--- a/Curso Gas B/01 - ITC-ICG 01 - Distribucion por canalizacion/01 - ITC-ICG 01 - Distribucion por canalizacion - Vídeo 1.pptx
+++ b/Curso Gas B/01 - ITC-ICG 01 - Distribucion por canalizacion/01 - ITC-ICG 01 - Distribucion por canalizacion - Vídeo 1.pptx
@@ -19,6 +19,7 @@
     <p:sldId id="267" r:id="rId19"/>
     <p:sldId id="268" r:id="rId20"/>
     <p:sldId id="269" r:id="rId21"/>
+    <p:sldId id="270" r:id="rId22"/>
   </p:sldIdLst>
   <p:sldSz cx="12191695" cy="6858000" type="screen4x3"/>
   <p:notesSz cx="6858000" cy="9144000"/>
@@ -515,12 +516,12 @@
           <a:lstStyle/>
           <a:p>
             <a:r>
-              <a:t>N1: ¿Por dónde entra el gas antes de llegar a una vivienda? Por la red de la calle.</a:t>
-            </a:r>
-          </a:p>
-          <a:p>
-            <a:r>
-              <a:t>N2: En este primer vídeo recorremos la vida de esa red, la de la compañía distribuidora, desde que está en el papel hasta que se le mete el gas. Son los cinco primeros apartados de la ITC-ICG cero uno: para qué sirve, cuándo hace falta permiso, cómo se diseña, cómo se ejecuta y qué pruebas hay que pasar. Aunque tú, como instalador de gas be, no montes esta red, es donde empalma tu acometida, así que conviene saber dónde acaba la responsabilidad del distribuidor y dónde empieza la tuya.</a:t>
+              <a:t>N1: ¿Por dónde entra el gas antes de llegar a una vivienda? Por la red de la calle, la de la compañía distribuidora.</a:t>
+            </a:r>
+          </a:p>
+          <a:p>
+            <a:r>
+              <a:t>N2: En este primer vídeo recorremos la vida entera de esa red, desde que está dibujada en el papel hasta que se le mete el gas. Son los cinco primeros apartados de la ITC-ICG cero uno: para qué sirve, cuándo hace falta permiso, cómo se diseña, cómo se ejecuta y qué pruebas hay que superar. Aunque tú, como instalador de gas be, no montes esta red, es justo donde empalma tu acometida, así que saber dónde acaba la responsabilidad del distribuidor y dónde empieza la tuya te ahorra más de una discusión en obra.</a:t>
             </a:r>
           </a:p>
         </p:txBody>
@@ -590,12 +591,12 @@
           <a:lstStyle/>
           <a:p>
             <a:r>
-              <a:t>N1: Antes de meter el gas, ¿qué se comprueba?</a:t>
-            </a:r>
-          </a:p>
-          <a:p>
-            <a:r>
-              <a:t>N2: Dos pruebas que no son lo mismo. La de resistencia comprueba que la tubería aguanta la presión sin reventar ni deformarse, que sea fuerte. La de estanquidad comprueba que no se escapa el gas por ninguna unión, que no fugue. Una tubería puede ser resistente y aun así fugar por una junta mal hecha, por eso se hacen las dos. Se realizan según las normas sesenta mil trescientos diez, trescientos once y trescientos doce, según el tipo de instalación. Y por seguridad, mientras se prueba no puede haber personas ajenas en la zona: estás metiendo presión y, si algo cede, salta con fuerza.</a:t>
+              <a:t>N1: Antes de meter el gas, ¿qué hay que comprobar?</a:t>
+            </a:r>
+          </a:p>
+          <a:p>
+            <a:r>
+              <a:t>N2: Dos pruebas que no son lo mismo. La de resistencia comprueba que la tubería aguanta la presión sin reventar ni deformarse, es decir que sea fuerte. La de estanquidad comprueba que no se escapa el gas por ninguna unión, es decir que no fugue. Una tubería puede ser resistente y aun así fugar por una junta mal hecha, por eso se hacen las dos. Se realizan según las normas sesenta mil trescientos diez, trescientos once y trescientos doce, según el tipo de instalación. Y por seguridad, mientras se prueba no puede haber personas ajenas en la zona: estás metiendo presión y, si algo cede, salta con fuerza.</a:t>
             </a:r>
           </a:p>
         </p:txBody>
@@ -670,7 +671,7 @@
           </a:p>
           <a:p>
             <a:r>
-              <a:t>N2: En el certificado de dirección de obra. Cuando las pruebas terminan con resultado positivo, su descripción y sus resultados se incorporan a ese certificado, que confecciona y firma el director de la obra. Ese papel es la prueba documental de que la red superó los ensayos. Es el mismo reflejo que tienes tú con un boletín o un certificado de instalación: lo que no está firmado y documentado, para la Administración no existe.</a:t>
+              <a:t>N2: En el certificado de dirección de obra. Cuando las pruebas terminan con resultado positivo, su descripción y sus resultados se incorporan a ese certificado, que confecciona y firma el director de la obra. Ese papel es la prueba documental de que la red superó los ensayos. Es el mismo reflejo que tienes tú cada vez que emites un boletín o un certificado de instalación: lo que no está firmado y documentado, para la Administración no existe.</a:t>
             </a:r>
           </a:p>
         </p:txBody>
@@ -745,7 +746,7 @@
           </a:p>
           <a:p>
             <a:r>
-              <a:t>N2: No. Solo se ponen en servicio las instalaciones que han superado las pruebas previas: sin pruebas, no hay gas. Al llenar de gas hay que evitar que se forme mezcla aire-gas dentro de los límites de inflamabilidad, que es la mezcla peligrosa. Para eso, o se introduce el gas despacio, a una velocidad que reduzca el riesgo en la zona de contacto, o se separan aire y gas con un tapón de gas inerte, por ejemplo nitrógeno, o un pistón de purga. Y el purgado se hace siempre de forma controlada. El peligro no es el gas solo ni el aire solo: es la mezcla más una chispa.</a:t>
+              <a:t>N2: No. Solo se ponen en servicio las instalaciones que han superado las pruebas previas: sin pruebas, no hay gas. Al llenar de gas hay que evitar que se forme mezcla aire-gas dentro de los límites de inflamabilidad, que es la mezcla peligrosa. Para eso, o se introduce el gas despacio, a una velocidad que reduzca el riesgo en la zona de contacto, o se separan aire y gas con un tapón de gas inerte, por ejemplo nitrógeno, o con un pistón de purga. Y el purgado se hace siempre de forma controlada. Grábate la física: el peligro no es el gas solo ni el aire solo, es la mezcla de los dos más una chispa.</a:t>
             </a:r>
           </a:p>
         </p:txBody>
@@ -820,7 +821,7 @@
           </a:p>
           <a:p>
             <a:r>
-              <a:t>N2: No lo hace cualquiera. La puesta en servicio la lleva a cabo personal cualificado autorizado por el distribuidor o por el titular de la instalación, y siempre con conocimiento del director de obra. Es la última barrera antes de que la red quede viva. Enlaza con lo anterior: primero pruebas superadas, después llenado controlado y, por último, gente autorizada dando el servicio con el director al tanto.</a:t>
+              <a:t>N2: No lo hace cualquiera. La puesta en servicio la lleva a cabo personal cualificado autorizado por el distribuidor o por el titular de la instalación, y siempre con conocimiento del director de obra. Es la última barrera antes de que la red quede viva. Enlaza con lo anterior en orden: primero pruebas superadas, después llenado controlado y, por último, gente autorizada dando el servicio con el director al tanto.</a:t>
             </a:r>
           </a:p>
         </p:txBody>
@@ -890,12 +891,97 @@
           <a:lstStyle/>
           <a:p>
             <a:r>
-              <a:t>N1: Si te quedas con tres cosas de este vídeo, que sean estas.</a:t>
-            </a:r>
-          </a:p>
-          <a:p>
-            <a:r>
-              <a:t>N2: Primera: esta instrucción manda en la red de la calle, la del distribuidor, a lo largo de sus tres fases, proyectar, construir y explotar; es donde empalma tu acometida, así que tener claro el límite te ahorra discusiones en obra. Segunda: sin pruebas superadas no hay gas, y hay un papel que lo certifica, el certificado de dirección de obra que firma el director. Y tercera, la que te acompañará toda la vida profesional: el peligro no es el gas solo, es la mezcla aire-gas dentro de los límites de inflamabilidad; por eso se llena despacio o con tapón inerte y se purga controlado. Esa física es la misma que aplicarás cada vez que purgues una instalación.</a:t>
+              <a:t>N1: Cuatro golpes rápidos antes de cerrar. ¿Los tienes?</a:t>
+            </a:r>
+          </a:p>
+          <a:p>
+            <a:r>
+              <a:t>N2: Uno, esta instrucción manda en la red de la calle a lo largo de sus tres fases, proyectar, construir y explotar. Dos, la red necesita autorización administrativa previa, la da la Comunidad Autónoma, y las obras del año anterior se entregan en el primer trimestre. Tres, sin pruebas de resistencia y estanquidad superadas no hay gas, y queda en el certificado de dirección de obra. Y cuatro, el peligro nunca es el gas solo: es la mezcla aire-gas dentro de los límites de inflamabilidad. Si respondes esos cuatro sin dudar, llevas el vídeo dominado.</a:t>
+            </a:r>
+          </a:p>
+        </p:txBody>
+      </p:sp>
+      <p:sp>
+        <p:nvSpPr>
+          <p:cNvPr id="4" name="Slide Number Placeholder 3"/>
+          <p:cNvSpPr>
+            <a:spLocks noGrp="1"/>
+          </p:cNvSpPr>
+          <p:nvPr>
+            <p:ph type="sldNum" idx="5" sz="quarter"/>
+          </p:nvPr>
+        </p:nvSpPr>
+        <p:spPr/>
+      </p:sp>
+    </p:spTree>
+  </p:cSld>
+  <p:clrMapOvr>
+    <a:masterClrMapping/>
+  </p:clrMapOvr>
+</p:notes>
+</file>
+
+<file path=ppt/notesSlides/notesSlide15.xml><?xml version="1.0" encoding="utf-8"?>
+<p:notes xmlns:a="http://schemas.openxmlformats.org/drawingml/2006/main" xmlns:p="http://schemas.openxmlformats.org/presentationml/2006/main" xmlns:r="http://schemas.openxmlformats.org/officeDocument/2006/relationships">
+  <p:cSld>
+    <p:spTree>
+      <p:nvGrpSpPr>
+        <p:cNvPr id="1" name=""/>
+        <p:cNvGrpSpPr/>
+        <p:nvPr/>
+      </p:nvGrpSpPr>
+      <p:grpSpPr>
+        <a:xfrm>
+          <a:off x="0" y="0"/>
+          <a:ext cx="0" cy="0"/>
+          <a:chOff x="0" y="0"/>
+          <a:chExt cx="0" cy="0"/>
+        </a:xfrm>
+      </p:grpSpPr>
+      <p:sp>
+        <p:nvSpPr>
+          <p:cNvPr id="2" name="Slide Image Placeholder 1"/>
+          <p:cNvSpPr>
+            <a:spLocks noGrp="1"/>
+          </p:cNvSpPr>
+          <p:nvPr>
+            <p:ph type="sldImg" idx="2"/>
+          </p:nvPr>
+        </p:nvSpPr>
+        <p:spPr/>
+      </p:sp>
+      <p:sp>
+        <p:nvSpPr>
+          <p:cNvPr id="3" name="Notes Placeholder 2"/>
+          <p:cNvSpPr>
+            <a:spLocks noGrp="1"/>
+          </p:cNvSpPr>
+          <p:nvPr>
+            <p:ph type="body" idx="3" sz="quarter"/>
+          </p:nvPr>
+        </p:nvSpPr>
+        <p:spPr/>
+        <p:txBody>
+          <a:bodyPr/>
+          <a:lstStyle/>
+          <a:p>
+            <a:r>
+              <a:t>N1: Cerramos fuerte. Si te quedas con cuatro conquistas, que sean estas.</a:t>
+            </a:r>
+          </a:p>
+          <a:p>
+            <a:r>
+              <a:t>N2: Una, ya separas la red de la calle, la del distribuidor, de tu instalación receptora, y sabes que el límite está en la acometida. Dos, sabes quién autoriza, la Comunidad Autónoma, y cuándo se entrega lo del año anterior, en el primer trimestre. Tres, tienes grabada la regla de oro: sin pruebas de resistencia y estanquidad superadas no hay gas, y hay un papel que lo certifica, el certificado de dirección de obra que firma el director. Y cuatro, la física que te acompañará toda la vida profesional: el peligro no es el gas solo, es la mezcla aire-gas dentro de los límites de inflamabilidad.</a:t>
+            </a:r>
+          </a:p>
+          <a:p>
+            <a:r>
+              <a:t>N1: ¿Y esto por qué pesa tanto?</a:t>
+            </a:r>
+          </a:p>
+          <a:p>
+            <a:r>
+              <a:t>N2: Porque en el examen te lo preguntan cruzado, con esa lista de siete normas y ese quién autoriza y cuándo; y en la obra es lo que decide si el día de más frío la red se queda corta y aparecen la llama amarilla y el monóxido aguas abajo, en la caldera de tu cliente. Hoy ya eres más gasista que ayer: entiendes por dónde entra el gas al barrio antes de llegar a ninguna vivienda. En el siguiente vídeo damos el salto a la red viva, cómo se opera, se mantiene y se protege las veinticuatro horas, y ahí aparecen las fugas, los plazos y los trucos de campo que usarás cada semana. Te espero allí.</a:t>
             </a:r>
           </a:p>
         </p:txBody>
@@ -965,12 +1051,12 @@
           <a:lstStyle/>
           <a:p>
             <a:r>
-              <a:t>N1: Antes de entrar en materia, tres números para situarte.</a:t>
-            </a:r>
-          </a:p>
-          <a:p>
-            <a:r>
-              <a:t>N2: Este vídeo cubre los cinco primeros apartados de la instrucción. Toda la red pasa por tres fases que se repiten como un mantra: proyectar, es decir dibujarla en el papel; construir, montar la tubería; y explotar, operarla y mantenerla mientras da servicio. Y para diseñarla hay siete normas de referencia que luego veremos. Si retienes estos tres bloques, el resto encaja solo.</a:t>
+              <a:t>N1: Antes de entrar en materia, tres números para orientarte.</a:t>
+            </a:r>
+          </a:p>
+          <a:p>
+            <a:r>
+              <a:t>N2: Este vídeo cubre los cinco primeros apartados de la instrucción. Toda red pasa por tres fases que se repiten como un mantra durante toda su vida: proyectar, que es dibujarla en el papel; construir, que es montar la tubería; y explotar, que es operarla y mantenerla mientras da servicio. Y para diseñarla hay siete normas de referencia que veremos enseguida. Si retienes estos tres bloques, todo lo demás encaja solo.</a:t>
             </a:r>
           </a:p>
         </p:txBody>
@@ -1045,7 +1131,7 @@
           </a:p>
           <a:p>
             <a:r>
-              <a:t>N2: La ITC-ICG cero uno fija los requisitos técnicos esenciales y las medidas de seguridad mínimas para proyectar, construir y explotar la red de distribución por canalización. Ojo con el matiz: manda sobre la red de la calle, la de la compañía distribuidora, no sobre la instalación de la vivienda, que va por otra instrucción. Y no se acaba cuando la tubería queda enterrada: rige durante toda su vida útil. Recuerda del tema anterior que la distribución por canalización es la letra a del artículo dos del Reglamento, con presión máxima de diseño de hasta dieciséis bar. En obra, cuando alguien discute que esto no es cosa suya, el límite está justo en la acometida: aguas arriba manda el distribuidor bajo esta ITC.</a:t>
+              <a:t>N2: La ITC-ICG cero uno fija los requisitos técnicos esenciales y las medidas de seguridad mínimas para proyectar, construir y explotar la red de distribución por canalización. Ojo al matiz: manda sobre la red de la calle, la del distribuidor, no sobre la instalación de la vivienda, que va por otra instrucción. Y no se acaba cuando la tubería queda enterrada: rige durante toda su vida útil. Recuerda del tema anterior que la distribución por canalización es la letra a del artículo dos del Reglamento, con presión máxima de diseño de hasta dieciséis bar. En obra, cuando alguien suelta eso de que no es cosa suya, el límite está justo en la acometida: aguas arriba manda el distribuidor bajo esta ITC.</a:t>
             </a:r>
           </a:p>
         </p:txBody>
@@ -1120,7 +1206,7 @@
           </a:p>
           <a:p>
             <a:r>
-              <a:t>N2: Sí, la red necesita autorización administrativa previa, salvo los casos que marca la Ley de Hidrocarburos en su artículo cincuenta y cinco punto dos. Ahora bien, para las extensiones de una red que ya existe no se pide permiso palmo a palmo: la compañía presenta una memoria general con lo que prevé construir en el año, y luego, en el primer trimestre del año siguiente, entrega a la Comunidad Autónoma el proyecto de lo que de verdad ejecutó, con la fecha de puesta en servicio de cada obra. El truco: primero digo lo que pienso hacer, después justifico lo que hice. Esto lo mueve la distribuidora, no tú, pero en el examen cae quién autoriza, la Comunidad Autónoma, y cuándo, el primer trimestre.</a:t>
+              <a:t>N2: Sí, la red necesita autorización administrativa previa, salvo los casos que marca la Ley del sector de hidrocarburos en su artículo cincuenta y cinco punto dos. Ahora bien, para las extensiones de una red que ya existe no se pide permiso palmo a palmo: la compañía presenta una memoria general con lo que prevé construir en el año y luego, en el primer trimestre del año siguiente, entrega a la Comunidad Autónoma el proyecto de lo que de verdad ejecutó, con la fecha de puesta en servicio de cada obra. El truco es fácil: primero digo lo que pienso hacer, después justifico lo que hice. Esto lo mueve la distribuidora, no tú, pero en el examen cae quién autoriza, que es la Comunidad Autónoma, y cuándo se entrega, que es el primer trimestre.</a:t>
             </a:r>
           </a:p>
         </p:txBody>
@@ -1195,7 +1281,7 @@
           </a:p>
           <a:p>
             <a:r>
-              <a:t>N2: Dos cosas a la vez: suministro seguro, que no haya fugas, y continuo, que no se corte el gas. Por eso la red se dimensiona con capacidad suficiente pensando en cuánta gente hay, en el nivel socioeconómico de la zona y en la climatología, porque donde hace más frío se consume más gas para calefacción. ¿Por qué te importa a ti, que trabajas aguas abajo? Porque una red mal dimensionada se queda corta el día de más frío, cae la presión y en los aparatos eso se traduce en llama amarilla, mala combustión, hollín y riesgo de monóxido de carbono. El diseño es, en el fondo, la primera avería que se evita.</a:t>
+              <a:t>N2: Dos cosas a la vez: suministro seguro, que no haya fugas, y continuo, que no se corte el gas. Por eso la red se dimensiona con capacidad suficiente pensando en cuánta gente hay, en el nivel socioeconómico de la zona y en la climatología, porque donde hace más frío se consume más gas para calefacción. ¿Y por qué te importa a ti, que trabajas aguas abajo? Porque una red mal dimensionada se queda corta el día de más frío, cae la presión y en los aparatos eso se nota en llama amarilla, mala combustión, hollín y riesgo de monóxido de carbono. El diseño es, en el fondo, la primera avería que se evita.</a:t>
             </a:r>
           </a:p>
         </p:txBody>
@@ -1265,12 +1351,12 @@
           <a:lstStyle/>
           <a:p>
             <a:r>
-              <a:t>N1: ¿Qué datos se ponen sobre la mesa al elegir los materiales?</a:t>
-            </a:r>
-          </a:p>
-          <a:p>
-            <a:r>
-              <a:t>N2: Cuatro criterios. Las características físico-químicas del gas, porque no es lo mismo gas natural que un gas licuado del petróleo; la presión de diseño, que marca el grosor y el material del tubo; la pérdida de carga admisible, es decir cuánta presión te puedes permitir perder por el camino; y las condiciones de operación y mantenimiento. Si el material no encaja con el gas o con la presión, tarde o temprano aparece el problema. Piénsalo como cuando eliges un tubo: eliges en función de lo que va a circular y a qué presión.</a:t>
+              <a:t>N1: ¿Qué datos deciden los materiales de la red?</a:t>
+            </a:r>
+          </a:p>
+          <a:p>
+            <a:r>
+              <a:t>N2: Cuatro criterios. Las características físico-químicas del gas, porque no es lo mismo gas natural que un gas licuado del petróleo; la presión de diseño, que marca el grosor y el material del tubo; la pérdida de carga admisible, es decir cuánta presión te puedes permitir perder por el camino; y las condiciones de operación y mantenimiento. Si el material no encaja con el gas o con la presión, tarde o temprano aparece el problema. Piénsalo como cuando eliges un tubo en obra: lo eliges en función de lo que va a circular por dentro y a qué presión.</a:t>
             </a:r>
           </a:p>
         </p:txBody>
@@ -1340,12 +1426,12 @@
           <a:lstStyle/>
           <a:p>
             <a:r>
-              <a:t>N1: ¿Cuántas normas de diseño hay que reconocer?</a:t>
-            </a:r>
-          </a:p>
-          <a:p>
-            <a:r>
-              <a:t>N2: Siete. No hace falta saberte de memoria qué dice cada una, pero sí reconocerlas si aparecen en una lista. Van en dos bloques. Las une e ene, la doce mil siete, la mil quinientos noventa y cuatro, la doce mil ciento ochenta y seis y la doce mil trescientos veintisiete, que vienen de Europa y regulan las redes según la presión. Y las tres hermanas españolas, la sesenta mil trescientos diez, la sesenta mil trescientos once y la sesenta mil trescientos doce, que aparecen una y otra vez en toda esta instrucción para diseño, pruebas, operación y mantenimiento. Si en el examen ves una lista de normas de canalización, esas tres seiscientas casi seguro que están.</a:t>
+              <a:t>N1: ¿Cuántas normas de diseño hay que saber reconocer?</a:t>
+            </a:r>
+          </a:p>
+          <a:p>
+            <a:r>
+              <a:t>N2: Siete. No hace falta memorizar qué dice cada una, pero sí reconocerlas cuando aparecen en una lista. Van en dos bloques. Las une e ene, que vienen de Europa y regulan las redes según la presión: la doce mil siete, la mil quinientos noventa y cuatro, la doce mil ciento ochenta y seis y la doce mil trescientos veintisiete. Y las tres hermanas españolas, la sesenta mil trescientos diez, la sesenta mil trescientos once y la sesenta mil trescientos doce, que vas a ver una y otra vez en toda esta instrucción para diseño, pruebas, operación y mantenimiento. Si en el examen ves una lista de normas de canalización, esas tres seiscientas casi seguro que están dentro.</a:t>
             </a:r>
           </a:p>
         </p:txBody>
@@ -1420,7 +1506,7 @@
           </a:p>
           <a:p>
             <a:r>
-              <a:t>N2: La obra se hace bajo la responsabilidad del titular, con personal propio o ajeno, garantizando la seguridad de los trabajadores. La clave de campo es no dañar otras instalaciones enterradas: la luz, el agua, el saneamiento, el teléfono, que ya corren bajo la calle. Al abrir zanja hay que saber qué pasa por debajo. Y cuando conectas tubo nuevo a la red que ya funciona, la norma es no dejar sin gas a los que ya lo tienen: se hace en carga siempre que se pueda. Piensa en el fontanero que cambia un tramo sin cortarle el agua a todo el edificio.</a:t>
+              <a:t>N2: La obra se hace bajo la responsabilidad del titular, con personal propio o ajeno, garantizando siempre la seguridad de los trabajadores. La clave de campo es no dañar otras instalaciones enterradas: la luz, el agua, el saneamiento, el teléfono, que ya corren bajo la calle. Al abrir zanja hay que saber qué pasa por debajo. Y cuando conectas tubo nuevo a la red que ya funciona, la norma es no dejar sin gas a los que ya lo tienen: se hace en carga siempre que se pueda. Es el mismo reflejo del fontanero que cambia un tramo sin cortarle el agua a todo el edificio.</a:t>
             </a:r>
           </a:p>
         </p:txBody>
@@ -1495,7 +1581,7 @@
           </a:p>
           <a:p>
             <a:r>
-              <a:t>N2: Eso son obras especiales. Si tu tubería cruza una carretera, un curso de agua, una vía de tren o un puente, hace falta autorización del organismo que manda en ese sitio: la administración de carreteras, la confederación del río, la de ferrocarriles. Y en lugar de abrir zanja a lo bruto se prefieren técnicas alternativas, por ejemplo perforar por debajo sin levantar la calzada, para molestar lo menos posible al servicio que cruzas. La idea es sencilla: cruzo algo importante, pido permiso a su dueño y uso la técnica que menos moleste.</a:t>
+              <a:t>N2: Eso son obras especiales. Si tu tubería cruza una carretera, un curso de agua, una vía de tren o un puente, hace falta autorización del organismo que manda en ese sitio: la administración de carreteras, la confederación del río, la de ferrocarriles. Y en vez de abrir zanja a lo bruto se prefieren técnicas alternativas, por ejemplo perforar por debajo sin levantar la calzada, para molestar lo menos posible al servicio que cruzas. La idea es sencilla: cruzo algo importante, pido permiso a su dueño y uso la técnica que menos moleste.</a:t>
             </a:r>
           </a:p>
         </p:txBody>
@@ -4750,7 +4836,7 @@
                 </a:solidFill>
                 <a:latin typeface="Montserrat"/>
               </a:rPr>
-              <a:t>010 / 014</a:t>
+              <a:t>010 / 015</a:t>
             </a:r>
           </a:p>
         </p:txBody>
@@ -5165,7 +5251,7 @@
                 </a:solidFill>
                 <a:latin typeface="Montserrat"/>
               </a:rPr>
-              <a:t>011 / 014</a:t>
+              <a:t>011 / 015</a:t>
             </a:r>
           </a:p>
         </p:txBody>
@@ -5555,7 +5641,7 @@
                 </a:solidFill>
                 <a:latin typeface="Montserrat"/>
               </a:rPr>
-              <a:t>012 / 014</a:t>
+              <a:t>012 / 015</a:t>
             </a:r>
           </a:p>
         </p:txBody>
@@ -5970,7 +6056,7 @@
                 </a:solidFill>
                 <a:latin typeface="Montserrat"/>
               </a:rPr>
-              <a:t>013 / 014</a:t>
+              <a:t>013 / 015</a:t>
             </a:r>
           </a:p>
         </p:txBody>
@@ -6360,7 +6446,7 @@
                 </a:solidFill>
                 <a:latin typeface="Montserrat"/>
               </a:rPr>
-              <a:t>014 / 014</a:t>
+              <a:t>014 / 015</a:t>
             </a:r>
           </a:p>
         </p:txBody>
@@ -6407,8 +6493,8 @@
         </p:nvSpPr>
         <p:spPr>
           <a:xfrm>
-            <a:off x="822960" y="640080"/>
-            <a:ext cx="10058400" cy="914400"/>
+            <a:off x="822960" y="457200"/>
+            <a:ext cx="8229600" cy="365760"/>
           </a:xfrm>
           <a:prstGeom prst="rect">
             <a:avLst/>
@@ -6422,13 +6508,13 @@
           <a:lstStyle/>
           <a:p>
             <a:r>
-              <a:rPr sz="3000" b="1" i="0">
-                <a:solidFill>
-                  <a:srgbClr val="1E2761"/>
-                </a:solidFill>
-                <a:latin typeface="Montserrat"/>
-              </a:rPr>
-              <a:t>Qué me llevo</a:t>
+              <a:rPr sz="1200" b="1" i="0">
+                <a:solidFill>
+                  <a:srgbClr val="64748B"/>
+                </a:solidFill>
+                <a:latin typeface="Montserrat"/>
+              </a:rPr>
+              <a:t>REPASO RELÁMPAGO</a:t>
             </a:r>
           </a:p>
         </p:txBody>
@@ -6441,8 +6527,8 @@
         </p:nvSpPr>
         <p:spPr>
           <a:xfrm>
-            <a:off x="822960" y="2011680"/>
-            <a:ext cx="10058400" cy="3657600"/>
+            <a:off x="822960" y="868680"/>
+            <a:ext cx="10515600" cy="914400"/>
           </a:xfrm>
           <a:prstGeom prst="rect">
             <a:avLst/>
@@ -6455,78 +6541,561 @@
           </a:bodyPr>
           <a:lstStyle/>
           <a:p>
+            <a:r>
+              <a:rPr sz="2700" b="1" i="0">
+                <a:solidFill>
+                  <a:srgbClr val="1E2761"/>
+                </a:solidFill>
+                <a:latin typeface="Montserrat"/>
+              </a:rPr>
+              <a:t>Lo que no se te puede olvidar</a:t>
+            </a:r>
+          </a:p>
+        </p:txBody>
+      </p:sp>
+      <p:sp>
+        <p:nvSpPr>
+          <p:cNvPr id="7" name="TextBox 6"/>
+          <p:cNvSpPr txBox="1"/>
+          <p:nvPr/>
+        </p:nvSpPr>
+        <p:spPr>
+          <a:xfrm>
+            <a:off x="822960" y="1920240"/>
+            <a:ext cx="4983480" cy="4206240"/>
+          </a:xfrm>
+          <a:prstGeom prst="rect">
+            <a:avLst/>
+          </a:prstGeom>
+          <a:noFill/>
+        </p:spPr>
+        <p:txBody>
+          <a:bodyPr wrap="square">
+            <a:spAutoFit/>
+          </a:bodyPr>
+          <a:lstStyle/>
+          <a:p>
             <a:pPr>
               <a:spcAft>
-                <a:spcPts val="1400"/>
+                <a:spcPts val="1000"/>
               </a:spcAft>
             </a:pPr>
             <a:r>
-              <a:rPr sz="2000" b="1" i="0">
+              <a:rPr sz="1600" b="1" i="0">
                 <a:solidFill>
                   <a:srgbClr val="2E3A80"/>
                 </a:solidFill>
                 <a:latin typeface="Montserrat"/>
               </a:rPr>
-              <a:t>✓  </a:t>
-            </a:r>
-            <a:r>
-              <a:rPr sz="2000" b="0" i="0">
+              <a:t>•  </a:t>
+            </a:r>
+            <a:r>
+              <a:rPr sz="1600" b="0" i="0">
                 <a:solidFill>
                   <a:srgbClr val="1B2330"/>
                 </a:solidFill>
                 <a:latin typeface="Montserrat"/>
               </a:rPr>
-              <a:t>ITC = red de calle · proyectar, construir, explotar</a:t>
+              <a:t>Manda en la red de la calle, no la tuya</a:t>
             </a:r>
           </a:p>
           <a:p>
             <a:pPr>
               <a:spcAft>
-                <a:spcPts val="1400"/>
+                <a:spcPts val="1000"/>
               </a:spcAft>
             </a:pPr>
             <a:r>
-              <a:rPr sz="2000" b="1" i="0">
+              <a:rPr sz="1600" b="1" i="0">
                 <a:solidFill>
                   <a:srgbClr val="2E3A80"/>
                 </a:solidFill>
                 <a:latin typeface="Montserrat"/>
               </a:rPr>
-              <a:t>✓  </a:t>
-            </a:r>
-            <a:r>
-              <a:rPr sz="2000" b="0" i="0">
+              <a:t>•  </a:t>
+            </a:r>
+            <a:r>
+              <a:rPr sz="1600" b="0" i="0">
                 <a:solidFill>
                   <a:srgbClr val="1B2330"/>
                 </a:solidFill>
                 <a:latin typeface="Montserrat"/>
               </a:rPr>
-              <a:t>Sin pruebas superadas, no hay gas</a:t>
+              <a:t>Autoriza la CA · entrega primer trimestre</a:t>
             </a:r>
           </a:p>
           <a:p>
             <a:pPr>
               <a:spcAft>
-                <a:spcPts val="1400"/>
+                <a:spcPts val="1000"/>
               </a:spcAft>
             </a:pPr>
             <a:r>
+              <a:rPr sz="1600" b="1" i="0">
+                <a:solidFill>
+                  <a:srgbClr val="2E3A80"/>
+                </a:solidFill>
+                <a:latin typeface="Montserrat"/>
+              </a:rPr>
+              <a:t>•  </a:t>
+            </a:r>
+            <a:r>
+              <a:rPr sz="1600" b="0" i="0">
+                <a:solidFill>
+                  <a:srgbClr val="1B2330"/>
+                </a:solidFill>
+                <a:latin typeface="Montserrat"/>
+              </a:rPr>
+              <a:t>Sin pruebas superadas, no hay gas</a:t>
+            </a:r>
+          </a:p>
+          <a:p>
+            <a:pPr>
+              <a:spcAft>
+                <a:spcPts val="1000"/>
+              </a:spcAft>
+            </a:pPr>
+            <a:r>
+              <a:rPr sz="1600" b="1" i="0">
+                <a:solidFill>
+                  <a:srgbClr val="2E3A80"/>
+                </a:solidFill>
+                <a:latin typeface="Montserrat"/>
+              </a:rPr>
+              <a:t>•  </a:t>
+            </a:r>
+            <a:r>
+              <a:rPr sz="1600" b="0" i="0">
+                <a:solidFill>
+                  <a:srgbClr val="1B2330"/>
+                </a:solidFill>
+                <a:latin typeface="Montserrat"/>
+              </a:rPr>
+              <a:t>El peligro es la mezcla aire-gas</a:t>
+            </a:r>
+          </a:p>
+        </p:txBody>
+      </p:sp>
+      <p:sp>
+        <p:nvSpPr>
+          <p:cNvPr id="8" name="imgph" descr="IMGQ:gas meter cabinet street wall"/>
+          <p:cNvSpPr/>
+          <p:nvPr/>
+        </p:nvSpPr>
+        <p:spPr>
+          <a:xfrm>
+            <a:off x="5806440" y="1051560"/>
+            <a:ext cx="5298947" cy="4629150"/>
+          </a:xfrm>
+          <a:prstGeom prst="roundRect">
+            <a:avLst/>
+          </a:prstGeom>
+          <a:solidFill>
+            <a:srgbClr val="F3F6FB"/>
+          </a:solidFill>
+          <a:ln w="12700">
+            <a:solidFill>
+              <a:srgbClr val="C7D2E6"/>
+            </a:solidFill>
+          </a:ln>
+          <a:effectLst/>
+        </p:spPr>
+        <p:style>
+          <a:lnRef idx="1">
+            <a:schemeClr val="accent1"/>
+          </a:lnRef>
+          <a:fillRef idx="3">
+            <a:schemeClr val="accent1"/>
+          </a:fillRef>
+          <a:effectRef idx="2">
+            <a:schemeClr val="accent1"/>
+          </a:effectRef>
+          <a:fontRef idx="minor">
+            <a:schemeClr val="lt1"/>
+          </a:fontRef>
+        </p:style>
+        <p:txBody>
+          <a:bodyPr rtlCol="0" anchor="ctr"/>
+          <a:lstStyle/>
+          <a:p>
+            <a:pPr algn="ctr"/>
+          </a:p>
+        </p:txBody>
+      </p:sp>
+      <p:sp>
+        <p:nvSpPr>
+          <p:cNvPr id="9" name="TextBox 8"/>
+          <p:cNvSpPr txBox="1"/>
+          <p:nvPr/>
+        </p:nvSpPr>
+        <p:spPr>
+          <a:xfrm>
+            <a:off x="6080760" y="2726055"/>
+            <a:ext cx="4750307" cy="1280160"/>
+          </a:xfrm>
+          <a:prstGeom prst="rect">
+            <a:avLst/>
+          </a:prstGeom>
+          <a:noFill/>
+        </p:spPr>
+        <p:txBody>
+          <a:bodyPr wrap="square">
+            <a:spAutoFit/>
+          </a:bodyPr>
+          <a:lstStyle/>
+          <a:p>
+            <a:pPr algn="ctr"/>
+            <a:r>
+              <a:rPr sz="1400" b="1" i="0">
+                <a:solidFill>
+                  <a:srgbClr val="64748B"/>
+                </a:solidFill>
+                <a:latin typeface="Montserrat"/>
+              </a:rPr>
+              <a:t>IMAGEN REALISTA</a:t>
+            </a:r>
+          </a:p>
+          <a:p>
+            <a:pPr algn="ctr"/>
+            <a:r>
+              <a:rPr sz="1100" b="0" i="1">
+                <a:solidFill>
+                  <a:srgbClr val="64748B"/>
+                </a:solidFill>
+                <a:latin typeface="Montserrat"/>
+              </a:rPr>
+              <a:t>gas meter cabinet street wall</a:t>
+            </a:r>
+          </a:p>
+        </p:txBody>
+      </p:sp>
+    </p:spTree>
+  </p:cSld>
+  <p:clrMapOvr>
+    <a:masterClrMapping/>
+  </p:clrMapOvr>
+</p:sld>
+</file>
+
+<file path=ppt/slides/slide15.xml><?xml version="1.0" encoding="utf-8"?>
+<p:sld xmlns:a="http://schemas.openxmlformats.org/drawingml/2006/main" xmlns:p="http://schemas.openxmlformats.org/presentationml/2006/main" xmlns:r="http://schemas.openxmlformats.org/officeDocument/2006/relationships">
+  <p:cSld>
+    <p:spTree>
+      <p:nvGrpSpPr>
+        <p:cNvPr id="1" name=""/>
+        <p:cNvGrpSpPr/>
+        <p:nvPr/>
+      </p:nvGrpSpPr>
+      <p:grpSpPr/>
+      <p:sp>
+        <p:nvSpPr>
+          <p:cNvPr id="2" name="Rectangle 1"/>
+          <p:cNvSpPr/>
+          <p:nvPr/>
+        </p:nvSpPr>
+        <p:spPr>
+          <a:xfrm>
+            <a:off x="0" y="0"/>
+            <a:ext cx="12191695" cy="6858000"/>
+          </a:xfrm>
+          <a:prstGeom prst="rect">
+            <a:avLst/>
+          </a:prstGeom>
+          <a:solidFill>
+            <a:srgbClr val="1E2761"/>
+          </a:solidFill>
+          <a:ln>
+            <a:noFill/>
+          </a:ln>
+          <a:effectLst/>
+        </p:spPr>
+        <p:style>
+          <a:lnRef idx="1">
+            <a:schemeClr val="accent1"/>
+          </a:lnRef>
+          <a:fillRef idx="3">
+            <a:schemeClr val="accent1"/>
+          </a:fillRef>
+          <a:effectRef idx="2">
+            <a:schemeClr val="accent1"/>
+          </a:effectRef>
+          <a:fontRef idx="minor">
+            <a:schemeClr val="lt1"/>
+          </a:fontRef>
+        </p:style>
+        <p:txBody>
+          <a:bodyPr rtlCol="0" anchor="ctr"/>
+          <a:lstStyle/>
+          <a:p>
+            <a:pPr algn="ctr"/>
+          </a:p>
+        </p:txBody>
+      </p:sp>
+      <p:sp>
+        <p:nvSpPr>
+          <p:cNvPr id="3" name="TextBox 2"/>
+          <p:cNvSpPr txBox="1"/>
+          <p:nvPr/>
+        </p:nvSpPr>
+        <p:spPr>
+          <a:xfrm>
+            <a:off x="822960" y="640080"/>
+            <a:ext cx="10515600" cy="457200"/>
+          </a:xfrm>
+          <a:prstGeom prst="rect">
+            <a:avLst/>
+          </a:prstGeom>
+          <a:noFill/>
+        </p:spPr>
+        <p:txBody>
+          <a:bodyPr wrap="square">
+            <a:spAutoFit/>
+          </a:bodyPr>
+          <a:lstStyle/>
+          <a:p>
+            <a:r>
+              <a:rPr sz="1400" b="1" i="0">
+                <a:solidFill>
+                  <a:srgbClr val="CADCFC"/>
+                </a:solidFill>
+                <a:latin typeface="Montserrat"/>
+              </a:rPr>
+              <a:t>LO QUE YA DOMINAS</a:t>
+            </a:r>
+          </a:p>
+        </p:txBody>
+      </p:sp>
+      <p:sp>
+        <p:nvSpPr>
+          <p:cNvPr id="4" name="TextBox 3"/>
+          <p:cNvSpPr txBox="1"/>
+          <p:nvPr/>
+        </p:nvSpPr>
+        <p:spPr>
+          <a:xfrm>
+            <a:off x="822960" y="1143000"/>
+            <a:ext cx="10515600" cy="1097280"/>
+          </a:xfrm>
+          <a:prstGeom prst="rect">
+            <a:avLst/>
+          </a:prstGeom>
+          <a:noFill/>
+        </p:spPr>
+        <p:txBody>
+          <a:bodyPr wrap="square">
+            <a:spAutoFit/>
+          </a:bodyPr>
+          <a:lstStyle/>
+          <a:p>
+            <a:r>
+              <a:rPr sz="3400" b="1" i="0">
+                <a:solidFill>
+                  <a:srgbClr val="FFFFFF"/>
+                </a:solidFill>
+                <a:latin typeface="Montserrat"/>
+              </a:rPr>
+              <a:t>Controlas la red desde el papel hasta el gas</a:t>
+            </a:r>
+          </a:p>
+        </p:txBody>
+      </p:sp>
+      <p:sp>
+        <p:nvSpPr>
+          <p:cNvPr id="5" name="TextBox 4"/>
+          <p:cNvSpPr txBox="1"/>
+          <p:nvPr/>
+        </p:nvSpPr>
+        <p:spPr>
+          <a:xfrm>
+            <a:off x="822960" y="2514600"/>
+            <a:ext cx="10515600" cy="2834640"/>
+          </a:xfrm>
+          <a:prstGeom prst="rect">
+            <a:avLst/>
+          </a:prstGeom>
+          <a:noFill/>
+        </p:spPr>
+        <p:txBody>
+          <a:bodyPr wrap="square">
+            <a:spAutoFit/>
+          </a:bodyPr>
+          <a:lstStyle/>
+          <a:p>
+            <a:pPr>
+              <a:spcAft>
+                <a:spcPts val="1200"/>
+              </a:spcAft>
+            </a:pPr>
+            <a:r>
               <a:rPr sz="2000" b="1" i="0">
                 <a:solidFill>
-                  <a:srgbClr val="2E3A80"/>
+                  <a:srgbClr val="CADCFC"/>
                 </a:solidFill>
                 <a:latin typeface="Montserrat"/>
               </a:rPr>
               <a:t>✓  </a:t>
             </a:r>
             <a:r>
-              <a:rPr sz="2000" b="0" i="0">
-                <a:solidFill>
-                  <a:srgbClr val="1B2330"/>
-                </a:solidFill>
-                <a:latin typeface="Montserrat"/>
-              </a:rPr>
-              <a:t>El peligro es la mezcla aire-gas</a:t>
+              <a:rPr sz="1900" b="0" i="0">
+                <a:solidFill>
+                  <a:srgbClr val="FFFFFF"/>
+                </a:solidFill>
+                <a:latin typeface="Montserrat"/>
+              </a:rPr>
+              <a:t>Separas la red de la calle de tu receptora</a:t>
+            </a:r>
+          </a:p>
+          <a:p>
+            <a:pPr>
+              <a:spcAft>
+                <a:spcPts val="1200"/>
+              </a:spcAft>
+            </a:pPr>
+            <a:r>
+              <a:rPr sz="2000" b="1" i="0">
+                <a:solidFill>
+                  <a:srgbClr val="CADCFC"/>
+                </a:solidFill>
+                <a:latin typeface="Montserrat"/>
+              </a:rPr>
+              <a:t>✓  </a:t>
+            </a:r>
+            <a:r>
+              <a:rPr sz="1900" b="0" i="0">
+                <a:solidFill>
+                  <a:srgbClr val="FFFFFF"/>
+                </a:solidFill>
+                <a:latin typeface="Montserrat"/>
+              </a:rPr>
+              <a:t>Sabes quién autoriza y cuándo: la CA, primer trimestre</a:t>
+            </a:r>
+          </a:p>
+          <a:p>
+            <a:pPr>
+              <a:spcAft>
+                <a:spcPts val="1200"/>
+              </a:spcAft>
+            </a:pPr>
+            <a:r>
+              <a:rPr sz="2000" b="1" i="0">
+                <a:solidFill>
+                  <a:srgbClr val="CADCFC"/>
+                </a:solidFill>
+                <a:latin typeface="Montserrat"/>
+              </a:rPr>
+              <a:t>✓  </a:t>
+            </a:r>
+            <a:r>
+              <a:rPr sz="1900" b="0" i="0">
+                <a:solidFill>
+                  <a:srgbClr val="FFFFFF"/>
+                </a:solidFill>
+                <a:latin typeface="Montserrat"/>
+              </a:rPr>
+              <a:t>Tienes grabado: sin pruebas superadas, no hay gas</a:t>
+            </a:r>
+          </a:p>
+          <a:p>
+            <a:pPr>
+              <a:spcAft>
+                <a:spcPts val="1200"/>
+              </a:spcAft>
+            </a:pPr>
+            <a:r>
+              <a:rPr sz="2000" b="1" i="0">
+                <a:solidFill>
+                  <a:srgbClr val="CADCFC"/>
+                </a:solidFill>
+                <a:latin typeface="Montserrat"/>
+              </a:rPr>
+              <a:t>✓  </a:t>
+            </a:r>
+            <a:r>
+              <a:rPr sz="1900" b="0" i="0">
+                <a:solidFill>
+                  <a:srgbClr val="FFFFFF"/>
+                </a:solidFill>
+                <a:latin typeface="Montserrat"/>
+              </a:rPr>
+              <a:t>El peligro no es el gas solo, es la mezcla aire-gas</a:t>
+            </a:r>
+          </a:p>
+        </p:txBody>
+      </p:sp>
+      <p:sp>
+        <p:nvSpPr>
+          <p:cNvPr id="6" name="Rounded Rectangle 5"/>
+          <p:cNvSpPr/>
+          <p:nvPr/>
+        </p:nvSpPr>
+        <p:spPr>
+          <a:xfrm>
+            <a:off x="822960" y="5532120"/>
+            <a:ext cx="10515600" cy="777240"/>
+          </a:xfrm>
+          <a:prstGeom prst="roundRect">
+            <a:avLst/>
+          </a:prstGeom>
+          <a:solidFill>
+            <a:srgbClr val="2E3A80"/>
+          </a:solidFill>
+          <a:ln>
+            <a:noFill/>
+          </a:ln>
+          <a:effectLst/>
+        </p:spPr>
+        <p:style>
+          <a:lnRef idx="1">
+            <a:schemeClr val="accent1"/>
+          </a:lnRef>
+          <a:fillRef idx="3">
+            <a:schemeClr val="accent1"/>
+          </a:fillRef>
+          <a:effectRef idx="2">
+            <a:schemeClr val="accent1"/>
+          </a:effectRef>
+          <a:fontRef idx="minor">
+            <a:schemeClr val="lt1"/>
+          </a:fontRef>
+        </p:style>
+        <p:txBody>
+          <a:bodyPr rtlCol="0" anchor="ctr"/>
+          <a:lstStyle/>
+          <a:p>
+            <a:pPr algn="ctr"/>
+          </a:p>
+        </p:txBody>
+      </p:sp>
+      <p:sp>
+        <p:nvSpPr>
+          <p:cNvPr id="7" name="TextBox 6"/>
+          <p:cNvSpPr txBox="1"/>
+          <p:nvPr/>
+        </p:nvSpPr>
+        <p:spPr>
+          <a:xfrm>
+            <a:off x="1051560" y="5605272"/>
+            <a:ext cx="10058400" cy="640080"/>
+          </a:xfrm>
+          <a:prstGeom prst="rect">
+            <a:avLst/>
+          </a:prstGeom>
+          <a:noFill/>
+        </p:spPr>
+        <p:txBody>
+          <a:bodyPr wrap="square">
+            <a:spAutoFit/>
+          </a:bodyPr>
+          <a:lstStyle/>
+          <a:p>
+            <a:r>
+              <a:rPr sz="1500" b="1" i="1">
+                <a:solidFill>
+                  <a:srgbClr val="CADCFC"/>
+                </a:solidFill>
+                <a:latin typeface="Montserrat"/>
+              </a:rPr>
+              <a:t>Hoy ya sabes por dónde entra el gas al barrio. En el siguiente vídeo la mantenemos viva.</a:t>
             </a:r>
           </a:p>
         </p:txBody>
@@ -6623,7 +7192,7 @@
                 </a:solidFill>
                 <a:latin typeface="Montserrat"/>
               </a:rPr>
-              <a:t>002 / 014</a:t>
+              <a:t>002 / 015</a:t>
             </a:r>
           </a:p>
         </p:txBody>
@@ -7136,7 +7705,7 @@
                 </a:solidFill>
                 <a:latin typeface="Montserrat"/>
               </a:rPr>
-              <a:t>003 / 014</a:t>
+              <a:t>003 / 015</a:t>
             </a:r>
           </a:p>
         </p:txBody>
@@ -7551,7 +8120,7 @@
                 </a:solidFill>
                 <a:latin typeface="Montserrat"/>
               </a:rPr>
-              <a:t>004 / 014</a:t>
+              <a:t>004 / 015</a:t>
             </a:r>
           </a:p>
         </p:txBody>
@@ -7966,7 +8535,7 @@
                 </a:solidFill>
                 <a:latin typeface="Montserrat"/>
               </a:rPr>
-              <a:t>005 / 014</a:t>
+              <a:t>005 / 015</a:t>
             </a:r>
           </a:p>
         </p:txBody>
@@ -8116,7 +8685,7 @@
                 </a:solidFill>
                 <a:latin typeface="Montserrat"/>
               </a:rPr>
-              <a:t>Fin: seguro (sin fugas) y continuo</a:t>
+              <a:t>Seguro (sin fugas) y continuo (sin cortes)</a:t>
             </a:r>
           </a:p>
           <a:p>
@@ -8356,7 +8925,7 @@
                 </a:solidFill>
                 <a:latin typeface="Montserrat"/>
               </a:rPr>
-              <a:t>006 / 014</a:t>
+              <a:t>006 / 015</a:t>
             </a:r>
           </a:p>
         </p:txBody>
@@ -8458,7 +9027,7 @@
                 </a:solidFill>
                 <a:latin typeface="Montserrat"/>
               </a:rPr>
-              <a:t>Qué se tiene en cuenta</a:t>
+              <a:t>Qué se pone sobre la mesa</a:t>
             </a:r>
           </a:p>
         </p:txBody>
@@ -8771,7 +9340,7 @@
                 </a:solidFill>
                 <a:latin typeface="Montserrat"/>
               </a:rPr>
-              <a:t>007 / 014</a:t>
+              <a:t>007 / 015</a:t>
             </a:r>
           </a:p>
         </p:txBody>
@@ -9161,7 +9730,7 @@
                 </a:solidFill>
                 <a:latin typeface="Montserrat"/>
               </a:rPr>
-              <a:t>008 / 014</a:t>
+              <a:t>008 / 015</a:t>
             </a:r>
           </a:p>
         </p:txBody>
@@ -9551,7 +10120,7 @@
                 </a:solidFill>
                 <a:latin typeface="Montserrat"/>
               </a:rPr>
-              <a:t>009 / 014</a:t>
+              <a:t>009 / 015</a:t>
             </a:r>
           </a:p>
         </p:txBody>
@@ -9751,14 +10320,14 @@
                 </a:solidFill>
                 <a:latin typeface="Montserrat"/>
               </a:rPr>
-              <a:t>Técnicas alternativas (sin abrir zanja)</a:t>
-            </a:r>
-          </a:p>
-        </p:txBody>
-      </p:sp>
-      <p:sp>
-        <p:nvSpPr>
-          <p:cNvPr id="8" name="imgph" descr="IMGQ:horizontal drilling pipeline road"/>
+              <a:t>Técnicas alternativas, sin abrir zanja</a:t>
+            </a:r>
+          </a:p>
+        </p:txBody>
+      </p:sp>
+      <p:sp>
+        <p:nvSpPr>
+          <p:cNvPr id="8" name="imgph" descr="IMGQ:horizontal directional drilling pipeline road"/>
           <p:cNvSpPr/>
           <p:nvPr/>
         </p:nvSpPr>
@@ -9844,7 +10413,7 @@
                 </a:solidFill>
                 <a:latin typeface="Montserrat"/>
               </a:rPr>
-              <a:t>horizontal drilling pipeline road</a:t>
+              <a:t>horizontal directional drilling pipeline road</a:t>
             </a:r>
           </a:p>
         </p:txBody>

--- a/Curso Gas B/01 - ITC-ICG 01 - Distribucion por canalizacion/01 - ITC-ICG 01 - Distribucion por canalizacion - Vídeo 1.pptx
+++ b/Curso Gas B/01 - ITC-ICG 01 - Distribucion por canalizacion/01 - ITC-ICG 01 - Distribucion por canalizacion - Vídeo 1.pptx
@@ -516,12 +516,12 @@
           <a:lstStyle/>
           <a:p>
             <a:r>
-              <a:t>N1: ¿Por dónde entra el gas antes de llegar a una vivienda? Por la red de la calle, la de la compañía distribuidora.</a:t>
-            </a:r>
-          </a:p>
-          <a:p>
-            <a:r>
-              <a:t>N2: En este primer vídeo recorremos la vida entera de esa red, desde que está dibujada en el papel hasta que se le mete el gas. Son los cinco primeros apartados de la ITC-ICG cero uno: para qué sirve, cuándo hace falta permiso, cómo se diseña, cómo se ejecuta y qué pruebas hay que superar. Aunque tú, como instalador de gas be, no montes esta red, es justo donde empalma tu acometida, así que saber dónde acaba la responsabilidad del distribuidor y dónde empieza la tuya te ahorra más de una discusión en obra.</a:t>
+              <a:t>N1: Cuando abres la llave de la cocina y sale gas, ¿de dónde viene ese gas antes de llegar al edificio?</a:t>
+            </a:r>
+          </a:p>
+          <a:p>
+            <a:r>
+              <a:t>N2: Viene de una tubería que corre por debajo de la calle, la red de la compañía distribuidora. Piensa en ella como en las tuberías del agua o los cables de la luz: un servicio enterrado que da a todo el barrio. Pues bien, esa red tiene su propia norma, y es la que abrimos hoy: la ITC-ICG cero uno. En este primer vídeo la seguimos desde que está dibujada en un papel hasta que se le mete el gas por primera vez. Son sus cinco primeros apartados: para qué sirve, cuándo hace falta permiso, cómo se diseña, cómo se construye y qué pruebas tiene que pasar. Y aunque tú, como instalador de gas be, no montes esta red, es justo donde empalma tu acometida. Saber dónde termina lo del distribuidor y dónde empieza lo tuyo te evita más de una discusión en obra, de esas de aquí no llego yo.</a:t>
             </a:r>
           </a:p>
         </p:txBody>
@@ -591,12 +591,12 @@
           <a:lstStyle/>
           <a:p>
             <a:r>
-              <a:t>N1: Antes de meter el gas, ¿qué hay que comprobar?</a:t>
-            </a:r>
-          </a:p>
-          <a:p>
-            <a:r>
-              <a:t>N2: Dos pruebas que no son lo mismo. La de resistencia comprueba que la tubería aguanta la presión sin reventar ni deformarse, es decir que sea fuerte. La de estanquidad comprueba que no se escapa el gas por ninguna unión, es decir que no fugue. Una tubería puede ser resistente y aun así fugar por una junta mal hecha, por eso se hacen las dos. Se realizan según las normas sesenta mil trescientos diez, trescientos once y trescientos doce, según el tipo de instalación. Y por seguridad, mientras se prueba no puede haber personas ajenas en la zona: estás metiendo presión y, si algo cede, salta con fuerza.</a:t>
+              <a:t>N1: Antes de soltar el gas, ¿qué hay que comprobar? Supongo que que no haya fugas.</a:t>
+            </a:r>
+          </a:p>
+          <a:p>
+            <a:r>
+              <a:t>N2: Eso, y una cosa más, porque son dos pruebas distintas y mucha gente las confunde. La prueba de resistencia comprueba que la tubería aguanta la presión sin reventar ni deformarse; en llano, que sea fuerte. La prueba de estanquidad comprueba que no se escapa ni una molécula de gas por ninguna unión; estanquidad significa justamente eso, que no fuga nada, ni una burbuja. Y son distintas de verdad: un tubo puede ser resistentísimo, aguantar una presión enorme, y aun así fugar por una junta mal apretada. Por eso se hacen las dos, no vale con una. Se realizan según las normas seiscientas, la trescientos diez, la trescientos once y la trescientos doce, según el tipo de instalación, esas tres hermanas que te dije que iban a volver. Y una regla de seguridad de puro sentido común: mientras se prueba, nadie ajeno en la zona. Estás metiendo mucha presión a un tubo, y si algo cede, salta con fuerza. Truco para no confundirlas nunca: resistencia, que no rompa; estanquidad, que no fugue.</a:t>
             </a:r>
           </a:p>
         </p:txBody>
@@ -666,12 +666,12 @@
           <a:lstStyle/>
           <a:p>
             <a:r>
-              <a:t>N1: ¿Dónde queda constancia de que la red pasó las pruebas?</a:t>
-            </a:r>
-          </a:p>
-          <a:p>
-            <a:r>
-              <a:t>N2: En el certificado de dirección de obra. Cuando las pruebas terminan con resultado positivo, su descripción y sus resultados se incorporan a ese certificado, que confecciona y firma el director de la obra. Ese papel es la prueba documental de que la red superó los ensayos. Es el mismo reflejo que tienes tú cada vez que emites un boletín o un certificado de instalación: lo que no está firmado y documentado, para la Administración no existe.</a:t>
+              <a:t>N1: Vale, se hacen las pruebas. Pero ¿dónde queda constancia de que salieron bien?</a:t>
+            </a:r>
+          </a:p>
+          <a:p>
+            <a:r>
+              <a:t>N2: En un documento con nombre y apellidos: el certificado de dirección de obra. Vamos por pasos. Primero, las pruebas tienen que terminar con resultado positivo; si algo falla, no hay nada que certificar, se corrige y se repite. Cuando salen bien, su descripción y sus resultados se incorporan a ese certificado de dirección de obra, que confecciona y firma el director de la obra, no cualquiera. ¿Y por qué tanto papel? Porque para la Administración lo que no está firmado y documentado, sencillamente no ha pasado. Ese certificado es la prueba de que la red superó los ensayos, el respaldo por si algún día hay que mirar atrás. Es el mismo reflejo que vas a tener tú cada vez que emitas un boletín o un certificado de instalación: haces el trabajo bien, sí, pero también lo dejas firmado. Trabajo hecho y papel firmado van siempre juntos.</a:t>
             </a:r>
           </a:p>
         </p:txBody>
@@ -741,12 +741,12 @@
           <a:lstStyle/>
           <a:p>
             <a:r>
-              <a:t>N1: ¿Se puede dar gas nada más terminar el montaje?</a:t>
-            </a:r>
-          </a:p>
-          <a:p>
-            <a:r>
-              <a:t>N2: No. Solo se ponen en servicio las instalaciones que han superado las pruebas previas: sin pruebas, no hay gas. Al llenar de gas hay que evitar que se forme mezcla aire-gas dentro de los límites de inflamabilidad, que es la mezcla peligrosa. Para eso, o se introduce el gas despacio, a una velocidad que reduzca el riesgo en la zona de contacto, o se separan aire y gas con un tapón de gas inerte, por ejemplo nitrógeno, o con un pistón de purga. Y el purgado se hace siempre de forma controlada. Grábate la física: el peligro no es el gas solo ni el aire solo, es la mezcla de los dos más una chispa.</a:t>
+              <a:t>N1: Terminado el montaje y las pruebas, ¿ya se puede meter el gas sin más?</a:t>
+            </a:r>
+          </a:p>
+          <a:p>
+            <a:r>
+              <a:t>N2: Solo si se ha superado un requisito de oro: la instalación tiene que haber pasado las pruebas previas. Sin pruebas superadas, no hay gas; grábatelo como un mandamiento. Y ahora viene la parte física, que es la clave de seguridad de todo tu oficio. Cuando metes gas en un tubo que está lleno de aire, durante un rato aire y gas conviven, y ahí está el peligro: no en el gas solo, que sin oxígeno no arde, sino en la mezcla aire-gas cuando cae dentro de los llamados límites de inflamabilidad, esa proporción justa en la que una simple chispa provoca una deflagración. ¿Cómo se evita? De dos maneras. O se introduce el gas despacio, a una velocidad que reduzca la zona de mezcla peligrosa en el punto de contacto; o se separan aire y gas metiendo en medio un tapón de gas inerte, por ejemplo nitrógeno, que no arde, o un pistón de purga que hace de tabique. Y el purgado, que es echar fuera el aire o el gas, siempre de forma controlada, nunca a lo loco. Métetelo en la cabeza porque lo vas a aplicar toda la vida cada vez que purgues una instalación: aire, más gas, más una chispa, igual a explosión.</a:t>
             </a:r>
           </a:p>
         </p:txBody>
@@ -816,12 +816,12 @@
           <a:lstStyle/>
           <a:p>
             <a:r>
-              <a:t>N1: ¿Quién da el paso final de meter el gas?</a:t>
-            </a:r>
-          </a:p>
-          <a:p>
-            <a:r>
-              <a:t>N2: No lo hace cualquiera. La puesta en servicio la lleva a cabo personal cualificado autorizado por el distribuidor o por el titular de la instalación, y siempre con conocimiento del director de obra. Es la última barrera antes de que la red quede viva. Enlaza con lo anterior en orden: primero pruebas superadas, después llenado controlado y, por último, gente autorizada dando el servicio con el director al tanto.</a:t>
+              <a:t>N1: Y ese paso final, el de meter el gas de verdad, ¿lo puede dar cualquiera?</a:t>
+            </a:r>
+          </a:p>
+          <a:p>
+            <a:r>
+              <a:t>N2: No, y es lógico si piensas lo que está en juego. La puesta en servicio la lleva a cabo personal cualificado autorizado, y ojo a quién lo autoriza: el distribuidor o el titular de la instalación de distribución. Además, se hace con conocimiento del director de obra, es decir, el director tiene que estar al tanto de que se está dando ese paso. Piénsalo como la última barrera antes de que la red quede viva y cargada de gas: no es momento de improvisar ni de que lo haga alguien de paso. Y fíjate cómo encaja todo en orden, como una cadena de seguridad: primero, pruebas superadas; después, llenado controlado para evitar la mezcla peligrosa; y por último, gente cualificada y autorizada dando el servicio, con el director de obra enterado. Cada eslabón protege al siguiente.</a:t>
             </a:r>
           </a:p>
         </p:txBody>
@@ -891,12 +891,12 @@
           <a:lstStyle/>
           <a:p>
             <a:r>
-              <a:t>N1: Cuatro golpes rápidos antes de cerrar. ¿Los tienes?</a:t>
-            </a:r>
-          </a:p>
-          <a:p>
-            <a:r>
-              <a:t>N2: Uno, esta instrucción manda en la red de la calle a lo largo de sus tres fases, proyectar, construir y explotar. Dos, la red necesita autorización administrativa previa, la da la Comunidad Autónoma, y las obras del año anterior se entregan en el primer trimestre. Tres, sin pruebas de resistencia y estanquidad superadas no hay gas, y queda en el certificado de dirección de obra. Y cuatro, el peligro nunca es el gas solo: es la mezcla aire-gas dentro de los límites de inflamabilidad. Si respondes esos cuatro sin dudar, llevas el vídeo dominado.</a:t>
+              <a:t>N1: Antes de cerrar, ¿me haces un repaso rápido para ver si me quedo con lo esencial?</a:t>
+            </a:r>
+          </a:p>
+          <a:p>
+            <a:r>
+              <a:t>N2: Cuatro golpes, y si respondes a los cuatro sin dudar, llevas el vídeo dominado. Uno: esta instrucción manda en la red de la calle, la del distribuidor, no en tu instalación receptora, y lo hace a lo largo de las tres fases, proyectar, construir y explotar. Dos: esa red necesita autorización administrativa previa; quién la da, la Comunidad Autónoma; y las obras del año anterior se entregan en el primer trimestre. Tres: sin pruebas de resistencia y estanquidad superadas no hay gas, y el resultado positivo queda en el certificado de dirección de obra que firma el director. Y cuatro, el que más te va a acompañar en la vida real: el peligro nunca es el gas solo, es la mezcla aire-gas dentro de los límites de inflamabilidad. Repasa mentalmente esos cuatro; si los tienes, seguimos.</a:t>
             </a:r>
           </a:p>
         </p:txBody>
@@ -966,22 +966,22 @@
           <a:lstStyle/>
           <a:p>
             <a:r>
-              <a:t>N1: Cerramos fuerte. Si te quedas con cuatro conquistas, que sean estas.</a:t>
-            </a:r>
-          </a:p>
-          <a:p>
-            <a:r>
-              <a:t>N2: Una, ya separas la red de la calle, la del distribuidor, de tu instalación receptora, y sabes que el límite está en la acometida. Dos, sabes quién autoriza, la Comunidad Autónoma, y cuándo se entrega lo del año anterior, en el primer trimestre. Tres, tienes grabada la regla de oro: sin pruebas de resistencia y estanquidad superadas no hay gas, y hay un papel que lo certifica, el certificado de dirección de obra que firma el director. Y cuatro, la física que te acompañará toda la vida profesional: el peligro no es el gas solo, es la mezcla aire-gas dentro de los límites de inflamabilidad.</a:t>
-            </a:r>
-          </a:p>
-          <a:p>
-            <a:r>
-              <a:t>N1: ¿Y esto por qué pesa tanto?</a:t>
-            </a:r>
-          </a:p>
-          <a:p>
-            <a:r>
-              <a:t>N2: Porque en el examen te lo preguntan cruzado, con esa lista de siete normas y ese quién autoriza y cuándo; y en la obra es lo que decide si el día de más frío la red se queda corta y aparecen la llama amarilla y el monóxido aguas abajo, en la caldera de tu cliente. Hoy ya eres más gasista que ayer: entiendes por dónde entra el gas al barrio antes de llegar a ninguna vivienda. En el siguiente vídeo damos el salto a la red viva, cómo se opera, se mantiene y se protege las veinticuatro horas, y ahí aparecen las fugas, los plazos y los trucos de campo que usarás cada semana. Te espero allí.</a:t>
+              <a:t>N1: Cerramos fuerte. Si me llevo cuatro conquistas de este vídeo, ¿cuáles deberían ser?</a:t>
+            </a:r>
+          </a:p>
+          <a:p>
+            <a:r>
+              <a:t>N2: Estas cuatro, y déjame reconstruir el hilo para que veas que no son cuatro cosas sueltas, sino una historia. Una: ya separas la red de la calle, la del distribuidor, de tu instalación receptora, y sabes que la frontera entre las dos está en la acometida. Esa frontera es la que te ahorra discusiones en obra. Dos: sabes quién autoriza esa red, la Comunidad Autónoma, y cuándo se entrega lo del año anterior, en el primer trimestre; son dos datos de examen que van casi siempre juntos. Tres: tienes grabada la regla de oro, sin pruebas de resistencia y estanquidad superadas no hay gas, y sabes que hay un papel que lo certifica, el certificado de dirección de obra que firma el director. Y cuatro: la física que te va a acompañar toda la vida profesional, el peligro no es el gas solo, es la mezcla aire-gas dentro de los límites de inflamabilidad.</a:t>
+            </a:r>
+          </a:p>
+          <a:p>
+            <a:r>
+              <a:t>N1: ¿Y por qué pesan tanto estas cuatro cosas?</a:t>
+            </a:r>
+          </a:p>
+          <a:p>
+            <a:r>
+              <a:t>N2: Por dos motivos que van de la mano. En el examen te las preguntan cruzadas: te sueltan la lista de siete normas, te preguntan quién autoriza y cuándo, o te ponen a elegir entre resistencia y estanquidad. Y en la obra deciden de verdad: un mal diseño aguas arriba es lo que hace que el día de más frío la red se quede corta y aparezcan la llama amarilla y el monóxido en la caldera de tu cliente, aguas abajo. Hoy ya eres más gasista que ayer, porque entiendes por dónde entra el gas al barrio antes de llegar a ninguna vivienda. En el siguiente vídeo damos el salto a la red ya viva: cómo se opera, se mantiene y se protege las veinticuatro horas, y ahí aparecen las fugas, los plazos y los trucos de campo que usarás cada semana. Te espero allí.</a:t>
             </a:r>
           </a:p>
         </p:txBody>
@@ -1051,12 +1051,12 @@
           <a:lstStyle/>
           <a:p>
             <a:r>
-              <a:t>N1: Antes de entrar en materia, tres números para orientarte.</a:t>
-            </a:r>
-          </a:p>
-          <a:p>
-            <a:r>
-              <a:t>N2: Este vídeo cubre los cinco primeros apartados de la instrucción. Toda red pasa por tres fases que se repiten como un mantra durante toda su vida: proyectar, que es dibujarla en el papel; construir, que es montar la tubería; y explotar, que es operarla y mantenerla mientras da servicio. Y para diseñarla hay siete normas de referencia que veremos enseguida. Si retienes estos tres bloques, todo lo demás encaja solo.</a:t>
+              <a:t>N1: ¿Por dónde empiezo a ordenar todo esto en la cabeza?</a:t>
+            </a:r>
+          </a:p>
+          <a:p>
+            <a:r>
+              <a:t>N2: Con tres números que te sirven de percha. El primero, cinco: son los cinco primeros apartados de la instrucción, y es todo lo que cubre este vídeo. El segundo, tres: toda red de gas pasa por tres fases que se repiten como un estribillo durante toda su vida. Proyectar, que es dibujarla en el papel; construir, que es montar la tubería en la zanja; y explotar, que es operarla y mantenerla mientras da servicio. Grábate esas tres palabras porque van a volver una y otra vez. Y el tercero, siete: son las normas técnicas de referencia para el diseño; no hay que sabérselas de memoria por dentro, solo reconocerlas. Si retienes estos tres bloques, cinco apartados, tres fases y siete normas, el resto del vídeo se te coloca solo.</a:t>
             </a:r>
           </a:p>
         </p:txBody>
@@ -1126,12 +1126,12 @@
           <a:lstStyle/>
           <a:p>
             <a:r>
-              <a:t>N1: ¿De qué red habla exactamente esta instrucción?</a:t>
-            </a:r>
-          </a:p>
-          <a:p>
-            <a:r>
-              <a:t>N2: La ITC-ICG cero uno fija los requisitos técnicos esenciales y las medidas de seguridad mínimas para proyectar, construir y explotar la red de distribución por canalización. Ojo al matiz: manda sobre la red de la calle, la del distribuidor, no sobre la instalación de la vivienda, que va por otra instrucción. Y no se acaba cuando la tubería queda enterrada: rige durante toda su vida útil. Recuerda del tema anterior que la distribución por canalización es la letra a del artículo dos del Reglamento, con presión máxima de diseño de hasta dieciséis bar. En obra, cuando alguien suelta eso de que no es cosa suya, el límite está justo en la acometida: aguas arriba manda el distribuidor bajo esta ITC.</a:t>
+              <a:t>N1: Vale, pero ¿de qué tubería habla exactamente? ¿De la de mi casa?</a:t>
+            </a:r>
+          </a:p>
+          <a:p>
+            <a:r>
+              <a:t>N2: No, y este matiz es el primero que hay que fijar. Compara dos tuberías: la que pasa por debajo de la calle y la que llega a tu cocina. Esta ITC manda sobre la primera, la de la calle, la del distribuidor. La de tu vivienda, la instalación receptora, va por otra instrucción distinta. Aclarado eso, ¿qué fija esta norma? Dos cosas: los requisitos técnicos esenciales, que en cristiano es lo mínimo que la red tiene que cumplir sí o sí, y las medidas de seguridad mínimas. Y lo fija para las tres fases que ya conoces: proyectar, construir y explotar. Ese detalle importa: la ITC no se calla el día que entierran el tubo, sigue mandando durante toda la vida útil de la red. Recuerda del tema anterior que la distribución por canalización es la letra a del artículo dos del Reglamento, con presión máxima de diseño de hasta dieciséis bar. En la obra, cuando alguien suelte eso de que la avería no es cosa suya, el límite exacto está en la acometida: aguas arriba manda el distribuidor bajo esta ITC, aguas abajo empieza tu responsabilidad.</a:t>
             </a:r>
           </a:p>
         </p:txBody>
@@ -1201,12 +1201,12 @@
           <a:lstStyle/>
           <a:p>
             <a:r>
-              <a:t>N1: ¿Hace falta pedir permiso para construir esta red?</a:t>
-            </a:r>
-          </a:p>
-          <a:p>
-            <a:r>
-              <a:t>N2: Sí, la red necesita autorización administrativa previa, salvo los casos que marca la Ley del sector de hidrocarburos en su artículo cincuenta y cinco punto dos. Ahora bien, para las extensiones de una red que ya existe no se pide permiso palmo a palmo: la compañía presenta una memoria general con lo que prevé construir en el año y luego, en el primer trimestre del año siguiente, entrega a la Comunidad Autónoma el proyecto de lo que de verdad ejecutó, con la fecha de puesta en servicio de cada obra. El truco es fácil: primero digo lo que pienso hacer, después justifico lo que hice. Esto lo mueve la distribuidora, no tú, pero en el examen cae quién autoriza, que es la Comunidad Autónoma, y cuándo se entrega, que es el primer trimestre.</a:t>
+              <a:t>N1: Para montar esta red, ¿hace falta pedir permiso, como una licencia de obra?</a:t>
+            </a:r>
+          </a:p>
+          <a:p>
+            <a:r>
+              <a:t>N2: Sí, en general sí: la red necesita autorización administrativa previa, es decir, el visto bueno de la Administración antes de empezar, salvo unos casos concretos que marca la Ley del sector de hidrocarburos en su artículo cincuenta y cinco punto dos. Ahora bien, aquí hay dos ritmos y conviene no mezclarlos. Para una red nueva de verdad, permiso previo. Pero para las extensiones, que es alargar una red que ya existe, no se pide permiso metro a metro: sería inviable. Lo que hace la compañía es presentar una memoria general, un documento con lo que prevé construir a lo largo del año. Y luego, en el primer trimestre del año siguiente, entrega a la Comunidad Autónoma el proyecto de lo que de verdad ejecutó, con la fecha de puesta en servicio de cada obra. El truco para no liarte: primero digo lo que pienso hacer, la previsión; después justifico lo que hice, las obras del año anterior. Todo esto lo mueve la distribuidora, tú como instalador no tramitas nada de esto, pero en el examen caen dos datos clavados: quién autoriza, que es la Comunidad Autónoma, y cuándo se entrega lo del año anterior, que es en el primer trimestre.</a:t>
             </a:r>
           </a:p>
         </p:txBody>
@@ -1276,12 +1276,12 @@
           <a:lstStyle/>
           <a:p>
             <a:r>
-              <a:t>N1: ¿Qué persigue un buen diseño de red?</a:t>
-            </a:r>
-          </a:p>
-          <a:p>
-            <a:r>
-              <a:t>N2: Dos cosas a la vez: suministro seguro, que no haya fugas, y continuo, que no se corte el gas. Por eso la red se dimensiona con capacidad suficiente pensando en cuánta gente hay, en el nivel socioeconómico de la zona y en la climatología, porque donde hace más frío se consume más gas para calefacción. ¿Y por qué te importa a ti, que trabajas aguas abajo? Porque una red mal dimensionada se queda corta el día de más frío, cae la presión y en los aparatos eso se nota en llama amarilla, mala combustión, hollín y riesgo de monóxido de carbono. El diseño es, en el fondo, la primera avería que se evita.</a:t>
+              <a:t>N1: ¿Qué es lo que persigue un buen diseño de red? ¿Que sea barata?</a:t>
+            </a:r>
+          </a:p>
+          <a:p>
+            <a:r>
+              <a:t>N2: No, persigue dos cosas a la vez, y son la brújula de todo el apartado. Suministro seguro, que quiere decir que no haya fugas; y suministro continuo, que quiere decir que no se corte el gas. Fíjate que son dos objetivos distintos: una red puede ser segura pero cortarse cada dos por tres, o dar servicio siempre pero fugar. Se buscan las dos. ¿Y cómo se consigue el continuo? Dimensionando la red con capacidad suficiente, es decir, poniendo tubos del calibre adecuado para la gente que va a colgar de ellos. Para eso se mira cuánta gente hay, el nivel socioeconómico de la zona, que es el poder adquisitivo y por tanto cuánto consumo se espera, y la climatología, porque donde hace más frío se gasta más gas en calefacción. ¿Y por qué te importa a ti, que trabajas aguas abajo, en las casas? Porque una red mal dimensionada se queda corta el día de más frío, cuando todo el barrio enciende la calefacción a la vez: cae la presión, y esa caída en los aparatos se traduce en llama amarilla, mala combustión, hollín y riesgo de monóxido de carbono. Dicho fino: el diseño es, en realidad, la primera avería que se evita, antes de que exista la instalación.</a:t>
             </a:r>
           </a:p>
         </p:txBody>
@@ -1351,12 +1351,12 @@
           <a:lstStyle/>
           <a:p>
             <a:r>
-              <a:t>N1: ¿Qué datos deciden los materiales de la red?</a:t>
-            </a:r>
-          </a:p>
-          <a:p>
-            <a:r>
-              <a:t>N2: Cuatro criterios. Las características físico-químicas del gas, porque no es lo mismo gas natural que un gas licuado del petróleo; la presión de diseño, que marca el grosor y el material del tubo; la pérdida de carga admisible, es decir cuánta presión te puedes permitir perder por el camino; y las condiciones de operación y mantenimiento. Si el material no encaja con el gas o con la presión, tarde o temprano aparece el problema. Piénsalo como cuando eliges un tubo en obra: lo eliges en función de lo que va a circular por dentro y a qué presión.</a:t>
+              <a:t>N1: Y a la hora de elegir los tubos y los materiales, ¿de qué depende esa elección?</a:t>
+            </a:r>
+          </a:p>
+          <a:p>
+            <a:r>
+              <a:t>N2: De cuatro criterios, y te los explico con la lógica de cuando eliges un tubo en obra. Primero, las características físico-químicas del gas, porque no es lo mismo transportar gas natural que un gas licuado del petróleo: cambian densidad, poder calorífico y hasta cómo ataca al material. Segundo, la presión de diseño, que es la presión máxima para la que se calcula la red; ella marca el grosor de la pared del tubo y el material, igual que una manguera de alta presión es más gruesa que una de riego. Tercero, la pérdida de carga admisible; carga aquí significa presión, así que esto es cuánta presión te puedes permitir perder por el rozamiento a lo largo del recorrido sin que al final de la línea llegue floja. Y cuarto, las condiciones de operación y mantenimiento, es decir, cómo se va a manejar y reparar durante su vida. Si el material no encaja con el gas o con la presión, tarde o temprano aparece el problema. Es exactamente tu reflejo cuando coges un tubo: lo eliges por lo que va a circular por dentro y a qué presión, no por lo que tengas más a mano en la furgoneta.</a:t>
             </a:r>
           </a:p>
         </p:txBody>
@@ -1426,12 +1426,12 @@
           <a:lstStyle/>
           <a:p>
             <a:r>
-              <a:t>N1: ¿Cuántas normas de diseño hay que saber reconocer?</a:t>
-            </a:r>
-          </a:p>
-          <a:p>
-            <a:r>
-              <a:t>N2: Siete. No hace falta memorizar qué dice cada una, pero sí reconocerlas cuando aparecen en una lista. Van en dos bloques. Las une e ene, que vienen de Europa y regulan las redes según la presión: la doce mil siete, la mil quinientos noventa y cuatro, la doce mil ciento ochenta y seis y la doce mil trescientos veintisiete. Y las tres hermanas españolas, la sesenta mil trescientos diez, la sesenta mil trescientos once y la sesenta mil trescientos doce, que vas a ver una y otra vez en toda esta instrucción para diseño, pruebas, operación y mantenimiento. Si en el examen ves una lista de normas de canalización, esas tres seiscientas casi seguro que están dentro.</a:t>
+              <a:t>N1: Son siete normas de diseño. ¿De verdad tengo que aprendérmelas todas?</a:t>
+            </a:r>
+          </a:p>
+          <a:p>
+            <a:r>
+              <a:t>N2: Tranquilo, no hay que saberse qué dice cada una por dentro; hay que reconocerlas cuando aparecen en una lista, que es como te lo van a preguntar. Y para reconocerlas, un truco de bloques. Por un lado, las que empiezan por une e ene: la doce mil siete, la mil quinientos noventa y cuatro, la doce mil ciento ochenta y seis y la doce mil trescientos veintisiete. Son de origen europeo y regulan las redes según la presión. Por otro lado, y estas son las importantes, tres normas españolas que van a ser tus viejas conocidas: la sesenta mil trescientos diez, la sesenta mil trescientos once y la sesenta mil trescientos doce. Llámalas las tres hermanas seiscientas. Y presta atención, porque no aparecen solo aquí: vas a ver estas tres una y otra vez en toda la ITC, para el diseño, para las pruebas, para la operación y para el mantenimiento. Regla de examen: si te ponen una lista de normas de canalización y tienes que elegir, esas tres seiscientas casi seguro que están dentro. Además, cuál se aplica no es al azar: depende de la presión de diseño de la red.</a:t>
             </a:r>
           </a:p>
         </p:txBody>
@@ -1501,12 +1501,12 @@
           <a:lstStyle/>
           <a:p>
             <a:r>
-              <a:t>N1: ¿Quién responde de la obra y qué cuidado manda?</a:t>
-            </a:r>
-          </a:p>
-          <a:p>
-            <a:r>
-              <a:t>N2: La obra se hace bajo la responsabilidad del titular, con personal propio o ajeno, garantizando siempre la seguridad de los trabajadores. La clave de campo es no dañar otras instalaciones enterradas: la luz, el agua, el saneamiento, el teléfono, que ya corren bajo la calle. Al abrir zanja hay que saber qué pasa por debajo. Y cuando conectas tubo nuevo a la red que ya funciona, la norma es no dejar sin gas a los que ya lo tienen: se hace en carga siempre que se pueda. Es el mismo reflejo del fontanero que cambia un tramo sin cortarle el agua a todo el edificio.</a:t>
+              <a:t>N1: Cuando por fin se abre la zanja y se monta el tubo, ¿quién responde y qué es lo que más se cuida?</a:t>
+            </a:r>
+          </a:p>
+          <a:p>
+            <a:r>
+              <a:t>N2: La obra se ejecuta bajo la responsabilidad del titular de la instalación, con personal propio o ajeno, es decir, con su gente o con una contrata, pero garantizando siempre la seguridad de quien trabaja. Y hay un cuidado que es puro sentido de obra: no dañar otras instalaciones enterradas. Piensa en lo que ya corre por debajo de una calle antes de que llegues tú con la máquina: la luz, el agua, el saneamiento, el teléfono, la fibra. Al abrir zanja hay que saber qué pasa por debajo para no reventarlo. Y hay un segundo reflejo: cuando conectas el tubo nuevo a la red que ya está funcionando y dando servicio, la norma es no dejar sin gas a quienes ya lo tienen; la conexión se hace en carga, con la red viva, siempre que se pueda. Es el mismo gesto que el del fontanero que cambia un tramo de tubería sin cortarle el agua a todo el edificio: molestar lo mínimo a quien ya tiene el servicio.</a:t>
             </a:r>
           </a:p>
         </p:txBody>
@@ -1576,12 +1576,12 @@
           <a:lstStyle/>
           <a:p>
             <a:r>
-              <a:t>N1: ¿Y si la tubería tiene que cruzar una carretera o un río?</a:t>
-            </a:r>
-          </a:p>
-          <a:p>
-            <a:r>
-              <a:t>N2: Eso son obras especiales. Si tu tubería cruza una carretera, un curso de agua, una vía de tren o un puente, hace falta autorización del organismo que manda en ese sitio: la administración de carreteras, la confederación del río, la de ferrocarriles. Y en vez de abrir zanja a lo bruto se prefieren técnicas alternativas, por ejemplo perforar por debajo sin levantar la calzada, para molestar lo menos posible al servicio que cruzas. La idea es sencilla: cruzo algo importante, pido permiso a su dueño y uso la técnica que menos moleste.</a:t>
+              <a:t>N1: ¿Y qué pasa cuando la tubería tiene que cruzar una carretera o un río? Ahí no puedes abrir zanja y ya está, ¿no?</a:t>
+            </a:r>
+          </a:p>
+          <a:p>
+            <a:r>
+              <a:t>N2: Exacto, eso son obras especiales y tienen reglas propias. La lista de obstáculos que la ITC llama especiales es cerrada, memorízala: carretera, curso de agua, ferrocarril y puente. En todos esos casos hace falta autorización del organismo afectado, es decir, del que manda en ese sitio: la administración de carreteras si cruzas una vía, la confederación hidrográfica si cruzas un río, la autoridad de ferrocarriles si cruzas las vías. Y la forma de cruzar tampoco es a lo bruto: se prefieren técnicas de construcción alternativas. La típica es la perforación horizontal, que consiste en pasar el tubo por debajo del obstáculo taladrando sin levantar la calzada, para no cortar el tráfico ni destrozar el firme. La idea resumida en una frase: cruzo algo importante, pido permiso a su dueño y uso la técnica que menos moleste al servicio que hay encima.</a:t>
             </a:r>
           </a:p>
         </p:txBody>
@@ -5068,7 +5068,7 @@
       </p:sp>
       <p:sp>
         <p:nvSpPr>
-          <p:cNvPr id="8" name="imgph" descr="IMGQ:gas pipe pressure test gauge"/>
+          <p:cNvPr id="8" name="imgph" descr="IMGQ:gas pipe pressure test gauge manometer"/>
           <p:cNvSpPr/>
           <p:nvPr/>
         </p:nvSpPr>
@@ -5154,7 +5154,7 @@
                 </a:solidFill>
                 <a:latin typeface="Montserrat"/>
               </a:rPr>
-              <a:t>gas pipe pressure test gauge</a:t>
+              <a:t>gas pipe pressure test gauge manometer</a:t>
             </a:r>
           </a:p>
         </p:txBody>
@@ -5458,7 +5458,7 @@
       </p:sp>
       <p:sp>
         <p:nvSpPr>
-          <p:cNvPr id="8" name="imgph" descr="IMGQ:signing construction certificate document"/>
+          <p:cNvPr id="8" name="imgph" descr="IMGQ:signing construction certificate document pen"/>
           <p:cNvSpPr/>
           <p:nvPr/>
         </p:nvSpPr>
@@ -5544,7 +5544,7 @@
                 </a:solidFill>
                 <a:latin typeface="Montserrat"/>
               </a:rPr>
-              <a:t>signing construction certificate document</a:t>
+              <a:t>signing construction certificate document pen</a:t>
             </a:r>
           </a:p>
         </p:txBody>
@@ -5866,14 +5866,14 @@
                 </a:solidFill>
                 <a:latin typeface="Montserrat"/>
               </a:rPr>
-              <a:t>Purgado controlado, nunca a lo loco</a:t>
-            </a:r>
-          </a:p>
-        </p:txBody>
-      </p:sp>
-      <p:sp>
-        <p:nvSpPr>
-          <p:cNvPr id="8" name="imgph" descr="IMGQ:gas valve technician gloves"/>
+              <a:t>Purgado siempre controlado</a:t>
+            </a:r>
+          </a:p>
+        </p:txBody>
+      </p:sp>
+      <p:sp>
+        <p:nvSpPr>
+          <p:cNvPr id="8" name="imgph" descr="IMGQ:technician opening gas valve gloves pipeline"/>
           <p:cNvSpPr/>
           <p:nvPr/>
         </p:nvSpPr>
@@ -5959,7 +5959,7 @@
                 </a:solidFill>
                 <a:latin typeface="Montserrat"/>
               </a:rPr>
-              <a:t>gas valve technician gloves</a:t>
+              <a:t>technician opening gas valve gloves pipeline</a:t>
             </a:r>
           </a:p>
         </p:txBody>
@@ -6124,7 +6124,7 @@
                 </a:solidFill>
                 <a:latin typeface="Montserrat"/>
               </a:rPr>
-              <a:t>APARTADO 5.2 · QUIÉN</a:t>
+              <a:t>APARTADO 5.2 · QUIÉN LO HACE</a:t>
             </a:r>
           </a:p>
         </p:txBody>
@@ -6263,7 +6263,7 @@
       </p:sp>
       <p:sp>
         <p:nvSpPr>
-          <p:cNvPr id="8" name="imgph" descr="IMGQ:gas technician commissioning pipeline"/>
+          <p:cNvPr id="8" name="imgph" descr="IMGQ:gas technician commissioning pipeline outdoor"/>
           <p:cNvSpPr/>
           <p:nvPr/>
         </p:nvSpPr>
@@ -6349,7 +6349,7 @@
                 </a:solidFill>
                 <a:latin typeface="Montserrat"/>
               </a:rPr>
-              <a:t>gas technician commissioning pipeline</a:t>
+              <a:t>gas technician commissioning pipeline outdoor</a:t>
             </a:r>
           </a:p>
         </p:txBody>
@@ -6678,7 +6678,7 @@
       </p:sp>
       <p:sp>
         <p:nvSpPr>
-          <p:cNvPr id="8" name="imgph" descr="IMGQ:gas meter cabinet street wall"/>
+          <p:cNvPr id="8" name="imgph" descr="IMGQ:gas meter cabinet street wall building"/>
           <p:cNvSpPr/>
           <p:nvPr/>
         </p:nvSpPr>
@@ -6764,7 +6764,7 @@
                 </a:solidFill>
                 <a:latin typeface="Montserrat"/>
               </a:rPr>
-              <a:t>gas meter cabinet street wall</a:t>
+              <a:t>gas meter cabinet street wall building</a:t>
             </a:r>
           </a:p>
         </p:txBody>
@@ -6967,7 +6967,7 @@
                 </a:solidFill>
                 <a:latin typeface="Montserrat"/>
               </a:rPr>
-              <a:t>Sabes quién autoriza y cuándo: la CA, primer trimestre</a:t>
+              <a:t>Sabes quién autoriza y cuándo: la CA y el primer trimestre</a:t>
             </a:r>
           </a:p>
           <a:p>
@@ -7376,7 +7376,7 @@
                 </a:solidFill>
                 <a:latin typeface="Montserrat"/>
               </a:rPr>
-              <a:t>apartados de la ITC (del 1 al 5)</a:t>
+              <a:t>apartados de la ITC que vemos hoy</a:t>
             </a:r>
           </a:p>
         </p:txBody>
@@ -7608,7 +7608,7 @@
                 </a:solidFill>
                 <a:latin typeface="Montserrat"/>
               </a:rPr>
-              <a:t>normas de diseño de referencia</a:t>
+              <a:t>normas de diseño que hay que reconocer</a:t>
             </a:r>
           </a:p>
         </p:txBody>
@@ -7937,7 +7937,7 @@
       </p:sp>
       <p:sp>
         <p:nvSpPr>
-          <p:cNvPr id="8" name="imgph" descr="IMGQ:gas pipeline construction street"/>
+          <p:cNvPr id="8" name="imgph" descr="IMGQ:gas pipeline construction street trench"/>
           <p:cNvSpPr/>
           <p:nvPr/>
         </p:nvSpPr>
@@ -8023,7 +8023,7 @@
                 </a:solidFill>
                 <a:latin typeface="Montserrat"/>
               </a:rPr>
-              <a:t>gas pipeline construction street</a:t>
+              <a:t>gas pipeline construction street trench</a:t>
             </a:r>
           </a:p>
         </p:txBody>
@@ -8352,7 +8352,7 @@
       </p:sp>
       <p:sp>
         <p:nvSpPr>
-          <p:cNvPr id="8" name="imgph" descr="IMGQ:official documents stamp approval"/>
+          <p:cNvPr id="8" name="imgph" descr="IMGQ:official documents stamp approval desk"/>
           <p:cNvSpPr/>
           <p:nvPr/>
         </p:nvSpPr>
@@ -8438,7 +8438,7 @@
                 </a:solidFill>
                 <a:latin typeface="Montserrat"/>
               </a:rPr>
-              <a:t>official documents stamp approval</a:t>
+              <a:t>official documents stamp approval desk</a:t>
             </a:r>
           </a:p>
         </p:txBody>
@@ -8685,7 +8685,7 @@
                 </a:solidFill>
                 <a:latin typeface="Montserrat"/>
               </a:rPr>
-              <a:t>Seguro (sin fugas) y continuo (sin cortes)</a:t>
+              <a:t>Seguro: sin fugas</a:t>
             </a:r>
           </a:p>
           <a:p>
@@ -8710,7 +8710,7 @@
                 </a:solidFill>
                 <a:latin typeface="Montserrat"/>
               </a:rPr>
-              <a:t>Dimensionar según la demanda</a:t>
+              <a:t>Continuo: sin cortes</a:t>
             </a:r>
           </a:p>
           <a:p>
@@ -8735,6 +8735,31 @@
                 </a:solidFill>
                 <a:latin typeface="Montserrat"/>
               </a:rPr>
+              <a:t>Dimensionar según la demanda</a:t>
+            </a:r>
+          </a:p>
+          <a:p>
+            <a:pPr>
+              <a:spcAft>
+                <a:spcPts val="1000"/>
+              </a:spcAft>
+            </a:pPr>
+            <a:r>
+              <a:rPr sz="1600" b="1" i="0">
+                <a:solidFill>
+                  <a:srgbClr val="2E3A80"/>
+                </a:solidFill>
+                <a:latin typeface="Montserrat"/>
+              </a:rPr>
+              <a:t>•  </a:t>
+            </a:r>
+            <a:r>
+              <a:rPr sz="1600" b="0" i="0">
+                <a:solidFill>
+                  <a:srgbClr val="1B2330"/>
+                </a:solidFill>
+                <a:latin typeface="Montserrat"/>
+              </a:rPr>
               <a:t>Nivel socioeconómico y climatología</a:t>
             </a:r>
           </a:p>
@@ -8742,7 +8767,7 @@
       </p:sp>
       <p:sp>
         <p:nvSpPr>
-          <p:cNvPr id="8" name="imgph" descr="IMGQ:gas distribution network map"/>
+          <p:cNvPr id="8" name="imgph" descr="IMGQ:engineer studying gas network plan office"/>
           <p:cNvSpPr/>
           <p:nvPr/>
         </p:nvSpPr>
@@ -8828,7 +8853,7 @@
                 </a:solidFill>
                 <a:latin typeface="Montserrat"/>
               </a:rPr>
-              <a:t>gas distribution network map</a:t>
+              <a:t>engineer studying gas network plan office</a:t>
             </a:r>
           </a:p>
         </p:txBody>
@@ -9157,7 +9182,7 @@
       </p:sp>
       <p:sp>
         <p:nvSpPr>
-          <p:cNvPr id="8" name="imgph" descr="IMGQ:engineer technical drawing pipes"/>
+          <p:cNvPr id="8" name="imgph" descr="IMGQ:engineer technical drawing pipes ruler"/>
           <p:cNvSpPr/>
           <p:nvPr/>
         </p:nvSpPr>
@@ -9243,7 +9268,7 @@
                 </a:solidFill>
                 <a:latin typeface="Montserrat"/>
               </a:rPr>
-              <a:t>engineer technical drawing pipes</a:t>
+              <a:t>engineer technical drawing pipes ruler</a:t>
             </a:r>
           </a:p>
         </p:txBody>
@@ -9408,7 +9433,7 @@
                 </a:solidFill>
                 <a:latin typeface="Montserrat"/>
               </a:rPr>
-              <a:t>APARTADO 3 · NORMAS</a:t>
+              <a:t>APARTADO 3 · NORMAS DE DISEÑO</a:t>
             </a:r>
           </a:p>
         </p:txBody>
@@ -9442,7 +9467,7 @@
                 </a:solidFill>
                 <a:latin typeface="Montserrat"/>
               </a:rPr>
-              <a:t>Las normas de diseño</a:t>
+              <a:t>Las siete normas</a:t>
             </a:r>
           </a:p>
         </p:txBody>
@@ -9547,7 +9572,7 @@
       </p:sp>
       <p:sp>
         <p:nvSpPr>
-          <p:cNvPr id="8" name="imgph" descr="IMGQ:technical standards binder shelf"/>
+          <p:cNvPr id="8" name="imgph" descr="IMGQ:technical standards binders shelf office"/>
           <p:cNvSpPr/>
           <p:nvPr/>
         </p:nvSpPr>
@@ -9633,7 +9658,7 @@
                 </a:solidFill>
                 <a:latin typeface="Montserrat"/>
               </a:rPr>
-              <a:t>technical standards binder shelf</a:t>
+              <a:t>technical standards binders shelf office</a:t>
             </a:r>
           </a:p>
         </p:txBody>
@@ -9937,7 +9962,7 @@
       </p:sp>
       <p:sp>
         <p:nvSpPr>
-          <p:cNvPr id="8" name="imgph" descr="IMGQ:excavator digging trench pipes"/>
+          <p:cNvPr id="8" name="imgph" descr="IMGQ:excavator digging trench underground pipes"/>
           <p:cNvSpPr/>
           <p:nvPr/>
         </p:nvSpPr>
@@ -10023,7 +10048,7 @@
                 </a:solidFill>
                 <a:latin typeface="Montserrat"/>
               </a:rPr>
-              <a:t>excavator digging trench pipes</a:t>
+              <a:t>excavator digging trench underground pipes</a:t>
             </a:r>
           </a:p>
         </p:txBody>

--- a/Curso Gas B/01 - ITC-ICG 01 - Distribucion por canalizacion/01 - ITC-ICG 01 - Distribucion por canalizacion - Vídeo 1.pptx
+++ b/Curso Gas B/01 - ITC-ICG 01 - Distribucion por canalizacion/01 - ITC-ICG 01 - Distribucion por canalizacion - Vídeo 1.pptx
@@ -20,6 +20,7 @@
     <p:sldId id="268" r:id="rId20"/>
     <p:sldId id="269" r:id="rId21"/>
     <p:sldId id="270" r:id="rId22"/>
+    <p:sldId id="271" r:id="rId23"/>
   </p:sldIdLst>
   <p:sldSz cx="12191695" cy="6858000" type="screen4x3"/>
   <p:notesSz cx="6858000" cy="9144000"/>
@@ -591,12 +592,12 @@
           <a:lstStyle/>
           <a:p>
             <a:r>
-              <a:t>N1: Antes de soltar el gas, ¿qué hay que comprobar? Supongo que que no haya fugas.</a:t>
-            </a:r>
-          </a:p>
-          <a:p>
-            <a:r>
-              <a:t>N2: Eso, y una cosa más, porque son dos pruebas distintas y mucha gente las confunde. La prueba de resistencia comprueba que la tubería aguanta la presión sin reventar ni deformarse; en llano, que sea fuerte. La prueba de estanquidad comprueba que no se escapa ni una molécula de gas por ninguna unión; estanquidad significa justamente eso, que no fuga nada, ni una burbuja. Y son distintas de verdad: un tubo puede ser resistentísimo, aguantar una presión enorme, y aun así fugar por una junta mal apretada. Por eso se hacen las dos, no vale con una. Se realizan según las normas seiscientas, la trescientos diez, la trescientos once y la trescientos doce, según el tipo de instalación, esas tres hermanas que te dije que iban a volver. Y una regla de seguridad de puro sentido común: mientras se prueba, nadie ajeno en la zona. Estás metiendo mucha presión a un tubo, y si algo cede, salta con fuerza. Truco para no confundirlas nunca: resistencia, que no rompa; estanquidad, que no fugue.</a:t>
+              <a:t>N1: ¿Y qué pasa cuando la tubería tiene que cruzar una carretera o un río? Ahí no puedes abrir zanja y ya está, ¿no?</a:t>
+            </a:r>
+          </a:p>
+          <a:p>
+            <a:r>
+              <a:t>N2: Exacto, eso son obras especiales y tienen reglas propias. La lista de obstáculos que la ITC llama especiales es cerrada, memorízala: carretera, curso de agua, ferrocarril y puente. En todos esos casos hace falta autorización del organismo afectado, es decir, del que manda en ese sitio: la administración de carreteras si cruzas una vía, la confederación hidrográfica si cruzas un río, la autoridad de ferrocarriles si cruzas las vías. Y la forma de cruzar tampoco es a lo bruto: se prefieren técnicas de construcción alternativas. La típica es la perforación horizontal, que consiste en pasar el tubo por debajo del obstáculo taladrando sin levantar la calzada, para no cortar el tráfico ni destrozar el firme. La idea resumida en una frase: cruzo algo importante, pido permiso a su dueño y uso la técnica que menos moleste al servicio que hay encima.</a:t>
             </a:r>
           </a:p>
         </p:txBody>
@@ -666,12 +667,12 @@
           <a:lstStyle/>
           <a:p>
             <a:r>
-              <a:t>N1: Vale, se hacen las pruebas. Pero ¿dónde queda constancia de que salieron bien?</a:t>
-            </a:r>
-          </a:p>
-          <a:p>
-            <a:r>
-              <a:t>N2: En un documento con nombre y apellidos: el certificado de dirección de obra. Vamos por pasos. Primero, las pruebas tienen que terminar con resultado positivo; si algo falla, no hay nada que certificar, se corrige y se repite. Cuando salen bien, su descripción y sus resultados se incorporan a ese certificado de dirección de obra, que confecciona y firma el director de la obra, no cualquiera. ¿Y por qué tanto papel? Porque para la Administración lo que no está firmado y documentado, sencillamente no ha pasado. Ese certificado es la prueba de que la red superó los ensayos, el respaldo por si algún día hay que mirar atrás. Es el mismo reflejo que vas a tener tú cada vez que emitas un boletín o un certificado de instalación: haces el trabajo bien, sí, pero también lo dejas firmado. Trabajo hecho y papel firmado van siempre juntos.</a:t>
+              <a:t>N1: Antes de soltar el gas, ¿qué hay que comprobar? Supongo que que no haya fugas.</a:t>
+            </a:r>
+          </a:p>
+          <a:p>
+            <a:r>
+              <a:t>N2: Eso, y una cosa más, porque son dos pruebas distintas y mucha gente las confunde. La prueba de resistencia comprueba que la tubería aguanta la presión sin reventar ni deformarse; en llano, que sea fuerte. La prueba de estanquidad comprueba que no se escapa ni una molécula de gas por ninguna unión; estanquidad significa justamente eso, que no fuga nada, ni una burbuja. Y son distintas de verdad: un tubo puede ser resistentísimo, aguantar una presión enorme, y aun así fugar por una junta mal apretada. Por eso se hacen las dos, no vale con una. Se realizan según las normas seiscientas, la trescientos diez, la trescientos once y la trescientos doce, según el tipo de instalación, esas tres hermanas que te dije que iban a volver. Y una regla de seguridad de puro sentido común: mientras se prueba, nadie ajeno en la zona. Estás metiendo mucha presión a un tubo, y si algo cede, salta con fuerza. Truco para no confundirlas nunca: resistencia, que no rompa; estanquidad, que no fugue.</a:t>
             </a:r>
           </a:p>
         </p:txBody>
@@ -741,12 +742,12 @@
           <a:lstStyle/>
           <a:p>
             <a:r>
-              <a:t>N1: Terminado el montaje y las pruebas, ¿ya se puede meter el gas sin más?</a:t>
-            </a:r>
-          </a:p>
-          <a:p>
-            <a:r>
-              <a:t>N2: Solo si se ha superado un requisito de oro: la instalación tiene que haber pasado las pruebas previas. Sin pruebas superadas, no hay gas; grábatelo como un mandamiento. Y ahora viene la parte física, que es la clave de seguridad de todo tu oficio. Cuando metes gas en un tubo que está lleno de aire, durante un rato aire y gas conviven, y ahí está el peligro: no en el gas solo, que sin oxígeno no arde, sino en la mezcla aire-gas cuando cae dentro de los llamados límites de inflamabilidad, esa proporción justa en la que una simple chispa provoca una deflagración. ¿Cómo se evita? De dos maneras. O se introduce el gas despacio, a una velocidad que reduzca la zona de mezcla peligrosa en el punto de contacto; o se separan aire y gas metiendo en medio un tapón de gas inerte, por ejemplo nitrógeno, que no arde, o un pistón de purga que hace de tabique. Y el purgado, que es echar fuera el aire o el gas, siempre de forma controlada, nunca a lo loco. Métetelo en la cabeza porque lo vas a aplicar toda la vida cada vez que purgues una instalación: aire, más gas, más una chispa, igual a explosión.</a:t>
+              <a:t>N1: Vale, se hacen las pruebas. Pero ¿dónde queda constancia de que salieron bien?</a:t>
+            </a:r>
+          </a:p>
+          <a:p>
+            <a:r>
+              <a:t>N2: En un documento con nombre y apellidos: el certificado de dirección de obra. Vamos por pasos. Primero, las pruebas tienen que terminar con resultado positivo; si algo falla, no hay nada que certificar, se corrige y se repite. Cuando salen bien, su descripción y sus resultados se incorporan a ese certificado de dirección de obra, que confecciona y firma el director de la obra, no cualquiera. ¿Y por qué tanto papel? Porque para la Administración lo que no está firmado y documentado, sencillamente no ha pasado. Ese certificado es la prueba de que la red superó los ensayos, el respaldo por si algún día hay que mirar atrás. Es el mismo reflejo que vas a tener tú cada vez que emitas un boletín o un certificado de instalación: haces el trabajo bien, sí, pero también lo dejas firmado. Trabajo hecho y papel firmado van siempre juntos.</a:t>
             </a:r>
           </a:p>
         </p:txBody>
@@ -816,12 +817,12 @@
           <a:lstStyle/>
           <a:p>
             <a:r>
-              <a:t>N1: Y ese paso final, el de meter el gas de verdad, ¿lo puede dar cualquiera?</a:t>
-            </a:r>
-          </a:p>
-          <a:p>
-            <a:r>
-              <a:t>N2: No, y es lógico si piensas lo que está en juego. La puesta en servicio la lleva a cabo personal cualificado autorizado, y ojo a quién lo autoriza: el distribuidor o el titular de la instalación de distribución. Además, se hace con conocimiento del director de obra, es decir, el director tiene que estar al tanto de que se está dando ese paso. Piénsalo como la última barrera antes de que la red quede viva y cargada de gas: no es momento de improvisar ni de que lo haga alguien de paso. Y fíjate cómo encaja todo en orden, como una cadena de seguridad: primero, pruebas superadas; después, llenado controlado para evitar la mezcla peligrosa; y por último, gente cualificada y autorizada dando el servicio, con el director de obra enterado. Cada eslabón protege al siguiente.</a:t>
+              <a:t>N1: Terminado el montaje y las pruebas, ¿ya se puede meter el gas sin más?</a:t>
+            </a:r>
+          </a:p>
+          <a:p>
+            <a:r>
+              <a:t>N2: Solo si se ha superado un requisito de oro: la instalación tiene que haber pasado las pruebas previas. Sin pruebas superadas, no hay gas; grábatelo como un mandamiento. Y ahora viene la parte física, que es la clave de seguridad de todo tu oficio. Cuando metes gas en un tubo que está lleno de aire, durante un rato aire y gas conviven, y ahí está el peligro: no en el gas solo, que sin oxígeno no arde, sino en la mezcla aire-gas cuando cae dentro de los llamados límites de inflamabilidad, esa proporción justa en la que una simple chispa provoca una deflagración. ¿Cómo se evita? De dos maneras. O se introduce el gas despacio, a una velocidad que reduzca la zona de mezcla peligrosa en el punto de contacto; o se separan aire y gas metiendo en medio un tapón de gas inerte, por ejemplo nitrógeno, que no arde, o un pistón de purga que hace de tabique. Y el purgado, que es echar fuera el aire o el gas, siempre de forma controlada, nunca a lo loco. Métetelo en la cabeza porque lo vas a aplicar toda la vida cada vez que purgues una instalación: aire, más gas, más una chispa, igual a explosión.</a:t>
             </a:r>
           </a:p>
         </p:txBody>
@@ -891,12 +892,12 @@
           <a:lstStyle/>
           <a:p>
             <a:r>
-              <a:t>N1: Antes de cerrar, ¿me haces un repaso rápido para ver si me quedo con lo esencial?</a:t>
-            </a:r>
-          </a:p>
-          <a:p>
-            <a:r>
-              <a:t>N2: Cuatro golpes, y si respondes a los cuatro sin dudar, llevas el vídeo dominado. Uno: esta instrucción manda en la red de la calle, la del distribuidor, no en tu instalación receptora, y lo hace a lo largo de las tres fases, proyectar, construir y explotar. Dos: esa red necesita autorización administrativa previa; quién la da, la Comunidad Autónoma; y las obras del año anterior se entregan en el primer trimestre. Tres: sin pruebas de resistencia y estanquidad superadas no hay gas, y el resultado positivo queda en el certificado de dirección de obra que firma el director. Y cuatro, el que más te va a acompañar en la vida real: el peligro nunca es el gas solo, es la mezcla aire-gas dentro de los límites de inflamabilidad. Repasa mentalmente esos cuatro; si los tienes, seguimos.</a:t>
+              <a:t>N1: Y ese paso final, el de meter el gas de verdad, ¿lo puede dar cualquiera?</a:t>
+            </a:r>
+          </a:p>
+          <a:p>
+            <a:r>
+              <a:t>N2: No, y es lógico si piensas lo que está en juego. La puesta en servicio la lleva a cabo personal cualificado autorizado, y ojo a quién lo autoriza: el distribuidor o el titular de la instalación de distribución. Además, se hace con conocimiento del director de obra, es decir, el director tiene que estar al tanto de que se está dando ese paso. Piénsalo como la última barrera antes de que la red quede viva y cargada de gas: no es momento de improvisar ni de que lo haga alguien de paso. Y fíjate cómo encaja todo en orden, como una cadena de seguridad: primero, pruebas superadas; después, llenado controlado para evitar la mezcla peligrosa; y por último, gente cualificada y autorizada dando el servicio, con el director de obra enterado. Cada eslabón protege al siguiente.</a:t>
             </a:r>
           </a:p>
         </p:txBody>
@@ -966,6 +967,81 @@
           <a:lstStyle/>
           <a:p>
             <a:r>
+              <a:t>N1: Antes de cerrar, ¿me haces un repaso rápido para ver si me quedo con lo esencial?</a:t>
+            </a:r>
+          </a:p>
+          <a:p>
+            <a:r>
+              <a:t>N2: Cuatro golpes, y si respondes a los cuatro sin dudar, llevas el vídeo dominado. Uno: esta instrucción manda en la red de la calle, la del distribuidor, no en tu instalación receptora, y lo hace a lo largo de las tres fases, proyectar, construir y explotar. Dos: esa red necesita autorización administrativa previa; quién la da, la Comunidad Autónoma; y las obras del año anterior se entregan en el primer trimestre. Tres: sin pruebas de resistencia y estanquidad superadas no hay gas, y el resultado positivo queda en el certificado de dirección de obra que firma el director. Y cuatro, el que más te va a acompañar en la vida real: el peligro nunca es el gas solo, es la mezcla aire-gas dentro de los límites de inflamabilidad. Repasa mentalmente esos cuatro; si los tienes, seguimos.</a:t>
+            </a:r>
+          </a:p>
+        </p:txBody>
+      </p:sp>
+      <p:sp>
+        <p:nvSpPr>
+          <p:cNvPr id="4" name="Slide Number Placeholder 3"/>
+          <p:cNvSpPr>
+            <a:spLocks noGrp="1"/>
+          </p:cNvSpPr>
+          <p:nvPr>
+            <p:ph type="sldNum" idx="5" sz="quarter"/>
+          </p:nvPr>
+        </p:nvSpPr>
+        <p:spPr/>
+      </p:sp>
+    </p:spTree>
+  </p:cSld>
+  <p:clrMapOvr>
+    <a:masterClrMapping/>
+  </p:clrMapOvr>
+</p:notes>
+</file>
+
+<file path=ppt/notesSlides/notesSlide16.xml><?xml version="1.0" encoding="utf-8"?>
+<p:notes xmlns:a="http://schemas.openxmlformats.org/drawingml/2006/main" xmlns:p="http://schemas.openxmlformats.org/presentationml/2006/main" xmlns:r="http://schemas.openxmlformats.org/officeDocument/2006/relationships">
+  <p:cSld>
+    <p:spTree>
+      <p:nvGrpSpPr>
+        <p:cNvPr id="1" name=""/>
+        <p:cNvGrpSpPr/>
+        <p:nvPr/>
+      </p:nvGrpSpPr>
+      <p:grpSpPr>
+        <a:xfrm>
+          <a:off x="0" y="0"/>
+          <a:ext cx="0" cy="0"/>
+          <a:chOff x="0" y="0"/>
+          <a:chExt cx="0" cy="0"/>
+        </a:xfrm>
+      </p:grpSpPr>
+      <p:sp>
+        <p:nvSpPr>
+          <p:cNvPr id="2" name="Slide Image Placeholder 1"/>
+          <p:cNvSpPr>
+            <a:spLocks noGrp="1"/>
+          </p:cNvSpPr>
+          <p:nvPr>
+            <p:ph type="sldImg" idx="2"/>
+          </p:nvPr>
+        </p:nvSpPr>
+        <p:spPr/>
+      </p:sp>
+      <p:sp>
+        <p:nvSpPr>
+          <p:cNvPr id="3" name="Notes Placeholder 2"/>
+          <p:cNvSpPr>
+            <a:spLocks noGrp="1"/>
+          </p:cNvSpPr>
+          <p:nvPr>
+            <p:ph type="body" idx="3" sz="quarter"/>
+          </p:nvPr>
+        </p:nvSpPr>
+        <p:spPr/>
+        <p:txBody>
+          <a:bodyPr/>
+          <a:lstStyle/>
+          <a:p>
+            <a:r>
               <a:t>N1: Cerramos fuerte. Si me llevo cuatro conquistas de este vídeo, ¿cuáles deberían ser?</a:t>
             </a:r>
           </a:p>
@@ -1124,16 +1200,7 @@
         <p:txBody>
           <a:bodyPr/>
           <a:lstStyle/>
-          <a:p>
-            <a:r>
-              <a:t>N1: Vale, pero ¿de qué tubería habla exactamente? ¿De la de mi casa?</a:t>
-            </a:r>
-          </a:p>
-          <a:p>
-            <a:r>
-              <a:t>N2: No, y este matiz es el primero que hay que fijar. Compara dos tuberías: la que pasa por debajo de la calle y la que llega a tu cocina. Esta ITC manda sobre la primera, la de la calle, la del distribuidor. La de tu vivienda, la instalación receptora, va por otra instrucción distinta. Aclarado eso, ¿qué fija esta norma? Dos cosas: los requisitos técnicos esenciales, que en cristiano es lo mínimo que la red tiene que cumplir sí o sí, y las medidas de seguridad mínimas. Y lo fija para las tres fases que ya conoces: proyectar, construir y explotar. Ese detalle importa: la ITC no se calla el día que entierran el tubo, sigue mandando durante toda la vida útil de la red. Recuerda del tema anterior que la distribución por canalización es la letra a del artículo dos del Reglamento, con presión máxima de diseño de hasta dieciséis bar. En la obra, cuando alguien suelte eso de que la avería no es cosa suya, el límite exacto está en la acometida: aguas arriba manda el distribuidor bajo esta ITC, aguas abajo empieza tu responsabilidad.</a:t>
-            </a:r>
-          </a:p>
+          <a:p/>
         </p:txBody>
       </p:sp>
       <p:sp>
@@ -1201,12 +1268,12 @@
           <a:lstStyle/>
           <a:p>
             <a:r>
-              <a:t>N1: Para montar esta red, ¿hace falta pedir permiso, como una licencia de obra?</a:t>
-            </a:r>
-          </a:p>
-          <a:p>
-            <a:r>
-              <a:t>N2: Sí, en general sí: la red necesita autorización administrativa previa, es decir, el visto bueno de la Administración antes de empezar, salvo unos casos concretos que marca la Ley del sector de hidrocarburos en su artículo cincuenta y cinco punto dos. Ahora bien, aquí hay dos ritmos y conviene no mezclarlos. Para una red nueva de verdad, permiso previo. Pero para las extensiones, que es alargar una red que ya existe, no se pide permiso metro a metro: sería inviable. Lo que hace la compañía es presentar una memoria general, un documento con lo que prevé construir a lo largo del año. Y luego, en el primer trimestre del año siguiente, entrega a la Comunidad Autónoma el proyecto de lo que de verdad ejecutó, con la fecha de puesta en servicio de cada obra. El truco para no liarte: primero digo lo que pienso hacer, la previsión; después justifico lo que hice, las obras del año anterior. Todo esto lo mueve la distribuidora, tú como instalador no tramitas nada de esto, pero en el examen caen dos datos clavados: quién autoriza, que es la Comunidad Autónoma, y cuándo se entrega lo del año anterior, que es en el primer trimestre.</a:t>
+              <a:t>N1: Vale, pero ¿de qué tubería habla exactamente? ¿De la de mi casa?</a:t>
+            </a:r>
+          </a:p>
+          <a:p>
+            <a:r>
+              <a:t>N2: No, y este matiz es el primero que hay que fijar. Compara dos tuberías: la que pasa por debajo de la calle y la que llega a tu cocina. Esta ITC manda sobre la primera, la de la calle, la del distribuidor. La de tu vivienda, la instalación receptora, va por otra instrucción distinta. Aclarado eso, ¿qué fija esta norma? Dos cosas: los requisitos técnicos esenciales, que en cristiano es lo mínimo que la red tiene que cumplir sí o sí, y las medidas de seguridad mínimas. Y lo fija para las tres fases que ya conoces: proyectar, construir y explotar. Ese detalle importa: la ITC no se calla el día que entierran el tubo, sigue mandando durante toda la vida útil de la red. Recuerda del tema anterior que la distribución por canalización es la letra a del artículo dos del Reglamento, con presión máxima de diseño de hasta dieciséis bar. En la obra, cuando alguien suelte eso de que la avería no es cosa suya, el límite exacto está en la acometida: aguas arriba manda el distribuidor bajo esta ITC, aguas abajo empieza tu responsabilidad.</a:t>
             </a:r>
           </a:p>
         </p:txBody>
@@ -1276,12 +1343,12 @@
           <a:lstStyle/>
           <a:p>
             <a:r>
-              <a:t>N1: ¿Qué es lo que persigue un buen diseño de red? ¿Que sea barata?</a:t>
-            </a:r>
-          </a:p>
-          <a:p>
-            <a:r>
-              <a:t>N2: No, persigue dos cosas a la vez, y son la brújula de todo el apartado. Suministro seguro, que quiere decir que no haya fugas; y suministro continuo, que quiere decir que no se corte el gas. Fíjate que son dos objetivos distintos: una red puede ser segura pero cortarse cada dos por tres, o dar servicio siempre pero fugar. Se buscan las dos. ¿Y cómo se consigue el continuo? Dimensionando la red con capacidad suficiente, es decir, poniendo tubos del calibre adecuado para la gente que va a colgar de ellos. Para eso se mira cuánta gente hay, el nivel socioeconómico de la zona, que es el poder adquisitivo y por tanto cuánto consumo se espera, y la climatología, porque donde hace más frío se gasta más gas en calefacción. ¿Y por qué te importa a ti, que trabajas aguas abajo, en las casas? Porque una red mal dimensionada se queda corta el día de más frío, cuando todo el barrio enciende la calefacción a la vez: cae la presión, y esa caída en los aparatos se traduce en llama amarilla, mala combustión, hollín y riesgo de monóxido de carbono. Dicho fino: el diseño es, en realidad, la primera avería que se evita, antes de que exista la instalación.</a:t>
+              <a:t>N1: Para montar esta red, ¿hace falta pedir permiso, como una licencia de obra?</a:t>
+            </a:r>
+          </a:p>
+          <a:p>
+            <a:r>
+              <a:t>N2: Sí, en general sí: la red necesita autorización administrativa previa, es decir, el visto bueno de la Administración antes de empezar, salvo unos casos concretos que marca la Ley del sector de hidrocarburos en su artículo cincuenta y cinco punto dos. Ahora bien, aquí hay dos ritmos y conviene no mezclarlos. Para una red nueva de verdad, permiso previo. Pero para las extensiones, que es alargar una red que ya existe, no se pide permiso metro a metro: sería inviable. Lo que hace la compañía es presentar una memoria general, un documento con lo que prevé construir a lo largo del año. Y luego, en el primer trimestre del año siguiente, entrega a la Comunidad Autónoma el proyecto de lo que de verdad ejecutó, con la fecha de puesta en servicio de cada obra. El truco para no liarte: primero digo lo que pienso hacer, la previsión; después justifico lo que hice, las obras del año anterior. Todo esto lo mueve la distribuidora, tú como instalador no tramitas nada de esto, pero en el examen caen dos datos clavados: quién autoriza, que es la Comunidad Autónoma, y cuándo se entrega lo del año anterior, que es en el primer trimestre.</a:t>
             </a:r>
           </a:p>
         </p:txBody>
@@ -1351,12 +1418,12 @@
           <a:lstStyle/>
           <a:p>
             <a:r>
-              <a:t>N1: Y a la hora de elegir los tubos y los materiales, ¿de qué depende esa elección?</a:t>
-            </a:r>
-          </a:p>
-          <a:p>
-            <a:r>
-              <a:t>N2: De cuatro criterios, y te los explico con la lógica de cuando eliges un tubo en obra. Primero, las características físico-químicas del gas, porque no es lo mismo transportar gas natural que un gas licuado del petróleo: cambian densidad, poder calorífico y hasta cómo ataca al material. Segundo, la presión de diseño, que es la presión máxima para la que se calcula la red; ella marca el grosor de la pared del tubo y el material, igual que una manguera de alta presión es más gruesa que una de riego. Tercero, la pérdida de carga admisible; carga aquí significa presión, así que esto es cuánta presión te puedes permitir perder por el rozamiento a lo largo del recorrido sin que al final de la línea llegue floja. Y cuarto, las condiciones de operación y mantenimiento, es decir, cómo se va a manejar y reparar durante su vida. Si el material no encaja con el gas o con la presión, tarde o temprano aparece el problema. Es exactamente tu reflejo cuando coges un tubo: lo eliges por lo que va a circular por dentro y a qué presión, no por lo que tengas más a mano en la furgoneta.</a:t>
+              <a:t>N1: ¿Qué es lo que persigue un buen diseño de red? ¿Que sea barata?</a:t>
+            </a:r>
+          </a:p>
+          <a:p>
+            <a:r>
+              <a:t>N2: No, persigue dos cosas a la vez, y son la brújula de todo el apartado. Suministro seguro, que quiere decir que no haya fugas; y suministro continuo, que quiere decir que no se corte el gas. Fíjate que son dos objetivos distintos: una red puede ser segura pero cortarse cada dos por tres, o dar servicio siempre pero fugar. Se buscan las dos. ¿Y cómo se consigue el continuo? Dimensionando la red con capacidad suficiente, es decir, poniendo tubos del calibre adecuado para la gente que va a colgar de ellos. Para eso se mira cuánta gente hay, el nivel socioeconómico de la zona, que es el poder adquisitivo y por tanto cuánto consumo se espera, y la climatología, porque donde hace más frío se gasta más gas en calefacción. ¿Y por qué te importa a ti, que trabajas aguas abajo, en las casas? Porque una red mal dimensionada se queda corta el día de más frío, cuando todo el barrio enciende la calefacción a la vez: cae la presión, y esa caída en los aparatos se traduce en llama amarilla, mala combustión, hollín y riesgo de monóxido de carbono. Dicho fino: el diseño es, en realidad, la primera avería que se evita, antes de que exista la instalación.</a:t>
             </a:r>
           </a:p>
         </p:txBody>
@@ -1426,12 +1493,12 @@
           <a:lstStyle/>
           <a:p>
             <a:r>
-              <a:t>N1: Son siete normas de diseño. ¿De verdad tengo que aprendérmelas todas?</a:t>
-            </a:r>
-          </a:p>
-          <a:p>
-            <a:r>
-              <a:t>N2: Tranquilo, no hay que saberse qué dice cada una por dentro; hay que reconocerlas cuando aparecen en una lista, que es como te lo van a preguntar. Y para reconocerlas, un truco de bloques. Por un lado, las que empiezan por une e ene: la doce mil siete, la mil quinientos noventa y cuatro, la doce mil ciento ochenta y seis y la doce mil trescientos veintisiete. Son de origen europeo y regulan las redes según la presión. Por otro lado, y estas son las importantes, tres normas españolas que van a ser tus viejas conocidas: la sesenta mil trescientos diez, la sesenta mil trescientos once y la sesenta mil trescientos doce. Llámalas las tres hermanas seiscientas. Y presta atención, porque no aparecen solo aquí: vas a ver estas tres una y otra vez en toda la ITC, para el diseño, para las pruebas, para la operación y para el mantenimiento. Regla de examen: si te ponen una lista de normas de canalización y tienes que elegir, esas tres seiscientas casi seguro que están dentro. Además, cuál se aplica no es al azar: depende de la presión de diseño de la red.</a:t>
+              <a:t>N1: Y a la hora de elegir los tubos y los materiales, ¿de qué depende esa elección?</a:t>
+            </a:r>
+          </a:p>
+          <a:p>
+            <a:r>
+              <a:t>N2: De cuatro criterios, y te los explico con la lógica de cuando eliges un tubo en obra. Primero, las características físico-químicas del gas, porque no es lo mismo transportar gas natural que un gas licuado del petróleo: cambian densidad, poder calorífico y hasta cómo ataca al material. Segundo, la presión de diseño, que es la presión máxima para la que se calcula la red; ella marca el grosor de la pared del tubo y el material, igual que una manguera de alta presión es más gruesa que una de riego. Tercero, la pérdida de carga admisible; carga aquí significa presión, así que esto es cuánta presión te puedes permitir perder por el rozamiento a lo largo del recorrido sin que al final de la línea llegue floja. Y cuarto, las condiciones de operación y mantenimiento, es decir, cómo se va a manejar y reparar durante su vida. Si el material no encaja con el gas o con la presión, tarde o temprano aparece el problema. Es exactamente tu reflejo cuando coges un tubo: lo eliges por lo que va a circular por dentro y a qué presión, no por lo que tengas más a mano en la furgoneta.</a:t>
             </a:r>
           </a:p>
         </p:txBody>
@@ -1501,12 +1568,12 @@
           <a:lstStyle/>
           <a:p>
             <a:r>
-              <a:t>N1: Cuando por fin se abre la zanja y se monta el tubo, ¿quién responde y qué es lo que más se cuida?</a:t>
-            </a:r>
-          </a:p>
-          <a:p>
-            <a:r>
-              <a:t>N2: La obra se ejecuta bajo la responsabilidad del titular de la instalación, con personal propio o ajeno, es decir, con su gente o con una contrata, pero garantizando siempre la seguridad de quien trabaja. Y hay un cuidado que es puro sentido de obra: no dañar otras instalaciones enterradas. Piensa en lo que ya corre por debajo de una calle antes de que llegues tú con la máquina: la luz, el agua, el saneamiento, el teléfono, la fibra. Al abrir zanja hay que saber qué pasa por debajo para no reventarlo. Y hay un segundo reflejo: cuando conectas el tubo nuevo a la red que ya está funcionando y dando servicio, la norma es no dejar sin gas a quienes ya lo tienen; la conexión se hace en carga, con la red viva, siempre que se pueda. Es el mismo gesto que el del fontanero que cambia un tramo de tubería sin cortarle el agua a todo el edificio: molestar lo mínimo a quien ya tiene el servicio.</a:t>
+              <a:t>N1: Son siete normas de diseño. ¿De verdad tengo que aprendérmelas todas?</a:t>
+            </a:r>
+          </a:p>
+          <a:p>
+            <a:r>
+              <a:t>N2: Tranquilo, no hay que saberse qué dice cada una por dentro; hay que reconocerlas cuando aparecen en una lista, que es como te lo van a preguntar. Y para reconocerlas, un truco de bloques. Por un lado, las que empiezan por une e ene: la doce mil siete, la mil quinientos noventa y cuatro, la doce mil ciento ochenta y seis y la doce mil trescientos veintisiete. Son de origen europeo y regulan las redes según la presión. Por otro lado, y estas son las importantes, tres normas españolas que van a ser tus viejas conocidas: la sesenta mil trescientos diez, la sesenta mil trescientos once y la sesenta mil trescientos doce. Llámalas las tres hermanas seiscientas. Y presta atención, porque no aparecen solo aquí: vas a ver estas tres una y otra vez en toda la ITC, para el diseño, para las pruebas, para la operación y para el mantenimiento. Regla de examen: si te ponen una lista de normas de canalización y tienes que elegir, esas tres seiscientas casi seguro que están dentro. Además, cuál se aplica no es al azar: depende de la presión de diseño de la red.</a:t>
             </a:r>
           </a:p>
         </p:txBody>
@@ -1576,12 +1643,12 @@
           <a:lstStyle/>
           <a:p>
             <a:r>
-              <a:t>N1: ¿Y qué pasa cuando la tubería tiene que cruzar una carretera o un río? Ahí no puedes abrir zanja y ya está, ¿no?</a:t>
-            </a:r>
-          </a:p>
-          <a:p>
-            <a:r>
-              <a:t>N2: Exacto, eso son obras especiales y tienen reglas propias. La lista de obstáculos que la ITC llama especiales es cerrada, memorízala: carretera, curso de agua, ferrocarril y puente. En todos esos casos hace falta autorización del organismo afectado, es decir, del que manda en ese sitio: la administración de carreteras si cruzas una vía, la confederación hidrográfica si cruzas un río, la autoridad de ferrocarriles si cruzas las vías. Y la forma de cruzar tampoco es a lo bruto: se prefieren técnicas de construcción alternativas. La típica es la perforación horizontal, que consiste en pasar el tubo por debajo del obstáculo taladrando sin levantar la calzada, para no cortar el tráfico ni destrozar el firme. La idea resumida en una frase: cruzo algo importante, pido permiso a su dueño y uso la técnica que menos moleste al servicio que hay encima.</a:t>
+              <a:t>N1: Cuando por fin se abre la zanja y se monta el tubo, ¿quién responde y qué es lo que más se cuida?</a:t>
+            </a:r>
+          </a:p>
+          <a:p>
+            <a:r>
+              <a:t>N2: La obra se ejecuta bajo la responsabilidad del titular de la instalación, con personal propio o ajeno, es decir, con su gente o con una contrata, pero garantizando siempre la seguridad de quien trabaja. Y hay un cuidado que es puro sentido de obra: no dañar otras instalaciones enterradas. Piensa en lo que ya corre por debajo de una calle antes de que llegues tú con la máquina: la luz, el agua, el saneamiento, el teléfono, la fibra. Al abrir zanja hay que saber qué pasa por debajo para no reventarlo. Y hay un segundo reflejo: cuando conectas el tubo nuevo a la red que ya está funcionando y dando servicio, la norma es no dejar sin gas a quienes ya lo tienen; la conexión se hace en carga, con la red viva, siempre que se pueda. Es el mismo gesto que el del fontanero que cambia un tramo de tubería sin cortarle el agua a todo el edificio: molestar lo mínimo a quien ya tiene el servicio.</a:t>
             </a:r>
           </a:p>
         </p:txBody>
@@ -4656,7 +4723,7 @@
             <a:r>
               <a:rPr sz="1400" b="1" i="0">
                 <a:solidFill>
-                  <a:srgbClr val="CADCFC"/>
+                  <a:srgbClr val="F4A24C"/>
                 </a:solidFill>
                 <a:latin typeface="Montserrat"/>
               </a:rPr>
@@ -4667,13 +4734,57 @@
       </p:sp>
       <p:sp>
         <p:nvSpPr>
-          <p:cNvPr id="4" name="TextBox 3"/>
+          <p:cNvPr id="4" name="Rounded Rectangle 3"/>
+          <p:cNvSpPr/>
+          <p:nvPr/>
+        </p:nvSpPr>
+        <p:spPr>
+          <a:xfrm>
+            <a:off x="868680" y="2057400"/>
+            <a:ext cx="1463040" cy="82296"/>
+          </a:xfrm>
+          <a:prstGeom prst="roundRect">
+            <a:avLst/>
+          </a:prstGeom>
+          <a:solidFill>
+            <a:srgbClr val="E8801A"/>
+          </a:solidFill>
+          <a:ln>
+            <a:noFill/>
+          </a:ln>
+          <a:effectLst/>
+        </p:spPr>
+        <p:style>
+          <a:lnRef idx="1">
+            <a:schemeClr val="accent1"/>
+          </a:lnRef>
+          <a:fillRef idx="3">
+            <a:schemeClr val="accent1"/>
+          </a:fillRef>
+          <a:effectRef idx="2">
+            <a:schemeClr val="accent1"/>
+          </a:effectRef>
+          <a:fontRef idx="minor">
+            <a:schemeClr val="lt1"/>
+          </a:fontRef>
+        </p:style>
+        <p:txBody>
+          <a:bodyPr rtlCol="0" anchor="ctr"/>
+          <a:lstStyle/>
+          <a:p>
+            <a:pPr algn="ctr"/>
+          </a:p>
+        </p:txBody>
+      </p:sp>
+      <p:sp>
+        <p:nvSpPr>
+          <p:cNvPr id="5" name="TextBox 4"/>
           <p:cNvSpPr txBox="1"/>
           <p:nvPr/>
         </p:nvSpPr>
         <p:spPr>
           <a:xfrm>
-            <a:off x="822960" y="2194560"/>
+            <a:off x="822960" y="2286000"/>
             <a:ext cx="10515600" cy="2011680"/>
           </a:xfrm>
           <a:prstGeom prst="rect">
@@ -4712,7 +4823,7 @@
       </p:sp>
       <p:sp>
         <p:nvSpPr>
-          <p:cNvPr id="5" name="TextBox 4"/>
+          <p:cNvPr id="6" name="TextBox 5"/>
           <p:cNvSpPr txBox="1"/>
           <p:nvPr/>
         </p:nvSpPr>
@@ -4836,7 +4947,7 @@
                 </a:solidFill>
                 <a:latin typeface="Montserrat"/>
               </a:rPr>
-              <a:t>010 / 015</a:t>
+              <a:t>010 / 016</a:t>
             </a:r>
           </a:p>
         </p:txBody>
@@ -4884,7 +4995,7 @@
         <p:spPr>
           <a:xfrm>
             <a:off x="822960" y="457200"/>
-            <a:ext cx="8229600" cy="365760"/>
+            <a:ext cx="10058400" cy="365760"/>
           </a:xfrm>
           <a:prstGeom prst="rect">
             <a:avLst/>
@@ -4898,13 +5009,13 @@
           <a:lstStyle/>
           <a:p>
             <a:r>
-              <a:rPr sz="1200" b="1" i="0">
-                <a:solidFill>
-                  <a:srgbClr val="64748B"/>
-                </a:solidFill>
-                <a:latin typeface="Montserrat"/>
-              </a:rPr>
-              <a:t>APARTADO 5.1 · PRUEBAS PREVIAS</a:t>
+              <a:rPr sz="1300" b="1" i="0">
+                <a:solidFill>
+                  <a:srgbClr val="E8801A"/>
+                </a:solidFill>
+                <a:latin typeface="Montserrat"/>
+              </a:rPr>
+              <a:t>APARTADO 4 · OBRAS ESPECIALES</a:t>
             </a:r>
           </a:p>
         </p:txBody>
@@ -4932,26 +5043,70 @@
           <a:lstStyle/>
           <a:p>
             <a:r>
-              <a:rPr sz="2700" b="1" i="0">
+              <a:rPr sz="2800" b="1" i="0">
                 <a:solidFill>
                   <a:srgbClr val="1E2761"/>
                 </a:solidFill>
                 <a:latin typeface="Montserrat"/>
               </a:rPr>
-              <a:t>Resistencia y estanquidad</a:t>
-            </a:r>
-          </a:p>
-        </p:txBody>
-      </p:sp>
-      <p:sp>
-        <p:nvSpPr>
-          <p:cNvPr id="7" name="TextBox 6"/>
+              <a:t>Cruces y obstáculos</a:t>
+            </a:r>
+          </a:p>
+        </p:txBody>
+      </p:sp>
+      <p:sp>
+        <p:nvSpPr>
+          <p:cNvPr id="7" name="Rounded Rectangle 6"/>
+          <p:cNvSpPr/>
+          <p:nvPr/>
+        </p:nvSpPr>
+        <p:spPr>
+          <a:xfrm>
+            <a:off x="868680" y="1627632"/>
+            <a:ext cx="2011680" cy="73152"/>
+          </a:xfrm>
+          <a:prstGeom prst="roundRect">
+            <a:avLst/>
+          </a:prstGeom>
+          <a:solidFill>
+            <a:srgbClr val="E8801A"/>
+          </a:solidFill>
+          <a:ln>
+            <a:noFill/>
+          </a:ln>
+          <a:effectLst/>
+        </p:spPr>
+        <p:style>
+          <a:lnRef idx="1">
+            <a:schemeClr val="accent1"/>
+          </a:lnRef>
+          <a:fillRef idx="3">
+            <a:schemeClr val="accent1"/>
+          </a:fillRef>
+          <a:effectRef idx="2">
+            <a:schemeClr val="accent1"/>
+          </a:effectRef>
+          <a:fontRef idx="minor">
+            <a:schemeClr val="lt1"/>
+          </a:fontRef>
+        </p:style>
+        <p:txBody>
+          <a:bodyPr rtlCol="0" anchor="ctr"/>
+          <a:lstStyle/>
+          <a:p>
+            <a:pPr algn="ctr"/>
+          </a:p>
+        </p:txBody>
+      </p:sp>
+      <p:sp>
+        <p:nvSpPr>
+          <p:cNvPr id="8" name="TextBox 7"/>
           <p:cNvSpPr txBox="1"/>
           <p:nvPr/>
         </p:nvSpPr>
         <p:spPr>
           <a:xfrm>
-            <a:off x="822960" y="1920240"/>
+            <a:off x="822960" y="1965960"/>
             <a:ext cx="4983480" cy="4206240"/>
           </a:xfrm>
           <a:prstGeom prst="rect">
@@ -4967,17 +5122,17 @@
           <a:p>
             <a:pPr>
               <a:spcAft>
-                <a:spcPts val="1000"/>
+                <a:spcPts val="1100"/>
               </a:spcAft>
             </a:pPr>
             <a:r>
               <a:rPr sz="1600" b="1" i="0">
                 <a:solidFill>
-                  <a:srgbClr val="2E3A80"/>
-                </a:solidFill>
-                <a:latin typeface="Montserrat"/>
-              </a:rPr>
-              <a:t>•  </a:t>
+                  <a:srgbClr val="E8801A"/>
+                </a:solidFill>
+                <a:latin typeface="Montserrat"/>
+              </a:rPr>
+              <a:t>▸  </a:t>
             </a:r>
             <a:r>
               <a:rPr sz="1600" b="0" i="0">
@@ -4986,23 +5141,23 @@
                 </a:solidFill>
                 <a:latin typeface="Montserrat"/>
               </a:rPr>
-              <a:t>Resistencia: que no reviente</a:t>
+              <a:t>Carretera, río, ferrocarril, puente</a:t>
             </a:r>
           </a:p>
           <a:p>
             <a:pPr>
               <a:spcAft>
-                <a:spcPts val="1000"/>
+                <a:spcPts val="1100"/>
               </a:spcAft>
             </a:pPr>
             <a:r>
               <a:rPr sz="1600" b="1" i="0">
                 <a:solidFill>
-                  <a:srgbClr val="2E3A80"/>
-                </a:solidFill>
-                <a:latin typeface="Montserrat"/>
-              </a:rPr>
-              <a:t>•  </a:t>
+                  <a:srgbClr val="E8801A"/>
+                </a:solidFill>
+                <a:latin typeface="Montserrat"/>
+              </a:rPr>
+              <a:t>▸  </a:t>
             </a:r>
             <a:r>
               <a:rPr sz="1600" b="0" i="0">
@@ -5011,23 +5166,23 @@
                 </a:solidFill>
                 <a:latin typeface="Montserrat"/>
               </a:rPr>
-              <a:t>Estanquidad: que no fugue</a:t>
+              <a:t>Permiso del organismo afectado</a:t>
             </a:r>
           </a:p>
           <a:p>
             <a:pPr>
               <a:spcAft>
-                <a:spcPts val="1000"/>
+                <a:spcPts val="1100"/>
               </a:spcAft>
             </a:pPr>
             <a:r>
               <a:rPr sz="1600" b="1" i="0">
                 <a:solidFill>
-                  <a:srgbClr val="2E3A80"/>
-                </a:solidFill>
-                <a:latin typeface="Montserrat"/>
-              </a:rPr>
-              <a:t>•  </a:t>
+                  <a:srgbClr val="E8801A"/>
+                </a:solidFill>
+                <a:latin typeface="Montserrat"/>
+              </a:rPr>
+              <a:t>▸  </a:t>
             </a:r>
             <a:r>
               <a:rPr sz="1600" b="0" i="0">
@@ -5036,39 +5191,14 @@
                 </a:solidFill>
                 <a:latin typeface="Montserrat"/>
               </a:rPr>
-              <a:t>UNE 60310 · 60311 · 60312</a:t>
-            </a:r>
-          </a:p>
-          <a:p>
-            <a:pPr>
-              <a:spcAft>
-                <a:spcPts val="1000"/>
-              </a:spcAft>
-            </a:pPr>
-            <a:r>
-              <a:rPr sz="1600" b="1" i="0">
-                <a:solidFill>
-                  <a:srgbClr val="2E3A80"/>
-                </a:solidFill>
-                <a:latin typeface="Montserrat"/>
-              </a:rPr>
-              <a:t>•  </a:t>
-            </a:r>
-            <a:r>
-              <a:rPr sz="1600" b="0" i="0">
-                <a:solidFill>
-                  <a:srgbClr val="1B2330"/>
-                </a:solidFill>
-                <a:latin typeface="Montserrat"/>
-              </a:rPr>
-              <a:t>Zona despejada durante la prueba</a:t>
-            </a:r>
-          </a:p>
-        </p:txBody>
-      </p:sp>
-      <p:sp>
-        <p:nvSpPr>
-          <p:cNvPr id="8" name="imgph" descr="IMGQ:gas pipe pressure test gauge manometer"/>
+              <a:t>Técnicas alternativas, sin abrir zanja</a:t>
+            </a:r>
+          </a:p>
+        </p:txBody>
+      </p:sp>
+      <p:sp>
+        <p:nvSpPr>
+          <p:cNvPr id="9" name="imgph" descr="IMGQ:horizontal directional drilling pipeline road"/>
           <p:cNvSpPr/>
           <p:nvPr/>
         </p:nvSpPr>
@@ -5114,7 +5244,7 @@
       </p:sp>
       <p:sp>
         <p:nvSpPr>
-          <p:cNvPr id="9" name="TextBox 8"/>
+          <p:cNvPr id="10" name="TextBox 9"/>
           <p:cNvSpPr txBox="1"/>
           <p:nvPr/>
         </p:nvSpPr>
@@ -5154,7 +5284,7 @@
                 </a:solidFill>
                 <a:latin typeface="Montserrat"/>
               </a:rPr>
-              <a:t>gas pipe pressure test gauge manometer</a:t>
+              <a:t>horizontal directional drilling pipeline road</a:t>
             </a:r>
           </a:p>
         </p:txBody>
@@ -5251,7 +5381,7 @@
                 </a:solidFill>
                 <a:latin typeface="Montserrat"/>
               </a:rPr>
-              <a:t>011 / 015</a:t>
+              <a:t>011 / 016</a:t>
             </a:r>
           </a:p>
         </p:txBody>
@@ -5299,7 +5429,7 @@
         <p:spPr>
           <a:xfrm>
             <a:off x="822960" y="457200"/>
-            <a:ext cx="8229600" cy="365760"/>
+            <a:ext cx="10058400" cy="365760"/>
           </a:xfrm>
           <a:prstGeom prst="rect">
             <a:avLst/>
@@ -5313,13 +5443,13 @@
           <a:lstStyle/>
           <a:p>
             <a:r>
-              <a:rPr sz="1200" b="1" i="0">
-                <a:solidFill>
-                  <a:srgbClr val="64748B"/>
-                </a:solidFill>
-                <a:latin typeface="Montserrat"/>
-              </a:rPr>
-              <a:t>APARTADO 5.1 · PAPELEO</a:t>
+              <a:rPr sz="1300" b="1" i="0">
+                <a:solidFill>
+                  <a:srgbClr val="E8801A"/>
+                </a:solidFill>
+                <a:latin typeface="Montserrat"/>
+              </a:rPr>
+              <a:t>APARTADO 5.1 · PRUEBAS PREVIAS</a:t>
             </a:r>
           </a:p>
         </p:txBody>
@@ -5347,26 +5477,70 @@
           <a:lstStyle/>
           <a:p>
             <a:r>
-              <a:rPr sz="2700" b="1" i="0">
+              <a:rPr sz="2800" b="1" i="0">
                 <a:solidFill>
                   <a:srgbClr val="1E2761"/>
                 </a:solidFill>
                 <a:latin typeface="Montserrat"/>
               </a:rPr>
-              <a:t>Queda por escrito</a:t>
-            </a:r>
-          </a:p>
-        </p:txBody>
-      </p:sp>
-      <p:sp>
-        <p:nvSpPr>
-          <p:cNvPr id="7" name="TextBox 6"/>
+              <a:t>Resistencia y estanquidad</a:t>
+            </a:r>
+          </a:p>
+        </p:txBody>
+      </p:sp>
+      <p:sp>
+        <p:nvSpPr>
+          <p:cNvPr id="7" name="Rounded Rectangle 6"/>
+          <p:cNvSpPr/>
+          <p:nvPr/>
+        </p:nvSpPr>
+        <p:spPr>
+          <a:xfrm>
+            <a:off x="868680" y="1627632"/>
+            <a:ext cx="2011680" cy="73152"/>
+          </a:xfrm>
+          <a:prstGeom prst="roundRect">
+            <a:avLst/>
+          </a:prstGeom>
+          <a:solidFill>
+            <a:srgbClr val="E8801A"/>
+          </a:solidFill>
+          <a:ln>
+            <a:noFill/>
+          </a:ln>
+          <a:effectLst/>
+        </p:spPr>
+        <p:style>
+          <a:lnRef idx="1">
+            <a:schemeClr val="accent1"/>
+          </a:lnRef>
+          <a:fillRef idx="3">
+            <a:schemeClr val="accent1"/>
+          </a:fillRef>
+          <a:effectRef idx="2">
+            <a:schemeClr val="accent1"/>
+          </a:effectRef>
+          <a:fontRef idx="minor">
+            <a:schemeClr val="lt1"/>
+          </a:fontRef>
+        </p:style>
+        <p:txBody>
+          <a:bodyPr rtlCol="0" anchor="ctr"/>
+          <a:lstStyle/>
+          <a:p>
+            <a:pPr algn="ctr"/>
+          </a:p>
+        </p:txBody>
+      </p:sp>
+      <p:sp>
+        <p:nvSpPr>
+          <p:cNvPr id="8" name="TextBox 7"/>
           <p:cNvSpPr txBox="1"/>
           <p:nvPr/>
         </p:nvSpPr>
         <p:spPr>
           <a:xfrm>
-            <a:off x="822960" y="1920240"/>
+            <a:off x="822960" y="1965960"/>
             <a:ext cx="4983480" cy="4206240"/>
           </a:xfrm>
           <a:prstGeom prst="rect">
@@ -5382,17 +5556,17 @@
           <a:p>
             <a:pPr>
               <a:spcAft>
-                <a:spcPts val="1000"/>
+                <a:spcPts val="1100"/>
               </a:spcAft>
             </a:pPr>
             <a:r>
               <a:rPr sz="1600" b="1" i="0">
                 <a:solidFill>
-                  <a:srgbClr val="2E3A80"/>
-                </a:solidFill>
-                <a:latin typeface="Montserrat"/>
-              </a:rPr>
-              <a:t>•  </a:t>
+                  <a:srgbClr val="E8801A"/>
+                </a:solidFill>
+                <a:latin typeface="Montserrat"/>
+              </a:rPr>
+              <a:t>▸  </a:t>
             </a:r>
             <a:r>
               <a:rPr sz="1600" b="0" i="0">
@@ -5401,23 +5575,23 @@
                 </a:solidFill>
                 <a:latin typeface="Montserrat"/>
               </a:rPr>
-              <a:t>Solo vale con resultado positivo</a:t>
+              <a:t>Resistencia: que no reviente</a:t>
             </a:r>
           </a:p>
           <a:p>
             <a:pPr>
               <a:spcAft>
-                <a:spcPts val="1000"/>
+                <a:spcPts val="1100"/>
               </a:spcAft>
             </a:pPr>
             <a:r>
               <a:rPr sz="1600" b="1" i="0">
                 <a:solidFill>
-                  <a:srgbClr val="2E3A80"/>
-                </a:solidFill>
-                <a:latin typeface="Montserrat"/>
-              </a:rPr>
-              <a:t>•  </a:t>
+                  <a:srgbClr val="E8801A"/>
+                </a:solidFill>
+                <a:latin typeface="Montserrat"/>
+              </a:rPr>
+              <a:t>▸  </a:t>
             </a:r>
             <a:r>
               <a:rPr sz="1600" b="0" i="0">
@@ -5426,23 +5600,23 @@
                 </a:solidFill>
                 <a:latin typeface="Montserrat"/>
               </a:rPr>
-              <a:t>Certificado de dirección de obra</a:t>
+              <a:t>Estanquidad: que no fugue</a:t>
             </a:r>
           </a:p>
           <a:p>
             <a:pPr>
               <a:spcAft>
-                <a:spcPts val="1000"/>
+                <a:spcPts val="1100"/>
               </a:spcAft>
             </a:pPr>
             <a:r>
               <a:rPr sz="1600" b="1" i="0">
                 <a:solidFill>
-                  <a:srgbClr val="2E3A80"/>
-                </a:solidFill>
-                <a:latin typeface="Montserrat"/>
-              </a:rPr>
-              <a:t>•  </a:t>
+                  <a:srgbClr val="E8801A"/>
+                </a:solidFill>
+                <a:latin typeface="Montserrat"/>
+              </a:rPr>
+              <a:t>▸  </a:t>
             </a:r>
             <a:r>
               <a:rPr sz="1600" b="0" i="0">
@@ -5451,14 +5625,39 @@
                 </a:solidFill>
                 <a:latin typeface="Montserrat"/>
               </a:rPr>
-              <a:t>Lo firma el director de obra</a:t>
-            </a:r>
-          </a:p>
-        </p:txBody>
-      </p:sp>
-      <p:sp>
-        <p:nvSpPr>
-          <p:cNvPr id="8" name="imgph" descr="IMGQ:signing construction certificate document pen"/>
+              <a:t>UNE 60310 · 60311 · 60312</a:t>
+            </a:r>
+          </a:p>
+          <a:p>
+            <a:pPr>
+              <a:spcAft>
+                <a:spcPts val="1100"/>
+              </a:spcAft>
+            </a:pPr>
+            <a:r>
+              <a:rPr sz="1600" b="1" i="0">
+                <a:solidFill>
+                  <a:srgbClr val="E8801A"/>
+                </a:solidFill>
+                <a:latin typeface="Montserrat"/>
+              </a:rPr>
+              <a:t>▸  </a:t>
+            </a:r>
+            <a:r>
+              <a:rPr sz="1600" b="0" i="0">
+                <a:solidFill>
+                  <a:srgbClr val="1B2330"/>
+                </a:solidFill>
+                <a:latin typeface="Montserrat"/>
+              </a:rPr>
+              <a:t>Zona despejada durante la prueba</a:t>
+            </a:r>
+          </a:p>
+        </p:txBody>
+      </p:sp>
+      <p:sp>
+        <p:nvSpPr>
+          <p:cNvPr id="9" name="imgph" descr="IMGQ:gas pipe pressure test gauge manometer"/>
           <p:cNvSpPr/>
           <p:nvPr/>
         </p:nvSpPr>
@@ -5504,7 +5703,7 @@
       </p:sp>
       <p:sp>
         <p:nvSpPr>
-          <p:cNvPr id="9" name="TextBox 8"/>
+          <p:cNvPr id="10" name="TextBox 9"/>
           <p:cNvSpPr txBox="1"/>
           <p:nvPr/>
         </p:nvSpPr>
@@ -5544,7 +5743,7 @@
                 </a:solidFill>
                 <a:latin typeface="Montserrat"/>
               </a:rPr>
-              <a:t>signing construction certificate document pen</a:t>
+              <a:t>gas pipe pressure test gauge manometer</a:t>
             </a:r>
           </a:p>
         </p:txBody>
@@ -5641,7 +5840,7 @@
                 </a:solidFill>
                 <a:latin typeface="Montserrat"/>
               </a:rPr>
-              <a:t>012 / 015</a:t>
+              <a:t>012 / 016</a:t>
             </a:r>
           </a:p>
         </p:txBody>
@@ -5689,7 +5888,7 @@
         <p:spPr>
           <a:xfrm>
             <a:off x="822960" y="457200"/>
-            <a:ext cx="8229600" cy="365760"/>
+            <a:ext cx="10058400" cy="365760"/>
           </a:xfrm>
           <a:prstGeom prst="rect">
             <a:avLst/>
@@ -5703,13 +5902,13 @@
           <a:lstStyle/>
           <a:p>
             <a:r>
-              <a:rPr sz="1200" b="1" i="0">
-                <a:solidFill>
-                  <a:srgbClr val="64748B"/>
-                </a:solidFill>
-                <a:latin typeface="Montserrat"/>
-              </a:rPr>
-              <a:t>APARTADO 5.2 · PUESTA EN SERVICIO</a:t>
+              <a:rPr sz="1300" b="1" i="0">
+                <a:solidFill>
+                  <a:srgbClr val="E8801A"/>
+                </a:solidFill>
+                <a:latin typeface="Montserrat"/>
+              </a:rPr>
+              <a:t>APARTADO 5.1 · PAPELEO</a:t>
             </a:r>
           </a:p>
         </p:txBody>
@@ -5737,26 +5936,70 @@
           <a:lstStyle/>
           <a:p>
             <a:r>
-              <a:rPr sz="2700" b="1" i="0">
+              <a:rPr sz="2800" b="1" i="0">
                 <a:solidFill>
                   <a:srgbClr val="1E2761"/>
                 </a:solidFill>
                 <a:latin typeface="Montserrat"/>
               </a:rPr>
-              <a:t>Sin pruebas no hay gas</a:t>
-            </a:r>
-          </a:p>
-        </p:txBody>
-      </p:sp>
-      <p:sp>
-        <p:nvSpPr>
-          <p:cNvPr id="7" name="TextBox 6"/>
+              <a:t>Queda por escrito</a:t>
+            </a:r>
+          </a:p>
+        </p:txBody>
+      </p:sp>
+      <p:sp>
+        <p:nvSpPr>
+          <p:cNvPr id="7" name="Rounded Rectangle 6"/>
+          <p:cNvSpPr/>
+          <p:nvPr/>
+        </p:nvSpPr>
+        <p:spPr>
+          <a:xfrm>
+            <a:off x="868680" y="1627632"/>
+            <a:ext cx="2011680" cy="73152"/>
+          </a:xfrm>
+          <a:prstGeom prst="roundRect">
+            <a:avLst/>
+          </a:prstGeom>
+          <a:solidFill>
+            <a:srgbClr val="E8801A"/>
+          </a:solidFill>
+          <a:ln>
+            <a:noFill/>
+          </a:ln>
+          <a:effectLst/>
+        </p:spPr>
+        <p:style>
+          <a:lnRef idx="1">
+            <a:schemeClr val="accent1"/>
+          </a:lnRef>
+          <a:fillRef idx="3">
+            <a:schemeClr val="accent1"/>
+          </a:fillRef>
+          <a:effectRef idx="2">
+            <a:schemeClr val="accent1"/>
+          </a:effectRef>
+          <a:fontRef idx="minor">
+            <a:schemeClr val="lt1"/>
+          </a:fontRef>
+        </p:style>
+        <p:txBody>
+          <a:bodyPr rtlCol="0" anchor="ctr"/>
+          <a:lstStyle/>
+          <a:p>
+            <a:pPr algn="ctr"/>
+          </a:p>
+        </p:txBody>
+      </p:sp>
+      <p:sp>
+        <p:nvSpPr>
+          <p:cNvPr id="8" name="TextBox 7"/>
           <p:cNvSpPr txBox="1"/>
           <p:nvPr/>
         </p:nvSpPr>
         <p:spPr>
           <a:xfrm>
-            <a:off x="822960" y="1920240"/>
+            <a:off x="822960" y="1965960"/>
             <a:ext cx="4983480" cy="4206240"/>
           </a:xfrm>
           <a:prstGeom prst="rect">
@@ -5772,17 +6015,17 @@
           <a:p>
             <a:pPr>
               <a:spcAft>
-                <a:spcPts val="1000"/>
+                <a:spcPts val="1100"/>
               </a:spcAft>
             </a:pPr>
             <a:r>
               <a:rPr sz="1600" b="1" i="0">
                 <a:solidFill>
-                  <a:srgbClr val="2E3A80"/>
-                </a:solidFill>
-                <a:latin typeface="Montserrat"/>
-              </a:rPr>
-              <a:t>•  </a:t>
+                  <a:srgbClr val="E8801A"/>
+                </a:solidFill>
+                <a:latin typeface="Montserrat"/>
+              </a:rPr>
+              <a:t>▸  </a:t>
             </a:r>
             <a:r>
               <a:rPr sz="1600" b="0" i="0">
@@ -5791,23 +6034,23 @@
                 </a:solidFill>
                 <a:latin typeface="Montserrat"/>
               </a:rPr>
-              <a:t>Solo si superó las pruebas previas</a:t>
+              <a:t>Solo vale con resultado positivo</a:t>
             </a:r>
           </a:p>
           <a:p>
             <a:pPr>
               <a:spcAft>
-                <a:spcPts val="1000"/>
+                <a:spcPts val="1100"/>
               </a:spcAft>
             </a:pPr>
             <a:r>
               <a:rPr sz="1600" b="1" i="0">
                 <a:solidFill>
-                  <a:srgbClr val="2E3A80"/>
-                </a:solidFill>
-                <a:latin typeface="Montserrat"/>
-              </a:rPr>
-              <a:t>•  </a:t>
+                  <a:srgbClr val="E8801A"/>
+                </a:solidFill>
+                <a:latin typeface="Montserrat"/>
+              </a:rPr>
+              <a:t>▸  </a:t>
             </a:r>
             <a:r>
               <a:rPr sz="1600" b="0" i="0">
@@ -5816,23 +6059,23 @@
                 </a:solidFill>
                 <a:latin typeface="Montserrat"/>
               </a:rPr>
-              <a:t>Evitar la mezcla aire-gas inflamable</a:t>
+              <a:t>Certificado de dirección de obra</a:t>
             </a:r>
           </a:p>
           <a:p>
             <a:pPr>
               <a:spcAft>
-                <a:spcPts val="1000"/>
+                <a:spcPts val="1100"/>
               </a:spcAft>
             </a:pPr>
             <a:r>
               <a:rPr sz="1600" b="1" i="0">
                 <a:solidFill>
-                  <a:srgbClr val="2E3A80"/>
-                </a:solidFill>
-                <a:latin typeface="Montserrat"/>
-              </a:rPr>
-              <a:t>•  </a:t>
+                  <a:srgbClr val="E8801A"/>
+                </a:solidFill>
+                <a:latin typeface="Montserrat"/>
+              </a:rPr>
+              <a:t>▸  </a:t>
             </a:r>
             <a:r>
               <a:rPr sz="1600" b="0" i="0">
@@ -5841,39 +6084,14 @@
                 </a:solidFill>
                 <a:latin typeface="Montserrat"/>
               </a:rPr>
-              <a:t>Llenado lento o tapón de gas inerte</a:t>
-            </a:r>
-          </a:p>
-          <a:p>
-            <a:pPr>
-              <a:spcAft>
-                <a:spcPts val="1000"/>
-              </a:spcAft>
-            </a:pPr>
-            <a:r>
-              <a:rPr sz="1600" b="1" i="0">
-                <a:solidFill>
-                  <a:srgbClr val="2E3A80"/>
-                </a:solidFill>
-                <a:latin typeface="Montserrat"/>
-              </a:rPr>
-              <a:t>•  </a:t>
-            </a:r>
-            <a:r>
-              <a:rPr sz="1600" b="0" i="0">
-                <a:solidFill>
-                  <a:srgbClr val="1B2330"/>
-                </a:solidFill>
-                <a:latin typeface="Montserrat"/>
-              </a:rPr>
-              <a:t>Purgado siempre controlado</a:t>
-            </a:r>
-          </a:p>
-        </p:txBody>
-      </p:sp>
-      <p:sp>
-        <p:nvSpPr>
-          <p:cNvPr id="8" name="imgph" descr="IMGQ:technician opening gas valve gloves pipeline"/>
+              <a:t>Lo firma el director de obra</a:t>
+            </a:r>
+          </a:p>
+        </p:txBody>
+      </p:sp>
+      <p:sp>
+        <p:nvSpPr>
+          <p:cNvPr id="9" name="imgph" descr="IMGQ:signing construction certificate document pen"/>
           <p:cNvSpPr/>
           <p:nvPr/>
         </p:nvSpPr>
@@ -5919,7 +6137,7 @@
       </p:sp>
       <p:sp>
         <p:nvSpPr>
-          <p:cNvPr id="9" name="TextBox 8"/>
+          <p:cNvPr id="10" name="TextBox 9"/>
           <p:cNvSpPr txBox="1"/>
           <p:nvPr/>
         </p:nvSpPr>
@@ -5959,7 +6177,7 @@
                 </a:solidFill>
                 <a:latin typeface="Montserrat"/>
               </a:rPr>
-              <a:t>technician opening gas valve gloves pipeline</a:t>
+              <a:t>signing construction certificate document pen</a:t>
             </a:r>
           </a:p>
         </p:txBody>
@@ -6056,7 +6274,7 @@
                 </a:solidFill>
                 <a:latin typeface="Montserrat"/>
               </a:rPr>
-              <a:t>013 / 015</a:t>
+              <a:t>013 / 016</a:t>
             </a:r>
           </a:p>
         </p:txBody>
@@ -6104,7 +6322,7 @@
         <p:spPr>
           <a:xfrm>
             <a:off x="822960" y="457200"/>
-            <a:ext cx="8229600" cy="365760"/>
+            <a:ext cx="10058400" cy="365760"/>
           </a:xfrm>
           <a:prstGeom prst="rect">
             <a:avLst/>
@@ -6118,13 +6336,13 @@
           <a:lstStyle/>
           <a:p>
             <a:r>
-              <a:rPr sz="1200" b="1" i="0">
-                <a:solidFill>
-                  <a:srgbClr val="64748B"/>
-                </a:solidFill>
-                <a:latin typeface="Montserrat"/>
-              </a:rPr>
-              <a:t>APARTADO 5.2 · QUIÉN LO HACE</a:t>
+              <a:rPr sz="1300" b="1" i="0">
+                <a:solidFill>
+                  <a:srgbClr val="E8801A"/>
+                </a:solidFill>
+                <a:latin typeface="Montserrat"/>
+              </a:rPr>
+              <a:t>APARTADO 5.2 · PUESTA EN SERVICIO</a:t>
             </a:r>
           </a:p>
         </p:txBody>
@@ -6152,26 +6370,70 @@
           <a:lstStyle/>
           <a:p>
             <a:r>
-              <a:rPr sz="2700" b="1" i="0">
+              <a:rPr sz="2800" b="1" i="0">
                 <a:solidFill>
                   <a:srgbClr val="1E2761"/>
                 </a:solidFill>
                 <a:latin typeface="Montserrat"/>
               </a:rPr>
-              <a:t>La última barrera</a:t>
-            </a:r>
-          </a:p>
-        </p:txBody>
-      </p:sp>
-      <p:sp>
-        <p:nvSpPr>
-          <p:cNvPr id="7" name="TextBox 6"/>
+              <a:t>Sin pruebas no hay gas</a:t>
+            </a:r>
+          </a:p>
+        </p:txBody>
+      </p:sp>
+      <p:sp>
+        <p:nvSpPr>
+          <p:cNvPr id="7" name="Rounded Rectangle 6"/>
+          <p:cNvSpPr/>
+          <p:nvPr/>
+        </p:nvSpPr>
+        <p:spPr>
+          <a:xfrm>
+            <a:off x="868680" y="1627632"/>
+            <a:ext cx="2011680" cy="73152"/>
+          </a:xfrm>
+          <a:prstGeom prst="roundRect">
+            <a:avLst/>
+          </a:prstGeom>
+          <a:solidFill>
+            <a:srgbClr val="E8801A"/>
+          </a:solidFill>
+          <a:ln>
+            <a:noFill/>
+          </a:ln>
+          <a:effectLst/>
+        </p:spPr>
+        <p:style>
+          <a:lnRef idx="1">
+            <a:schemeClr val="accent1"/>
+          </a:lnRef>
+          <a:fillRef idx="3">
+            <a:schemeClr val="accent1"/>
+          </a:fillRef>
+          <a:effectRef idx="2">
+            <a:schemeClr val="accent1"/>
+          </a:effectRef>
+          <a:fontRef idx="minor">
+            <a:schemeClr val="lt1"/>
+          </a:fontRef>
+        </p:style>
+        <p:txBody>
+          <a:bodyPr rtlCol="0" anchor="ctr"/>
+          <a:lstStyle/>
+          <a:p>
+            <a:pPr algn="ctr"/>
+          </a:p>
+        </p:txBody>
+      </p:sp>
+      <p:sp>
+        <p:nvSpPr>
+          <p:cNvPr id="8" name="TextBox 7"/>
           <p:cNvSpPr txBox="1"/>
           <p:nvPr/>
         </p:nvSpPr>
         <p:spPr>
           <a:xfrm>
-            <a:off x="822960" y="1920240"/>
+            <a:off x="822960" y="1965960"/>
             <a:ext cx="4983480" cy="4206240"/>
           </a:xfrm>
           <a:prstGeom prst="rect">
@@ -6187,17 +6449,17 @@
           <a:p>
             <a:pPr>
               <a:spcAft>
-                <a:spcPts val="1000"/>
+                <a:spcPts val="1100"/>
               </a:spcAft>
             </a:pPr>
             <a:r>
               <a:rPr sz="1600" b="1" i="0">
                 <a:solidFill>
-                  <a:srgbClr val="2E3A80"/>
-                </a:solidFill>
-                <a:latin typeface="Montserrat"/>
-              </a:rPr>
-              <a:t>•  </a:t>
+                  <a:srgbClr val="E8801A"/>
+                </a:solidFill>
+                <a:latin typeface="Montserrat"/>
+              </a:rPr>
+              <a:t>▸  </a:t>
             </a:r>
             <a:r>
               <a:rPr sz="1600" b="0" i="0">
@@ -6206,23 +6468,23 @@
                 </a:solidFill>
                 <a:latin typeface="Montserrat"/>
               </a:rPr>
-              <a:t>Personal cualificado autorizado</a:t>
+              <a:t>Solo si superó las pruebas previas</a:t>
             </a:r>
           </a:p>
           <a:p>
             <a:pPr>
               <a:spcAft>
-                <a:spcPts val="1000"/>
+                <a:spcPts val="1100"/>
               </a:spcAft>
             </a:pPr>
             <a:r>
               <a:rPr sz="1600" b="1" i="0">
                 <a:solidFill>
-                  <a:srgbClr val="2E3A80"/>
-                </a:solidFill>
-                <a:latin typeface="Montserrat"/>
-              </a:rPr>
-              <a:t>•  </a:t>
+                  <a:srgbClr val="E8801A"/>
+                </a:solidFill>
+                <a:latin typeface="Montserrat"/>
+              </a:rPr>
+              <a:t>▸  </a:t>
             </a:r>
             <a:r>
               <a:rPr sz="1600" b="0" i="0">
@@ -6231,23 +6493,23 @@
                 </a:solidFill>
                 <a:latin typeface="Montserrat"/>
               </a:rPr>
-              <a:t>Por el distribuidor o el titular</a:t>
+              <a:t>Evitar la mezcla aire-gas inflamable</a:t>
             </a:r>
           </a:p>
           <a:p>
             <a:pPr>
               <a:spcAft>
-                <a:spcPts val="1000"/>
+                <a:spcPts val="1100"/>
               </a:spcAft>
             </a:pPr>
             <a:r>
               <a:rPr sz="1600" b="1" i="0">
                 <a:solidFill>
-                  <a:srgbClr val="2E3A80"/>
-                </a:solidFill>
-                <a:latin typeface="Montserrat"/>
-              </a:rPr>
-              <a:t>•  </a:t>
+                  <a:srgbClr val="E8801A"/>
+                </a:solidFill>
+                <a:latin typeface="Montserrat"/>
+              </a:rPr>
+              <a:t>▸  </a:t>
             </a:r>
             <a:r>
               <a:rPr sz="1600" b="0" i="0">
@@ -6256,14 +6518,39 @@
                 </a:solidFill>
                 <a:latin typeface="Montserrat"/>
               </a:rPr>
-              <a:t>Con conocimiento del director de obra</a:t>
-            </a:r>
-          </a:p>
-        </p:txBody>
-      </p:sp>
-      <p:sp>
-        <p:nvSpPr>
-          <p:cNvPr id="8" name="imgph" descr="IMGQ:gas technician commissioning pipeline outdoor"/>
+              <a:t>Llenado lento o tapón de gas inerte</a:t>
+            </a:r>
+          </a:p>
+          <a:p>
+            <a:pPr>
+              <a:spcAft>
+                <a:spcPts val="1100"/>
+              </a:spcAft>
+            </a:pPr>
+            <a:r>
+              <a:rPr sz="1600" b="1" i="0">
+                <a:solidFill>
+                  <a:srgbClr val="E8801A"/>
+                </a:solidFill>
+                <a:latin typeface="Montserrat"/>
+              </a:rPr>
+              <a:t>▸  </a:t>
+            </a:r>
+            <a:r>
+              <a:rPr sz="1600" b="0" i="0">
+                <a:solidFill>
+                  <a:srgbClr val="1B2330"/>
+                </a:solidFill>
+                <a:latin typeface="Montserrat"/>
+              </a:rPr>
+              <a:t>Purgado siempre controlado</a:t>
+            </a:r>
+          </a:p>
+        </p:txBody>
+      </p:sp>
+      <p:sp>
+        <p:nvSpPr>
+          <p:cNvPr id="9" name="imgph" descr="IMGQ:technician opening gas valve gloves pipeline"/>
           <p:cNvSpPr/>
           <p:nvPr/>
         </p:nvSpPr>
@@ -6309,7 +6596,7 @@
       </p:sp>
       <p:sp>
         <p:nvSpPr>
-          <p:cNvPr id="9" name="TextBox 8"/>
+          <p:cNvPr id="10" name="TextBox 9"/>
           <p:cNvSpPr txBox="1"/>
           <p:nvPr/>
         </p:nvSpPr>
@@ -6349,7 +6636,7 @@
                 </a:solidFill>
                 <a:latin typeface="Montserrat"/>
               </a:rPr>
-              <a:t>gas technician commissioning pipeline outdoor</a:t>
+              <a:t>technician opening gas valve gloves pipeline</a:t>
             </a:r>
           </a:p>
         </p:txBody>
@@ -6446,7 +6733,7 @@
                 </a:solidFill>
                 <a:latin typeface="Montserrat"/>
               </a:rPr>
-              <a:t>014 / 015</a:t>
+              <a:t>014 / 016</a:t>
             </a:r>
           </a:p>
         </p:txBody>
@@ -6494,7 +6781,7 @@
         <p:spPr>
           <a:xfrm>
             <a:off x="822960" y="457200"/>
-            <a:ext cx="8229600" cy="365760"/>
+            <a:ext cx="10058400" cy="365760"/>
           </a:xfrm>
           <a:prstGeom prst="rect">
             <a:avLst/>
@@ -6508,13 +6795,13 @@
           <a:lstStyle/>
           <a:p>
             <a:r>
-              <a:rPr sz="1200" b="1" i="0">
-                <a:solidFill>
-                  <a:srgbClr val="64748B"/>
-                </a:solidFill>
-                <a:latin typeface="Montserrat"/>
-              </a:rPr>
-              <a:t>REPASO RELÁMPAGO</a:t>
+              <a:rPr sz="1300" b="1" i="0">
+                <a:solidFill>
+                  <a:srgbClr val="E8801A"/>
+                </a:solidFill>
+                <a:latin typeface="Montserrat"/>
+              </a:rPr>
+              <a:t>APARTADO 5.2 · QUIÉN LO HACE</a:t>
             </a:r>
           </a:p>
         </p:txBody>
@@ -6542,26 +6829,70 @@
           <a:lstStyle/>
           <a:p>
             <a:r>
-              <a:rPr sz="2700" b="1" i="0">
+              <a:rPr sz="2800" b="1" i="0">
                 <a:solidFill>
                   <a:srgbClr val="1E2761"/>
                 </a:solidFill>
                 <a:latin typeface="Montserrat"/>
               </a:rPr>
-              <a:t>Lo que no se te puede olvidar</a:t>
-            </a:r>
-          </a:p>
-        </p:txBody>
-      </p:sp>
-      <p:sp>
-        <p:nvSpPr>
-          <p:cNvPr id="7" name="TextBox 6"/>
+              <a:t>La última barrera</a:t>
+            </a:r>
+          </a:p>
+        </p:txBody>
+      </p:sp>
+      <p:sp>
+        <p:nvSpPr>
+          <p:cNvPr id="7" name="Rounded Rectangle 6"/>
+          <p:cNvSpPr/>
+          <p:nvPr/>
+        </p:nvSpPr>
+        <p:spPr>
+          <a:xfrm>
+            <a:off x="868680" y="1627632"/>
+            <a:ext cx="2011680" cy="73152"/>
+          </a:xfrm>
+          <a:prstGeom prst="roundRect">
+            <a:avLst/>
+          </a:prstGeom>
+          <a:solidFill>
+            <a:srgbClr val="E8801A"/>
+          </a:solidFill>
+          <a:ln>
+            <a:noFill/>
+          </a:ln>
+          <a:effectLst/>
+        </p:spPr>
+        <p:style>
+          <a:lnRef idx="1">
+            <a:schemeClr val="accent1"/>
+          </a:lnRef>
+          <a:fillRef idx="3">
+            <a:schemeClr val="accent1"/>
+          </a:fillRef>
+          <a:effectRef idx="2">
+            <a:schemeClr val="accent1"/>
+          </a:effectRef>
+          <a:fontRef idx="minor">
+            <a:schemeClr val="lt1"/>
+          </a:fontRef>
+        </p:style>
+        <p:txBody>
+          <a:bodyPr rtlCol="0" anchor="ctr"/>
+          <a:lstStyle/>
+          <a:p>
+            <a:pPr algn="ctr"/>
+          </a:p>
+        </p:txBody>
+      </p:sp>
+      <p:sp>
+        <p:nvSpPr>
+          <p:cNvPr id="8" name="TextBox 7"/>
           <p:cNvSpPr txBox="1"/>
           <p:nvPr/>
         </p:nvSpPr>
         <p:spPr>
           <a:xfrm>
-            <a:off x="822960" y="1920240"/>
+            <a:off x="822960" y="1965960"/>
             <a:ext cx="4983480" cy="4206240"/>
           </a:xfrm>
           <a:prstGeom prst="rect">
@@ -6577,17 +6908,17 @@
           <a:p>
             <a:pPr>
               <a:spcAft>
-                <a:spcPts val="1000"/>
+                <a:spcPts val="1100"/>
               </a:spcAft>
             </a:pPr>
             <a:r>
               <a:rPr sz="1600" b="1" i="0">
                 <a:solidFill>
-                  <a:srgbClr val="2E3A80"/>
-                </a:solidFill>
-                <a:latin typeface="Montserrat"/>
-              </a:rPr>
-              <a:t>•  </a:t>
+                  <a:srgbClr val="E8801A"/>
+                </a:solidFill>
+                <a:latin typeface="Montserrat"/>
+              </a:rPr>
+              <a:t>▸  </a:t>
             </a:r>
             <a:r>
               <a:rPr sz="1600" b="0" i="0">
@@ -6596,23 +6927,23 @@
                 </a:solidFill>
                 <a:latin typeface="Montserrat"/>
               </a:rPr>
-              <a:t>Manda en la red de la calle, no la tuya</a:t>
+              <a:t>Personal cualificado autorizado</a:t>
             </a:r>
           </a:p>
           <a:p>
             <a:pPr>
               <a:spcAft>
-                <a:spcPts val="1000"/>
+                <a:spcPts val="1100"/>
               </a:spcAft>
             </a:pPr>
             <a:r>
               <a:rPr sz="1600" b="1" i="0">
                 <a:solidFill>
-                  <a:srgbClr val="2E3A80"/>
-                </a:solidFill>
-                <a:latin typeface="Montserrat"/>
-              </a:rPr>
-              <a:t>•  </a:t>
+                  <a:srgbClr val="E8801A"/>
+                </a:solidFill>
+                <a:latin typeface="Montserrat"/>
+              </a:rPr>
+              <a:t>▸  </a:t>
             </a:r>
             <a:r>
               <a:rPr sz="1600" b="0" i="0">
@@ -6621,23 +6952,23 @@
                 </a:solidFill>
                 <a:latin typeface="Montserrat"/>
               </a:rPr>
-              <a:t>Autoriza la CA · entrega primer trimestre</a:t>
+              <a:t>Por el distribuidor o el titular</a:t>
             </a:r>
           </a:p>
           <a:p>
             <a:pPr>
               <a:spcAft>
-                <a:spcPts val="1000"/>
+                <a:spcPts val="1100"/>
               </a:spcAft>
             </a:pPr>
             <a:r>
               <a:rPr sz="1600" b="1" i="0">
                 <a:solidFill>
-                  <a:srgbClr val="2E3A80"/>
-                </a:solidFill>
-                <a:latin typeface="Montserrat"/>
-              </a:rPr>
-              <a:t>•  </a:t>
+                  <a:srgbClr val="E8801A"/>
+                </a:solidFill>
+                <a:latin typeface="Montserrat"/>
+              </a:rPr>
+              <a:t>▸  </a:t>
             </a:r>
             <a:r>
               <a:rPr sz="1600" b="0" i="0">
@@ -6646,39 +6977,14 @@
                 </a:solidFill>
                 <a:latin typeface="Montserrat"/>
               </a:rPr>
-              <a:t>Sin pruebas superadas, no hay gas</a:t>
-            </a:r>
-          </a:p>
-          <a:p>
-            <a:pPr>
-              <a:spcAft>
-                <a:spcPts val="1000"/>
-              </a:spcAft>
-            </a:pPr>
-            <a:r>
-              <a:rPr sz="1600" b="1" i="0">
-                <a:solidFill>
-                  <a:srgbClr val="2E3A80"/>
-                </a:solidFill>
-                <a:latin typeface="Montserrat"/>
-              </a:rPr>
-              <a:t>•  </a:t>
-            </a:r>
-            <a:r>
-              <a:rPr sz="1600" b="0" i="0">
-                <a:solidFill>
-                  <a:srgbClr val="1B2330"/>
-                </a:solidFill>
-                <a:latin typeface="Montserrat"/>
-              </a:rPr>
-              <a:t>El peligro es la mezcla aire-gas</a:t>
-            </a:r>
-          </a:p>
-        </p:txBody>
-      </p:sp>
-      <p:sp>
-        <p:nvSpPr>
-          <p:cNvPr id="8" name="imgph" descr="IMGQ:gas meter cabinet street wall building"/>
+              <a:t>Con conocimiento del director de obra</a:t>
+            </a:r>
+          </a:p>
+        </p:txBody>
+      </p:sp>
+      <p:sp>
+        <p:nvSpPr>
+          <p:cNvPr id="9" name="imgph" descr="IMGQ:gas technician commissioning pipeline outdoor"/>
           <p:cNvSpPr/>
           <p:nvPr/>
         </p:nvSpPr>
@@ -6724,7 +7030,7 @@
       </p:sp>
       <p:sp>
         <p:nvSpPr>
-          <p:cNvPr id="9" name="TextBox 8"/>
+          <p:cNvPr id="10" name="TextBox 9"/>
           <p:cNvSpPr txBox="1"/>
           <p:nvPr/>
         </p:nvSpPr>
@@ -6764,7 +7070,7 @@
                 </a:solidFill>
                 <a:latin typeface="Montserrat"/>
               </a:rPr>
-              <a:t>gas meter cabinet street wall building</a:t>
+              <a:t>gas technician commissioning pipeline outdoor</a:t>
             </a:r>
           </a:p>
         </p:txBody>
@@ -6802,6 +7108,465 @@
             <a:avLst/>
           </a:prstGeom>
           <a:solidFill>
+            <a:srgbClr val="FFFFFF"/>
+          </a:solidFill>
+          <a:ln>
+            <a:noFill/>
+          </a:ln>
+          <a:effectLst/>
+        </p:spPr>
+        <p:style>
+          <a:lnRef idx="1">
+            <a:schemeClr val="accent1"/>
+          </a:lnRef>
+          <a:fillRef idx="3">
+            <a:schemeClr val="accent1"/>
+          </a:fillRef>
+          <a:effectRef idx="2">
+            <a:schemeClr val="accent1"/>
+          </a:effectRef>
+          <a:fontRef idx="minor">
+            <a:schemeClr val="lt1"/>
+          </a:fontRef>
+        </p:style>
+        <p:txBody>
+          <a:bodyPr rtlCol="0" anchor="ctr"/>
+          <a:lstStyle/>
+          <a:p>
+            <a:pPr algn="ctr"/>
+          </a:p>
+        </p:txBody>
+      </p:sp>
+      <p:sp>
+        <p:nvSpPr>
+          <p:cNvPr id="3" name="TextBox 2"/>
+          <p:cNvSpPr txBox="1"/>
+          <p:nvPr/>
+        </p:nvSpPr>
+        <p:spPr>
+          <a:xfrm>
+            <a:off x="10607040" y="320040"/>
+            <a:ext cx="1371600" cy="365760"/>
+          </a:xfrm>
+          <a:prstGeom prst="rect">
+            <a:avLst/>
+          </a:prstGeom>
+          <a:noFill/>
+        </p:spPr>
+        <p:txBody>
+          <a:bodyPr wrap="square">
+            <a:spAutoFit/>
+          </a:bodyPr>
+          <a:lstStyle/>
+          <a:p>
+            <a:pPr algn="r"/>
+            <a:r>
+              <a:rPr sz="1000" b="1" i="0">
+                <a:solidFill>
+                  <a:srgbClr val="64748B"/>
+                </a:solidFill>
+                <a:latin typeface="Montserrat"/>
+              </a:rPr>
+              <a:t>015 / 016</a:t>
+            </a:r>
+          </a:p>
+        </p:txBody>
+      </p:sp>
+      <p:sp>
+        <p:nvSpPr>
+          <p:cNvPr id="4" name="TextBox 3"/>
+          <p:cNvSpPr txBox="1"/>
+          <p:nvPr/>
+        </p:nvSpPr>
+        <p:spPr>
+          <a:xfrm>
+            <a:off x="457200" y="6419088"/>
+            <a:ext cx="8229600" cy="365760"/>
+          </a:xfrm>
+          <a:prstGeom prst="rect">
+            <a:avLst/>
+          </a:prstGeom>
+          <a:noFill/>
+        </p:spPr>
+        <p:txBody>
+          <a:bodyPr wrap="square">
+            <a:spAutoFit/>
+          </a:bodyPr>
+          <a:lstStyle/>
+          <a:p>
+            <a:r>
+              <a:rPr sz="900" b="0" i="0">
+                <a:solidFill>
+                  <a:srgbClr val="64748B"/>
+                </a:solidFill>
+                <a:latin typeface="Montserrat"/>
+              </a:rPr>
+              <a:t>Curso Gas B · Tema 01 · Distribución por canalización</a:t>
+            </a:r>
+          </a:p>
+        </p:txBody>
+      </p:sp>
+      <p:sp>
+        <p:nvSpPr>
+          <p:cNvPr id="5" name="TextBox 4"/>
+          <p:cNvSpPr txBox="1"/>
+          <p:nvPr/>
+        </p:nvSpPr>
+        <p:spPr>
+          <a:xfrm>
+            <a:off x="822960" y="457200"/>
+            <a:ext cx="10058400" cy="365760"/>
+          </a:xfrm>
+          <a:prstGeom prst="rect">
+            <a:avLst/>
+          </a:prstGeom>
+          <a:noFill/>
+        </p:spPr>
+        <p:txBody>
+          <a:bodyPr wrap="square">
+            <a:spAutoFit/>
+          </a:bodyPr>
+          <a:lstStyle/>
+          <a:p>
+            <a:r>
+              <a:rPr sz="1300" b="1" i="0">
+                <a:solidFill>
+                  <a:srgbClr val="E8801A"/>
+                </a:solidFill>
+                <a:latin typeface="Montserrat"/>
+              </a:rPr>
+              <a:t>REPASO RELÁMPAGO</a:t>
+            </a:r>
+          </a:p>
+        </p:txBody>
+      </p:sp>
+      <p:sp>
+        <p:nvSpPr>
+          <p:cNvPr id="6" name="TextBox 5"/>
+          <p:cNvSpPr txBox="1"/>
+          <p:nvPr/>
+        </p:nvSpPr>
+        <p:spPr>
+          <a:xfrm>
+            <a:off x="822960" y="868680"/>
+            <a:ext cx="10515600" cy="914400"/>
+          </a:xfrm>
+          <a:prstGeom prst="rect">
+            <a:avLst/>
+          </a:prstGeom>
+          <a:noFill/>
+        </p:spPr>
+        <p:txBody>
+          <a:bodyPr wrap="square">
+            <a:spAutoFit/>
+          </a:bodyPr>
+          <a:lstStyle/>
+          <a:p>
+            <a:r>
+              <a:rPr sz="2800" b="1" i="0">
+                <a:solidFill>
+                  <a:srgbClr val="1E2761"/>
+                </a:solidFill>
+                <a:latin typeface="Montserrat"/>
+              </a:rPr>
+              <a:t>Lo que no se te puede olvidar</a:t>
+            </a:r>
+          </a:p>
+        </p:txBody>
+      </p:sp>
+      <p:sp>
+        <p:nvSpPr>
+          <p:cNvPr id="7" name="Rounded Rectangle 6"/>
+          <p:cNvSpPr/>
+          <p:nvPr/>
+        </p:nvSpPr>
+        <p:spPr>
+          <a:xfrm>
+            <a:off x="868680" y="1627632"/>
+            <a:ext cx="2011680" cy="73152"/>
+          </a:xfrm>
+          <a:prstGeom prst="roundRect">
+            <a:avLst/>
+          </a:prstGeom>
+          <a:solidFill>
+            <a:srgbClr val="E8801A"/>
+          </a:solidFill>
+          <a:ln>
+            <a:noFill/>
+          </a:ln>
+          <a:effectLst/>
+        </p:spPr>
+        <p:style>
+          <a:lnRef idx="1">
+            <a:schemeClr val="accent1"/>
+          </a:lnRef>
+          <a:fillRef idx="3">
+            <a:schemeClr val="accent1"/>
+          </a:fillRef>
+          <a:effectRef idx="2">
+            <a:schemeClr val="accent1"/>
+          </a:effectRef>
+          <a:fontRef idx="minor">
+            <a:schemeClr val="lt1"/>
+          </a:fontRef>
+        </p:style>
+        <p:txBody>
+          <a:bodyPr rtlCol="0" anchor="ctr"/>
+          <a:lstStyle/>
+          <a:p>
+            <a:pPr algn="ctr"/>
+          </a:p>
+        </p:txBody>
+      </p:sp>
+      <p:sp>
+        <p:nvSpPr>
+          <p:cNvPr id="8" name="TextBox 7"/>
+          <p:cNvSpPr txBox="1"/>
+          <p:nvPr/>
+        </p:nvSpPr>
+        <p:spPr>
+          <a:xfrm>
+            <a:off x="822960" y="1965960"/>
+            <a:ext cx="4983480" cy="4206240"/>
+          </a:xfrm>
+          <a:prstGeom prst="rect">
+            <a:avLst/>
+          </a:prstGeom>
+          <a:noFill/>
+        </p:spPr>
+        <p:txBody>
+          <a:bodyPr wrap="square">
+            <a:spAutoFit/>
+          </a:bodyPr>
+          <a:lstStyle/>
+          <a:p>
+            <a:pPr>
+              <a:spcAft>
+                <a:spcPts val="1100"/>
+              </a:spcAft>
+            </a:pPr>
+            <a:r>
+              <a:rPr sz="1600" b="1" i="0">
+                <a:solidFill>
+                  <a:srgbClr val="E8801A"/>
+                </a:solidFill>
+                <a:latin typeface="Montserrat"/>
+              </a:rPr>
+              <a:t>▸  </a:t>
+            </a:r>
+            <a:r>
+              <a:rPr sz="1600" b="0" i="0">
+                <a:solidFill>
+                  <a:srgbClr val="1B2330"/>
+                </a:solidFill>
+                <a:latin typeface="Montserrat"/>
+              </a:rPr>
+              <a:t>Manda en la red de la calle, no la tuya</a:t>
+            </a:r>
+          </a:p>
+          <a:p>
+            <a:pPr>
+              <a:spcAft>
+                <a:spcPts val="1100"/>
+              </a:spcAft>
+            </a:pPr>
+            <a:r>
+              <a:rPr sz="1600" b="1" i="0">
+                <a:solidFill>
+                  <a:srgbClr val="E8801A"/>
+                </a:solidFill>
+                <a:latin typeface="Montserrat"/>
+              </a:rPr>
+              <a:t>▸  </a:t>
+            </a:r>
+            <a:r>
+              <a:rPr sz="1600" b="0" i="0">
+                <a:solidFill>
+                  <a:srgbClr val="1B2330"/>
+                </a:solidFill>
+                <a:latin typeface="Montserrat"/>
+              </a:rPr>
+              <a:t>Autoriza la CA · entrega primer trimestre</a:t>
+            </a:r>
+          </a:p>
+          <a:p>
+            <a:pPr>
+              <a:spcAft>
+                <a:spcPts val="1100"/>
+              </a:spcAft>
+            </a:pPr>
+            <a:r>
+              <a:rPr sz="1600" b="1" i="0">
+                <a:solidFill>
+                  <a:srgbClr val="E8801A"/>
+                </a:solidFill>
+                <a:latin typeface="Montserrat"/>
+              </a:rPr>
+              <a:t>▸  </a:t>
+            </a:r>
+            <a:r>
+              <a:rPr sz="1600" b="0" i="0">
+                <a:solidFill>
+                  <a:srgbClr val="1B2330"/>
+                </a:solidFill>
+                <a:latin typeface="Montserrat"/>
+              </a:rPr>
+              <a:t>Sin pruebas superadas, no hay gas</a:t>
+            </a:r>
+          </a:p>
+          <a:p>
+            <a:pPr>
+              <a:spcAft>
+                <a:spcPts val="1100"/>
+              </a:spcAft>
+            </a:pPr>
+            <a:r>
+              <a:rPr sz="1600" b="1" i="0">
+                <a:solidFill>
+                  <a:srgbClr val="E8801A"/>
+                </a:solidFill>
+                <a:latin typeface="Montserrat"/>
+              </a:rPr>
+              <a:t>▸  </a:t>
+            </a:r>
+            <a:r>
+              <a:rPr sz="1600" b="0" i="0">
+                <a:solidFill>
+                  <a:srgbClr val="1B2330"/>
+                </a:solidFill>
+                <a:latin typeface="Montserrat"/>
+              </a:rPr>
+              <a:t>El peligro es la mezcla aire-gas</a:t>
+            </a:r>
+          </a:p>
+        </p:txBody>
+      </p:sp>
+      <p:sp>
+        <p:nvSpPr>
+          <p:cNvPr id="9" name="imgph" descr="IMGQ:gas meter cabinet street wall building"/>
+          <p:cNvSpPr/>
+          <p:nvPr/>
+        </p:nvSpPr>
+        <p:spPr>
+          <a:xfrm>
+            <a:off x="5806440" y="1051560"/>
+            <a:ext cx="5298947" cy="4629150"/>
+          </a:xfrm>
+          <a:prstGeom prst="roundRect">
+            <a:avLst/>
+          </a:prstGeom>
+          <a:solidFill>
+            <a:srgbClr val="F3F6FB"/>
+          </a:solidFill>
+          <a:ln w="12700">
+            <a:solidFill>
+              <a:srgbClr val="C7D2E6"/>
+            </a:solidFill>
+          </a:ln>
+          <a:effectLst/>
+        </p:spPr>
+        <p:style>
+          <a:lnRef idx="1">
+            <a:schemeClr val="accent1"/>
+          </a:lnRef>
+          <a:fillRef idx="3">
+            <a:schemeClr val="accent1"/>
+          </a:fillRef>
+          <a:effectRef idx="2">
+            <a:schemeClr val="accent1"/>
+          </a:effectRef>
+          <a:fontRef idx="minor">
+            <a:schemeClr val="lt1"/>
+          </a:fontRef>
+        </p:style>
+        <p:txBody>
+          <a:bodyPr rtlCol="0" anchor="ctr"/>
+          <a:lstStyle/>
+          <a:p>
+            <a:pPr algn="ctr"/>
+          </a:p>
+        </p:txBody>
+      </p:sp>
+      <p:sp>
+        <p:nvSpPr>
+          <p:cNvPr id="10" name="TextBox 9"/>
+          <p:cNvSpPr txBox="1"/>
+          <p:nvPr/>
+        </p:nvSpPr>
+        <p:spPr>
+          <a:xfrm>
+            <a:off x="6080760" y="2726055"/>
+            <a:ext cx="4750307" cy="1280160"/>
+          </a:xfrm>
+          <a:prstGeom prst="rect">
+            <a:avLst/>
+          </a:prstGeom>
+          <a:noFill/>
+        </p:spPr>
+        <p:txBody>
+          <a:bodyPr wrap="square">
+            <a:spAutoFit/>
+          </a:bodyPr>
+          <a:lstStyle/>
+          <a:p>
+            <a:pPr algn="ctr"/>
+            <a:r>
+              <a:rPr sz="1400" b="1" i="0">
+                <a:solidFill>
+                  <a:srgbClr val="64748B"/>
+                </a:solidFill>
+                <a:latin typeface="Montserrat"/>
+              </a:rPr>
+              <a:t>IMAGEN REALISTA</a:t>
+            </a:r>
+          </a:p>
+          <a:p>
+            <a:pPr algn="ctr"/>
+            <a:r>
+              <a:rPr sz="1100" b="0" i="1">
+                <a:solidFill>
+                  <a:srgbClr val="64748B"/>
+                </a:solidFill>
+                <a:latin typeface="Montserrat"/>
+              </a:rPr>
+              <a:t>gas meter cabinet street wall building</a:t>
+            </a:r>
+          </a:p>
+        </p:txBody>
+      </p:sp>
+    </p:spTree>
+  </p:cSld>
+  <p:clrMapOvr>
+    <a:masterClrMapping/>
+  </p:clrMapOvr>
+</p:sld>
+</file>
+
+<file path=ppt/slides/slide16.xml><?xml version="1.0" encoding="utf-8"?>
+<p:sld xmlns:a="http://schemas.openxmlformats.org/drawingml/2006/main" xmlns:p="http://schemas.openxmlformats.org/presentationml/2006/main" xmlns:r="http://schemas.openxmlformats.org/officeDocument/2006/relationships">
+  <p:cSld>
+    <p:spTree>
+      <p:nvGrpSpPr>
+        <p:cNvPr id="1" name=""/>
+        <p:cNvGrpSpPr/>
+        <p:nvPr/>
+      </p:nvGrpSpPr>
+      <p:grpSpPr/>
+      <p:sp>
+        <p:nvSpPr>
+          <p:cNvPr id="2" name="Rectangle 1"/>
+          <p:cNvSpPr/>
+          <p:nvPr/>
+        </p:nvSpPr>
+        <p:spPr>
+          <a:xfrm>
+            <a:off x="0" y="0"/>
+            <a:ext cx="12191695" cy="6858000"/>
+          </a:xfrm>
+          <a:prstGeom prst="rect">
+            <a:avLst/>
+          </a:prstGeom>
+          <a:solidFill>
             <a:srgbClr val="1E2761"/>
           </a:solidFill>
           <a:ln>
@@ -6856,7 +7621,7 @@
             <a:r>
               <a:rPr sz="1400" b="1" i="0">
                 <a:solidFill>
-                  <a:srgbClr val="CADCFC"/>
+                  <a:srgbClr val="F4A24C"/>
                 </a:solidFill>
                 <a:latin typeface="Montserrat"/>
               </a:rPr>
@@ -6867,13 +7632,57 @@
       </p:sp>
       <p:sp>
         <p:nvSpPr>
-          <p:cNvPr id="4" name="TextBox 3"/>
+          <p:cNvPr id="4" name="Rounded Rectangle 3"/>
+          <p:cNvSpPr/>
+          <p:nvPr/>
+        </p:nvSpPr>
+        <p:spPr>
+          <a:xfrm>
+            <a:off x="868680" y="1051560"/>
+            <a:ext cx="1463040" cy="82296"/>
+          </a:xfrm>
+          <a:prstGeom prst="roundRect">
+            <a:avLst/>
+          </a:prstGeom>
+          <a:solidFill>
+            <a:srgbClr val="E8801A"/>
+          </a:solidFill>
+          <a:ln>
+            <a:noFill/>
+          </a:ln>
+          <a:effectLst/>
+        </p:spPr>
+        <p:style>
+          <a:lnRef idx="1">
+            <a:schemeClr val="accent1"/>
+          </a:lnRef>
+          <a:fillRef idx="3">
+            <a:schemeClr val="accent1"/>
+          </a:fillRef>
+          <a:effectRef idx="2">
+            <a:schemeClr val="accent1"/>
+          </a:effectRef>
+          <a:fontRef idx="minor">
+            <a:schemeClr val="lt1"/>
+          </a:fontRef>
+        </p:style>
+        <p:txBody>
+          <a:bodyPr rtlCol="0" anchor="ctr"/>
+          <a:lstStyle/>
+          <a:p>
+            <a:pPr algn="ctr"/>
+          </a:p>
+        </p:txBody>
+      </p:sp>
+      <p:sp>
+        <p:nvSpPr>
+          <p:cNvPr id="5" name="TextBox 4"/>
           <p:cNvSpPr txBox="1"/>
           <p:nvPr/>
         </p:nvSpPr>
         <p:spPr>
           <a:xfrm>
-            <a:off x="822960" y="1143000"/>
+            <a:off x="822960" y="1234440"/>
             <a:ext cx="10515600" cy="1097280"/>
           </a:xfrm>
           <a:prstGeom prst="rect">
@@ -6901,14 +7710,14 @@
       </p:sp>
       <p:sp>
         <p:nvSpPr>
-          <p:cNvPr id="5" name="TextBox 4"/>
+          <p:cNvPr id="6" name="TextBox 5"/>
           <p:cNvSpPr txBox="1"/>
           <p:nvPr/>
         </p:nvSpPr>
         <p:spPr>
           <a:xfrm>
-            <a:off x="822960" y="2514600"/>
-            <a:ext cx="10515600" cy="2834640"/>
+            <a:off x="822960" y="2606040"/>
+            <a:ext cx="10515600" cy="2743200"/>
           </a:xfrm>
           <a:prstGeom prst="rect">
             <a:avLst/>
@@ -6929,7 +7738,7 @@
             <a:r>
               <a:rPr sz="2000" b="1" i="0">
                 <a:solidFill>
-                  <a:srgbClr val="CADCFC"/>
+                  <a:srgbClr val="F4A24C"/>
                 </a:solidFill>
                 <a:latin typeface="Montserrat"/>
               </a:rPr>
@@ -6954,7 +7763,7 @@
             <a:r>
               <a:rPr sz="2000" b="1" i="0">
                 <a:solidFill>
-                  <a:srgbClr val="CADCFC"/>
+                  <a:srgbClr val="F4A24C"/>
                 </a:solidFill>
                 <a:latin typeface="Montserrat"/>
               </a:rPr>
@@ -6979,7 +7788,7 @@
             <a:r>
               <a:rPr sz="2000" b="1" i="0">
                 <a:solidFill>
-                  <a:srgbClr val="CADCFC"/>
+                  <a:srgbClr val="F4A24C"/>
                 </a:solidFill>
                 <a:latin typeface="Montserrat"/>
               </a:rPr>
@@ -7004,7 +7813,7 @@
             <a:r>
               <a:rPr sz="2000" b="1" i="0">
                 <a:solidFill>
-                  <a:srgbClr val="CADCFC"/>
+                  <a:srgbClr val="F4A24C"/>
                 </a:solidFill>
                 <a:latin typeface="Montserrat"/>
               </a:rPr>
@@ -7024,20 +7833,20 @@
       </p:sp>
       <p:sp>
         <p:nvSpPr>
-          <p:cNvPr id="6" name="Rounded Rectangle 5"/>
+          <p:cNvPr id="7" name="Rounded Rectangle 6"/>
           <p:cNvSpPr/>
           <p:nvPr/>
         </p:nvSpPr>
         <p:spPr>
           <a:xfrm>
             <a:off x="822960" y="5532120"/>
-            <a:ext cx="10515600" cy="777240"/>
+            <a:ext cx="10515600" cy="822960"/>
           </a:xfrm>
           <a:prstGeom prst="roundRect">
             <a:avLst/>
           </a:prstGeom>
           <a:solidFill>
-            <a:srgbClr val="2E3A80"/>
+            <a:srgbClr val="E8801A"/>
           </a:solidFill>
           <a:ln>
             <a:noFill/>
@@ -7068,13 +7877,13 @@
       </p:sp>
       <p:sp>
         <p:nvSpPr>
-          <p:cNvPr id="7" name="TextBox 6"/>
+          <p:cNvPr id="8" name="TextBox 7"/>
           <p:cNvSpPr txBox="1"/>
           <p:nvPr/>
         </p:nvSpPr>
         <p:spPr>
           <a:xfrm>
-            <a:off x="1051560" y="5605272"/>
+            <a:off x="1051560" y="5623560"/>
             <a:ext cx="10058400" cy="640080"/>
           </a:xfrm>
           <a:prstGeom prst="rect">
@@ -7091,7 +7900,7 @@
             <a:r>
               <a:rPr sz="1500" b="1" i="1">
                 <a:solidFill>
-                  <a:srgbClr val="CADCFC"/>
+                  <a:srgbClr val="1E2761"/>
                 </a:solidFill>
                 <a:latin typeface="Montserrat"/>
               </a:rPr>
@@ -7192,7 +8001,7 @@
                 </a:solidFill>
                 <a:latin typeface="Montserrat"/>
               </a:rPr>
-              <a:t>002 / 015</a:t>
+              <a:t>002 / 016</a:t>
             </a:r>
           </a:p>
         </p:txBody>
@@ -7256,7 +8065,7 @@
             <a:r>
               <a:rPr sz="2700" b="1" i="0">
                 <a:solidFill>
-                  <a:srgbClr val="1E2761"/>
+                  <a:srgbClr val="E8801A"/>
                 </a:solidFill>
                 <a:latin typeface="Montserrat"/>
               </a:rPr>
@@ -7268,6 +8077,50 @@
       <p:sp>
         <p:nvSpPr>
           <p:cNvPr id="6" name="Rounded Rectangle 5"/>
+          <p:cNvSpPr/>
+          <p:nvPr/>
+        </p:nvSpPr>
+        <p:spPr>
+          <a:xfrm>
+            <a:off x="868680" y="1234440"/>
+            <a:ext cx="1463040" cy="73152"/>
+          </a:xfrm>
+          <a:prstGeom prst="roundRect">
+            <a:avLst/>
+          </a:prstGeom>
+          <a:solidFill>
+            <a:srgbClr val="1E2761"/>
+          </a:solidFill>
+          <a:ln>
+            <a:noFill/>
+          </a:ln>
+          <a:effectLst/>
+        </p:spPr>
+        <p:style>
+          <a:lnRef idx="1">
+            <a:schemeClr val="accent1"/>
+          </a:lnRef>
+          <a:fillRef idx="3">
+            <a:schemeClr val="accent1"/>
+          </a:fillRef>
+          <a:effectRef idx="2">
+            <a:schemeClr val="accent1"/>
+          </a:effectRef>
+          <a:fontRef idx="minor">
+            <a:schemeClr val="lt1"/>
+          </a:fontRef>
+        </p:style>
+        <p:txBody>
+          <a:bodyPr rtlCol="0" anchor="ctr"/>
+          <a:lstStyle/>
+          <a:p>
+            <a:pPr algn="ctr"/>
+          </a:p>
+        </p:txBody>
+      </p:sp>
+      <p:sp>
+        <p:nvSpPr>
+          <p:cNvPr id="7" name="Rounded Rectangle 6"/>
           <p:cNvSpPr/>
           <p:nvPr/>
         </p:nvSpPr>
@@ -7313,7 +8166,7 @@
       </p:sp>
       <p:sp>
         <p:nvSpPr>
-          <p:cNvPr id="7" name="TextBox 6"/>
+          <p:cNvPr id="8" name="TextBox 7"/>
           <p:cNvSpPr txBox="1"/>
           <p:nvPr/>
         </p:nvSpPr>
@@ -7348,7 +8201,7 @@
       </p:sp>
       <p:sp>
         <p:nvSpPr>
-          <p:cNvPr id="8" name="TextBox 7"/>
+          <p:cNvPr id="9" name="TextBox 8"/>
           <p:cNvSpPr txBox="1"/>
           <p:nvPr/>
         </p:nvSpPr>
@@ -7383,7 +8236,7 @@
       </p:sp>
       <p:sp>
         <p:nvSpPr>
-          <p:cNvPr id="9" name="Rounded Rectangle 8"/>
+          <p:cNvPr id="10" name="Rounded Rectangle 9"/>
           <p:cNvSpPr/>
           <p:nvPr/>
         </p:nvSpPr>
@@ -7429,7 +8282,7 @@
       </p:sp>
       <p:sp>
         <p:nvSpPr>
-          <p:cNvPr id="10" name="TextBox 9"/>
+          <p:cNvPr id="11" name="TextBox 10"/>
           <p:cNvSpPr txBox="1"/>
           <p:nvPr/>
         </p:nvSpPr>
@@ -7464,7 +8317,7 @@
       </p:sp>
       <p:sp>
         <p:nvSpPr>
-          <p:cNvPr id="11" name="TextBox 10"/>
+          <p:cNvPr id="12" name="TextBox 11"/>
           <p:cNvSpPr txBox="1"/>
           <p:nvPr/>
         </p:nvSpPr>
@@ -7499,7 +8352,7 @@
       </p:sp>
       <p:sp>
         <p:nvSpPr>
-          <p:cNvPr id="12" name="Rounded Rectangle 11"/>
+          <p:cNvPr id="13" name="Rounded Rectangle 12"/>
           <p:cNvSpPr/>
           <p:nvPr/>
         </p:nvSpPr>
@@ -7545,7 +8398,7 @@
       </p:sp>
       <p:sp>
         <p:nvSpPr>
-          <p:cNvPr id="13" name="TextBox 12"/>
+          <p:cNvPr id="14" name="TextBox 13"/>
           <p:cNvSpPr txBox="1"/>
           <p:nvPr/>
         </p:nvSpPr>
@@ -7580,7 +8433,7 @@
       </p:sp>
       <p:sp>
         <p:nvSpPr>
-          <p:cNvPr id="14" name="TextBox 13"/>
+          <p:cNvPr id="15" name="TextBox 14"/>
           <p:cNvSpPr txBox="1"/>
           <p:nvPr/>
         </p:nvSpPr>
@@ -7705,7 +8558,7 @@
                 </a:solidFill>
                 <a:latin typeface="Montserrat"/>
               </a:rPr>
-              <a:t>003 / 015</a:t>
+              <a:t>003 / 016</a:t>
             </a:r>
           </a:p>
         </p:txBody>
@@ -7752,7 +8605,7 @@
         </p:nvSpPr>
         <p:spPr>
           <a:xfrm>
-            <a:off x="822960" y="457200"/>
+            <a:off x="822960" y="502920"/>
             <a:ext cx="8229600" cy="365760"/>
           </a:xfrm>
           <a:prstGeom prst="rect">
@@ -7767,13 +8620,13 @@
           <a:lstStyle/>
           <a:p>
             <a:r>
-              <a:rPr sz="1200" b="1" i="0">
-                <a:solidFill>
-                  <a:srgbClr val="64748B"/>
-                </a:solidFill>
-                <a:latin typeface="Montserrat"/>
-              </a:rPr>
-              <a:t>APARTADO 1 · OBJETO</a:t>
+              <a:rPr sz="1300" b="1" i="0">
+                <a:solidFill>
+                  <a:srgbClr val="E8801A"/>
+                </a:solidFill>
+                <a:latin typeface="Montserrat"/>
+              </a:rPr>
+              <a:t>PARTES DE ESTE VÍDEO</a:t>
             </a:r>
           </a:p>
         </p:txBody>
@@ -7786,7 +8639,7 @@
         </p:nvSpPr>
         <p:spPr>
           <a:xfrm>
-            <a:off x="822960" y="868680"/>
+            <a:off x="822960" y="914400"/>
             <a:ext cx="10515600" cy="914400"/>
           </a:xfrm>
           <a:prstGeom prst="rect">
@@ -7807,155 +8660,30 @@
                 </a:solidFill>
                 <a:latin typeface="Montserrat"/>
               </a:rPr>
-              <a:t>¿De qué manda esta ITC?</a:t>
-            </a:r>
-          </a:p>
-        </p:txBody>
-      </p:sp>
-      <p:sp>
-        <p:nvSpPr>
-          <p:cNvPr id="7" name="TextBox 6"/>
-          <p:cNvSpPr txBox="1"/>
-          <p:nvPr/>
-        </p:nvSpPr>
-        <p:spPr>
-          <a:xfrm>
-            <a:off x="822960" y="1920240"/>
-            <a:ext cx="4983480" cy="4206240"/>
-          </a:xfrm>
-          <a:prstGeom prst="rect">
-            <a:avLst/>
-          </a:prstGeom>
-          <a:noFill/>
-        </p:spPr>
-        <p:txBody>
-          <a:bodyPr wrap="square">
-            <a:spAutoFit/>
-          </a:bodyPr>
-          <a:lstStyle/>
-          <a:p>
-            <a:pPr>
-              <a:spcAft>
-                <a:spcPts val="1000"/>
-              </a:spcAft>
-            </a:pPr>
-            <a:r>
-              <a:rPr sz="1600" b="1" i="0">
-                <a:solidFill>
-                  <a:srgbClr val="2E3A80"/>
-                </a:solidFill>
-                <a:latin typeface="Montserrat"/>
-              </a:rPr>
-              <a:t>•  </a:t>
-            </a:r>
-            <a:r>
-              <a:rPr sz="1600" b="0" i="0">
-                <a:solidFill>
-                  <a:srgbClr val="1B2330"/>
-                </a:solidFill>
-                <a:latin typeface="Montserrat"/>
-              </a:rPr>
-              <a:t>Requisitos técnicos y seguridad mínima</a:t>
-            </a:r>
-          </a:p>
-          <a:p>
-            <a:pPr>
-              <a:spcAft>
-                <a:spcPts val="1000"/>
-              </a:spcAft>
-            </a:pPr>
-            <a:r>
-              <a:rPr sz="1600" b="1" i="0">
-                <a:solidFill>
-                  <a:srgbClr val="2E3A80"/>
-                </a:solidFill>
-                <a:latin typeface="Montserrat"/>
-              </a:rPr>
-              <a:t>•  </a:t>
-            </a:r>
-            <a:r>
-              <a:rPr sz="1600" b="0" i="0">
-                <a:solidFill>
-                  <a:srgbClr val="1B2330"/>
-                </a:solidFill>
-                <a:latin typeface="Montserrat"/>
-              </a:rPr>
-              <a:t>Proyectar · construir · explotar</a:t>
-            </a:r>
-          </a:p>
-          <a:p>
-            <a:pPr>
-              <a:spcAft>
-                <a:spcPts val="1000"/>
-              </a:spcAft>
-            </a:pPr>
-            <a:r>
-              <a:rPr sz="1600" b="1" i="0">
-                <a:solidFill>
-                  <a:srgbClr val="2E3A80"/>
-                </a:solidFill>
-                <a:latin typeface="Montserrat"/>
-              </a:rPr>
-              <a:t>•  </a:t>
-            </a:r>
-            <a:r>
-              <a:rPr sz="1600" b="0" i="0">
-                <a:solidFill>
-                  <a:srgbClr val="1B2330"/>
-                </a:solidFill>
-                <a:latin typeface="Montserrat"/>
-              </a:rPr>
-              <a:t>La red de la calle, no la receptora</a:t>
-            </a:r>
-          </a:p>
-          <a:p>
-            <a:pPr>
-              <a:spcAft>
-                <a:spcPts val="1000"/>
-              </a:spcAft>
-            </a:pPr>
-            <a:r>
-              <a:rPr sz="1600" b="1" i="0">
-                <a:solidFill>
-                  <a:srgbClr val="2E3A80"/>
-                </a:solidFill>
-                <a:latin typeface="Montserrat"/>
-              </a:rPr>
-              <a:t>•  </a:t>
-            </a:r>
-            <a:r>
-              <a:rPr sz="1600" b="0" i="0">
-                <a:solidFill>
-                  <a:srgbClr val="1B2330"/>
-                </a:solidFill>
-                <a:latin typeface="Montserrat"/>
-              </a:rPr>
-              <a:t>Canalización: hasta 16 bar</a:t>
-            </a:r>
-          </a:p>
-        </p:txBody>
-      </p:sp>
-      <p:sp>
-        <p:nvSpPr>
-          <p:cNvPr id="8" name="imgph" descr="IMGQ:gas pipeline construction street trench"/>
+              <a:t>En este vídeo</a:t>
+            </a:r>
+          </a:p>
+        </p:txBody>
+      </p:sp>
+      <p:sp>
+        <p:nvSpPr>
+          <p:cNvPr id="7" name="Rounded Rectangle 6"/>
           <p:cNvSpPr/>
           <p:nvPr/>
         </p:nvSpPr>
         <p:spPr>
           <a:xfrm>
-            <a:off x="5806440" y="1051560"/>
-            <a:ext cx="5298947" cy="4629150"/>
+            <a:off x="868680" y="1673352"/>
+            <a:ext cx="2011680" cy="73152"/>
           </a:xfrm>
           <a:prstGeom prst="roundRect">
             <a:avLst/>
           </a:prstGeom>
           <a:solidFill>
-            <a:srgbClr val="F3F6FB"/>
+            <a:srgbClr val="E8801A"/>
           </a:solidFill>
-          <a:ln w="12700">
-            <a:solidFill>
-              <a:srgbClr val="C7D2E6"/>
-            </a:solidFill>
+          <a:ln>
+            <a:noFill/>
           </a:ln>
           <a:effectLst/>
         </p:spPr>
@@ -7983,14 +8711,14 @@
       </p:sp>
       <p:sp>
         <p:nvSpPr>
-          <p:cNvPr id="9" name="TextBox 8"/>
+          <p:cNvPr id="8" name="TextBox 7"/>
           <p:cNvSpPr txBox="1"/>
           <p:nvPr/>
         </p:nvSpPr>
         <p:spPr>
           <a:xfrm>
-            <a:off x="6080760" y="2726055"/>
-            <a:ext cx="4750307" cy="1280160"/>
+            <a:off x="822960" y="2103120"/>
+            <a:ext cx="10515600" cy="4023360"/>
           </a:xfrm>
           <a:prstGeom prst="rect">
             <a:avLst/>
@@ -8003,27 +8731,178 @@
           </a:bodyPr>
           <a:lstStyle/>
           <a:p>
-            <a:pPr algn="ctr"/>
-            <a:r>
-              <a:rPr sz="1400" b="1" i="0">
-                <a:solidFill>
-                  <a:srgbClr val="64748B"/>
-                </a:solidFill>
-                <a:latin typeface="Montserrat"/>
-              </a:rPr>
-              <a:t>IMAGEN REALISTA</a:t>
-            </a:r>
-          </a:p>
-          <a:p>
-            <a:pPr algn="ctr"/>
-            <a:r>
-              <a:rPr sz="1100" b="0" i="1">
-                <a:solidFill>
-                  <a:srgbClr val="64748B"/>
-                </a:solidFill>
-                <a:latin typeface="Montserrat"/>
-              </a:rPr>
-              <a:t>gas pipeline construction street trench</a:t>
+            <a:pPr>
+              <a:spcAft>
+                <a:spcPts val="900"/>
+              </a:spcAft>
+            </a:pPr>
+            <a:r>
+              <a:rPr sz="1800" b="1" i="0">
+                <a:solidFill>
+                  <a:srgbClr val="E8801A"/>
+                </a:solidFill>
+                <a:latin typeface="Montserrat"/>
+              </a:rPr>
+              <a:t>01   </a:t>
+            </a:r>
+            <a:r>
+              <a:rPr sz="1700" b="0" i="0">
+                <a:solidFill>
+                  <a:srgbClr val="1B2330"/>
+                </a:solidFill>
+                <a:latin typeface="Montserrat"/>
+              </a:rPr>
+              <a:t>Apartado 1</a:t>
+            </a:r>
+          </a:p>
+          <a:p>
+            <a:pPr>
+              <a:spcAft>
+                <a:spcPts val="900"/>
+              </a:spcAft>
+            </a:pPr>
+            <a:r>
+              <a:rPr sz="1800" b="1" i="0">
+                <a:solidFill>
+                  <a:srgbClr val="E8801A"/>
+                </a:solidFill>
+                <a:latin typeface="Montserrat"/>
+              </a:rPr>
+              <a:t>02   </a:t>
+            </a:r>
+            <a:r>
+              <a:rPr sz="1700" b="0" i="0">
+                <a:solidFill>
+                  <a:srgbClr val="1B2330"/>
+                </a:solidFill>
+                <a:latin typeface="Montserrat"/>
+              </a:rPr>
+              <a:t>Apartado 2</a:t>
+            </a:r>
+          </a:p>
+          <a:p>
+            <a:pPr>
+              <a:spcAft>
+                <a:spcPts val="900"/>
+              </a:spcAft>
+            </a:pPr>
+            <a:r>
+              <a:rPr sz="1800" b="1" i="0">
+                <a:solidFill>
+                  <a:srgbClr val="E8801A"/>
+                </a:solidFill>
+                <a:latin typeface="Montserrat"/>
+              </a:rPr>
+              <a:t>03   </a:t>
+            </a:r>
+            <a:r>
+              <a:rPr sz="1700" b="0" i="0">
+                <a:solidFill>
+                  <a:srgbClr val="1B2330"/>
+                </a:solidFill>
+                <a:latin typeface="Montserrat"/>
+              </a:rPr>
+              <a:t>Apartado 3</a:t>
+            </a:r>
+          </a:p>
+          <a:p>
+            <a:pPr>
+              <a:spcAft>
+                <a:spcPts val="900"/>
+              </a:spcAft>
+            </a:pPr>
+            <a:r>
+              <a:rPr sz="1800" b="1" i="0">
+                <a:solidFill>
+                  <a:srgbClr val="E8801A"/>
+                </a:solidFill>
+                <a:latin typeface="Montserrat"/>
+              </a:rPr>
+              <a:t>04   </a:t>
+            </a:r>
+            <a:r>
+              <a:rPr sz="1700" b="0" i="0">
+                <a:solidFill>
+                  <a:srgbClr val="1B2330"/>
+                </a:solidFill>
+                <a:latin typeface="Montserrat"/>
+              </a:rPr>
+              <a:t>Apartado 4</a:t>
+            </a:r>
+          </a:p>
+          <a:p>
+            <a:pPr>
+              <a:spcAft>
+                <a:spcPts val="900"/>
+              </a:spcAft>
+            </a:pPr>
+            <a:r>
+              <a:rPr sz="1800" b="1" i="0">
+                <a:solidFill>
+                  <a:srgbClr val="E8801A"/>
+                </a:solidFill>
+                <a:latin typeface="Montserrat"/>
+              </a:rPr>
+              <a:t>05   </a:t>
+            </a:r>
+            <a:r>
+              <a:rPr sz="1700" b="0" i="0">
+                <a:solidFill>
+                  <a:srgbClr val="1B2330"/>
+                </a:solidFill>
+                <a:latin typeface="Montserrat"/>
+              </a:rPr>
+              <a:t>Apartado 5.1</a:t>
+            </a:r>
+          </a:p>
+          <a:p>
+            <a:pPr>
+              <a:spcAft>
+                <a:spcPts val="900"/>
+              </a:spcAft>
+            </a:pPr>
+            <a:r>
+              <a:rPr sz="1800" b="1" i="0">
+                <a:solidFill>
+                  <a:srgbClr val="E8801A"/>
+                </a:solidFill>
+                <a:latin typeface="Montserrat"/>
+              </a:rPr>
+              <a:t>06   </a:t>
+            </a:r>
+            <a:r>
+              <a:rPr sz="1700" b="0" i="0">
+                <a:solidFill>
+                  <a:srgbClr val="1B2330"/>
+                </a:solidFill>
+                <a:latin typeface="Montserrat"/>
+              </a:rPr>
+              <a:t>Apartado 5.2</a:t>
+            </a:r>
+          </a:p>
+          <a:p>
+            <a:pPr>
+              <a:spcAft>
+                <a:spcPts val="900"/>
+              </a:spcAft>
+            </a:pPr>
+            <a:r>
+              <a:rPr sz="1800" b="1" i="0">
+                <a:solidFill>
+                  <a:srgbClr val="E8801A"/>
+                </a:solidFill>
+                <a:latin typeface="Montserrat"/>
+              </a:rPr>
+              <a:t>07   </a:t>
+            </a:r>
+            <a:r>
+              <a:rPr sz="1700" b="0" i="0">
+                <a:solidFill>
+                  <a:srgbClr val="1B2330"/>
+                </a:solidFill>
+                <a:latin typeface="Montserrat"/>
+              </a:rPr>
+              <a:t>Repaso relámpago</a:t>
             </a:r>
           </a:p>
         </p:txBody>
@@ -8120,7 +8999,7 @@
                 </a:solidFill>
                 <a:latin typeface="Montserrat"/>
               </a:rPr>
-              <a:t>004 / 015</a:t>
+              <a:t>004 / 016</a:t>
             </a:r>
           </a:p>
         </p:txBody>
@@ -8168,7 +9047,7 @@
         <p:spPr>
           <a:xfrm>
             <a:off x="822960" y="457200"/>
-            <a:ext cx="8229600" cy="365760"/>
+            <a:ext cx="10058400" cy="365760"/>
           </a:xfrm>
           <a:prstGeom prst="rect">
             <a:avLst/>
@@ -8182,13 +9061,13 @@
           <a:lstStyle/>
           <a:p>
             <a:r>
-              <a:rPr sz="1200" b="1" i="0">
-                <a:solidFill>
-                  <a:srgbClr val="64748B"/>
-                </a:solidFill>
-                <a:latin typeface="Montserrat"/>
-              </a:rPr>
-              <a:t>APARTADO 2 · AUTORIZACIÓN</a:t>
+              <a:rPr sz="1300" b="1" i="0">
+                <a:solidFill>
+                  <a:srgbClr val="E8801A"/>
+                </a:solidFill>
+                <a:latin typeface="Montserrat"/>
+              </a:rPr>
+              <a:t>APARTADO 1 · OBJETO</a:t>
             </a:r>
           </a:p>
         </p:txBody>
@@ -8216,26 +9095,70 @@
           <a:lstStyle/>
           <a:p>
             <a:r>
-              <a:rPr sz="2700" b="1" i="0">
+              <a:rPr sz="2800" b="1" i="0">
                 <a:solidFill>
                   <a:srgbClr val="1E2761"/>
                 </a:solidFill>
                 <a:latin typeface="Montserrat"/>
               </a:rPr>
-              <a:t>Permiso antes de construir</a:t>
-            </a:r>
-          </a:p>
-        </p:txBody>
-      </p:sp>
-      <p:sp>
-        <p:nvSpPr>
-          <p:cNvPr id="7" name="TextBox 6"/>
+              <a:t>¿De qué manda esta ITC?</a:t>
+            </a:r>
+          </a:p>
+        </p:txBody>
+      </p:sp>
+      <p:sp>
+        <p:nvSpPr>
+          <p:cNvPr id="7" name="Rounded Rectangle 6"/>
+          <p:cNvSpPr/>
+          <p:nvPr/>
+        </p:nvSpPr>
+        <p:spPr>
+          <a:xfrm>
+            <a:off x="868680" y="1627632"/>
+            <a:ext cx="2011680" cy="73152"/>
+          </a:xfrm>
+          <a:prstGeom prst="roundRect">
+            <a:avLst/>
+          </a:prstGeom>
+          <a:solidFill>
+            <a:srgbClr val="E8801A"/>
+          </a:solidFill>
+          <a:ln>
+            <a:noFill/>
+          </a:ln>
+          <a:effectLst/>
+        </p:spPr>
+        <p:style>
+          <a:lnRef idx="1">
+            <a:schemeClr val="accent1"/>
+          </a:lnRef>
+          <a:fillRef idx="3">
+            <a:schemeClr val="accent1"/>
+          </a:fillRef>
+          <a:effectRef idx="2">
+            <a:schemeClr val="accent1"/>
+          </a:effectRef>
+          <a:fontRef idx="minor">
+            <a:schemeClr val="lt1"/>
+          </a:fontRef>
+        </p:style>
+        <p:txBody>
+          <a:bodyPr rtlCol="0" anchor="ctr"/>
+          <a:lstStyle/>
+          <a:p>
+            <a:pPr algn="ctr"/>
+          </a:p>
+        </p:txBody>
+      </p:sp>
+      <p:sp>
+        <p:nvSpPr>
+          <p:cNvPr id="8" name="TextBox 7"/>
           <p:cNvSpPr txBox="1"/>
           <p:nvPr/>
         </p:nvSpPr>
         <p:spPr>
           <a:xfrm>
-            <a:off x="822960" y="1920240"/>
+            <a:off x="822960" y="1965960"/>
             <a:ext cx="4983480" cy="4206240"/>
           </a:xfrm>
           <a:prstGeom prst="rect">
@@ -8251,17 +9174,17 @@
           <a:p>
             <a:pPr>
               <a:spcAft>
-                <a:spcPts val="1000"/>
+                <a:spcPts val="1100"/>
               </a:spcAft>
             </a:pPr>
             <a:r>
               <a:rPr sz="1600" b="1" i="0">
                 <a:solidFill>
-                  <a:srgbClr val="2E3A80"/>
-                </a:solidFill>
-                <a:latin typeface="Montserrat"/>
-              </a:rPr>
-              <a:t>•  </a:t>
+                  <a:srgbClr val="E8801A"/>
+                </a:solidFill>
+                <a:latin typeface="Montserrat"/>
+              </a:rPr>
+              <a:t>▸  </a:t>
             </a:r>
             <a:r>
               <a:rPr sz="1600" b="0" i="0">
@@ -8270,23 +9193,23 @@
                 </a:solidFill>
                 <a:latin typeface="Montserrat"/>
               </a:rPr>
-              <a:t>Autorización administrativa previa</a:t>
+              <a:t>Requisitos técnicos y seguridad mínima</a:t>
             </a:r>
           </a:p>
           <a:p>
             <a:pPr>
               <a:spcAft>
-                <a:spcPts val="1000"/>
+                <a:spcPts val="1100"/>
               </a:spcAft>
             </a:pPr>
             <a:r>
               <a:rPr sz="1600" b="1" i="0">
                 <a:solidFill>
-                  <a:srgbClr val="2E3A80"/>
-                </a:solidFill>
-                <a:latin typeface="Montserrat"/>
-              </a:rPr>
-              <a:t>•  </a:t>
+                  <a:srgbClr val="E8801A"/>
+                </a:solidFill>
+                <a:latin typeface="Montserrat"/>
+              </a:rPr>
+              <a:t>▸  </a:t>
             </a:r>
             <a:r>
               <a:rPr sz="1600" b="0" i="0">
@@ -8295,23 +9218,23 @@
                 </a:solidFill>
                 <a:latin typeface="Montserrat"/>
               </a:rPr>
-              <a:t>Extensiones: memoria general de previsiones</a:t>
+              <a:t>Proyectar · construir · explotar</a:t>
             </a:r>
           </a:p>
           <a:p>
             <a:pPr>
               <a:spcAft>
-                <a:spcPts val="1000"/>
+                <a:spcPts val="1100"/>
               </a:spcAft>
             </a:pPr>
             <a:r>
               <a:rPr sz="1600" b="1" i="0">
                 <a:solidFill>
-                  <a:srgbClr val="2E3A80"/>
-                </a:solidFill>
-                <a:latin typeface="Montserrat"/>
-              </a:rPr>
-              <a:t>•  </a:t>
+                  <a:srgbClr val="E8801A"/>
+                </a:solidFill>
+                <a:latin typeface="Montserrat"/>
+              </a:rPr>
+              <a:t>▸  </a:t>
             </a:r>
             <a:r>
               <a:rPr sz="1600" b="0" i="0">
@@ -8320,23 +9243,23 @@
                 </a:solidFill>
                 <a:latin typeface="Montserrat"/>
               </a:rPr>
-              <a:t>Primer trimestre: obras del año anterior</a:t>
+              <a:t>La red de la calle, no la receptora</a:t>
             </a:r>
           </a:p>
           <a:p>
             <a:pPr>
               <a:spcAft>
-                <a:spcPts val="1000"/>
+                <a:spcPts val="1100"/>
               </a:spcAft>
             </a:pPr>
             <a:r>
               <a:rPr sz="1600" b="1" i="0">
                 <a:solidFill>
-                  <a:srgbClr val="2E3A80"/>
-                </a:solidFill>
-                <a:latin typeface="Montserrat"/>
-              </a:rPr>
-              <a:t>•  </a:t>
+                  <a:srgbClr val="E8801A"/>
+                </a:solidFill>
+                <a:latin typeface="Montserrat"/>
+              </a:rPr>
+              <a:t>▸  </a:t>
             </a:r>
             <a:r>
               <a:rPr sz="1600" b="0" i="0">
@@ -8345,14 +9268,14 @@
                 </a:solidFill>
                 <a:latin typeface="Montserrat"/>
               </a:rPr>
-              <a:t>Autoriza la Comunidad Autónoma</a:t>
-            </a:r>
-          </a:p>
-        </p:txBody>
-      </p:sp>
-      <p:sp>
-        <p:nvSpPr>
-          <p:cNvPr id="8" name="imgph" descr="IMGQ:official documents stamp approval desk"/>
+              <a:t>Canalización: hasta 16 bar</a:t>
+            </a:r>
+          </a:p>
+        </p:txBody>
+      </p:sp>
+      <p:sp>
+        <p:nvSpPr>
+          <p:cNvPr id="9" name="imgph" descr="IMGQ:gas pipeline construction street trench"/>
           <p:cNvSpPr/>
           <p:nvPr/>
         </p:nvSpPr>
@@ -8398,7 +9321,7 @@
       </p:sp>
       <p:sp>
         <p:nvSpPr>
-          <p:cNvPr id="9" name="TextBox 8"/>
+          <p:cNvPr id="10" name="TextBox 9"/>
           <p:cNvSpPr txBox="1"/>
           <p:nvPr/>
         </p:nvSpPr>
@@ -8438,7 +9361,7 @@
                 </a:solidFill>
                 <a:latin typeface="Montserrat"/>
               </a:rPr>
-              <a:t>official documents stamp approval desk</a:t>
+              <a:t>gas pipeline construction street trench</a:t>
             </a:r>
           </a:p>
         </p:txBody>
@@ -8535,7 +9458,7 @@
                 </a:solidFill>
                 <a:latin typeface="Montserrat"/>
               </a:rPr>
-              <a:t>005 / 015</a:t>
+              <a:t>005 / 016</a:t>
             </a:r>
           </a:p>
         </p:txBody>
@@ -8583,7 +9506,7 @@
         <p:spPr>
           <a:xfrm>
             <a:off x="822960" y="457200"/>
-            <a:ext cx="8229600" cy="365760"/>
+            <a:ext cx="10058400" cy="365760"/>
           </a:xfrm>
           <a:prstGeom prst="rect">
             <a:avLst/>
@@ -8597,13 +9520,13 @@
           <a:lstStyle/>
           <a:p>
             <a:r>
-              <a:rPr sz="1200" b="1" i="0">
-                <a:solidFill>
-                  <a:srgbClr val="64748B"/>
-                </a:solidFill>
-                <a:latin typeface="Montserrat"/>
-              </a:rPr>
-              <a:t>APARTADO 3 · DISEÑO</a:t>
+              <a:rPr sz="1300" b="1" i="0">
+                <a:solidFill>
+                  <a:srgbClr val="E8801A"/>
+                </a:solidFill>
+                <a:latin typeface="Montserrat"/>
+              </a:rPr>
+              <a:t>APARTADO 2 · AUTORIZACIÓN</a:t>
             </a:r>
           </a:p>
         </p:txBody>
@@ -8631,26 +9554,70 @@
           <a:lstStyle/>
           <a:p>
             <a:r>
-              <a:rPr sz="2700" b="1" i="0">
+              <a:rPr sz="2800" b="1" i="0">
                 <a:solidFill>
                   <a:srgbClr val="1E2761"/>
                 </a:solidFill>
                 <a:latin typeface="Montserrat"/>
               </a:rPr>
-              <a:t>Suministro seguro y continuo</a:t>
-            </a:r>
-          </a:p>
-        </p:txBody>
-      </p:sp>
-      <p:sp>
-        <p:nvSpPr>
-          <p:cNvPr id="7" name="TextBox 6"/>
+              <a:t>Permiso antes de construir</a:t>
+            </a:r>
+          </a:p>
+        </p:txBody>
+      </p:sp>
+      <p:sp>
+        <p:nvSpPr>
+          <p:cNvPr id="7" name="Rounded Rectangle 6"/>
+          <p:cNvSpPr/>
+          <p:nvPr/>
+        </p:nvSpPr>
+        <p:spPr>
+          <a:xfrm>
+            <a:off x="868680" y="1627632"/>
+            <a:ext cx="2011680" cy="73152"/>
+          </a:xfrm>
+          <a:prstGeom prst="roundRect">
+            <a:avLst/>
+          </a:prstGeom>
+          <a:solidFill>
+            <a:srgbClr val="E8801A"/>
+          </a:solidFill>
+          <a:ln>
+            <a:noFill/>
+          </a:ln>
+          <a:effectLst/>
+        </p:spPr>
+        <p:style>
+          <a:lnRef idx="1">
+            <a:schemeClr val="accent1"/>
+          </a:lnRef>
+          <a:fillRef idx="3">
+            <a:schemeClr val="accent1"/>
+          </a:fillRef>
+          <a:effectRef idx="2">
+            <a:schemeClr val="accent1"/>
+          </a:effectRef>
+          <a:fontRef idx="minor">
+            <a:schemeClr val="lt1"/>
+          </a:fontRef>
+        </p:style>
+        <p:txBody>
+          <a:bodyPr rtlCol="0" anchor="ctr"/>
+          <a:lstStyle/>
+          <a:p>
+            <a:pPr algn="ctr"/>
+          </a:p>
+        </p:txBody>
+      </p:sp>
+      <p:sp>
+        <p:nvSpPr>
+          <p:cNvPr id="8" name="TextBox 7"/>
           <p:cNvSpPr txBox="1"/>
           <p:nvPr/>
         </p:nvSpPr>
         <p:spPr>
           <a:xfrm>
-            <a:off x="822960" y="1920240"/>
+            <a:off x="822960" y="1965960"/>
             <a:ext cx="4983480" cy="4206240"/>
           </a:xfrm>
           <a:prstGeom prst="rect">
@@ -8666,17 +9633,17 @@
           <a:p>
             <a:pPr>
               <a:spcAft>
-                <a:spcPts val="1000"/>
+                <a:spcPts val="1100"/>
               </a:spcAft>
             </a:pPr>
             <a:r>
               <a:rPr sz="1600" b="1" i="0">
                 <a:solidFill>
-                  <a:srgbClr val="2E3A80"/>
-                </a:solidFill>
-                <a:latin typeface="Montserrat"/>
-              </a:rPr>
-              <a:t>•  </a:t>
+                  <a:srgbClr val="E8801A"/>
+                </a:solidFill>
+                <a:latin typeface="Montserrat"/>
+              </a:rPr>
+              <a:t>▸  </a:t>
             </a:r>
             <a:r>
               <a:rPr sz="1600" b="0" i="0">
@@ -8685,23 +9652,23 @@
                 </a:solidFill>
                 <a:latin typeface="Montserrat"/>
               </a:rPr>
-              <a:t>Seguro: sin fugas</a:t>
+              <a:t>Autorización administrativa previa</a:t>
             </a:r>
           </a:p>
           <a:p>
             <a:pPr>
               <a:spcAft>
-                <a:spcPts val="1000"/>
+                <a:spcPts val="1100"/>
               </a:spcAft>
             </a:pPr>
             <a:r>
               <a:rPr sz="1600" b="1" i="0">
                 <a:solidFill>
-                  <a:srgbClr val="2E3A80"/>
-                </a:solidFill>
-                <a:latin typeface="Montserrat"/>
-              </a:rPr>
-              <a:t>•  </a:t>
+                  <a:srgbClr val="E8801A"/>
+                </a:solidFill>
+                <a:latin typeface="Montserrat"/>
+              </a:rPr>
+              <a:t>▸  </a:t>
             </a:r>
             <a:r>
               <a:rPr sz="1600" b="0" i="0">
@@ -8710,23 +9677,23 @@
                 </a:solidFill>
                 <a:latin typeface="Montserrat"/>
               </a:rPr>
-              <a:t>Continuo: sin cortes</a:t>
+              <a:t>Extensiones: memoria general de previsiones</a:t>
             </a:r>
           </a:p>
           <a:p>
             <a:pPr>
               <a:spcAft>
-                <a:spcPts val="1000"/>
+                <a:spcPts val="1100"/>
               </a:spcAft>
             </a:pPr>
             <a:r>
               <a:rPr sz="1600" b="1" i="0">
                 <a:solidFill>
-                  <a:srgbClr val="2E3A80"/>
-                </a:solidFill>
-                <a:latin typeface="Montserrat"/>
-              </a:rPr>
-              <a:t>•  </a:t>
+                  <a:srgbClr val="E8801A"/>
+                </a:solidFill>
+                <a:latin typeface="Montserrat"/>
+              </a:rPr>
+              <a:t>▸  </a:t>
             </a:r>
             <a:r>
               <a:rPr sz="1600" b="0" i="0">
@@ -8735,23 +9702,23 @@
                 </a:solidFill>
                 <a:latin typeface="Montserrat"/>
               </a:rPr>
-              <a:t>Dimensionar según la demanda</a:t>
+              <a:t>Primer trimestre: obras del año anterior</a:t>
             </a:r>
           </a:p>
           <a:p>
             <a:pPr>
               <a:spcAft>
-                <a:spcPts val="1000"/>
+                <a:spcPts val="1100"/>
               </a:spcAft>
             </a:pPr>
             <a:r>
               <a:rPr sz="1600" b="1" i="0">
                 <a:solidFill>
-                  <a:srgbClr val="2E3A80"/>
-                </a:solidFill>
-                <a:latin typeface="Montserrat"/>
-              </a:rPr>
-              <a:t>•  </a:t>
+                  <a:srgbClr val="E8801A"/>
+                </a:solidFill>
+                <a:latin typeface="Montserrat"/>
+              </a:rPr>
+              <a:t>▸  </a:t>
             </a:r>
             <a:r>
               <a:rPr sz="1600" b="0" i="0">
@@ -8760,14 +9727,14 @@
                 </a:solidFill>
                 <a:latin typeface="Montserrat"/>
               </a:rPr>
-              <a:t>Nivel socioeconómico y climatología</a:t>
-            </a:r>
-          </a:p>
-        </p:txBody>
-      </p:sp>
-      <p:sp>
-        <p:nvSpPr>
-          <p:cNvPr id="8" name="imgph" descr="IMGQ:engineer studying gas network plan office"/>
+              <a:t>Autoriza la Comunidad Autónoma</a:t>
+            </a:r>
+          </a:p>
+        </p:txBody>
+      </p:sp>
+      <p:sp>
+        <p:nvSpPr>
+          <p:cNvPr id="9" name="imgph" descr="IMGQ:official documents stamp approval desk"/>
           <p:cNvSpPr/>
           <p:nvPr/>
         </p:nvSpPr>
@@ -8813,7 +9780,7 @@
       </p:sp>
       <p:sp>
         <p:nvSpPr>
-          <p:cNvPr id="9" name="TextBox 8"/>
+          <p:cNvPr id="10" name="TextBox 9"/>
           <p:cNvSpPr txBox="1"/>
           <p:nvPr/>
         </p:nvSpPr>
@@ -8853,7 +9820,7 @@
                 </a:solidFill>
                 <a:latin typeface="Montserrat"/>
               </a:rPr>
-              <a:t>engineer studying gas network plan office</a:t>
+              <a:t>official documents stamp approval desk</a:t>
             </a:r>
           </a:p>
         </p:txBody>
@@ -8950,7 +9917,7 @@
                 </a:solidFill>
                 <a:latin typeface="Montserrat"/>
               </a:rPr>
-              <a:t>006 / 015</a:t>
+              <a:t>006 / 016</a:t>
             </a:r>
           </a:p>
         </p:txBody>
@@ -8998,7 +9965,7 @@
         <p:spPr>
           <a:xfrm>
             <a:off x="822960" y="457200"/>
-            <a:ext cx="8229600" cy="365760"/>
+            <a:ext cx="10058400" cy="365760"/>
           </a:xfrm>
           <a:prstGeom prst="rect">
             <a:avLst/>
@@ -9012,9 +9979,9 @@
           <a:lstStyle/>
           <a:p>
             <a:r>
-              <a:rPr sz="1200" b="1" i="0">
-                <a:solidFill>
-                  <a:srgbClr val="64748B"/>
+              <a:rPr sz="1300" b="1" i="0">
+                <a:solidFill>
+                  <a:srgbClr val="E8801A"/>
                 </a:solidFill>
                 <a:latin typeface="Montserrat"/>
               </a:rPr>
@@ -9046,26 +10013,70 @@
           <a:lstStyle/>
           <a:p>
             <a:r>
-              <a:rPr sz="2700" b="1" i="0">
+              <a:rPr sz="2800" b="1" i="0">
                 <a:solidFill>
                   <a:srgbClr val="1E2761"/>
                 </a:solidFill>
                 <a:latin typeface="Montserrat"/>
               </a:rPr>
-              <a:t>Qué se pone sobre la mesa</a:t>
-            </a:r>
-          </a:p>
-        </p:txBody>
-      </p:sp>
-      <p:sp>
-        <p:nvSpPr>
-          <p:cNvPr id="7" name="TextBox 6"/>
+              <a:t>Suministro seguro y continuo</a:t>
+            </a:r>
+          </a:p>
+        </p:txBody>
+      </p:sp>
+      <p:sp>
+        <p:nvSpPr>
+          <p:cNvPr id="7" name="Rounded Rectangle 6"/>
+          <p:cNvSpPr/>
+          <p:nvPr/>
+        </p:nvSpPr>
+        <p:spPr>
+          <a:xfrm>
+            <a:off x="868680" y="1627632"/>
+            <a:ext cx="2011680" cy="73152"/>
+          </a:xfrm>
+          <a:prstGeom prst="roundRect">
+            <a:avLst/>
+          </a:prstGeom>
+          <a:solidFill>
+            <a:srgbClr val="E8801A"/>
+          </a:solidFill>
+          <a:ln>
+            <a:noFill/>
+          </a:ln>
+          <a:effectLst/>
+        </p:spPr>
+        <p:style>
+          <a:lnRef idx="1">
+            <a:schemeClr val="accent1"/>
+          </a:lnRef>
+          <a:fillRef idx="3">
+            <a:schemeClr val="accent1"/>
+          </a:fillRef>
+          <a:effectRef idx="2">
+            <a:schemeClr val="accent1"/>
+          </a:effectRef>
+          <a:fontRef idx="minor">
+            <a:schemeClr val="lt1"/>
+          </a:fontRef>
+        </p:style>
+        <p:txBody>
+          <a:bodyPr rtlCol="0" anchor="ctr"/>
+          <a:lstStyle/>
+          <a:p>
+            <a:pPr algn="ctr"/>
+          </a:p>
+        </p:txBody>
+      </p:sp>
+      <p:sp>
+        <p:nvSpPr>
+          <p:cNvPr id="8" name="TextBox 7"/>
           <p:cNvSpPr txBox="1"/>
           <p:nvPr/>
         </p:nvSpPr>
         <p:spPr>
           <a:xfrm>
-            <a:off x="822960" y="1920240"/>
+            <a:off x="822960" y="1965960"/>
             <a:ext cx="4983480" cy="4206240"/>
           </a:xfrm>
           <a:prstGeom prst="rect">
@@ -9081,17 +10092,17 @@
           <a:p>
             <a:pPr>
               <a:spcAft>
-                <a:spcPts val="1000"/>
+                <a:spcPts val="1100"/>
               </a:spcAft>
             </a:pPr>
             <a:r>
               <a:rPr sz="1600" b="1" i="0">
                 <a:solidFill>
-                  <a:srgbClr val="2E3A80"/>
-                </a:solidFill>
-                <a:latin typeface="Montserrat"/>
-              </a:rPr>
-              <a:t>•  </a:t>
+                  <a:srgbClr val="E8801A"/>
+                </a:solidFill>
+                <a:latin typeface="Montserrat"/>
+              </a:rPr>
+              <a:t>▸  </a:t>
             </a:r>
             <a:r>
               <a:rPr sz="1600" b="0" i="0">
@@ -9100,23 +10111,23 @@
                 </a:solidFill>
                 <a:latin typeface="Montserrat"/>
               </a:rPr>
-              <a:t>Características físico-químicas del gas</a:t>
+              <a:t>Seguro: sin fugas</a:t>
             </a:r>
           </a:p>
           <a:p>
             <a:pPr>
               <a:spcAft>
-                <a:spcPts val="1000"/>
+                <a:spcPts val="1100"/>
               </a:spcAft>
             </a:pPr>
             <a:r>
               <a:rPr sz="1600" b="1" i="0">
                 <a:solidFill>
-                  <a:srgbClr val="2E3A80"/>
-                </a:solidFill>
-                <a:latin typeface="Montserrat"/>
-              </a:rPr>
-              <a:t>•  </a:t>
+                  <a:srgbClr val="E8801A"/>
+                </a:solidFill>
+                <a:latin typeface="Montserrat"/>
+              </a:rPr>
+              <a:t>▸  </a:t>
             </a:r>
             <a:r>
               <a:rPr sz="1600" b="0" i="0">
@@ -9125,23 +10136,23 @@
                 </a:solidFill>
                 <a:latin typeface="Montserrat"/>
               </a:rPr>
-              <a:t>Presión de diseño</a:t>
+              <a:t>Continuo: sin cortes</a:t>
             </a:r>
           </a:p>
           <a:p>
             <a:pPr>
               <a:spcAft>
-                <a:spcPts val="1000"/>
+                <a:spcPts val="1100"/>
               </a:spcAft>
             </a:pPr>
             <a:r>
               <a:rPr sz="1600" b="1" i="0">
                 <a:solidFill>
-                  <a:srgbClr val="2E3A80"/>
-                </a:solidFill>
-                <a:latin typeface="Montserrat"/>
-              </a:rPr>
-              <a:t>•  </a:t>
+                  <a:srgbClr val="E8801A"/>
+                </a:solidFill>
+                <a:latin typeface="Montserrat"/>
+              </a:rPr>
+              <a:t>▸  </a:t>
             </a:r>
             <a:r>
               <a:rPr sz="1600" b="0" i="0">
@@ -9150,23 +10161,23 @@
                 </a:solidFill>
                 <a:latin typeface="Montserrat"/>
               </a:rPr>
-              <a:t>Pérdida de carga admisible</a:t>
+              <a:t>Dimensionar según la demanda</a:t>
             </a:r>
           </a:p>
           <a:p>
             <a:pPr>
               <a:spcAft>
-                <a:spcPts val="1000"/>
+                <a:spcPts val="1100"/>
               </a:spcAft>
             </a:pPr>
             <a:r>
               <a:rPr sz="1600" b="1" i="0">
                 <a:solidFill>
-                  <a:srgbClr val="2E3A80"/>
-                </a:solidFill>
-                <a:latin typeface="Montserrat"/>
-              </a:rPr>
-              <a:t>•  </a:t>
+                  <a:srgbClr val="E8801A"/>
+                </a:solidFill>
+                <a:latin typeface="Montserrat"/>
+              </a:rPr>
+              <a:t>▸  </a:t>
             </a:r>
             <a:r>
               <a:rPr sz="1600" b="0" i="0">
@@ -9175,14 +10186,14 @@
                 </a:solidFill>
                 <a:latin typeface="Montserrat"/>
               </a:rPr>
-              <a:t>Operación y mantenimiento</a:t>
-            </a:r>
-          </a:p>
-        </p:txBody>
-      </p:sp>
-      <p:sp>
-        <p:nvSpPr>
-          <p:cNvPr id="8" name="imgph" descr="IMGQ:engineer technical drawing pipes ruler"/>
+              <a:t>Nivel socioeconómico y climatología</a:t>
+            </a:r>
+          </a:p>
+        </p:txBody>
+      </p:sp>
+      <p:sp>
+        <p:nvSpPr>
+          <p:cNvPr id="9" name="imgph" descr="IMGQ:engineer studying gas network plan office"/>
           <p:cNvSpPr/>
           <p:nvPr/>
         </p:nvSpPr>
@@ -9228,7 +10239,7 @@
       </p:sp>
       <p:sp>
         <p:nvSpPr>
-          <p:cNvPr id="9" name="TextBox 8"/>
+          <p:cNvPr id="10" name="TextBox 9"/>
           <p:cNvSpPr txBox="1"/>
           <p:nvPr/>
         </p:nvSpPr>
@@ -9268,7 +10279,7 @@
                 </a:solidFill>
                 <a:latin typeface="Montserrat"/>
               </a:rPr>
-              <a:t>engineer technical drawing pipes ruler</a:t>
+              <a:t>engineer studying gas network plan office</a:t>
             </a:r>
           </a:p>
         </p:txBody>
@@ -9365,7 +10376,7 @@
                 </a:solidFill>
                 <a:latin typeface="Montserrat"/>
               </a:rPr>
-              <a:t>007 / 015</a:t>
+              <a:t>007 / 016</a:t>
             </a:r>
           </a:p>
         </p:txBody>
@@ -9413,7 +10424,7 @@
         <p:spPr>
           <a:xfrm>
             <a:off x="822960" y="457200"/>
-            <a:ext cx="8229600" cy="365760"/>
+            <a:ext cx="10058400" cy="365760"/>
           </a:xfrm>
           <a:prstGeom prst="rect">
             <a:avLst/>
@@ -9427,13 +10438,13 @@
           <a:lstStyle/>
           <a:p>
             <a:r>
-              <a:rPr sz="1200" b="1" i="0">
-                <a:solidFill>
-                  <a:srgbClr val="64748B"/>
-                </a:solidFill>
-                <a:latin typeface="Montserrat"/>
-              </a:rPr>
-              <a:t>APARTADO 3 · NORMAS DE DISEÑO</a:t>
+              <a:rPr sz="1300" b="1" i="0">
+                <a:solidFill>
+                  <a:srgbClr val="E8801A"/>
+                </a:solidFill>
+                <a:latin typeface="Montserrat"/>
+              </a:rPr>
+              <a:t>APARTADO 3 · DISEÑO</a:t>
             </a:r>
           </a:p>
         </p:txBody>
@@ -9461,26 +10472,70 @@
           <a:lstStyle/>
           <a:p>
             <a:r>
-              <a:rPr sz="2700" b="1" i="0">
+              <a:rPr sz="2800" b="1" i="0">
                 <a:solidFill>
                   <a:srgbClr val="1E2761"/>
                 </a:solidFill>
                 <a:latin typeface="Montserrat"/>
               </a:rPr>
-              <a:t>Las siete normas</a:t>
-            </a:r>
-          </a:p>
-        </p:txBody>
-      </p:sp>
-      <p:sp>
-        <p:nvSpPr>
-          <p:cNvPr id="7" name="TextBox 6"/>
+              <a:t>Qué se pone sobre la mesa</a:t>
+            </a:r>
+          </a:p>
+        </p:txBody>
+      </p:sp>
+      <p:sp>
+        <p:nvSpPr>
+          <p:cNvPr id="7" name="Rounded Rectangle 6"/>
+          <p:cNvSpPr/>
+          <p:nvPr/>
+        </p:nvSpPr>
+        <p:spPr>
+          <a:xfrm>
+            <a:off x="868680" y="1627632"/>
+            <a:ext cx="2011680" cy="73152"/>
+          </a:xfrm>
+          <a:prstGeom prst="roundRect">
+            <a:avLst/>
+          </a:prstGeom>
+          <a:solidFill>
+            <a:srgbClr val="E8801A"/>
+          </a:solidFill>
+          <a:ln>
+            <a:noFill/>
+          </a:ln>
+          <a:effectLst/>
+        </p:spPr>
+        <p:style>
+          <a:lnRef idx="1">
+            <a:schemeClr val="accent1"/>
+          </a:lnRef>
+          <a:fillRef idx="3">
+            <a:schemeClr val="accent1"/>
+          </a:fillRef>
+          <a:effectRef idx="2">
+            <a:schemeClr val="accent1"/>
+          </a:effectRef>
+          <a:fontRef idx="minor">
+            <a:schemeClr val="lt1"/>
+          </a:fontRef>
+        </p:style>
+        <p:txBody>
+          <a:bodyPr rtlCol="0" anchor="ctr"/>
+          <a:lstStyle/>
+          <a:p>
+            <a:pPr algn="ctr"/>
+          </a:p>
+        </p:txBody>
+      </p:sp>
+      <p:sp>
+        <p:nvSpPr>
+          <p:cNvPr id="8" name="TextBox 7"/>
           <p:cNvSpPr txBox="1"/>
           <p:nvPr/>
         </p:nvSpPr>
         <p:spPr>
           <a:xfrm>
-            <a:off x="822960" y="1920240"/>
+            <a:off x="822960" y="1965960"/>
             <a:ext cx="4983480" cy="4206240"/>
           </a:xfrm>
           <a:prstGeom prst="rect">
@@ -9496,17 +10551,17 @@
           <a:p>
             <a:pPr>
               <a:spcAft>
-                <a:spcPts val="1000"/>
+                <a:spcPts val="1100"/>
               </a:spcAft>
             </a:pPr>
             <a:r>
               <a:rPr sz="1600" b="1" i="0">
                 <a:solidFill>
-                  <a:srgbClr val="2E3A80"/>
-                </a:solidFill>
-                <a:latin typeface="Montserrat"/>
-              </a:rPr>
-              <a:t>•  </a:t>
+                  <a:srgbClr val="E8801A"/>
+                </a:solidFill>
+                <a:latin typeface="Montserrat"/>
+              </a:rPr>
+              <a:t>▸  </a:t>
             </a:r>
             <a:r>
               <a:rPr sz="1600" b="0" i="0">
@@ -9515,23 +10570,23 @@
                 </a:solidFill>
                 <a:latin typeface="Montserrat"/>
               </a:rPr>
-              <a:t>UNE-EN 12007 · 1594 · 12186 · 12327</a:t>
+              <a:t>Características físico-químicas del gas</a:t>
             </a:r>
           </a:p>
           <a:p>
             <a:pPr>
               <a:spcAft>
-                <a:spcPts val="1000"/>
+                <a:spcPts val="1100"/>
               </a:spcAft>
             </a:pPr>
             <a:r>
               <a:rPr sz="1600" b="1" i="0">
                 <a:solidFill>
-                  <a:srgbClr val="2E3A80"/>
-                </a:solidFill>
-                <a:latin typeface="Montserrat"/>
-              </a:rPr>
-              <a:t>•  </a:t>
+                  <a:srgbClr val="E8801A"/>
+                </a:solidFill>
+                <a:latin typeface="Montserrat"/>
+              </a:rPr>
+              <a:t>▸  </a:t>
             </a:r>
             <a:r>
               <a:rPr sz="1600" b="0" i="0">
@@ -9540,23 +10595,23 @@
                 </a:solidFill>
                 <a:latin typeface="Montserrat"/>
               </a:rPr>
-              <a:t>UNE 60310 · 60311 · 60312</a:t>
+              <a:t>Presión de diseño</a:t>
             </a:r>
           </a:p>
           <a:p>
             <a:pPr>
               <a:spcAft>
-                <a:spcPts val="1000"/>
+                <a:spcPts val="1100"/>
               </a:spcAft>
             </a:pPr>
             <a:r>
               <a:rPr sz="1600" b="1" i="0">
                 <a:solidFill>
-                  <a:srgbClr val="2E3A80"/>
-                </a:solidFill>
-                <a:latin typeface="Montserrat"/>
-              </a:rPr>
-              <a:t>•  </a:t>
+                  <a:srgbClr val="E8801A"/>
+                </a:solidFill>
+                <a:latin typeface="Montserrat"/>
+              </a:rPr>
+              <a:t>▸  </a:t>
             </a:r>
             <a:r>
               <a:rPr sz="1600" b="0" i="0">
@@ -9565,14 +10620,39 @@
                 </a:solidFill>
                 <a:latin typeface="Montserrat"/>
               </a:rPr>
-              <a:t>Se aplican según la presión de diseño</a:t>
-            </a:r>
-          </a:p>
-        </p:txBody>
-      </p:sp>
-      <p:sp>
-        <p:nvSpPr>
-          <p:cNvPr id="8" name="imgph" descr="IMGQ:technical standards binders shelf office"/>
+              <a:t>Pérdida de carga admisible</a:t>
+            </a:r>
+          </a:p>
+          <a:p>
+            <a:pPr>
+              <a:spcAft>
+                <a:spcPts val="1100"/>
+              </a:spcAft>
+            </a:pPr>
+            <a:r>
+              <a:rPr sz="1600" b="1" i="0">
+                <a:solidFill>
+                  <a:srgbClr val="E8801A"/>
+                </a:solidFill>
+                <a:latin typeface="Montserrat"/>
+              </a:rPr>
+              <a:t>▸  </a:t>
+            </a:r>
+            <a:r>
+              <a:rPr sz="1600" b="0" i="0">
+                <a:solidFill>
+                  <a:srgbClr val="1B2330"/>
+                </a:solidFill>
+                <a:latin typeface="Montserrat"/>
+              </a:rPr>
+              <a:t>Operación y mantenimiento</a:t>
+            </a:r>
+          </a:p>
+        </p:txBody>
+      </p:sp>
+      <p:sp>
+        <p:nvSpPr>
+          <p:cNvPr id="9" name="imgph" descr="IMGQ:engineer technical drawing pipes ruler"/>
           <p:cNvSpPr/>
           <p:nvPr/>
         </p:nvSpPr>
@@ -9618,7 +10698,7 @@
       </p:sp>
       <p:sp>
         <p:nvSpPr>
-          <p:cNvPr id="9" name="TextBox 8"/>
+          <p:cNvPr id="10" name="TextBox 9"/>
           <p:cNvSpPr txBox="1"/>
           <p:nvPr/>
         </p:nvSpPr>
@@ -9658,7 +10738,7 @@
                 </a:solidFill>
                 <a:latin typeface="Montserrat"/>
               </a:rPr>
-              <a:t>technical standards binders shelf office</a:t>
+              <a:t>engineer technical drawing pipes ruler</a:t>
             </a:r>
           </a:p>
         </p:txBody>
@@ -9755,7 +10835,7 @@
                 </a:solidFill>
                 <a:latin typeface="Montserrat"/>
               </a:rPr>
-              <a:t>008 / 015</a:t>
+              <a:t>008 / 016</a:t>
             </a:r>
           </a:p>
         </p:txBody>
@@ -9803,7 +10883,7 @@
         <p:spPr>
           <a:xfrm>
             <a:off x="822960" y="457200"/>
-            <a:ext cx="8229600" cy="365760"/>
+            <a:ext cx="10058400" cy="365760"/>
           </a:xfrm>
           <a:prstGeom prst="rect">
             <a:avLst/>
@@ -9817,13 +10897,13 @@
           <a:lstStyle/>
           <a:p>
             <a:r>
-              <a:rPr sz="1200" b="1" i="0">
-                <a:solidFill>
-                  <a:srgbClr val="64748B"/>
-                </a:solidFill>
-                <a:latin typeface="Montserrat"/>
-              </a:rPr>
-              <a:t>APARTADO 4 · EJECUCIÓN</a:t>
+              <a:rPr sz="1300" b="1" i="0">
+                <a:solidFill>
+                  <a:srgbClr val="E8801A"/>
+                </a:solidFill>
+                <a:latin typeface="Montserrat"/>
+              </a:rPr>
+              <a:t>APARTADO 3 · NORMAS DE DISEÑO</a:t>
             </a:r>
           </a:p>
         </p:txBody>
@@ -9851,26 +10931,70 @@
           <a:lstStyle/>
           <a:p>
             <a:r>
-              <a:rPr sz="2700" b="1" i="0">
+              <a:rPr sz="2800" b="1" i="0">
                 <a:solidFill>
                   <a:srgbClr val="1E2761"/>
                 </a:solidFill>
                 <a:latin typeface="Montserrat"/>
               </a:rPr>
-              <a:t>Montar sin dañar</a:t>
-            </a:r>
-          </a:p>
-        </p:txBody>
-      </p:sp>
-      <p:sp>
-        <p:nvSpPr>
-          <p:cNvPr id="7" name="TextBox 6"/>
+              <a:t>Las siete normas</a:t>
+            </a:r>
+          </a:p>
+        </p:txBody>
+      </p:sp>
+      <p:sp>
+        <p:nvSpPr>
+          <p:cNvPr id="7" name="Rounded Rectangle 6"/>
+          <p:cNvSpPr/>
+          <p:nvPr/>
+        </p:nvSpPr>
+        <p:spPr>
+          <a:xfrm>
+            <a:off x="868680" y="1627632"/>
+            <a:ext cx="2011680" cy="73152"/>
+          </a:xfrm>
+          <a:prstGeom prst="roundRect">
+            <a:avLst/>
+          </a:prstGeom>
+          <a:solidFill>
+            <a:srgbClr val="E8801A"/>
+          </a:solidFill>
+          <a:ln>
+            <a:noFill/>
+          </a:ln>
+          <a:effectLst/>
+        </p:spPr>
+        <p:style>
+          <a:lnRef idx="1">
+            <a:schemeClr val="accent1"/>
+          </a:lnRef>
+          <a:fillRef idx="3">
+            <a:schemeClr val="accent1"/>
+          </a:fillRef>
+          <a:effectRef idx="2">
+            <a:schemeClr val="accent1"/>
+          </a:effectRef>
+          <a:fontRef idx="minor">
+            <a:schemeClr val="lt1"/>
+          </a:fontRef>
+        </p:style>
+        <p:txBody>
+          <a:bodyPr rtlCol="0" anchor="ctr"/>
+          <a:lstStyle/>
+          <a:p>
+            <a:pPr algn="ctr"/>
+          </a:p>
+        </p:txBody>
+      </p:sp>
+      <p:sp>
+        <p:nvSpPr>
+          <p:cNvPr id="8" name="TextBox 7"/>
           <p:cNvSpPr txBox="1"/>
           <p:nvPr/>
         </p:nvSpPr>
         <p:spPr>
           <a:xfrm>
-            <a:off x="822960" y="1920240"/>
+            <a:off x="822960" y="1965960"/>
             <a:ext cx="4983480" cy="4206240"/>
           </a:xfrm>
           <a:prstGeom prst="rect">
@@ -9886,17 +11010,17 @@
           <a:p>
             <a:pPr>
               <a:spcAft>
-                <a:spcPts val="1000"/>
+                <a:spcPts val="1100"/>
               </a:spcAft>
             </a:pPr>
             <a:r>
               <a:rPr sz="1600" b="1" i="0">
                 <a:solidFill>
-                  <a:srgbClr val="2E3A80"/>
-                </a:solidFill>
-                <a:latin typeface="Montserrat"/>
-              </a:rPr>
-              <a:t>•  </a:t>
+                  <a:srgbClr val="E8801A"/>
+                </a:solidFill>
+                <a:latin typeface="Montserrat"/>
+              </a:rPr>
+              <a:t>▸  </a:t>
             </a:r>
             <a:r>
               <a:rPr sz="1600" b="0" i="0">
@@ -9905,23 +11029,23 @@
                 </a:solidFill>
                 <a:latin typeface="Montserrat"/>
               </a:rPr>
-              <a:t>Bajo responsabilidad del titular</a:t>
+              <a:t>UNE-EN 12007 · 1594 · 12186 · 12327</a:t>
             </a:r>
           </a:p>
           <a:p>
             <a:pPr>
               <a:spcAft>
-                <a:spcPts val="1000"/>
+                <a:spcPts val="1100"/>
               </a:spcAft>
             </a:pPr>
             <a:r>
               <a:rPr sz="1600" b="1" i="0">
                 <a:solidFill>
-                  <a:srgbClr val="2E3A80"/>
-                </a:solidFill>
-                <a:latin typeface="Montserrat"/>
-              </a:rPr>
-              <a:t>•  </a:t>
+                  <a:srgbClr val="E8801A"/>
+                </a:solidFill>
+                <a:latin typeface="Montserrat"/>
+              </a:rPr>
+              <a:t>▸  </a:t>
             </a:r>
             <a:r>
               <a:rPr sz="1600" b="0" i="0">
@@ -9930,23 +11054,23 @@
                 </a:solidFill>
                 <a:latin typeface="Montserrat"/>
               </a:rPr>
-              <a:t>No dañar otras redes enterradas</a:t>
+              <a:t>UNE 60310 · 60311 · 60312</a:t>
             </a:r>
           </a:p>
           <a:p>
             <a:pPr>
               <a:spcAft>
-                <a:spcPts val="1000"/>
+                <a:spcPts val="1100"/>
               </a:spcAft>
             </a:pPr>
             <a:r>
               <a:rPr sz="1600" b="1" i="0">
                 <a:solidFill>
-                  <a:srgbClr val="2E3A80"/>
-                </a:solidFill>
-                <a:latin typeface="Montserrat"/>
-              </a:rPr>
-              <a:t>•  </a:t>
+                  <a:srgbClr val="E8801A"/>
+                </a:solidFill>
+                <a:latin typeface="Montserrat"/>
+              </a:rPr>
+              <a:t>▸  </a:t>
             </a:r>
             <a:r>
               <a:rPr sz="1600" b="0" i="0">
@@ -9955,14 +11079,14 @@
                 </a:solidFill>
                 <a:latin typeface="Montserrat"/>
               </a:rPr>
-              <a:t>Conectar sin cortar el suministro</a:t>
-            </a:r>
-          </a:p>
-        </p:txBody>
-      </p:sp>
-      <p:sp>
-        <p:nvSpPr>
-          <p:cNvPr id="8" name="imgph" descr="IMGQ:excavator digging trench underground pipes"/>
+              <a:t>Se aplican según la presión de diseño</a:t>
+            </a:r>
+          </a:p>
+        </p:txBody>
+      </p:sp>
+      <p:sp>
+        <p:nvSpPr>
+          <p:cNvPr id="9" name="imgph" descr="IMGQ:technical standards binders shelf office"/>
           <p:cNvSpPr/>
           <p:nvPr/>
         </p:nvSpPr>
@@ -10008,7 +11132,7 @@
       </p:sp>
       <p:sp>
         <p:nvSpPr>
-          <p:cNvPr id="9" name="TextBox 8"/>
+          <p:cNvPr id="10" name="TextBox 9"/>
           <p:cNvSpPr txBox="1"/>
           <p:nvPr/>
         </p:nvSpPr>
@@ -10048,7 +11172,7 @@
                 </a:solidFill>
                 <a:latin typeface="Montserrat"/>
               </a:rPr>
-              <a:t>excavator digging trench underground pipes</a:t>
+              <a:t>technical standards binders shelf office</a:t>
             </a:r>
           </a:p>
         </p:txBody>
@@ -10145,7 +11269,7 @@
                 </a:solidFill>
                 <a:latin typeface="Montserrat"/>
               </a:rPr>
-              <a:t>009 / 015</a:t>
+              <a:t>009 / 016</a:t>
             </a:r>
           </a:p>
         </p:txBody>
@@ -10193,7 +11317,7 @@
         <p:spPr>
           <a:xfrm>
             <a:off x="822960" y="457200"/>
-            <a:ext cx="8229600" cy="365760"/>
+            <a:ext cx="10058400" cy="365760"/>
           </a:xfrm>
           <a:prstGeom prst="rect">
             <a:avLst/>
@@ -10207,13 +11331,13 @@
           <a:lstStyle/>
           <a:p>
             <a:r>
-              <a:rPr sz="1200" b="1" i="0">
-                <a:solidFill>
-                  <a:srgbClr val="64748B"/>
-                </a:solidFill>
-                <a:latin typeface="Montserrat"/>
-              </a:rPr>
-              <a:t>APARTADO 4 · OBRAS ESPECIALES</a:t>
+              <a:rPr sz="1300" b="1" i="0">
+                <a:solidFill>
+                  <a:srgbClr val="E8801A"/>
+                </a:solidFill>
+                <a:latin typeface="Montserrat"/>
+              </a:rPr>
+              <a:t>APARTADO 4 · EJECUCIÓN</a:t>
             </a:r>
           </a:p>
         </p:txBody>
@@ -10241,26 +11365,70 @@
           <a:lstStyle/>
           <a:p>
             <a:r>
-              <a:rPr sz="2700" b="1" i="0">
+              <a:rPr sz="2800" b="1" i="0">
                 <a:solidFill>
                   <a:srgbClr val="1E2761"/>
                 </a:solidFill>
                 <a:latin typeface="Montserrat"/>
               </a:rPr>
-              <a:t>Cruces y obstáculos</a:t>
-            </a:r>
-          </a:p>
-        </p:txBody>
-      </p:sp>
-      <p:sp>
-        <p:nvSpPr>
-          <p:cNvPr id="7" name="TextBox 6"/>
+              <a:t>Montar sin dañar</a:t>
+            </a:r>
+          </a:p>
+        </p:txBody>
+      </p:sp>
+      <p:sp>
+        <p:nvSpPr>
+          <p:cNvPr id="7" name="Rounded Rectangle 6"/>
+          <p:cNvSpPr/>
+          <p:nvPr/>
+        </p:nvSpPr>
+        <p:spPr>
+          <a:xfrm>
+            <a:off x="868680" y="1627632"/>
+            <a:ext cx="2011680" cy="73152"/>
+          </a:xfrm>
+          <a:prstGeom prst="roundRect">
+            <a:avLst/>
+          </a:prstGeom>
+          <a:solidFill>
+            <a:srgbClr val="E8801A"/>
+          </a:solidFill>
+          <a:ln>
+            <a:noFill/>
+          </a:ln>
+          <a:effectLst/>
+        </p:spPr>
+        <p:style>
+          <a:lnRef idx="1">
+            <a:schemeClr val="accent1"/>
+          </a:lnRef>
+          <a:fillRef idx="3">
+            <a:schemeClr val="accent1"/>
+          </a:fillRef>
+          <a:effectRef idx="2">
+            <a:schemeClr val="accent1"/>
+          </a:effectRef>
+          <a:fontRef idx="minor">
+            <a:schemeClr val="lt1"/>
+          </a:fontRef>
+        </p:style>
+        <p:txBody>
+          <a:bodyPr rtlCol="0" anchor="ctr"/>
+          <a:lstStyle/>
+          <a:p>
+            <a:pPr algn="ctr"/>
+          </a:p>
+        </p:txBody>
+      </p:sp>
+      <p:sp>
+        <p:nvSpPr>
+          <p:cNvPr id="8" name="TextBox 7"/>
           <p:cNvSpPr txBox="1"/>
           <p:nvPr/>
         </p:nvSpPr>
         <p:spPr>
           <a:xfrm>
-            <a:off x="822960" y="1920240"/>
+            <a:off x="822960" y="1965960"/>
             <a:ext cx="4983480" cy="4206240"/>
           </a:xfrm>
           <a:prstGeom prst="rect">
@@ -10276,17 +11444,17 @@
           <a:p>
             <a:pPr>
               <a:spcAft>
-                <a:spcPts val="1000"/>
+                <a:spcPts val="1100"/>
               </a:spcAft>
             </a:pPr>
             <a:r>
               <a:rPr sz="1600" b="1" i="0">
                 <a:solidFill>
-                  <a:srgbClr val="2E3A80"/>
-                </a:solidFill>
-                <a:latin typeface="Montserrat"/>
-              </a:rPr>
-              <a:t>•  </a:t>
+                  <a:srgbClr val="E8801A"/>
+                </a:solidFill>
+                <a:latin typeface="Montserrat"/>
+              </a:rPr>
+              <a:t>▸  </a:t>
             </a:r>
             <a:r>
               <a:rPr sz="1600" b="0" i="0">
@@ -10295,23 +11463,23 @@
                 </a:solidFill>
                 <a:latin typeface="Montserrat"/>
               </a:rPr>
-              <a:t>Carretera, río, ferrocarril, puente</a:t>
+              <a:t>Bajo responsabilidad del titular</a:t>
             </a:r>
           </a:p>
           <a:p>
             <a:pPr>
               <a:spcAft>
-                <a:spcPts val="1000"/>
+                <a:spcPts val="1100"/>
               </a:spcAft>
             </a:pPr>
             <a:r>
               <a:rPr sz="1600" b="1" i="0">
                 <a:solidFill>
-                  <a:srgbClr val="2E3A80"/>
-                </a:solidFill>
-                <a:latin typeface="Montserrat"/>
-              </a:rPr>
-              <a:t>•  </a:t>
+                  <a:srgbClr val="E8801A"/>
+                </a:solidFill>
+                <a:latin typeface="Montserrat"/>
+              </a:rPr>
+              <a:t>▸  </a:t>
             </a:r>
             <a:r>
               <a:rPr sz="1600" b="0" i="0">
@@ -10320,23 +11488,23 @@
                 </a:solidFill>
                 <a:latin typeface="Montserrat"/>
               </a:rPr>
-              <a:t>Permiso del organismo afectado</a:t>
+              <a:t>No dañar otras redes enterradas</a:t>
             </a:r>
           </a:p>
           <a:p>
             <a:pPr>
               <a:spcAft>
-                <a:spcPts val="1000"/>
+                <a:spcPts val="1100"/>
               </a:spcAft>
             </a:pPr>
             <a:r>
               <a:rPr sz="1600" b="1" i="0">
                 <a:solidFill>
-                  <a:srgbClr val="2E3A80"/>
-                </a:solidFill>
-                <a:latin typeface="Montserrat"/>
-              </a:rPr>
-              <a:t>•  </a:t>
+                  <a:srgbClr val="E8801A"/>
+                </a:solidFill>
+                <a:latin typeface="Montserrat"/>
+              </a:rPr>
+              <a:t>▸  </a:t>
             </a:r>
             <a:r>
               <a:rPr sz="1600" b="0" i="0">
@@ -10345,14 +11513,14 @@
                 </a:solidFill>
                 <a:latin typeface="Montserrat"/>
               </a:rPr>
-              <a:t>Técnicas alternativas, sin abrir zanja</a:t>
-            </a:r>
-          </a:p>
-        </p:txBody>
-      </p:sp>
-      <p:sp>
-        <p:nvSpPr>
-          <p:cNvPr id="8" name="imgph" descr="IMGQ:horizontal directional drilling pipeline road"/>
+              <a:t>Conectar sin cortar el suministro</a:t>
+            </a:r>
+          </a:p>
+        </p:txBody>
+      </p:sp>
+      <p:sp>
+        <p:nvSpPr>
+          <p:cNvPr id="9" name="imgph" descr="IMGQ:excavator digging trench underground pipes"/>
           <p:cNvSpPr/>
           <p:nvPr/>
         </p:nvSpPr>
@@ -10398,7 +11566,7 @@
       </p:sp>
       <p:sp>
         <p:nvSpPr>
-          <p:cNvPr id="9" name="TextBox 8"/>
+          <p:cNvPr id="10" name="TextBox 9"/>
           <p:cNvSpPr txBox="1"/>
           <p:nvPr/>
         </p:nvSpPr>
@@ -10438,7 +11606,7 @@
                 </a:solidFill>
                 <a:latin typeface="Montserrat"/>
               </a:rPr>
-              <a:t>horizontal directional drilling pipeline road</a:t>
+              <a:t>excavator digging trench underground pipes</a:t>
             </a:r>
           </a:p>
         </p:txBody>

--- a/Curso Gas B/01 - ITC-ICG 01 - Distribucion por canalizacion/01 - ITC-ICG 01 - Distribucion por canalizacion - Vídeo 1.pptx
+++ b/Curso Gas B/01 - ITC-ICG 01 - Distribucion por canalizacion/01 - ITC-ICG 01 - Distribucion por canalizacion - Vídeo 1.pptx
@@ -21,6 +21,12 @@
     <p:sldId id="269" r:id="rId21"/>
     <p:sldId id="270" r:id="rId22"/>
     <p:sldId id="271" r:id="rId23"/>
+    <p:sldId id="272" r:id="rId24"/>
+    <p:sldId id="273" r:id="rId25"/>
+    <p:sldId id="274" r:id="rId26"/>
+    <p:sldId id="275" r:id="rId27"/>
+    <p:sldId id="276" r:id="rId28"/>
+    <p:sldId id="277" r:id="rId29"/>
   </p:sldIdLst>
   <p:sldSz cx="12191695" cy="6858000" type="screen4x3"/>
   <p:notesSz cx="6858000" cy="9144000"/>
@@ -592,12 +598,12 @@
           <a:lstStyle/>
           <a:p>
             <a:r>
-              <a:t>N1: ¿Y qué pasa cuando la tubería tiene que cruzar una carretera o un río? Ahí no puedes abrir zanja y ya está, ¿no?</a:t>
-            </a:r>
-          </a:p>
-          <a:p>
-            <a:r>
-              <a:t>N2: Exacto, eso son obras especiales y tienen reglas propias. La lista de obstáculos que la ITC llama especiales es cerrada, memorízala: carretera, curso de agua, ferrocarril y puente. En todos esos casos hace falta autorización del organismo afectado, es decir, del que manda en ese sitio: la administración de carreteras si cruzas una vía, la confederación hidrográfica si cruzas un río, la autoridad de ferrocarriles si cruzas las vías. Y la forma de cruzar tampoco es a lo bruto: se prefieren técnicas de construcción alternativas. La típica es la perforación horizontal, que consiste en pasar el tubo por debajo del obstáculo taladrando sin levantar la calzada, para no cortar el tráfico ni destrozar el firme. La idea resumida en una frase: cruzo algo importante, pido permiso a su dueño y uso la técnica que menos moleste al servicio que hay encima.</a:t>
+              <a:t>N1: Son siete normas de diseño. ¿De verdad tengo que aprendérmelas todas?</a:t>
+            </a:r>
+          </a:p>
+          <a:p>
+            <a:r>
+              <a:t>N2: Tranquilo, no hay que saberse qué dice cada una por dentro; hay que reconocerlas cuando aparecen en una lista, que es como te lo van a preguntar. Y para reconocerlas, un truco de bloques. Por un lado, las que empiezan por une e ene: la doce mil siete, la mil quinientos noventa y cuatro, la doce mil ciento ochenta y seis y la doce mil trescientos veintisiete. Son de origen europeo y regulan las redes según la presión. Por otro lado, y estas son las importantes, tres normas españolas que van a ser tus viejas conocidas: la sesenta mil trescientos diez, la sesenta mil trescientos once y la sesenta mil trescientos doce. Llámalas las tres hermanas seiscientas. Y presta atención, porque no aparecen solo aquí: vas a ver estas tres una y otra vez en toda la ITC, para el diseño, para las pruebas, para la operación y para el mantenimiento. Regla de examen: si te ponen una lista de normas de canalización y tienes que elegir, esas tres seiscientas casi seguro que están dentro. Además, cuál se aplica no es al azar: depende de la presión de diseño de la red.</a:t>
             </a:r>
           </a:p>
         </p:txBody>
@@ -667,12 +673,12 @@
           <a:lstStyle/>
           <a:p>
             <a:r>
-              <a:t>N1: Antes de soltar el gas, ¿qué hay que comprobar? Supongo que que no haya fugas.</a:t>
-            </a:r>
-          </a:p>
-          <a:p>
-            <a:r>
-              <a:t>N2: Eso, y una cosa más, porque son dos pruebas distintas y mucha gente las confunde. La prueba de resistencia comprueba que la tubería aguanta la presión sin reventar ni deformarse; en llano, que sea fuerte. La prueba de estanquidad comprueba que no se escapa ni una molécula de gas por ninguna unión; estanquidad significa justamente eso, que no fuga nada, ni una burbuja. Y son distintas de verdad: un tubo puede ser resistentísimo, aguantar una presión enorme, y aun así fugar por una junta mal apretada. Por eso se hacen las dos, no vale con una. Se realizan según las normas seiscientas, la trescientos diez, la trescientos once y la trescientos doce, según el tipo de instalación, esas tres hermanas que te dije que iban a volver. Y una regla de seguridad de puro sentido común: mientras se prueba, nadie ajeno en la zona. Estás metiendo mucha presión a un tubo, y si algo cede, salta con fuerza. Truco para no confundirlas nunca: resistencia, que no rompa; estanquidad, que no fugue.</a:t>
+              <a:t>N1: Cuando por fin se abre la zanja y se monta el tubo, ¿quién responde y qué es lo que más se cuida?</a:t>
+            </a:r>
+          </a:p>
+          <a:p>
+            <a:r>
+              <a:t>N2: La obra se ejecuta bajo la responsabilidad del titular de la instalación, con personal propio o ajeno, es decir, con su gente o con una contrata, pero garantizando siempre la seguridad de quien trabaja. Y hay un cuidado que es puro sentido de obra: no dañar otras instalaciones enterradas. Piensa en lo que ya corre por debajo de una calle antes de que llegues tú con la máquina: la luz, el agua, el saneamiento, el teléfono, la fibra. Al abrir zanja hay que saber qué pasa por debajo para no reventarlo. Y hay un segundo reflejo: cuando conectas el tubo nuevo a la red que ya está funcionando y dando servicio, la norma es no dejar sin gas a quienes ya lo tienen; la conexión se hace en carga, con la red viva, siempre que se pueda. Es el mismo gesto que el del fontanero que cambia un tramo de tubería sin cortarle el agua a todo el edificio: molestar lo mínimo a quien ya tiene el servicio.</a:t>
             </a:r>
           </a:p>
         </p:txBody>
@@ -742,12 +748,12 @@
           <a:lstStyle/>
           <a:p>
             <a:r>
-              <a:t>N1: Vale, se hacen las pruebas. Pero ¿dónde queda constancia de que salieron bien?</a:t>
-            </a:r>
-          </a:p>
-          <a:p>
-            <a:r>
-              <a:t>N2: En un documento con nombre y apellidos: el certificado de dirección de obra. Vamos por pasos. Primero, las pruebas tienen que terminar con resultado positivo; si algo falla, no hay nada que certificar, se corrige y se repite. Cuando salen bien, su descripción y sus resultados se incorporan a ese certificado de dirección de obra, que confecciona y firma el director de la obra, no cualquiera. ¿Y por qué tanto papel? Porque para la Administración lo que no está firmado y documentado, sencillamente no ha pasado. Ese certificado es la prueba de que la red superó los ensayos, el respaldo por si algún día hay que mirar atrás. Es el mismo reflejo que vas a tener tú cada vez que emitas un boletín o un certificado de instalación: haces el trabajo bien, sí, pero también lo dejas firmado. Trabajo hecho y papel firmado van siempre juntos.</a:t>
+              <a:t>N1: ¿Y qué pasa cuando la tubería tiene que cruzar una carretera o un río? Ahí no puedes abrir zanja y ya está, ¿no?</a:t>
+            </a:r>
+          </a:p>
+          <a:p>
+            <a:r>
+              <a:t>N2: Exacto, eso son obras especiales y tienen reglas propias. La lista de obstáculos que la ITC llama especiales es cerrada, memorízala: carretera, curso de agua, ferrocarril y puente. En todos esos casos hace falta autorización del organismo afectado, es decir, del que manda en ese sitio: la administración de carreteras si cruzas una vía, la confederación hidrográfica si cruzas un río, la autoridad de ferrocarriles si cruzas las vías. Y la forma de cruzar tampoco es a lo bruto: se prefieren técnicas de construcción alternativas. La típica es la perforación horizontal, que consiste en pasar el tubo por debajo del obstáculo taladrando sin levantar la calzada, para no cortar el tráfico ni destrozar el firme. La idea resumida en una frase: cruzo algo importante, pido permiso a su dueño y uso la técnica que menos moleste al servicio que hay encima.</a:t>
             </a:r>
           </a:p>
         </p:txBody>
@@ -817,12 +823,12 @@
           <a:lstStyle/>
           <a:p>
             <a:r>
-              <a:t>N1: Terminado el montaje y las pruebas, ¿ya se puede meter el gas sin más?</a:t>
-            </a:r>
-          </a:p>
-          <a:p>
-            <a:r>
-              <a:t>N2: Solo si se ha superado un requisito de oro: la instalación tiene que haber pasado las pruebas previas. Sin pruebas superadas, no hay gas; grábatelo como un mandamiento. Y ahora viene la parte física, que es la clave de seguridad de todo tu oficio. Cuando metes gas en un tubo que está lleno de aire, durante un rato aire y gas conviven, y ahí está el peligro: no en el gas solo, que sin oxígeno no arde, sino en la mezcla aire-gas cuando cae dentro de los llamados límites de inflamabilidad, esa proporción justa en la que una simple chispa provoca una deflagración. ¿Cómo se evita? De dos maneras. O se introduce el gas despacio, a una velocidad que reduzca la zona de mezcla peligrosa en el punto de contacto; o se separan aire y gas metiendo en medio un tapón de gas inerte, por ejemplo nitrógeno, que no arde, o un pistón de purga que hace de tabique. Y el purgado, que es echar fuera el aire o el gas, siempre de forma controlada, nunca a lo loco. Métetelo en la cabeza porque lo vas a aplicar toda la vida cada vez que purgues una instalación: aire, más gas, más una chispa, igual a explosión.</a:t>
+              <a:t>N1: Antes de soltar el gas, ¿qué hay que comprobar? Supongo que que no haya fugas.</a:t>
+            </a:r>
+          </a:p>
+          <a:p>
+            <a:r>
+              <a:t>N2: Eso, y una cosa más, porque son dos pruebas distintas y mucha gente las confunde. La prueba de resistencia comprueba que la tubería aguanta la presión sin reventar ni deformarse; en llano, que sea fuerte. La prueba de estanquidad comprueba que no se escapa ni una molécula de gas por ninguna unión; estanquidad significa justamente eso, que no fuga nada, ni una burbuja. Y son distintas de verdad: un tubo puede ser resistentísimo, aguantar una presión enorme, y aun así fugar por una junta mal apretada. Por eso se hacen las dos, no vale con una. Se realizan según las normas seiscientas, la trescientos diez, la trescientos once y la trescientos doce, según el tipo de instalación, esas tres hermanas que te dije que iban a volver. Y una regla de seguridad de puro sentido común: mientras se prueba, nadie ajeno en la zona. Estás metiendo mucha presión a un tubo, y si algo cede, salta con fuerza. Truco para no confundirlas nunca: resistencia, que no rompa; estanquidad, que no fugue.</a:t>
             </a:r>
           </a:p>
         </p:txBody>
@@ -892,12 +898,12 @@
           <a:lstStyle/>
           <a:p>
             <a:r>
-              <a:t>N1: Y ese paso final, el de meter el gas de verdad, ¿lo puede dar cualquiera?</a:t>
-            </a:r>
-          </a:p>
-          <a:p>
-            <a:r>
-              <a:t>N2: No, y es lógico si piensas lo que está en juego. La puesta en servicio la lleva a cabo personal cualificado autorizado, y ojo a quién lo autoriza: el distribuidor o el titular de la instalación de distribución. Además, se hace con conocimiento del director de obra, es decir, el director tiene que estar al tanto de que se está dando ese paso. Piénsalo como la última barrera antes de que la red quede viva y cargada de gas: no es momento de improvisar ni de que lo haga alguien de paso. Y fíjate cómo encaja todo en orden, como una cadena de seguridad: primero, pruebas superadas; después, llenado controlado para evitar la mezcla peligrosa; y por último, gente cualificada y autorizada dando el servicio, con el director de obra enterado. Cada eslabón protege al siguiente.</a:t>
+              <a:t>N1: Cuidado, que estas dos pruebas se confunden a la primera de cambio.</a:t>
+            </a:r>
+          </a:p>
+          <a:p>
+            <a:r>
+              <a:t>N2: Una mira si el tubo es fuerte; la otra, si el tubo es hermético. La pregunta va por la segunda.</a:t>
             </a:r>
           </a:p>
         </p:txBody>
@@ -967,12 +973,12 @@
           <a:lstStyle/>
           <a:p>
             <a:r>
-              <a:t>N1: Antes de cerrar, ¿me haces un repaso rápido para ver si me quedo con lo esencial?</a:t>
-            </a:r>
-          </a:p>
-          <a:p>
-            <a:r>
-              <a:t>N2: Cuatro golpes, y si respondes a los cuatro sin dudar, llevas el vídeo dominado. Uno: esta instrucción manda en la red de la calle, la del distribuidor, no en tu instalación receptora, y lo hace a lo largo de las tres fases, proyectar, construir y explotar. Dos: esa red necesita autorización administrativa previa; quién la da, la Comunidad Autónoma; y las obras del año anterior se entregan en el primer trimestre. Tres: sin pruebas de resistencia y estanquidad superadas no hay gas, y el resultado positivo queda en el certificado de dirección de obra que firma el director. Y cuatro, el que más te va a acompañar en la vida real: el peligro nunca es el gas solo, es la mezcla aire-gas dentro de los límites de inflamabilidad. Repasa mentalmente esos cuatro; si los tienes, seguimos.</a:t>
+              <a:t>N1: ¿Por qué la a?</a:t>
+            </a:r>
+          </a:p>
+          <a:p>
+            <a:r>
+              <a:t>N2: Porque estanquidad es que no se escape ni una burbuja por las uniones. Que aguante la presión sin reventar es la de resistencia, que es otra cosa. Recuerda el truco: resistencia, que no rompa; estanquidad, que no fugue.</a:t>
             </a:r>
           </a:p>
         </p:txBody>
@@ -1042,22 +1048,237 @@
           <a:lstStyle/>
           <a:p>
             <a:r>
-              <a:t>N1: Cerramos fuerte. Si me llevo cuatro conquistas de este vídeo, ¿cuáles deberían ser?</a:t>
-            </a:r>
-          </a:p>
-          <a:p>
-            <a:r>
-              <a:t>N2: Estas cuatro, y déjame reconstruir el hilo para que veas que no son cuatro cosas sueltas, sino una historia. Una: ya separas la red de la calle, la del distribuidor, de tu instalación receptora, y sabes que la frontera entre las dos está en la acometida. Esa frontera es la que te ahorra discusiones en obra. Dos: sabes quién autoriza esa red, la Comunidad Autónoma, y cuándo se entrega lo del año anterior, en el primer trimestre; son dos datos de examen que van casi siempre juntos. Tres: tienes grabada la regla de oro, sin pruebas de resistencia y estanquidad superadas no hay gas, y sabes que hay un papel que lo certifica, el certificado de dirección de obra que firma el director. Y cuatro: la física que te va a acompañar toda la vida profesional, el peligro no es el gas solo, es la mezcla aire-gas dentro de los límites de inflamabilidad.</a:t>
-            </a:r>
-          </a:p>
-          <a:p>
-            <a:r>
-              <a:t>N1: ¿Y por qué pesan tanto estas cuatro cosas?</a:t>
-            </a:r>
-          </a:p>
-          <a:p>
-            <a:r>
-              <a:t>N2: Por dos motivos que van de la mano. En el examen te las preguntan cruzadas: te sueltan la lista de siete normas, te preguntan quién autoriza y cuándo, o te ponen a elegir entre resistencia y estanquidad. Y en la obra deciden de verdad: un mal diseño aguas arriba es lo que hace que el día de más frío la red se quede corta y aparezcan la llama amarilla y el monóxido en la caldera de tu cliente, aguas abajo. Hoy ya eres más gasista que ayer, porque entiendes por dónde entra el gas al barrio antes de llegar a ninguna vivienda. En el siguiente vídeo damos el salto a la red ya viva: cómo se opera, se mantiene y se protege las veinticuatro horas, y ahí aparecen las fugas, los plazos y los trucos de campo que usarás cada semana. Te espero allí.</a:t>
+              <a:t>N1: Vale, se hacen las pruebas. Pero ¿dónde queda constancia de que salieron bien?</a:t>
+            </a:r>
+          </a:p>
+          <a:p>
+            <a:r>
+              <a:t>N2: En un documento con nombre y apellidos: el certificado de dirección de obra. Vamos por pasos. Primero, las pruebas tienen que terminar con resultado positivo; si algo falla, no hay nada que certificar, se corrige y se repite. Cuando salen bien, su descripción y sus resultados se incorporan a ese certificado de dirección de obra, que confecciona y firma el director de la obra, no cualquiera. ¿Y por qué tanto papel? Porque para la Administración lo que no está firmado y documentado, sencillamente no ha pasado. Ese certificado es la prueba de que la red superó los ensayos, el respaldo por si algún día hay que mirar atrás. Es el mismo reflejo que vas a tener tú cada vez que emitas un boletín o un certificado de instalación: haces el trabajo bien, sí, pero también lo dejas firmado. Trabajo hecho y papel firmado van siempre juntos.</a:t>
+            </a:r>
+          </a:p>
+        </p:txBody>
+      </p:sp>
+      <p:sp>
+        <p:nvSpPr>
+          <p:cNvPr id="4" name="Slide Number Placeholder 3"/>
+          <p:cNvSpPr>
+            <a:spLocks noGrp="1"/>
+          </p:cNvSpPr>
+          <p:nvPr>
+            <p:ph type="sldNum" idx="5" sz="quarter"/>
+          </p:nvPr>
+        </p:nvSpPr>
+        <p:spPr/>
+      </p:sp>
+    </p:spTree>
+  </p:cSld>
+  <p:clrMapOvr>
+    <a:masterClrMapping/>
+  </p:clrMapOvr>
+</p:notes>
+</file>
+
+<file path=ppt/notesSlides/notesSlide17.xml><?xml version="1.0" encoding="utf-8"?>
+<p:notes xmlns:a="http://schemas.openxmlformats.org/drawingml/2006/main" xmlns:p="http://schemas.openxmlformats.org/presentationml/2006/main" xmlns:r="http://schemas.openxmlformats.org/officeDocument/2006/relationships">
+  <p:cSld>
+    <p:spTree>
+      <p:nvGrpSpPr>
+        <p:cNvPr id="1" name=""/>
+        <p:cNvGrpSpPr/>
+        <p:nvPr/>
+      </p:nvGrpSpPr>
+      <p:grpSpPr>
+        <a:xfrm>
+          <a:off x="0" y="0"/>
+          <a:ext cx="0" cy="0"/>
+          <a:chOff x="0" y="0"/>
+          <a:chExt cx="0" cy="0"/>
+        </a:xfrm>
+      </p:grpSpPr>
+      <p:sp>
+        <p:nvSpPr>
+          <p:cNvPr id="2" name="Slide Image Placeholder 1"/>
+          <p:cNvSpPr>
+            <a:spLocks noGrp="1"/>
+          </p:cNvSpPr>
+          <p:nvPr>
+            <p:ph type="sldImg" idx="2"/>
+          </p:nvPr>
+        </p:nvSpPr>
+        <p:spPr/>
+      </p:sp>
+      <p:sp>
+        <p:nvSpPr>
+          <p:cNvPr id="3" name="Notes Placeholder 2"/>
+          <p:cNvSpPr>
+            <a:spLocks noGrp="1"/>
+          </p:cNvSpPr>
+          <p:nvPr>
+            <p:ph type="body" idx="3" sz="quarter"/>
+          </p:nvPr>
+        </p:nvSpPr>
+        <p:spPr/>
+        <p:txBody>
+          <a:bodyPr/>
+          <a:lstStyle/>
+          <a:p>
+            <a:r>
+              <a:t>N1: Terminado el montaje y las pruebas, ¿ya se puede meter el gas sin más?</a:t>
+            </a:r>
+          </a:p>
+          <a:p>
+            <a:r>
+              <a:t>N2: Solo si se ha superado un requisito de oro: la instalación tiene que haber pasado las pruebas previas. Sin pruebas superadas, no hay gas; grábatelo como un mandamiento. Y ahora viene la parte física, que es la clave de seguridad de todo tu oficio. Cuando metes gas en un tubo que está lleno de aire, durante un rato aire y gas conviven, y ahí está el peligro: no en el gas solo, que sin oxígeno no arde, sino en la mezcla aire-gas cuando cae dentro de los llamados límites de inflamabilidad, esa proporción justa en la que una simple chispa provoca una deflagración. ¿Cómo se evita? De dos maneras. O se introduce el gas despacio, a una velocidad que reduzca la zona de mezcla peligrosa en el punto de contacto; o se separan aire y gas metiendo en medio un tapón de gas inerte, por ejemplo nitrógeno, que no arde, o un pistón de purga que hace de tabique. Y el purgado, que es echar fuera el aire o el gas, siempre de forma controlada, nunca a lo loco. Métetelo en la cabeza porque lo vas a aplicar toda la vida cada vez que purgues una instalación: aire, más gas, más una chispa, igual a explosión.</a:t>
+            </a:r>
+          </a:p>
+        </p:txBody>
+      </p:sp>
+      <p:sp>
+        <p:nvSpPr>
+          <p:cNvPr id="4" name="Slide Number Placeholder 3"/>
+          <p:cNvSpPr>
+            <a:spLocks noGrp="1"/>
+          </p:cNvSpPr>
+          <p:nvPr>
+            <p:ph type="sldNum" idx="5" sz="quarter"/>
+          </p:nvPr>
+        </p:nvSpPr>
+        <p:spPr/>
+      </p:sp>
+    </p:spTree>
+  </p:cSld>
+  <p:clrMapOvr>
+    <a:masterClrMapping/>
+  </p:clrMapOvr>
+</p:notes>
+</file>
+
+<file path=ppt/notesSlides/notesSlide18.xml><?xml version="1.0" encoding="utf-8"?>
+<p:notes xmlns:a="http://schemas.openxmlformats.org/drawingml/2006/main" xmlns:p="http://schemas.openxmlformats.org/presentationml/2006/main" xmlns:r="http://schemas.openxmlformats.org/officeDocument/2006/relationships">
+  <p:cSld>
+    <p:spTree>
+      <p:nvGrpSpPr>
+        <p:cNvPr id="1" name=""/>
+        <p:cNvGrpSpPr/>
+        <p:nvPr/>
+      </p:nvGrpSpPr>
+      <p:grpSpPr>
+        <a:xfrm>
+          <a:off x="0" y="0"/>
+          <a:ext cx="0" cy="0"/>
+          <a:chOff x="0" y="0"/>
+          <a:chExt cx="0" cy="0"/>
+        </a:xfrm>
+      </p:grpSpPr>
+      <p:sp>
+        <p:nvSpPr>
+          <p:cNvPr id="2" name="Slide Image Placeholder 1"/>
+          <p:cNvSpPr>
+            <a:spLocks noGrp="1"/>
+          </p:cNvSpPr>
+          <p:nvPr>
+            <p:ph type="sldImg" idx="2"/>
+          </p:nvPr>
+        </p:nvSpPr>
+        <p:spPr/>
+      </p:sp>
+      <p:sp>
+        <p:nvSpPr>
+          <p:cNvPr id="3" name="Notes Placeholder 2"/>
+          <p:cNvSpPr>
+            <a:spLocks noGrp="1"/>
+          </p:cNvSpPr>
+          <p:nvPr>
+            <p:ph type="body" idx="3" sz="quarter"/>
+          </p:nvPr>
+        </p:nvSpPr>
+        <p:spPr/>
+        <p:txBody>
+          <a:bodyPr/>
+          <a:lstStyle/>
+          <a:p>
+            <a:r>
+              <a:t>N1: Pregunta de las que salvan vidas, no solo exámenes.</a:t>
+            </a:r>
+          </a:p>
+          <a:p>
+            <a:r>
+              <a:t>N2: El gas solo no arde y el aire solo tampoco. Piensa qué aparece cuando se juntan los dos en la proporción justa.</a:t>
+            </a:r>
+          </a:p>
+        </p:txBody>
+      </p:sp>
+      <p:sp>
+        <p:nvSpPr>
+          <p:cNvPr id="4" name="Slide Number Placeholder 3"/>
+          <p:cNvSpPr>
+            <a:spLocks noGrp="1"/>
+          </p:cNvSpPr>
+          <p:nvPr>
+            <p:ph type="sldNum" idx="5" sz="quarter"/>
+          </p:nvPr>
+        </p:nvSpPr>
+        <p:spPr/>
+      </p:sp>
+    </p:spTree>
+  </p:cSld>
+  <p:clrMapOvr>
+    <a:masterClrMapping/>
+  </p:clrMapOvr>
+</p:notes>
+</file>
+
+<file path=ppt/notesSlides/notesSlide19.xml><?xml version="1.0" encoding="utf-8"?>
+<p:notes xmlns:a="http://schemas.openxmlformats.org/drawingml/2006/main" xmlns:p="http://schemas.openxmlformats.org/presentationml/2006/main" xmlns:r="http://schemas.openxmlformats.org/officeDocument/2006/relationships">
+  <p:cSld>
+    <p:spTree>
+      <p:nvGrpSpPr>
+        <p:cNvPr id="1" name=""/>
+        <p:cNvGrpSpPr/>
+        <p:nvPr/>
+      </p:nvGrpSpPr>
+      <p:grpSpPr>
+        <a:xfrm>
+          <a:off x="0" y="0"/>
+          <a:ext cx="0" cy="0"/>
+          <a:chOff x="0" y="0"/>
+          <a:chExt cx="0" cy="0"/>
+        </a:xfrm>
+      </p:grpSpPr>
+      <p:sp>
+        <p:nvSpPr>
+          <p:cNvPr id="2" name="Slide Image Placeholder 1"/>
+          <p:cNvSpPr>
+            <a:spLocks noGrp="1"/>
+          </p:cNvSpPr>
+          <p:nvPr>
+            <p:ph type="sldImg" idx="2"/>
+          </p:nvPr>
+        </p:nvSpPr>
+        <p:spPr/>
+      </p:sp>
+      <p:sp>
+        <p:nvSpPr>
+          <p:cNvPr id="3" name="Notes Placeholder 2"/>
+          <p:cNvSpPr>
+            <a:spLocks noGrp="1"/>
+          </p:cNvSpPr>
+          <p:nvPr>
+            <p:ph type="body" idx="3" sz="quarter"/>
+          </p:nvPr>
+        </p:nvSpPr>
+        <p:spPr/>
+        <p:txBody>
+          <a:bodyPr/>
+          <a:lstStyle/>
+          <a:p>
+            <a:r>
+              <a:t>N1: ¿Por qué la a?</a:t>
+            </a:r>
+          </a:p>
+          <a:p>
+            <a:r>
+              <a:t>N2: Porque el peligro no es el gas ni el aire por separado, sino la mezcla aire-gas cuando cae dentro de los límites de inflamabilidad y basta una chispa. Por eso se mete el gas despacio o con un tapón de gas inerte que separe ambos fluidos.</a:t>
             </a:r>
           </a:p>
         </p:txBody>
@@ -1157,6 +1378,241 @@
 </p:notes>
 </file>
 
+<file path=ppt/notesSlides/notesSlide20.xml><?xml version="1.0" encoding="utf-8"?>
+<p:notes xmlns:a="http://schemas.openxmlformats.org/drawingml/2006/main" xmlns:p="http://schemas.openxmlformats.org/presentationml/2006/main" xmlns:r="http://schemas.openxmlformats.org/officeDocument/2006/relationships">
+  <p:cSld>
+    <p:spTree>
+      <p:nvGrpSpPr>
+        <p:cNvPr id="1" name=""/>
+        <p:cNvGrpSpPr/>
+        <p:nvPr/>
+      </p:nvGrpSpPr>
+      <p:grpSpPr>
+        <a:xfrm>
+          <a:off x="0" y="0"/>
+          <a:ext cx="0" cy="0"/>
+          <a:chOff x="0" y="0"/>
+          <a:chExt cx="0" cy="0"/>
+        </a:xfrm>
+      </p:grpSpPr>
+      <p:sp>
+        <p:nvSpPr>
+          <p:cNvPr id="2" name="Slide Image Placeholder 1"/>
+          <p:cNvSpPr>
+            <a:spLocks noGrp="1"/>
+          </p:cNvSpPr>
+          <p:nvPr>
+            <p:ph type="sldImg" idx="2"/>
+          </p:nvPr>
+        </p:nvSpPr>
+        <p:spPr/>
+      </p:sp>
+      <p:sp>
+        <p:nvSpPr>
+          <p:cNvPr id="3" name="Notes Placeholder 2"/>
+          <p:cNvSpPr>
+            <a:spLocks noGrp="1"/>
+          </p:cNvSpPr>
+          <p:nvPr>
+            <p:ph type="body" idx="3" sz="quarter"/>
+          </p:nvPr>
+        </p:nvSpPr>
+        <p:spPr/>
+        <p:txBody>
+          <a:bodyPr/>
+          <a:lstStyle/>
+          <a:p>
+            <a:r>
+              <a:t>N1: Y ese paso final, el de meter el gas de verdad, ¿lo puede dar cualquiera?</a:t>
+            </a:r>
+          </a:p>
+          <a:p>
+            <a:r>
+              <a:t>N2: No, y es lógico si piensas lo que está en juego. La puesta en servicio la lleva a cabo personal cualificado autorizado, y ojo a quién lo autoriza: el distribuidor o el titular de la instalación de distribución. Además, se hace con conocimiento del director de obra, es decir, el director tiene que estar al tanto de que se está dando ese paso. Piénsalo como la última barrera antes de que la red quede viva y cargada de gas: no es momento de improvisar ni de que lo haga alguien de paso. Y fíjate cómo encaja todo en orden, como una cadena de seguridad: primero, pruebas superadas; después, llenado controlado para evitar la mezcla peligrosa; y por último, gente cualificada y autorizada dando el servicio, con el director de obra enterado. Cada eslabón protege al siguiente.</a:t>
+            </a:r>
+          </a:p>
+        </p:txBody>
+      </p:sp>
+      <p:sp>
+        <p:nvSpPr>
+          <p:cNvPr id="4" name="Slide Number Placeholder 3"/>
+          <p:cNvSpPr>
+            <a:spLocks noGrp="1"/>
+          </p:cNvSpPr>
+          <p:nvPr>
+            <p:ph type="sldNum" idx="5" sz="quarter"/>
+          </p:nvPr>
+        </p:nvSpPr>
+        <p:spPr/>
+      </p:sp>
+    </p:spTree>
+  </p:cSld>
+  <p:clrMapOvr>
+    <a:masterClrMapping/>
+  </p:clrMapOvr>
+</p:notes>
+</file>
+
+<file path=ppt/notesSlides/notesSlide21.xml><?xml version="1.0" encoding="utf-8"?>
+<p:notes xmlns:a="http://schemas.openxmlformats.org/drawingml/2006/main" xmlns:p="http://schemas.openxmlformats.org/presentationml/2006/main" xmlns:r="http://schemas.openxmlformats.org/officeDocument/2006/relationships">
+  <p:cSld>
+    <p:spTree>
+      <p:nvGrpSpPr>
+        <p:cNvPr id="1" name=""/>
+        <p:cNvGrpSpPr/>
+        <p:nvPr/>
+      </p:nvGrpSpPr>
+      <p:grpSpPr>
+        <a:xfrm>
+          <a:off x="0" y="0"/>
+          <a:ext cx="0" cy="0"/>
+          <a:chOff x="0" y="0"/>
+          <a:chExt cx="0" cy="0"/>
+        </a:xfrm>
+      </p:grpSpPr>
+      <p:sp>
+        <p:nvSpPr>
+          <p:cNvPr id="2" name="Slide Image Placeholder 1"/>
+          <p:cNvSpPr>
+            <a:spLocks noGrp="1"/>
+          </p:cNvSpPr>
+          <p:nvPr>
+            <p:ph type="sldImg" idx="2"/>
+          </p:nvPr>
+        </p:nvSpPr>
+        <p:spPr/>
+      </p:sp>
+      <p:sp>
+        <p:nvSpPr>
+          <p:cNvPr id="3" name="Notes Placeholder 2"/>
+          <p:cNvSpPr>
+            <a:spLocks noGrp="1"/>
+          </p:cNvSpPr>
+          <p:nvPr>
+            <p:ph type="body" idx="3" sz="quarter"/>
+          </p:nvPr>
+        </p:nvSpPr>
+        <p:spPr/>
+        <p:txBody>
+          <a:bodyPr/>
+          <a:lstStyle/>
+          <a:p>
+            <a:r>
+              <a:t>N1: Antes de cerrar, ¿me haces un repaso rápido para ver si me quedo con lo esencial?</a:t>
+            </a:r>
+          </a:p>
+          <a:p>
+            <a:r>
+              <a:t>N2: Cuatro golpes, y si respondes a los cuatro sin dudar, llevas el vídeo dominado. Uno: esta instrucción manda en la red de la calle, la del distribuidor, no en tu instalación receptora, y lo hace a lo largo de las tres fases, proyectar, construir y explotar. Dos: esa red necesita autorización administrativa previa; quién la da, la Comunidad Autónoma; y las obras del año anterior se entregan en el primer trimestre. Tres: sin pruebas de resistencia y estanquidad superadas no hay gas, y el resultado positivo queda en el certificado de dirección de obra que firma el director. Y cuatro, el que más te va a acompañar en la vida real: el peligro nunca es el gas solo, es la mezcla aire-gas dentro de los límites de inflamabilidad. Repasa mentalmente esos cuatro; si los tienes, seguimos.</a:t>
+            </a:r>
+          </a:p>
+        </p:txBody>
+      </p:sp>
+      <p:sp>
+        <p:nvSpPr>
+          <p:cNvPr id="4" name="Slide Number Placeholder 3"/>
+          <p:cNvSpPr>
+            <a:spLocks noGrp="1"/>
+          </p:cNvSpPr>
+          <p:nvPr>
+            <p:ph type="sldNum" idx="5" sz="quarter"/>
+          </p:nvPr>
+        </p:nvSpPr>
+        <p:spPr/>
+      </p:sp>
+    </p:spTree>
+  </p:cSld>
+  <p:clrMapOvr>
+    <a:masterClrMapping/>
+  </p:clrMapOvr>
+</p:notes>
+</file>
+
+<file path=ppt/notesSlides/notesSlide22.xml><?xml version="1.0" encoding="utf-8"?>
+<p:notes xmlns:a="http://schemas.openxmlformats.org/drawingml/2006/main" xmlns:p="http://schemas.openxmlformats.org/presentationml/2006/main" xmlns:r="http://schemas.openxmlformats.org/officeDocument/2006/relationships">
+  <p:cSld>
+    <p:spTree>
+      <p:nvGrpSpPr>
+        <p:cNvPr id="1" name=""/>
+        <p:cNvGrpSpPr/>
+        <p:nvPr/>
+      </p:nvGrpSpPr>
+      <p:grpSpPr>
+        <a:xfrm>
+          <a:off x="0" y="0"/>
+          <a:ext cx="0" cy="0"/>
+          <a:chOff x="0" y="0"/>
+          <a:chExt cx="0" cy="0"/>
+        </a:xfrm>
+      </p:grpSpPr>
+      <p:sp>
+        <p:nvSpPr>
+          <p:cNvPr id="2" name="Slide Image Placeholder 1"/>
+          <p:cNvSpPr>
+            <a:spLocks noGrp="1"/>
+          </p:cNvSpPr>
+          <p:nvPr>
+            <p:ph type="sldImg" idx="2"/>
+          </p:nvPr>
+        </p:nvSpPr>
+        <p:spPr/>
+      </p:sp>
+      <p:sp>
+        <p:nvSpPr>
+          <p:cNvPr id="3" name="Notes Placeholder 2"/>
+          <p:cNvSpPr>
+            <a:spLocks noGrp="1"/>
+          </p:cNvSpPr>
+          <p:nvPr>
+            <p:ph type="body" idx="3" sz="quarter"/>
+          </p:nvPr>
+        </p:nvSpPr>
+        <p:spPr/>
+        <p:txBody>
+          <a:bodyPr/>
+          <a:lstStyle/>
+          <a:p>
+            <a:r>
+              <a:t>N1: Cerramos fuerte. Si me llevo cuatro conquistas de este vídeo, ¿cuáles deberían ser?</a:t>
+            </a:r>
+          </a:p>
+          <a:p>
+            <a:r>
+              <a:t>N2: Estas cuatro, y déjame reconstruir el hilo para que veas que no son cuatro cosas sueltas, sino una historia. Una: ya separas la red de la calle, la del distribuidor, de tu instalación receptora, y sabes que la frontera entre las dos está en la acometida. Esa frontera es la que te ahorra discusiones en obra. Dos: sabes quién autoriza esa red, la Comunidad Autónoma, y cuándo se entrega lo del año anterior, en el primer trimestre; son dos datos de examen que van casi siempre juntos. Tres: tienes grabada la regla de oro, sin pruebas de resistencia y estanquidad superadas no hay gas, y sabes que hay un papel que lo certifica, el certificado de dirección de obra que firma el director. Y cuatro: la física que te va a acompañar toda la vida profesional, el peligro no es el gas solo, es la mezcla aire-gas dentro de los límites de inflamabilidad.</a:t>
+            </a:r>
+          </a:p>
+          <a:p>
+            <a:r>
+              <a:t>N1: ¿Y por qué pesan tanto estas cuatro cosas?</a:t>
+            </a:r>
+          </a:p>
+          <a:p>
+            <a:r>
+              <a:t>N2: Por dos motivos que van de la mano. En el examen te las preguntan cruzadas: te sueltan la lista de siete normas, te preguntan quién autoriza y cuándo, o te ponen a elegir entre resistencia y estanquidad. Y en la obra deciden de verdad: un mal diseño aguas arriba es lo que hace que el día de más frío la red se quede corta y aparezcan la llama amarilla y el monóxido en la caldera de tu cliente, aguas abajo. Hoy ya eres más gasista que ayer, porque entiendes por dónde entra el gas al barrio antes de llegar a ninguna vivienda. En el siguiente vídeo damos el salto a la red ya viva: cómo se opera, se mantiene y se protege las veinticuatro horas, y ahí aparecen las fugas, los plazos y los trucos de campo que usarás cada semana. Te espero allí.</a:t>
+            </a:r>
+          </a:p>
+        </p:txBody>
+      </p:sp>
+      <p:sp>
+        <p:nvSpPr>
+          <p:cNvPr id="4" name="Slide Number Placeholder 3"/>
+          <p:cNvSpPr>
+            <a:spLocks noGrp="1"/>
+          </p:cNvSpPr>
+          <p:nvPr>
+            <p:ph type="sldNum" idx="5" sz="quarter"/>
+          </p:nvPr>
+        </p:nvSpPr>
+        <p:spPr/>
+      </p:sp>
+    </p:spTree>
+  </p:cSld>
+  <p:clrMapOvr>
+    <a:masterClrMapping/>
+  </p:clrMapOvr>
+</p:notes>
+</file>
+
 <file path=ppt/notesSlides/notesSlide3.xml><?xml version="1.0" encoding="utf-8"?>
 <p:notes xmlns:a="http://schemas.openxmlformats.org/drawingml/2006/main" xmlns:p="http://schemas.openxmlformats.org/presentationml/2006/main" xmlns:r="http://schemas.openxmlformats.org/officeDocument/2006/relationships">
   <p:cSld>
@@ -1418,12 +1874,12 @@
           <a:lstStyle/>
           <a:p>
             <a:r>
-              <a:t>N1: ¿Qué es lo que persigue un buen diseño de red? ¿Que sea barata?</a:t>
-            </a:r>
-          </a:p>
-          <a:p>
-            <a:r>
-              <a:t>N2: No, persigue dos cosas a la vez, y son la brújula de todo el apartado. Suministro seguro, que quiere decir que no haya fugas; y suministro continuo, que quiere decir que no se corte el gas. Fíjate que son dos objetivos distintos: una red puede ser segura pero cortarse cada dos por tres, o dar servicio siempre pero fugar. Se buscan las dos. ¿Y cómo se consigue el continuo? Dimensionando la red con capacidad suficiente, es decir, poniendo tubos del calibre adecuado para la gente que va a colgar de ellos. Para eso se mira cuánta gente hay, el nivel socioeconómico de la zona, que es el poder adquisitivo y por tanto cuánto consumo se espera, y la climatología, porque donde hace más frío se gasta más gas en calefacción. ¿Y por qué te importa a ti, que trabajas aguas abajo, en las casas? Porque una red mal dimensionada se queda corta el día de más frío, cuando todo el barrio enciende la calefacción a la vez: cae la presión, y esa caída en los aparatos se traduce en llama amarilla, mala combustión, hollín y riesgo de monóxido de carbono. Dicho fino: el diseño es, en realidad, la primera avería que se evita, antes de que exista la instalación.</a:t>
+              <a:t>N1: Aquí van dos datos que caen casi siempre juntos, no los sueltes por separado.</a:t>
+            </a:r>
+          </a:p>
+          <a:p>
+            <a:r>
+              <a:t>N2: Piensa quién da el permiso y en qué momento del calendario se rinden cuentas de lo construido. Uno es una administración; el otro, un trimestre concreto.</a:t>
             </a:r>
           </a:p>
         </p:txBody>
@@ -1493,12 +1949,12 @@
           <a:lstStyle/>
           <a:p>
             <a:r>
-              <a:t>N1: Y a la hora de elegir los tubos y los materiales, ¿de qué depende esa elección?</a:t>
-            </a:r>
-          </a:p>
-          <a:p>
-            <a:r>
-              <a:t>N2: De cuatro criterios, y te los explico con la lógica de cuando eliges un tubo en obra. Primero, las características físico-químicas del gas, porque no es lo mismo transportar gas natural que un gas licuado del petróleo: cambian densidad, poder calorífico y hasta cómo ataca al material. Segundo, la presión de diseño, que es la presión máxima para la que se calcula la red; ella marca el grosor de la pared del tubo y el material, igual que una manguera de alta presión es más gruesa que una de riego. Tercero, la pérdida de carga admisible; carga aquí significa presión, así que esto es cuánta presión te puedes permitir perder por el rozamiento a lo largo del recorrido sin que al final de la línea llegue floja. Y cuarto, las condiciones de operación y mantenimiento, es decir, cómo se va a manejar y reparar durante su vida. Si el material no encaja con el gas o con la presión, tarde o temprano aparece el problema. Es exactamente tu reflejo cuando coges un tubo: lo eliges por lo que va a circular por dentro y a qué presión, no por lo que tengas más a mano en la furgoneta.</a:t>
+              <a:t>N1: ¿Por qué la primera?</a:t>
+            </a:r>
+          </a:p>
+          <a:p>
+            <a:r>
+              <a:t>N2: Porque la que autoriza es la Comunidad Autónoma, no el Ayuntamiento ni el Ministerio, y el proyecto de las obras realizadas se entrega dentro del primer trimestre del año siguiente. El truco: primero digo lo que pienso hacer y luego justifico lo que hice, y quien manda es la comunidad autónoma.</a:t>
             </a:r>
           </a:p>
         </p:txBody>
@@ -1568,12 +2024,12 @@
           <a:lstStyle/>
           <a:p>
             <a:r>
-              <a:t>N1: Son siete normas de diseño. ¿De verdad tengo que aprendérmelas todas?</a:t>
-            </a:r>
-          </a:p>
-          <a:p>
-            <a:r>
-              <a:t>N2: Tranquilo, no hay que saberse qué dice cada una por dentro; hay que reconocerlas cuando aparecen en una lista, que es como te lo van a preguntar. Y para reconocerlas, un truco de bloques. Por un lado, las que empiezan por une e ene: la doce mil siete, la mil quinientos noventa y cuatro, la doce mil ciento ochenta y seis y la doce mil trescientos veintisiete. Son de origen europeo y regulan las redes según la presión. Por otro lado, y estas son las importantes, tres normas españolas que van a ser tus viejas conocidas: la sesenta mil trescientos diez, la sesenta mil trescientos once y la sesenta mil trescientos doce. Llámalas las tres hermanas seiscientas. Y presta atención, porque no aparecen solo aquí: vas a ver estas tres una y otra vez en toda la ITC, para el diseño, para las pruebas, para la operación y para el mantenimiento. Regla de examen: si te ponen una lista de normas de canalización y tienes que elegir, esas tres seiscientas casi seguro que están dentro. Además, cuál se aplica no es al azar: depende de la presión de diseño de la red.</a:t>
+              <a:t>N1: ¿Qué es lo que persigue un buen diseño de red? ¿Que sea barata?</a:t>
+            </a:r>
+          </a:p>
+          <a:p>
+            <a:r>
+              <a:t>N2: No, persigue dos cosas a la vez, y son la brújula de todo el apartado. Suministro seguro, que quiere decir que no haya fugas; y suministro continuo, que quiere decir que no se corte el gas. Fíjate que son dos objetivos distintos: una red puede ser segura pero cortarse cada dos por tres, o dar servicio siempre pero fugar. Se buscan las dos. ¿Y cómo se consigue el continuo? Dimensionando la red con capacidad suficiente, es decir, poniendo tubos del calibre adecuado para la gente que va a colgar de ellos. Para eso se mira cuánta gente hay, el nivel socioeconómico de la zona, que es el poder adquisitivo y por tanto cuánto consumo se espera, y la climatología, porque donde hace más frío se gasta más gas en calefacción. ¿Y por qué te importa a ti, que trabajas aguas abajo, en las casas? Porque una red mal dimensionada se queda corta el día de más frío, cuando todo el barrio enciende la calefacción a la vez: cae la presión, y esa caída en los aparatos se traduce en llama amarilla, mala combustión, hollín y riesgo de monóxido de carbono. Dicho fino: el diseño es, en realidad, la primera avería que se evita, antes de que exista la instalación.</a:t>
             </a:r>
           </a:p>
         </p:txBody>
@@ -1643,12 +2099,12 @@
           <a:lstStyle/>
           <a:p>
             <a:r>
-              <a:t>N1: Cuando por fin se abre la zanja y se monta el tubo, ¿quién responde y qué es lo que más se cuida?</a:t>
-            </a:r>
-          </a:p>
-          <a:p>
-            <a:r>
-              <a:t>N2: La obra se ejecuta bajo la responsabilidad del titular de la instalación, con personal propio o ajeno, es decir, con su gente o con una contrata, pero garantizando siempre la seguridad de quien trabaja. Y hay un cuidado que es puro sentido de obra: no dañar otras instalaciones enterradas. Piensa en lo que ya corre por debajo de una calle antes de que llegues tú con la máquina: la luz, el agua, el saneamiento, el teléfono, la fibra. Al abrir zanja hay que saber qué pasa por debajo para no reventarlo. Y hay un segundo reflejo: cuando conectas el tubo nuevo a la red que ya está funcionando y dando servicio, la norma es no dejar sin gas a quienes ya lo tienen; la conexión se hace en carga, con la red viva, siempre que se pueda. Es el mismo gesto que el del fontanero que cambia un tramo de tubería sin cortarle el agua a todo el edificio: molestar lo mínimo a quien ya tiene el servicio.</a:t>
+              <a:t>N1: Y a la hora de elegir los tubos y los materiales, ¿de qué depende esa elección?</a:t>
+            </a:r>
+          </a:p>
+          <a:p>
+            <a:r>
+              <a:t>N2: De cuatro criterios, y te los explico con la lógica de cuando eliges un tubo en obra. Primero, las características físico-químicas del gas, porque no es lo mismo transportar gas natural que un gas licuado del petróleo: cambian densidad, poder calorífico y hasta cómo ataca al material. Segundo, la presión de diseño, que es la presión máxima para la que se calcula la red; ella marca el grosor de la pared del tubo y el material, igual que una manguera de alta presión es más gruesa que una de riego. Tercero, la pérdida de carga admisible; carga aquí significa presión, así que esto es cuánta presión te puedes permitir perder por el rozamiento a lo largo del recorrido sin que al final de la línea llegue floja. Y cuarto, las condiciones de operación y mantenimiento, es decir, cómo se va a manejar y reparar durante su vida. Si el material no encaja con el gas o con la presión, tarde o temprano aparece el problema. Es exactamente tu reflejo cuando coges un tubo: lo eliges por lo que va a circular por dentro y a qué presión, no por lo que tengas más a mano en la furgoneta.</a:t>
             </a:r>
           </a:p>
         </p:txBody>
@@ -4734,7 +5190,7 @@
       </p:sp>
       <p:sp>
         <p:nvSpPr>
-          <p:cNvPr id="4" name="Rounded Rectangle 3"/>
+          <p:cNvPr id="4" name="Rectangle 3"/>
           <p:cNvSpPr/>
           <p:nvPr/>
         </p:nvSpPr>
@@ -4743,7 +5199,7 @@
             <a:off x="868680" y="2057400"/>
             <a:ext cx="1463040" cy="82296"/>
           </a:xfrm>
-          <a:prstGeom prst="roundRect">
+          <a:prstGeom prst="rect">
             <a:avLst/>
           </a:prstGeom>
           <a:solidFill>
@@ -4860,6 +5316,18 @@
   <p:clrMapOvr>
     <a:masterClrMapping/>
   </p:clrMapOvr>
+  <mc:AlternateContent xmlns:mc="http://schemas.openxmlformats.org/markup-compatibility/2006">
+    <mc:Choice xmlns:p14="http://schemas.microsoft.com/office/powerpoint/2010/main" Requires="p14">
+      <p:transition spd="med" p14:dur="700">
+        <p14:cube dir="l"/>
+      </p:transition>
+    </mc:Choice>
+    <mc:Fallback>
+      <p:transition spd="med">
+        <p:push dir="l"/>
+      </p:transition>
+    </mc:Fallback>
+  </mc:AlternateContent>
 </p:sld>
 </file>
 
@@ -4947,7 +5415,7 @@
                 </a:solidFill>
                 <a:latin typeface="Montserrat"/>
               </a:rPr>
-              <a:t>010 / 016</a:t>
+              <a:t>010 / 022</a:t>
             </a:r>
           </a:p>
         </p:txBody>
@@ -5015,7 +5483,7 @@
                 </a:solidFill>
                 <a:latin typeface="Montserrat"/>
               </a:rPr>
-              <a:t>APARTADO 4 · OBRAS ESPECIALES</a:t>
+              <a:t>APARTADO 3 · NORMAS DE DISEÑO</a:t>
             </a:r>
           </a:p>
         </p:txBody>
@@ -5049,14 +5517,14 @@
                 </a:solidFill>
                 <a:latin typeface="Montserrat"/>
               </a:rPr>
-              <a:t>Cruces y obstáculos</a:t>
-            </a:r>
-          </a:p>
-        </p:txBody>
-      </p:sp>
-      <p:sp>
-        <p:nvSpPr>
-          <p:cNvPr id="7" name="Rounded Rectangle 6"/>
+              <a:t>Las siete normas</a:t>
+            </a:r>
+          </a:p>
+        </p:txBody>
+      </p:sp>
+      <p:sp>
+        <p:nvSpPr>
+          <p:cNvPr id="7" name="Rectangle 6"/>
           <p:cNvSpPr/>
           <p:nvPr/>
         </p:nvSpPr>
@@ -5065,7 +5533,7 @@
             <a:off x="868680" y="1627632"/>
             <a:ext cx="2011680" cy="73152"/>
           </a:xfrm>
-          <a:prstGeom prst="roundRect">
+          <a:prstGeom prst="rect">
             <a:avLst/>
           </a:prstGeom>
           <a:solidFill>
@@ -5107,7 +5575,7 @@
         <p:spPr>
           <a:xfrm>
             <a:off x="822960" y="1965960"/>
-            <a:ext cx="4983480" cy="4206240"/>
+            <a:ext cx="5029200" cy="4206240"/>
           </a:xfrm>
           <a:prstGeom prst="rect">
             <a:avLst/>
@@ -5141,7 +5609,7 @@
                 </a:solidFill>
                 <a:latin typeface="Montserrat"/>
               </a:rPr>
-              <a:t>Carretera, río, ferrocarril, puente</a:t>
+              <a:t>UNE-EN 12007 · 1594 · 12186 · 12327</a:t>
             </a:r>
           </a:p>
           <a:p>
@@ -5166,7 +5634,7 @@
                 </a:solidFill>
                 <a:latin typeface="Montserrat"/>
               </a:rPr>
-              <a:t>Permiso del organismo afectado</a:t>
+              <a:t>UNE 60310 · 60311 · 60312</a:t>
             </a:r>
           </a:p>
           <a:p>
@@ -5191,21 +5659,21 @@
                 </a:solidFill>
                 <a:latin typeface="Montserrat"/>
               </a:rPr>
-              <a:t>Técnicas alternativas, sin abrir zanja</a:t>
-            </a:r>
-          </a:p>
-        </p:txBody>
-      </p:sp>
-      <p:sp>
-        <p:nvSpPr>
-          <p:cNvPr id="9" name="imgph" descr="IMGQ:horizontal directional drilling pipeline road"/>
+              <a:t>Se aplican según la presión de diseño</a:t>
+            </a:r>
+          </a:p>
+        </p:txBody>
+      </p:sp>
+      <p:sp>
+        <p:nvSpPr>
+          <p:cNvPr id="9" name="imgph" descr="IMGQ:technical standards binders shelf office"/>
           <p:cNvSpPr/>
           <p:nvPr/>
         </p:nvSpPr>
         <p:spPr>
           <a:xfrm>
-            <a:off x="5806440" y="1051560"/>
-            <a:ext cx="5298947" cy="4629150"/>
+            <a:off x="6080760" y="1965960"/>
+            <a:ext cx="5303520" cy="4572000"/>
           </a:xfrm>
           <a:prstGeom prst="roundRect">
             <a:avLst/>
@@ -5250,8 +5718,8 @@
         </p:nvSpPr>
         <p:spPr>
           <a:xfrm>
-            <a:off x="6080760" y="2726055"/>
-            <a:ext cx="4750307" cy="1280160"/>
+            <a:off x="6355080" y="3611880"/>
+            <a:ext cx="4754880" cy="1280160"/>
           </a:xfrm>
           <a:prstGeom prst="rect">
             <a:avLst/>
@@ -5272,7 +5740,7 @@
                 </a:solidFill>
                 <a:latin typeface="Montserrat"/>
               </a:rPr>
-              <a:t>IMAGEN REALISTA</a:t>
+              <a:t>IMAGEN</a:t>
             </a:r>
           </a:p>
           <a:p>
@@ -5284,7 +5752,7 @@
                 </a:solidFill>
                 <a:latin typeface="Montserrat"/>
               </a:rPr>
-              <a:t>horizontal directional drilling pipeline road</a:t>
+              <a:t>technical standards binders shelf office</a:t>
             </a:r>
           </a:p>
         </p:txBody>
@@ -5294,6 +5762,18 @@
   <p:clrMapOvr>
     <a:masterClrMapping/>
   </p:clrMapOvr>
+  <mc:AlternateContent xmlns:mc="http://schemas.openxmlformats.org/markup-compatibility/2006">
+    <mc:Choice xmlns:p14="http://schemas.microsoft.com/office/powerpoint/2010/main" Requires="p14">
+      <p:transition spd="med" p14:dur="700">
+        <p14:cube dir="r"/>
+      </p:transition>
+    </mc:Choice>
+    <mc:Fallback>
+      <p:transition spd="med">
+        <p:push dir="r"/>
+      </p:transition>
+    </mc:Fallback>
+  </mc:AlternateContent>
 </p:sld>
 </file>
 
@@ -5381,7 +5861,7 @@
                 </a:solidFill>
                 <a:latin typeface="Montserrat"/>
               </a:rPr>
-              <a:t>011 / 016</a:t>
+              <a:t>011 / 022</a:t>
             </a:r>
           </a:p>
         </p:txBody>
@@ -5449,7 +5929,7 @@
                 </a:solidFill>
                 <a:latin typeface="Montserrat"/>
               </a:rPr>
-              <a:t>APARTADO 5.1 · PRUEBAS PREVIAS</a:t>
+              <a:t>APARTADO 4 · EJECUCIÓN</a:t>
             </a:r>
           </a:p>
         </p:txBody>
@@ -5483,14 +5963,14 @@
                 </a:solidFill>
                 <a:latin typeface="Montserrat"/>
               </a:rPr>
-              <a:t>Resistencia y estanquidad</a:t>
-            </a:r>
-          </a:p>
-        </p:txBody>
-      </p:sp>
-      <p:sp>
-        <p:nvSpPr>
-          <p:cNvPr id="7" name="Rounded Rectangle 6"/>
+              <a:t>Montar sin dañar</a:t>
+            </a:r>
+          </a:p>
+        </p:txBody>
+      </p:sp>
+      <p:sp>
+        <p:nvSpPr>
+          <p:cNvPr id="7" name="Rectangle 6"/>
           <p:cNvSpPr/>
           <p:nvPr/>
         </p:nvSpPr>
@@ -5499,7 +5979,7 @@
             <a:off x="868680" y="1627632"/>
             <a:ext cx="2011680" cy="73152"/>
           </a:xfrm>
-          <a:prstGeom prst="roundRect">
+          <a:prstGeom prst="rect">
             <a:avLst/>
           </a:prstGeom>
           <a:solidFill>
@@ -5540,8 +6020,8 @@
         </p:nvSpPr>
         <p:spPr>
           <a:xfrm>
-            <a:off x="822960" y="1965960"/>
-            <a:ext cx="4983480" cy="4206240"/>
+            <a:off x="6355080" y="1965960"/>
+            <a:ext cx="5029200" cy="4206240"/>
           </a:xfrm>
           <a:prstGeom prst="rect">
             <a:avLst/>
@@ -5575,7 +6055,7 @@
                 </a:solidFill>
                 <a:latin typeface="Montserrat"/>
               </a:rPr>
-              <a:t>Resistencia: que no reviente</a:t>
+              <a:t>Bajo responsabilidad del titular</a:t>
             </a:r>
           </a:p>
           <a:p>
@@ -5600,7 +6080,7 @@
                 </a:solidFill>
                 <a:latin typeface="Montserrat"/>
               </a:rPr>
-              <a:t>Estanquidad: que no fugue</a:t>
+              <a:t>No dañar otras redes enterradas</a:t>
             </a:r>
           </a:p>
           <a:p>
@@ -5625,46 +6105,21 @@
                 </a:solidFill>
                 <a:latin typeface="Montserrat"/>
               </a:rPr>
-              <a:t>UNE 60310 · 60311 · 60312</a:t>
-            </a:r>
-          </a:p>
-          <a:p>
-            <a:pPr>
-              <a:spcAft>
-                <a:spcPts val="1100"/>
-              </a:spcAft>
-            </a:pPr>
-            <a:r>
-              <a:rPr sz="1600" b="1" i="0">
-                <a:solidFill>
-                  <a:srgbClr val="E8801A"/>
-                </a:solidFill>
-                <a:latin typeface="Montserrat"/>
-              </a:rPr>
-              <a:t>▸  </a:t>
-            </a:r>
-            <a:r>
-              <a:rPr sz="1600" b="0" i="0">
-                <a:solidFill>
-                  <a:srgbClr val="1B2330"/>
-                </a:solidFill>
-                <a:latin typeface="Montserrat"/>
-              </a:rPr>
-              <a:t>Zona despejada durante la prueba</a:t>
-            </a:r>
-          </a:p>
-        </p:txBody>
-      </p:sp>
-      <p:sp>
-        <p:nvSpPr>
-          <p:cNvPr id="9" name="imgph" descr="IMGQ:gas pipe pressure test gauge manometer"/>
+              <a:t>Conectar sin cortar el suministro</a:t>
+            </a:r>
+          </a:p>
+        </p:txBody>
+      </p:sp>
+      <p:sp>
+        <p:nvSpPr>
+          <p:cNvPr id="9" name="imgph" descr="IMGQ:excavator digging trench underground pipes"/>
           <p:cNvSpPr/>
           <p:nvPr/>
         </p:nvSpPr>
         <p:spPr>
           <a:xfrm>
-            <a:off x="5806440" y="1051560"/>
-            <a:ext cx="5298947" cy="4629150"/>
+            <a:off x="822960" y="1965960"/>
+            <a:ext cx="5303520" cy="4572000"/>
           </a:xfrm>
           <a:prstGeom prst="roundRect">
             <a:avLst/>
@@ -5709,8 +6164,8 @@
         </p:nvSpPr>
         <p:spPr>
           <a:xfrm>
-            <a:off x="6080760" y="2726055"/>
-            <a:ext cx="4750307" cy="1280160"/>
+            <a:off x="1097280" y="3611880"/>
+            <a:ext cx="4754880" cy="1280160"/>
           </a:xfrm>
           <a:prstGeom prst="rect">
             <a:avLst/>
@@ -5731,7 +6186,7 @@
                 </a:solidFill>
                 <a:latin typeface="Montserrat"/>
               </a:rPr>
-              <a:t>IMAGEN REALISTA</a:t>
+              <a:t>IMAGEN</a:t>
             </a:r>
           </a:p>
           <a:p>
@@ -5743,7 +6198,7 @@
                 </a:solidFill>
                 <a:latin typeface="Montserrat"/>
               </a:rPr>
-              <a:t>gas pipe pressure test gauge manometer</a:t>
+              <a:t>excavator digging trench underground pipes</a:t>
             </a:r>
           </a:p>
         </p:txBody>
@@ -5753,6 +6208,18 @@
   <p:clrMapOvr>
     <a:masterClrMapping/>
   </p:clrMapOvr>
+  <mc:AlternateContent xmlns:mc="http://schemas.openxmlformats.org/markup-compatibility/2006">
+    <mc:Choice xmlns:p14="http://schemas.microsoft.com/office/powerpoint/2010/main" Requires="p14">
+      <p:transition spd="med" p14:dur="700">
+        <p14:cube dir="l"/>
+      </p:transition>
+    </mc:Choice>
+    <mc:Fallback>
+      <p:transition spd="med">
+        <p:push dir="l"/>
+      </p:transition>
+    </mc:Fallback>
+  </mc:AlternateContent>
 </p:sld>
 </file>
 
@@ -5840,7 +6307,7 @@
                 </a:solidFill>
                 <a:latin typeface="Montserrat"/>
               </a:rPr>
-              <a:t>012 / 016</a:t>
+              <a:t>012 / 022</a:t>
             </a:r>
           </a:p>
         </p:txBody>
@@ -5908,7 +6375,7 @@
                 </a:solidFill>
                 <a:latin typeface="Montserrat"/>
               </a:rPr>
-              <a:t>APARTADO 5.1 · PAPELEO</a:t>
+              <a:t>APARTADO 4 · OBRAS ESPECIALES</a:t>
             </a:r>
           </a:p>
         </p:txBody>
@@ -5942,14 +6409,14 @@
                 </a:solidFill>
                 <a:latin typeface="Montserrat"/>
               </a:rPr>
-              <a:t>Queda por escrito</a:t>
-            </a:r>
-          </a:p>
-        </p:txBody>
-      </p:sp>
-      <p:sp>
-        <p:nvSpPr>
-          <p:cNvPr id="7" name="Rounded Rectangle 6"/>
+              <a:t>Cruces y obstáculos</a:t>
+            </a:r>
+          </a:p>
+        </p:txBody>
+      </p:sp>
+      <p:sp>
+        <p:nvSpPr>
+          <p:cNvPr id="7" name="Rectangle 6"/>
           <p:cNvSpPr/>
           <p:nvPr/>
         </p:nvSpPr>
@@ -5958,7 +6425,7 @@
             <a:off x="868680" y="1627632"/>
             <a:ext cx="2011680" cy="73152"/>
           </a:xfrm>
-          <a:prstGeom prst="roundRect">
+          <a:prstGeom prst="rect">
             <a:avLst/>
           </a:prstGeom>
           <a:solidFill>
@@ -6000,7 +6467,7 @@
         <p:spPr>
           <a:xfrm>
             <a:off x="822960" y="1965960"/>
-            <a:ext cx="4983480" cy="4206240"/>
+            <a:ext cx="5029200" cy="4206240"/>
           </a:xfrm>
           <a:prstGeom prst="rect">
             <a:avLst/>
@@ -6034,7 +6501,7 @@
                 </a:solidFill>
                 <a:latin typeface="Montserrat"/>
               </a:rPr>
-              <a:t>Solo vale con resultado positivo</a:t>
+              <a:t>Carretera, río, ferrocarril, puente</a:t>
             </a:r>
           </a:p>
           <a:p>
@@ -6059,7 +6526,7 @@
                 </a:solidFill>
                 <a:latin typeface="Montserrat"/>
               </a:rPr>
-              <a:t>Certificado de dirección de obra</a:t>
+              <a:t>Permiso del organismo afectado</a:t>
             </a:r>
           </a:p>
           <a:p>
@@ -6084,21 +6551,21 @@
                 </a:solidFill>
                 <a:latin typeface="Montserrat"/>
               </a:rPr>
-              <a:t>Lo firma el director de obra</a:t>
-            </a:r>
-          </a:p>
-        </p:txBody>
-      </p:sp>
-      <p:sp>
-        <p:nvSpPr>
-          <p:cNvPr id="9" name="imgph" descr="IMGQ:signing construction certificate document pen"/>
+              <a:t>Técnicas alternativas, sin abrir zanja</a:t>
+            </a:r>
+          </a:p>
+        </p:txBody>
+      </p:sp>
+      <p:sp>
+        <p:nvSpPr>
+          <p:cNvPr id="9" name="imgph" descr="IMGQ:horizontal directional drilling pipeline road"/>
           <p:cNvSpPr/>
           <p:nvPr/>
         </p:nvSpPr>
         <p:spPr>
           <a:xfrm>
-            <a:off x="5806440" y="1051560"/>
-            <a:ext cx="5298947" cy="4629150"/>
+            <a:off x="6080760" y="1965960"/>
+            <a:ext cx="5303520" cy="4572000"/>
           </a:xfrm>
           <a:prstGeom prst="roundRect">
             <a:avLst/>
@@ -6143,8 +6610,8 @@
         </p:nvSpPr>
         <p:spPr>
           <a:xfrm>
-            <a:off x="6080760" y="2726055"/>
-            <a:ext cx="4750307" cy="1280160"/>
+            <a:off x="6355080" y="3611880"/>
+            <a:ext cx="4754880" cy="1280160"/>
           </a:xfrm>
           <a:prstGeom prst="rect">
             <a:avLst/>
@@ -6165,7 +6632,7 @@
                 </a:solidFill>
                 <a:latin typeface="Montserrat"/>
               </a:rPr>
-              <a:t>IMAGEN REALISTA</a:t>
+              <a:t>IMAGEN</a:t>
             </a:r>
           </a:p>
           <a:p>
@@ -6177,7 +6644,7 @@
                 </a:solidFill>
                 <a:latin typeface="Montserrat"/>
               </a:rPr>
-              <a:t>signing construction certificate document pen</a:t>
+              <a:t>horizontal directional drilling pipeline road</a:t>
             </a:r>
           </a:p>
         </p:txBody>
@@ -6187,6 +6654,18 @@
   <p:clrMapOvr>
     <a:masterClrMapping/>
   </p:clrMapOvr>
+  <mc:AlternateContent xmlns:mc="http://schemas.openxmlformats.org/markup-compatibility/2006">
+    <mc:Choice xmlns:p14="http://schemas.microsoft.com/office/powerpoint/2010/main" Requires="p14">
+      <p:transition spd="med" p14:dur="700">
+        <p14:cube dir="r"/>
+      </p:transition>
+    </mc:Choice>
+    <mc:Fallback>
+      <p:transition spd="med">
+        <p:push dir="r"/>
+      </p:transition>
+    </mc:Fallback>
+  </mc:AlternateContent>
 </p:sld>
 </file>
 
@@ -6274,7 +6753,7 @@
                 </a:solidFill>
                 <a:latin typeface="Montserrat"/>
               </a:rPr>
-              <a:t>013 / 016</a:t>
+              <a:t>013 / 022</a:t>
             </a:r>
           </a:p>
         </p:txBody>
@@ -6342,7 +6821,7 @@
                 </a:solidFill>
                 <a:latin typeface="Montserrat"/>
               </a:rPr>
-              <a:t>APARTADO 5.2 · PUESTA EN SERVICIO</a:t>
+              <a:t>APARTADO 5.1 · PRUEBAS PREVIAS</a:t>
             </a:r>
           </a:p>
         </p:txBody>
@@ -6376,14 +6855,14 @@
                 </a:solidFill>
                 <a:latin typeface="Montserrat"/>
               </a:rPr>
-              <a:t>Sin pruebas no hay gas</a:t>
-            </a:r>
-          </a:p>
-        </p:txBody>
-      </p:sp>
-      <p:sp>
-        <p:nvSpPr>
-          <p:cNvPr id="7" name="Rounded Rectangle 6"/>
+              <a:t>Resistencia y estanquidad</a:t>
+            </a:r>
+          </a:p>
+        </p:txBody>
+      </p:sp>
+      <p:sp>
+        <p:nvSpPr>
+          <p:cNvPr id="7" name="Rectangle 6"/>
           <p:cNvSpPr/>
           <p:nvPr/>
         </p:nvSpPr>
@@ -6392,7 +6871,7 @@
             <a:off x="868680" y="1627632"/>
             <a:ext cx="2011680" cy="73152"/>
           </a:xfrm>
-          <a:prstGeom prst="roundRect">
+          <a:prstGeom prst="rect">
             <a:avLst/>
           </a:prstGeom>
           <a:solidFill>
@@ -6433,8 +6912,8 @@
         </p:nvSpPr>
         <p:spPr>
           <a:xfrm>
-            <a:off x="822960" y="1965960"/>
-            <a:ext cx="4983480" cy="4206240"/>
+            <a:off x="6355080" y="1965960"/>
+            <a:ext cx="5029200" cy="4206240"/>
           </a:xfrm>
           <a:prstGeom prst="rect">
             <a:avLst/>
@@ -6468,7 +6947,7 @@
                 </a:solidFill>
                 <a:latin typeface="Montserrat"/>
               </a:rPr>
-              <a:t>Solo si superó las pruebas previas</a:t>
+              <a:t>Resistencia: que no reviente</a:t>
             </a:r>
           </a:p>
           <a:p>
@@ -6493,7 +6972,7 @@
                 </a:solidFill>
                 <a:latin typeface="Montserrat"/>
               </a:rPr>
-              <a:t>Evitar la mezcla aire-gas inflamable</a:t>
+              <a:t>Estanquidad: que no fugue</a:t>
             </a:r>
           </a:p>
           <a:p>
@@ -6518,7 +6997,7 @@
                 </a:solidFill>
                 <a:latin typeface="Montserrat"/>
               </a:rPr>
-              <a:t>Llenado lento o tapón de gas inerte</a:t>
+              <a:t>UNE 60310 · 60311 · 60312</a:t>
             </a:r>
           </a:p>
           <a:p>
@@ -6543,21 +7022,21 @@
                 </a:solidFill>
                 <a:latin typeface="Montserrat"/>
               </a:rPr>
-              <a:t>Purgado siempre controlado</a:t>
-            </a:r>
-          </a:p>
-        </p:txBody>
-      </p:sp>
-      <p:sp>
-        <p:nvSpPr>
-          <p:cNvPr id="9" name="imgph" descr="IMGQ:technician opening gas valve gloves pipeline"/>
+              <a:t>Zona despejada durante la prueba</a:t>
+            </a:r>
+          </a:p>
+        </p:txBody>
+      </p:sp>
+      <p:sp>
+        <p:nvSpPr>
+          <p:cNvPr id="9" name="imgph" descr="IMGQ:gas pipe pressure test gauge manometer"/>
           <p:cNvSpPr/>
           <p:nvPr/>
         </p:nvSpPr>
         <p:spPr>
           <a:xfrm>
-            <a:off x="5806440" y="1051560"/>
-            <a:ext cx="5298947" cy="4629150"/>
+            <a:off x="822960" y="1965960"/>
+            <a:ext cx="5303520" cy="4572000"/>
           </a:xfrm>
           <a:prstGeom prst="roundRect">
             <a:avLst/>
@@ -6602,8 +7081,8 @@
         </p:nvSpPr>
         <p:spPr>
           <a:xfrm>
-            <a:off x="6080760" y="2726055"/>
-            <a:ext cx="4750307" cy="1280160"/>
+            <a:off x="1097280" y="3611880"/>
+            <a:ext cx="4754880" cy="1280160"/>
           </a:xfrm>
           <a:prstGeom prst="rect">
             <a:avLst/>
@@ -6624,7 +7103,7 @@
                 </a:solidFill>
                 <a:latin typeface="Montserrat"/>
               </a:rPr>
-              <a:t>IMAGEN REALISTA</a:t>
+              <a:t>IMAGEN</a:t>
             </a:r>
           </a:p>
           <a:p>
@@ -6636,7 +7115,7 @@
                 </a:solidFill>
                 <a:latin typeface="Montserrat"/>
               </a:rPr>
-              <a:t>technician opening gas valve gloves pipeline</a:t>
+              <a:t>gas pipe pressure test gauge manometer</a:t>
             </a:r>
           </a:p>
         </p:txBody>
@@ -6646,6 +7125,18 @@
   <p:clrMapOvr>
     <a:masterClrMapping/>
   </p:clrMapOvr>
+  <mc:AlternateContent xmlns:mc="http://schemas.openxmlformats.org/markup-compatibility/2006">
+    <mc:Choice xmlns:p14="http://schemas.microsoft.com/office/powerpoint/2010/main" Requires="p14">
+      <p:transition spd="med" p14:dur="700">
+        <p14:cube dir="l"/>
+      </p:transition>
+    </mc:Choice>
+    <mc:Fallback>
+      <p:transition spd="med">
+        <p:push dir="l"/>
+      </p:transition>
+    </mc:Fallback>
+  </mc:AlternateContent>
 </p:sld>
 </file>
 
@@ -6733,7 +7224,7 @@
                 </a:solidFill>
                 <a:latin typeface="Montserrat"/>
               </a:rPr>
-              <a:t>014 / 016</a:t>
+              <a:t>014 / 022</a:t>
             </a:r>
           </a:p>
         </p:txBody>
@@ -6774,84 +7265,16 @@
       </p:sp>
       <p:sp>
         <p:nvSpPr>
-          <p:cNvPr id="5" name="TextBox 4"/>
-          <p:cNvSpPr txBox="1"/>
-          <p:nvPr/>
-        </p:nvSpPr>
-        <p:spPr>
-          <a:xfrm>
-            <a:off x="822960" y="457200"/>
-            <a:ext cx="10058400" cy="365760"/>
-          </a:xfrm>
-          <a:prstGeom prst="rect">
-            <a:avLst/>
-          </a:prstGeom>
-          <a:noFill/>
-        </p:spPr>
-        <p:txBody>
-          <a:bodyPr wrap="square">
-            <a:spAutoFit/>
-          </a:bodyPr>
-          <a:lstStyle/>
-          <a:p>
-            <a:r>
-              <a:rPr sz="1300" b="1" i="0">
-                <a:solidFill>
-                  <a:srgbClr val="E8801A"/>
-                </a:solidFill>
-                <a:latin typeface="Montserrat"/>
-              </a:rPr>
-              <a:t>APARTADO 5.2 · QUIÉN LO HACE</a:t>
-            </a:r>
-          </a:p>
-        </p:txBody>
-      </p:sp>
-      <p:sp>
-        <p:nvSpPr>
-          <p:cNvPr id="6" name="TextBox 5"/>
-          <p:cNvSpPr txBox="1"/>
-          <p:nvPr/>
-        </p:nvSpPr>
-        <p:spPr>
-          <a:xfrm>
-            <a:off x="822960" y="868680"/>
-            <a:ext cx="10515600" cy="914400"/>
-          </a:xfrm>
-          <a:prstGeom prst="rect">
-            <a:avLst/>
-          </a:prstGeom>
-          <a:noFill/>
-        </p:spPr>
-        <p:txBody>
-          <a:bodyPr wrap="square">
-            <a:spAutoFit/>
-          </a:bodyPr>
-          <a:lstStyle/>
-          <a:p>
-            <a:r>
-              <a:rPr sz="2800" b="1" i="0">
-                <a:solidFill>
-                  <a:srgbClr val="1E2761"/>
-                </a:solidFill>
-                <a:latin typeface="Montserrat"/>
-              </a:rPr>
-              <a:t>La última barrera</a:t>
-            </a:r>
-          </a:p>
-        </p:txBody>
-      </p:sp>
-      <p:sp>
-        <p:nvSpPr>
-          <p:cNvPr id="7" name="Rounded Rectangle 6"/>
+          <p:cNvPr id="5" name="Rectangle 4"/>
           <p:cNvSpPr/>
           <p:nvPr/>
         </p:nvSpPr>
         <p:spPr>
           <a:xfrm>
-            <a:off x="868680" y="1627632"/>
-            <a:ext cx="2011680" cy="73152"/>
-          </a:xfrm>
-          <a:prstGeom prst="roundRect">
+            <a:off x="0" y="0"/>
+            <a:ext cx="12191695" cy="1143000"/>
+          </a:xfrm>
+          <a:prstGeom prst="rect">
             <a:avLst/>
           </a:prstGeom>
           <a:solidFill>
@@ -6886,14 +7309,14 @@
       </p:sp>
       <p:sp>
         <p:nvSpPr>
-          <p:cNvPr id="8" name="TextBox 7"/>
+          <p:cNvPr id="6" name="TextBox 5"/>
           <p:cNvSpPr txBox="1"/>
           <p:nvPr/>
         </p:nvSpPr>
         <p:spPr>
           <a:xfrm>
-            <a:off x="822960" y="1965960"/>
-            <a:ext cx="4983480" cy="4206240"/>
+            <a:off x="822960" y="274320"/>
+            <a:ext cx="10515600" cy="640080"/>
           </a:xfrm>
           <a:prstGeom prst="rect">
             <a:avLst/>
@@ -6906,92 +7329,62 @@
           </a:bodyPr>
           <a:lstStyle/>
           <a:p>
-            <a:pPr>
-              <a:spcAft>
-                <a:spcPts val="1100"/>
-              </a:spcAft>
-            </a:pPr>
-            <a:r>
-              <a:rPr sz="1600" b="1" i="0">
-                <a:solidFill>
-                  <a:srgbClr val="E8801A"/>
-                </a:solidFill>
-                <a:latin typeface="Montserrat"/>
-              </a:rPr>
-              <a:t>▸  </a:t>
-            </a:r>
-            <a:r>
-              <a:rPr sz="1600" b="0" i="0">
-                <a:solidFill>
-                  <a:srgbClr val="1B2330"/>
-                </a:solidFill>
-                <a:latin typeface="Montserrat"/>
-              </a:rPr>
-              <a:t>Personal cualificado autorizado</a:t>
-            </a:r>
-          </a:p>
-          <a:p>
-            <a:pPr>
-              <a:spcAft>
-                <a:spcPts val="1100"/>
-              </a:spcAft>
-            </a:pPr>
-            <a:r>
-              <a:rPr sz="1600" b="1" i="0">
-                <a:solidFill>
-                  <a:srgbClr val="E8801A"/>
-                </a:solidFill>
-                <a:latin typeface="Montserrat"/>
-              </a:rPr>
-              <a:t>▸  </a:t>
-            </a:r>
-            <a:r>
-              <a:rPr sz="1600" b="0" i="0">
-                <a:solidFill>
-                  <a:srgbClr val="1B2330"/>
-                </a:solidFill>
-                <a:latin typeface="Montserrat"/>
-              </a:rPr>
-              <a:t>Por el distribuidor o el titular</a:t>
-            </a:r>
-          </a:p>
-          <a:p>
-            <a:pPr>
-              <a:spcAft>
-                <a:spcPts val="1100"/>
-              </a:spcAft>
-            </a:pPr>
-            <a:r>
-              <a:rPr sz="1600" b="1" i="0">
-                <a:solidFill>
-                  <a:srgbClr val="E8801A"/>
-                </a:solidFill>
-                <a:latin typeface="Montserrat"/>
-              </a:rPr>
-              <a:t>▸  </a:t>
-            </a:r>
-            <a:r>
-              <a:rPr sz="1600" b="0" i="0">
-                <a:solidFill>
-                  <a:srgbClr val="1B2330"/>
-                </a:solidFill>
-                <a:latin typeface="Montserrat"/>
-              </a:rPr>
-              <a:t>Con conocimiento del director de obra</a:t>
-            </a:r>
-          </a:p>
-        </p:txBody>
-      </p:sp>
-      <p:sp>
-        <p:nvSpPr>
-          <p:cNvPr id="9" name="imgph" descr="IMGQ:gas technician commissioning pipeline outdoor"/>
+            <a:r>
+              <a:rPr sz="2400" b="1" i="0">
+                <a:solidFill>
+                  <a:srgbClr val="FFFFFF"/>
+                </a:solidFill>
+                <a:latin typeface="Montserrat"/>
+              </a:rPr>
+              <a:t>⚡  PREGUNTA RÁPIDA</a:t>
+            </a:r>
+          </a:p>
+        </p:txBody>
+      </p:sp>
+      <p:sp>
+        <p:nvSpPr>
+          <p:cNvPr id="7" name="TextBox 6"/>
+          <p:cNvSpPr txBox="1"/>
+          <p:nvPr/>
+        </p:nvSpPr>
+        <p:spPr>
+          <a:xfrm>
+            <a:off x="822960" y="1508760"/>
+            <a:ext cx="10515600" cy="1371600"/>
+          </a:xfrm>
+          <a:prstGeom prst="rect">
+            <a:avLst/>
+          </a:prstGeom>
+          <a:noFill/>
+        </p:spPr>
+        <p:txBody>
+          <a:bodyPr wrap="square">
+            <a:spAutoFit/>
+          </a:bodyPr>
+          <a:lstStyle/>
+          <a:p>
+            <a:r>
+              <a:rPr sz="2400" b="1" i="0">
+                <a:solidFill>
+                  <a:srgbClr val="1E2761"/>
+                </a:solidFill>
+                <a:latin typeface="Montserrat"/>
+              </a:rPr>
+              <a:t>En las pruebas previas, ¿qué comprueba exactamente la prueba de estanquidad?</a:t>
+            </a:r>
+          </a:p>
+        </p:txBody>
+      </p:sp>
+      <p:sp>
+        <p:nvSpPr>
+          <p:cNvPr id="8" name="Rounded Rectangle 7"/>
           <p:cNvSpPr/>
           <p:nvPr/>
         </p:nvSpPr>
         <p:spPr>
           <a:xfrm>
-            <a:off x="5806440" y="1051560"/>
-            <a:ext cx="5298947" cy="4629150"/>
+            <a:off x="822960" y="3291840"/>
+            <a:ext cx="4983480" cy="1143000"/>
           </a:xfrm>
           <a:prstGeom prst="roundRect">
             <a:avLst/>
@@ -7030,14 +7423,58 @@
       </p:sp>
       <p:sp>
         <p:nvSpPr>
+          <p:cNvPr id="9" name="Rectangle 8"/>
+          <p:cNvSpPr/>
+          <p:nvPr/>
+        </p:nvSpPr>
+        <p:spPr>
+          <a:xfrm>
+            <a:off x="822960" y="3291840"/>
+            <a:ext cx="640080" cy="1143000"/>
+          </a:xfrm>
+          <a:prstGeom prst="rect">
+            <a:avLst/>
+          </a:prstGeom>
+          <a:solidFill>
+            <a:srgbClr val="1E2761"/>
+          </a:solidFill>
+          <a:ln>
+            <a:noFill/>
+          </a:ln>
+          <a:effectLst/>
+        </p:spPr>
+        <p:style>
+          <a:lnRef idx="1">
+            <a:schemeClr val="accent1"/>
+          </a:lnRef>
+          <a:fillRef idx="3">
+            <a:schemeClr val="accent1"/>
+          </a:fillRef>
+          <a:effectRef idx="2">
+            <a:schemeClr val="accent1"/>
+          </a:effectRef>
+          <a:fontRef idx="minor">
+            <a:schemeClr val="lt1"/>
+          </a:fontRef>
+        </p:style>
+        <p:txBody>
+          <a:bodyPr rtlCol="0" anchor="ctr"/>
+          <a:lstStyle/>
+          <a:p>
+            <a:pPr algn="ctr"/>
+          </a:p>
+        </p:txBody>
+      </p:sp>
+      <p:sp>
+        <p:nvSpPr>
           <p:cNvPr id="10" name="TextBox 9"/>
           <p:cNvSpPr txBox="1"/>
           <p:nvPr/>
         </p:nvSpPr>
         <p:spPr>
           <a:xfrm>
-            <a:off x="6080760" y="2726055"/>
-            <a:ext cx="4750307" cy="1280160"/>
+            <a:off x="822960" y="3611880"/>
+            <a:ext cx="640080" cy="548640"/>
           </a:xfrm>
           <a:prstGeom prst="rect">
             <a:avLst/>
@@ -7052,25 +7489,524 @@
           <a:p>
             <a:pPr algn="ctr"/>
             <a:r>
-              <a:rPr sz="1400" b="1" i="0">
-                <a:solidFill>
-                  <a:srgbClr val="64748B"/>
-                </a:solidFill>
-                <a:latin typeface="Montserrat"/>
-              </a:rPr>
-              <a:t>IMAGEN REALISTA</a:t>
-            </a:r>
-          </a:p>
+              <a:rPr sz="2200" b="1" i="0">
+                <a:solidFill>
+                  <a:srgbClr val="FFFFFF"/>
+                </a:solidFill>
+                <a:latin typeface="Montserrat"/>
+              </a:rPr>
+              <a:t>A</a:t>
+            </a:r>
+          </a:p>
+        </p:txBody>
+      </p:sp>
+      <p:sp>
+        <p:nvSpPr>
+          <p:cNvPr id="11" name="TextBox 10"/>
+          <p:cNvSpPr txBox="1"/>
+          <p:nvPr/>
+        </p:nvSpPr>
+        <p:spPr>
+          <a:xfrm>
+            <a:off x="1600200" y="3474720"/>
+            <a:ext cx="4114800" cy="868680"/>
+          </a:xfrm>
+          <a:prstGeom prst="rect">
+            <a:avLst/>
+          </a:prstGeom>
+          <a:noFill/>
+        </p:spPr>
+        <p:txBody>
+          <a:bodyPr wrap="square">
+            <a:spAutoFit/>
+          </a:bodyPr>
+          <a:lstStyle/>
+          <a:p>
+            <a:r>
+              <a:rPr sz="1400" b="0" i="0">
+                <a:solidFill>
+                  <a:srgbClr val="1B2330"/>
+                </a:solidFill>
+                <a:latin typeface="Montserrat"/>
+              </a:rPr>
+              <a:t>Que la tubería no deja escapar el gas por ninguna unión</a:t>
+            </a:r>
+          </a:p>
+        </p:txBody>
+      </p:sp>
+      <p:sp>
+        <p:nvSpPr>
+          <p:cNvPr id="12" name="Rounded Rectangle 11"/>
+          <p:cNvSpPr/>
+          <p:nvPr/>
+        </p:nvSpPr>
+        <p:spPr>
+          <a:xfrm>
+            <a:off x="6355080" y="3291840"/>
+            <a:ext cx="4983480" cy="1143000"/>
+          </a:xfrm>
+          <a:prstGeom prst="roundRect">
+            <a:avLst/>
+          </a:prstGeom>
+          <a:solidFill>
+            <a:srgbClr val="F3F6FB"/>
+          </a:solidFill>
+          <a:ln w="12700">
+            <a:solidFill>
+              <a:srgbClr val="C7D2E6"/>
+            </a:solidFill>
+          </a:ln>
+          <a:effectLst/>
+        </p:spPr>
+        <p:style>
+          <a:lnRef idx="1">
+            <a:schemeClr val="accent1"/>
+          </a:lnRef>
+          <a:fillRef idx="3">
+            <a:schemeClr val="accent1"/>
+          </a:fillRef>
+          <a:effectRef idx="2">
+            <a:schemeClr val="accent1"/>
+          </a:effectRef>
+          <a:fontRef idx="minor">
+            <a:schemeClr val="lt1"/>
+          </a:fontRef>
+        </p:style>
+        <p:txBody>
+          <a:bodyPr rtlCol="0" anchor="ctr"/>
+          <a:lstStyle/>
           <a:p>
             <a:pPr algn="ctr"/>
-            <a:r>
-              <a:rPr sz="1100" b="0" i="1">
-                <a:solidFill>
-                  <a:srgbClr val="64748B"/>
-                </a:solidFill>
-                <a:latin typeface="Montserrat"/>
-              </a:rPr>
-              <a:t>gas technician commissioning pipeline outdoor</a:t>
+          </a:p>
+        </p:txBody>
+      </p:sp>
+      <p:sp>
+        <p:nvSpPr>
+          <p:cNvPr id="13" name="Rectangle 12"/>
+          <p:cNvSpPr/>
+          <p:nvPr/>
+        </p:nvSpPr>
+        <p:spPr>
+          <a:xfrm>
+            <a:off x="6355080" y="3291840"/>
+            <a:ext cx="640080" cy="1143000"/>
+          </a:xfrm>
+          <a:prstGeom prst="rect">
+            <a:avLst/>
+          </a:prstGeom>
+          <a:solidFill>
+            <a:srgbClr val="1E2761"/>
+          </a:solidFill>
+          <a:ln>
+            <a:noFill/>
+          </a:ln>
+          <a:effectLst/>
+        </p:spPr>
+        <p:style>
+          <a:lnRef idx="1">
+            <a:schemeClr val="accent1"/>
+          </a:lnRef>
+          <a:fillRef idx="3">
+            <a:schemeClr val="accent1"/>
+          </a:fillRef>
+          <a:effectRef idx="2">
+            <a:schemeClr val="accent1"/>
+          </a:effectRef>
+          <a:fontRef idx="minor">
+            <a:schemeClr val="lt1"/>
+          </a:fontRef>
+        </p:style>
+        <p:txBody>
+          <a:bodyPr rtlCol="0" anchor="ctr"/>
+          <a:lstStyle/>
+          <a:p>
+            <a:pPr algn="ctr"/>
+          </a:p>
+        </p:txBody>
+      </p:sp>
+      <p:sp>
+        <p:nvSpPr>
+          <p:cNvPr id="14" name="TextBox 13"/>
+          <p:cNvSpPr txBox="1"/>
+          <p:nvPr/>
+        </p:nvSpPr>
+        <p:spPr>
+          <a:xfrm>
+            <a:off x="6355080" y="3611880"/>
+            <a:ext cx="640080" cy="548640"/>
+          </a:xfrm>
+          <a:prstGeom prst="rect">
+            <a:avLst/>
+          </a:prstGeom>
+          <a:noFill/>
+        </p:spPr>
+        <p:txBody>
+          <a:bodyPr wrap="square">
+            <a:spAutoFit/>
+          </a:bodyPr>
+          <a:lstStyle/>
+          <a:p>
+            <a:pPr algn="ctr"/>
+            <a:r>
+              <a:rPr sz="2200" b="1" i="0">
+                <a:solidFill>
+                  <a:srgbClr val="FFFFFF"/>
+                </a:solidFill>
+                <a:latin typeface="Montserrat"/>
+              </a:rPr>
+              <a:t>B</a:t>
+            </a:r>
+          </a:p>
+        </p:txBody>
+      </p:sp>
+      <p:sp>
+        <p:nvSpPr>
+          <p:cNvPr id="15" name="TextBox 14"/>
+          <p:cNvSpPr txBox="1"/>
+          <p:nvPr/>
+        </p:nvSpPr>
+        <p:spPr>
+          <a:xfrm>
+            <a:off x="7132320" y="3474720"/>
+            <a:ext cx="4114800" cy="868680"/>
+          </a:xfrm>
+          <a:prstGeom prst="rect">
+            <a:avLst/>
+          </a:prstGeom>
+          <a:noFill/>
+        </p:spPr>
+        <p:txBody>
+          <a:bodyPr wrap="square">
+            <a:spAutoFit/>
+          </a:bodyPr>
+          <a:lstStyle/>
+          <a:p>
+            <a:r>
+              <a:rPr sz="1400" b="0" i="0">
+                <a:solidFill>
+                  <a:srgbClr val="1B2330"/>
+                </a:solidFill>
+                <a:latin typeface="Montserrat"/>
+              </a:rPr>
+              <a:t>Que la tubería aguanta la presión sin reventar</a:t>
+            </a:r>
+          </a:p>
+        </p:txBody>
+      </p:sp>
+      <p:sp>
+        <p:nvSpPr>
+          <p:cNvPr id="16" name="Rounded Rectangle 15"/>
+          <p:cNvSpPr/>
+          <p:nvPr/>
+        </p:nvSpPr>
+        <p:spPr>
+          <a:xfrm>
+            <a:off x="822960" y="4617720"/>
+            <a:ext cx="4983480" cy="1143000"/>
+          </a:xfrm>
+          <a:prstGeom prst="roundRect">
+            <a:avLst/>
+          </a:prstGeom>
+          <a:solidFill>
+            <a:srgbClr val="F3F6FB"/>
+          </a:solidFill>
+          <a:ln w="12700">
+            <a:solidFill>
+              <a:srgbClr val="C7D2E6"/>
+            </a:solidFill>
+          </a:ln>
+          <a:effectLst/>
+        </p:spPr>
+        <p:style>
+          <a:lnRef idx="1">
+            <a:schemeClr val="accent1"/>
+          </a:lnRef>
+          <a:fillRef idx="3">
+            <a:schemeClr val="accent1"/>
+          </a:fillRef>
+          <a:effectRef idx="2">
+            <a:schemeClr val="accent1"/>
+          </a:effectRef>
+          <a:fontRef idx="minor">
+            <a:schemeClr val="lt1"/>
+          </a:fontRef>
+        </p:style>
+        <p:txBody>
+          <a:bodyPr rtlCol="0" anchor="ctr"/>
+          <a:lstStyle/>
+          <a:p>
+            <a:pPr algn="ctr"/>
+          </a:p>
+        </p:txBody>
+      </p:sp>
+      <p:sp>
+        <p:nvSpPr>
+          <p:cNvPr id="17" name="Rectangle 16"/>
+          <p:cNvSpPr/>
+          <p:nvPr/>
+        </p:nvSpPr>
+        <p:spPr>
+          <a:xfrm>
+            <a:off x="822960" y="4617720"/>
+            <a:ext cx="640080" cy="1143000"/>
+          </a:xfrm>
+          <a:prstGeom prst="rect">
+            <a:avLst/>
+          </a:prstGeom>
+          <a:solidFill>
+            <a:srgbClr val="1E2761"/>
+          </a:solidFill>
+          <a:ln>
+            <a:noFill/>
+          </a:ln>
+          <a:effectLst/>
+        </p:spPr>
+        <p:style>
+          <a:lnRef idx="1">
+            <a:schemeClr val="accent1"/>
+          </a:lnRef>
+          <a:fillRef idx="3">
+            <a:schemeClr val="accent1"/>
+          </a:fillRef>
+          <a:effectRef idx="2">
+            <a:schemeClr val="accent1"/>
+          </a:effectRef>
+          <a:fontRef idx="minor">
+            <a:schemeClr val="lt1"/>
+          </a:fontRef>
+        </p:style>
+        <p:txBody>
+          <a:bodyPr rtlCol="0" anchor="ctr"/>
+          <a:lstStyle/>
+          <a:p>
+            <a:pPr algn="ctr"/>
+          </a:p>
+        </p:txBody>
+      </p:sp>
+      <p:sp>
+        <p:nvSpPr>
+          <p:cNvPr id="18" name="TextBox 17"/>
+          <p:cNvSpPr txBox="1"/>
+          <p:nvPr/>
+        </p:nvSpPr>
+        <p:spPr>
+          <a:xfrm>
+            <a:off x="822960" y="4937760"/>
+            <a:ext cx="640080" cy="548640"/>
+          </a:xfrm>
+          <a:prstGeom prst="rect">
+            <a:avLst/>
+          </a:prstGeom>
+          <a:noFill/>
+        </p:spPr>
+        <p:txBody>
+          <a:bodyPr wrap="square">
+            <a:spAutoFit/>
+          </a:bodyPr>
+          <a:lstStyle/>
+          <a:p>
+            <a:pPr algn="ctr"/>
+            <a:r>
+              <a:rPr sz="2200" b="1" i="0">
+                <a:solidFill>
+                  <a:srgbClr val="FFFFFF"/>
+                </a:solidFill>
+                <a:latin typeface="Montserrat"/>
+              </a:rPr>
+              <a:t>C</a:t>
+            </a:r>
+          </a:p>
+        </p:txBody>
+      </p:sp>
+      <p:sp>
+        <p:nvSpPr>
+          <p:cNvPr id="19" name="TextBox 18"/>
+          <p:cNvSpPr txBox="1"/>
+          <p:nvPr/>
+        </p:nvSpPr>
+        <p:spPr>
+          <a:xfrm>
+            <a:off x="1600200" y="4800600"/>
+            <a:ext cx="4114800" cy="868680"/>
+          </a:xfrm>
+          <a:prstGeom prst="rect">
+            <a:avLst/>
+          </a:prstGeom>
+          <a:noFill/>
+        </p:spPr>
+        <p:txBody>
+          <a:bodyPr wrap="square">
+            <a:spAutoFit/>
+          </a:bodyPr>
+          <a:lstStyle/>
+          <a:p>
+            <a:r>
+              <a:rPr sz="1400" b="0" i="0">
+                <a:solidFill>
+                  <a:srgbClr val="1B2330"/>
+                </a:solidFill>
+                <a:latin typeface="Montserrat"/>
+              </a:rPr>
+              <a:t>Que el material resiste la corrosión del terreno</a:t>
+            </a:r>
+          </a:p>
+        </p:txBody>
+      </p:sp>
+      <p:sp>
+        <p:nvSpPr>
+          <p:cNvPr id="20" name="Rounded Rectangle 19"/>
+          <p:cNvSpPr/>
+          <p:nvPr/>
+        </p:nvSpPr>
+        <p:spPr>
+          <a:xfrm>
+            <a:off x="6355080" y="4617720"/>
+            <a:ext cx="4983480" cy="1143000"/>
+          </a:xfrm>
+          <a:prstGeom prst="roundRect">
+            <a:avLst/>
+          </a:prstGeom>
+          <a:solidFill>
+            <a:srgbClr val="F3F6FB"/>
+          </a:solidFill>
+          <a:ln w="12700">
+            <a:solidFill>
+              <a:srgbClr val="C7D2E6"/>
+            </a:solidFill>
+          </a:ln>
+          <a:effectLst/>
+        </p:spPr>
+        <p:style>
+          <a:lnRef idx="1">
+            <a:schemeClr val="accent1"/>
+          </a:lnRef>
+          <a:fillRef idx="3">
+            <a:schemeClr val="accent1"/>
+          </a:fillRef>
+          <a:effectRef idx="2">
+            <a:schemeClr val="accent1"/>
+          </a:effectRef>
+          <a:fontRef idx="minor">
+            <a:schemeClr val="lt1"/>
+          </a:fontRef>
+        </p:style>
+        <p:txBody>
+          <a:bodyPr rtlCol="0" anchor="ctr"/>
+          <a:lstStyle/>
+          <a:p>
+            <a:pPr algn="ctr"/>
+          </a:p>
+        </p:txBody>
+      </p:sp>
+      <p:sp>
+        <p:nvSpPr>
+          <p:cNvPr id="21" name="Rectangle 20"/>
+          <p:cNvSpPr/>
+          <p:nvPr/>
+        </p:nvSpPr>
+        <p:spPr>
+          <a:xfrm>
+            <a:off x="6355080" y="4617720"/>
+            <a:ext cx="640080" cy="1143000"/>
+          </a:xfrm>
+          <a:prstGeom prst="rect">
+            <a:avLst/>
+          </a:prstGeom>
+          <a:solidFill>
+            <a:srgbClr val="1E2761"/>
+          </a:solidFill>
+          <a:ln>
+            <a:noFill/>
+          </a:ln>
+          <a:effectLst/>
+        </p:spPr>
+        <p:style>
+          <a:lnRef idx="1">
+            <a:schemeClr val="accent1"/>
+          </a:lnRef>
+          <a:fillRef idx="3">
+            <a:schemeClr val="accent1"/>
+          </a:fillRef>
+          <a:effectRef idx="2">
+            <a:schemeClr val="accent1"/>
+          </a:effectRef>
+          <a:fontRef idx="minor">
+            <a:schemeClr val="lt1"/>
+          </a:fontRef>
+        </p:style>
+        <p:txBody>
+          <a:bodyPr rtlCol="0" anchor="ctr"/>
+          <a:lstStyle/>
+          <a:p>
+            <a:pPr algn="ctr"/>
+          </a:p>
+        </p:txBody>
+      </p:sp>
+      <p:sp>
+        <p:nvSpPr>
+          <p:cNvPr id="22" name="TextBox 21"/>
+          <p:cNvSpPr txBox="1"/>
+          <p:nvPr/>
+        </p:nvSpPr>
+        <p:spPr>
+          <a:xfrm>
+            <a:off x="6355080" y="4937760"/>
+            <a:ext cx="640080" cy="548640"/>
+          </a:xfrm>
+          <a:prstGeom prst="rect">
+            <a:avLst/>
+          </a:prstGeom>
+          <a:noFill/>
+        </p:spPr>
+        <p:txBody>
+          <a:bodyPr wrap="square">
+            <a:spAutoFit/>
+          </a:bodyPr>
+          <a:lstStyle/>
+          <a:p>
+            <a:pPr algn="ctr"/>
+            <a:r>
+              <a:rPr sz="2200" b="1" i="0">
+                <a:solidFill>
+                  <a:srgbClr val="FFFFFF"/>
+                </a:solidFill>
+                <a:latin typeface="Montserrat"/>
+              </a:rPr>
+              <a:t>D</a:t>
+            </a:r>
+          </a:p>
+        </p:txBody>
+      </p:sp>
+      <p:sp>
+        <p:nvSpPr>
+          <p:cNvPr id="23" name="TextBox 22"/>
+          <p:cNvSpPr txBox="1"/>
+          <p:nvPr/>
+        </p:nvSpPr>
+        <p:spPr>
+          <a:xfrm>
+            <a:off x="7132320" y="4800600"/>
+            <a:ext cx="4114800" cy="868680"/>
+          </a:xfrm>
+          <a:prstGeom prst="rect">
+            <a:avLst/>
+          </a:prstGeom>
+          <a:noFill/>
+        </p:spPr>
+        <p:txBody>
+          <a:bodyPr wrap="square">
+            <a:spAutoFit/>
+          </a:bodyPr>
+          <a:lstStyle/>
+          <a:p>
+            <a:r>
+              <a:rPr sz="1400" b="0" i="0">
+                <a:solidFill>
+                  <a:srgbClr val="1B2330"/>
+                </a:solidFill>
+                <a:latin typeface="Montserrat"/>
+              </a:rPr>
+              <a:t>Que la red tiene el diámetro adecuado a la demanda</a:t>
             </a:r>
           </a:p>
         </p:txBody>
@@ -7080,6 +8016,18 @@
   <p:clrMapOvr>
     <a:masterClrMapping/>
   </p:clrMapOvr>
+  <mc:AlternateContent xmlns:mc="http://schemas.openxmlformats.org/markup-compatibility/2006">
+    <mc:Choice xmlns:p14="http://schemas.microsoft.com/office/powerpoint/2010/main" Requires="p14">
+      <p:transition spd="med" p14:dur="700">
+        <p14:cube dir="r"/>
+      </p:transition>
+    </mc:Choice>
+    <mc:Fallback>
+      <p:transition spd="med">
+        <p:push dir="r"/>
+      </p:transition>
+    </mc:Fallback>
+  </mc:AlternateContent>
 </p:sld>
 </file>
 
@@ -7167,7 +8115,7 @@
                 </a:solidFill>
                 <a:latin typeface="Montserrat"/>
               </a:rPr>
-              <a:t>015 / 016</a:t>
+              <a:t>015 / 022</a:t>
             </a:r>
           </a:p>
         </p:txBody>
@@ -7208,88 +8156,20 @@
       </p:sp>
       <p:sp>
         <p:nvSpPr>
-          <p:cNvPr id="5" name="TextBox 4"/>
-          <p:cNvSpPr txBox="1"/>
-          <p:nvPr/>
-        </p:nvSpPr>
-        <p:spPr>
-          <a:xfrm>
-            <a:off x="822960" y="457200"/>
-            <a:ext cx="10058400" cy="365760"/>
-          </a:xfrm>
-          <a:prstGeom prst="rect">
-            <a:avLst/>
-          </a:prstGeom>
-          <a:noFill/>
-        </p:spPr>
-        <p:txBody>
-          <a:bodyPr wrap="square">
-            <a:spAutoFit/>
-          </a:bodyPr>
-          <a:lstStyle/>
-          <a:p>
-            <a:r>
-              <a:rPr sz="1300" b="1" i="0">
-                <a:solidFill>
-                  <a:srgbClr val="E8801A"/>
-                </a:solidFill>
-                <a:latin typeface="Montserrat"/>
-              </a:rPr>
-              <a:t>REPASO RELÁMPAGO</a:t>
-            </a:r>
-          </a:p>
-        </p:txBody>
-      </p:sp>
-      <p:sp>
-        <p:nvSpPr>
-          <p:cNvPr id="6" name="TextBox 5"/>
-          <p:cNvSpPr txBox="1"/>
-          <p:nvPr/>
-        </p:nvSpPr>
-        <p:spPr>
-          <a:xfrm>
-            <a:off x="822960" y="868680"/>
-            <a:ext cx="10515600" cy="914400"/>
-          </a:xfrm>
-          <a:prstGeom prst="rect">
-            <a:avLst/>
-          </a:prstGeom>
-          <a:noFill/>
-        </p:spPr>
-        <p:txBody>
-          <a:bodyPr wrap="square">
-            <a:spAutoFit/>
-          </a:bodyPr>
-          <a:lstStyle/>
-          <a:p>
-            <a:r>
-              <a:rPr sz="2800" b="1" i="0">
-                <a:solidFill>
-                  <a:srgbClr val="1E2761"/>
-                </a:solidFill>
-                <a:latin typeface="Montserrat"/>
-              </a:rPr>
-              <a:t>Lo que no se te puede olvidar</a:t>
-            </a:r>
-          </a:p>
-        </p:txBody>
-      </p:sp>
-      <p:sp>
-        <p:nvSpPr>
-          <p:cNvPr id="7" name="Rounded Rectangle 6"/>
+          <p:cNvPr id="5" name="Rectangle 4"/>
           <p:cNvSpPr/>
           <p:nvPr/>
         </p:nvSpPr>
         <p:spPr>
           <a:xfrm>
-            <a:off x="868680" y="1627632"/>
-            <a:ext cx="2011680" cy="73152"/>
-          </a:xfrm>
-          <a:prstGeom prst="roundRect">
+            <a:off x="0" y="0"/>
+            <a:ext cx="12191695" cy="1143000"/>
+          </a:xfrm>
+          <a:prstGeom prst="rect">
             <a:avLst/>
           </a:prstGeom>
           <a:solidFill>
-            <a:srgbClr val="E8801A"/>
+            <a:srgbClr val="1E8E4B"/>
           </a:solidFill>
           <a:ln>
             <a:noFill/>
@@ -7320,14 +8200,14 @@
       </p:sp>
       <p:sp>
         <p:nvSpPr>
-          <p:cNvPr id="8" name="TextBox 7"/>
+          <p:cNvPr id="6" name="TextBox 5"/>
           <p:cNvSpPr txBox="1"/>
           <p:nvPr/>
         </p:nvSpPr>
         <p:spPr>
           <a:xfrm>
-            <a:off x="822960" y="1965960"/>
-            <a:ext cx="4983480" cy="4206240"/>
+            <a:off x="822960" y="274320"/>
+            <a:ext cx="10515600" cy="640080"/>
           </a:xfrm>
           <a:prstGeom prst="rect">
             <a:avLst/>
@@ -7340,127 +8220,72 @@
           </a:bodyPr>
           <a:lstStyle/>
           <a:p>
-            <a:pPr>
-              <a:spcAft>
-                <a:spcPts val="1100"/>
-              </a:spcAft>
-            </a:pPr>
-            <a:r>
-              <a:rPr sz="1600" b="1" i="0">
-                <a:solidFill>
-                  <a:srgbClr val="E8801A"/>
-                </a:solidFill>
-                <a:latin typeface="Montserrat"/>
-              </a:rPr>
-              <a:t>▸  </a:t>
-            </a:r>
-            <a:r>
-              <a:rPr sz="1600" b="0" i="0">
-                <a:solidFill>
-                  <a:srgbClr val="1B2330"/>
-                </a:solidFill>
-                <a:latin typeface="Montserrat"/>
-              </a:rPr>
-              <a:t>Manda en la red de la calle, no la tuya</a:t>
-            </a:r>
-          </a:p>
-          <a:p>
-            <a:pPr>
-              <a:spcAft>
-                <a:spcPts val="1100"/>
-              </a:spcAft>
-            </a:pPr>
-            <a:r>
-              <a:rPr sz="1600" b="1" i="0">
-                <a:solidFill>
-                  <a:srgbClr val="E8801A"/>
-                </a:solidFill>
-                <a:latin typeface="Montserrat"/>
-              </a:rPr>
-              <a:t>▸  </a:t>
-            </a:r>
-            <a:r>
-              <a:rPr sz="1600" b="0" i="0">
-                <a:solidFill>
-                  <a:srgbClr val="1B2330"/>
-                </a:solidFill>
-                <a:latin typeface="Montserrat"/>
-              </a:rPr>
-              <a:t>Autoriza la CA · entrega primer trimestre</a:t>
-            </a:r>
-          </a:p>
-          <a:p>
-            <a:pPr>
-              <a:spcAft>
-                <a:spcPts val="1100"/>
-              </a:spcAft>
-            </a:pPr>
-            <a:r>
-              <a:rPr sz="1600" b="1" i="0">
-                <a:solidFill>
-                  <a:srgbClr val="E8801A"/>
-                </a:solidFill>
-                <a:latin typeface="Montserrat"/>
-              </a:rPr>
-              <a:t>▸  </a:t>
-            </a:r>
-            <a:r>
-              <a:rPr sz="1600" b="0" i="0">
-                <a:solidFill>
-                  <a:srgbClr val="1B2330"/>
-                </a:solidFill>
-                <a:latin typeface="Montserrat"/>
-              </a:rPr>
-              <a:t>Sin pruebas superadas, no hay gas</a:t>
-            </a:r>
-          </a:p>
-          <a:p>
-            <a:pPr>
-              <a:spcAft>
-                <a:spcPts val="1100"/>
-              </a:spcAft>
-            </a:pPr>
-            <a:r>
-              <a:rPr sz="1600" b="1" i="0">
-                <a:solidFill>
-                  <a:srgbClr val="E8801A"/>
-                </a:solidFill>
-                <a:latin typeface="Montserrat"/>
-              </a:rPr>
-              <a:t>▸  </a:t>
-            </a:r>
-            <a:r>
-              <a:rPr sz="1600" b="0" i="0">
-                <a:solidFill>
-                  <a:srgbClr val="1B2330"/>
-                </a:solidFill>
-                <a:latin typeface="Montserrat"/>
-              </a:rPr>
-              <a:t>El peligro es la mezcla aire-gas</a:t>
-            </a:r>
-          </a:p>
-        </p:txBody>
-      </p:sp>
-      <p:sp>
-        <p:nvSpPr>
-          <p:cNvPr id="9" name="imgph" descr="IMGQ:gas meter cabinet street wall building"/>
+            <a:r>
+              <a:rPr sz="2400" b="1" i="0">
+                <a:solidFill>
+                  <a:srgbClr val="FFFFFF"/>
+                </a:solidFill>
+                <a:latin typeface="Montserrat"/>
+              </a:rPr>
+              <a:t>✔  RESPUESTA:  A</a:t>
+            </a:r>
+          </a:p>
+        </p:txBody>
+      </p:sp>
+      <p:sp>
+        <p:nvSpPr>
+          <p:cNvPr id="7" name="TextBox 6"/>
+          <p:cNvSpPr txBox="1"/>
+          <p:nvPr/>
+        </p:nvSpPr>
+        <p:spPr>
+          <a:xfrm>
+            <a:off x="822960" y="1417320"/>
+            <a:ext cx="10515600" cy="914400"/>
+          </a:xfrm>
+          <a:prstGeom prst="rect">
+            <a:avLst/>
+          </a:prstGeom>
+          <a:noFill/>
+        </p:spPr>
+        <p:txBody>
+          <a:bodyPr wrap="square">
+            <a:spAutoFit/>
+          </a:bodyPr>
+          <a:lstStyle/>
+          <a:p>
+            <a:r>
+              <a:rPr sz="1800" b="1" i="0">
+                <a:solidFill>
+                  <a:srgbClr val="64748B"/>
+                </a:solidFill>
+                <a:latin typeface="Montserrat"/>
+              </a:rPr>
+              <a:t>En las pruebas previas, ¿qué comprueba exactamente la prueba de estanquidad?</a:t>
+            </a:r>
+          </a:p>
+        </p:txBody>
+      </p:sp>
+      <p:sp>
+        <p:nvSpPr>
+          <p:cNvPr id="8" name="Rounded Rectangle 7"/>
           <p:cNvSpPr/>
           <p:nvPr/>
         </p:nvSpPr>
         <p:spPr>
           <a:xfrm>
-            <a:off x="5806440" y="1051560"/>
-            <a:ext cx="5298947" cy="4629150"/>
+            <a:off x="822960" y="2514600"/>
+            <a:ext cx="10515600" cy="914400"/>
           </a:xfrm>
           <a:prstGeom prst="roundRect">
             <a:avLst/>
           </a:prstGeom>
           <a:solidFill>
-            <a:srgbClr val="F3F6FB"/>
+            <a:srgbClr val="E9F6EE"/>
           </a:solidFill>
           <a:ln w="12700">
             <a:solidFill>
-              <a:srgbClr val="C7D2E6"/>
+              <a:srgbClr val="1E8E4B"/>
             </a:solidFill>
           </a:ln>
           <a:effectLst/>
@@ -7489,14 +8314,14 @@
       </p:sp>
       <p:sp>
         <p:nvSpPr>
-          <p:cNvPr id="10" name="TextBox 9"/>
+          <p:cNvPr id="9" name="TextBox 8"/>
           <p:cNvSpPr txBox="1"/>
           <p:nvPr/>
         </p:nvSpPr>
         <p:spPr>
           <a:xfrm>
-            <a:off x="6080760" y="2726055"/>
-            <a:ext cx="4750307" cy="1280160"/>
+            <a:off x="1097280" y="2697480"/>
+            <a:ext cx="10058400" cy="640080"/>
           </a:xfrm>
           <a:prstGeom prst="rect">
             <a:avLst/>
@@ -7509,27 +8334,66 @@
           </a:bodyPr>
           <a:lstStyle/>
           <a:p>
-            <a:pPr algn="ctr"/>
-            <a:r>
-              <a:rPr sz="1400" b="1" i="0">
-                <a:solidFill>
-                  <a:srgbClr val="64748B"/>
-                </a:solidFill>
-                <a:latin typeface="Montserrat"/>
-              </a:rPr>
-              <a:t>IMAGEN REALISTA</a:t>
-            </a:r>
-          </a:p>
-          <a:p>
-            <a:pPr algn="ctr"/>
-            <a:r>
-              <a:rPr sz="1100" b="0" i="1">
-                <a:solidFill>
-                  <a:srgbClr val="64748B"/>
-                </a:solidFill>
-                <a:latin typeface="Montserrat"/>
-              </a:rPr>
-              <a:t>gas meter cabinet street wall building</a:t>
+            <a:r>
+              <a:rPr sz="1800" b="1" i="0">
+                <a:solidFill>
+                  <a:srgbClr val="1E8E4B"/>
+                </a:solidFill>
+                <a:latin typeface="Montserrat"/>
+              </a:rPr>
+              <a:t>A.  </a:t>
+            </a:r>
+            <a:r>
+              <a:rPr sz="1800" b="1" i="0">
+                <a:solidFill>
+                  <a:srgbClr val="1E2761"/>
+                </a:solidFill>
+                <a:latin typeface="Montserrat"/>
+              </a:rPr>
+              <a:t>Que la tubería no deja escapar el gas por ninguna unión</a:t>
+            </a:r>
+          </a:p>
+        </p:txBody>
+      </p:sp>
+      <p:sp>
+        <p:nvSpPr>
+          <p:cNvPr id="10" name="TextBox 9"/>
+          <p:cNvSpPr txBox="1"/>
+          <p:nvPr/>
+        </p:nvSpPr>
+        <p:spPr>
+          <a:xfrm>
+            <a:off x="822960" y="3749039"/>
+            <a:ext cx="10515600" cy="2194560"/>
+          </a:xfrm>
+          <a:prstGeom prst="rect">
+            <a:avLst/>
+          </a:prstGeom>
+          <a:noFill/>
+        </p:spPr>
+        <p:txBody>
+          <a:bodyPr wrap="square">
+            <a:spAutoFit/>
+          </a:bodyPr>
+          <a:lstStyle/>
+          <a:p>
+            <a:r>
+              <a:rPr sz="1500" b="1" i="0">
+                <a:solidFill>
+                  <a:srgbClr val="E8801A"/>
+                </a:solidFill>
+                <a:latin typeface="Montserrat"/>
+              </a:rPr>
+              <a:t>Por qué:  </a:t>
+            </a:r>
+            <a:r>
+              <a:rPr sz="1500" b="0" i="0">
+                <a:solidFill>
+                  <a:srgbClr val="1B2330"/>
+                </a:solidFill>
+                <a:latin typeface="Montserrat"/>
+              </a:rPr>
+              <a:t>La estanquidad verifica que no hay fugas; que aguante la presión sin romper es la prueba de resistencia.</a:t>
             </a:r>
           </a:p>
         </p:txBody>
@@ -7539,6 +8403,18 @@
   <p:clrMapOvr>
     <a:masterClrMapping/>
   </p:clrMapOvr>
+  <mc:AlternateContent xmlns:mc="http://schemas.openxmlformats.org/markup-compatibility/2006">
+    <mc:Choice xmlns:p14="http://schemas.microsoft.com/office/powerpoint/2010/main" Requires="p14">
+      <p:transition spd="med" p14:dur="700">
+        <p14:cube dir="l"/>
+      </p:transition>
+    </mc:Choice>
+    <mc:Fallback>
+      <p:transition spd="med">
+        <p:push dir="l"/>
+      </p:transition>
+    </mc:Fallback>
+  </mc:AlternateContent>
 </p:sld>
 </file>
 
@@ -7567,7 +8443,7 @@
             <a:avLst/>
           </a:prstGeom>
           <a:solidFill>
-            <a:srgbClr val="1E2761"/>
+            <a:srgbClr val="FFFFFF"/>
           </a:solidFill>
           <a:ln>
             <a:noFill/>
@@ -7604,8 +8480,8 @@
         </p:nvSpPr>
         <p:spPr>
           <a:xfrm>
-            <a:off x="822960" y="640080"/>
-            <a:ext cx="10515600" cy="457200"/>
+            <a:off x="10607040" y="320040"/>
+            <a:ext cx="1371600" cy="365760"/>
           </a:xfrm>
           <a:prstGeom prst="rect">
             <a:avLst/>
@@ -7618,30 +8494,133 @@
           </a:bodyPr>
           <a:lstStyle/>
           <a:p>
-            <a:r>
-              <a:rPr sz="1400" b="1" i="0">
-                <a:solidFill>
-                  <a:srgbClr val="F4A24C"/>
-                </a:solidFill>
-                <a:latin typeface="Montserrat"/>
-              </a:rPr>
-              <a:t>LO QUE YA DOMINAS</a:t>
-            </a:r>
-          </a:p>
-        </p:txBody>
-      </p:sp>
-      <p:sp>
-        <p:nvSpPr>
-          <p:cNvPr id="4" name="Rounded Rectangle 3"/>
+            <a:pPr algn="r"/>
+            <a:r>
+              <a:rPr sz="1000" b="1" i="0">
+                <a:solidFill>
+                  <a:srgbClr val="64748B"/>
+                </a:solidFill>
+                <a:latin typeface="Montserrat"/>
+              </a:rPr>
+              <a:t>016 / 022</a:t>
+            </a:r>
+          </a:p>
+        </p:txBody>
+      </p:sp>
+      <p:sp>
+        <p:nvSpPr>
+          <p:cNvPr id="4" name="TextBox 3"/>
+          <p:cNvSpPr txBox="1"/>
+          <p:nvPr/>
+        </p:nvSpPr>
+        <p:spPr>
+          <a:xfrm>
+            <a:off x="457200" y="6419088"/>
+            <a:ext cx="8229600" cy="365760"/>
+          </a:xfrm>
+          <a:prstGeom prst="rect">
+            <a:avLst/>
+          </a:prstGeom>
+          <a:noFill/>
+        </p:spPr>
+        <p:txBody>
+          <a:bodyPr wrap="square">
+            <a:spAutoFit/>
+          </a:bodyPr>
+          <a:lstStyle/>
+          <a:p>
+            <a:r>
+              <a:rPr sz="900" b="0" i="0">
+                <a:solidFill>
+                  <a:srgbClr val="64748B"/>
+                </a:solidFill>
+                <a:latin typeface="Montserrat"/>
+              </a:rPr>
+              <a:t>Curso Gas B · Tema 01 · Distribución por canalización</a:t>
+            </a:r>
+          </a:p>
+        </p:txBody>
+      </p:sp>
+      <p:sp>
+        <p:nvSpPr>
+          <p:cNvPr id="5" name="TextBox 4"/>
+          <p:cNvSpPr txBox="1"/>
+          <p:nvPr/>
+        </p:nvSpPr>
+        <p:spPr>
+          <a:xfrm>
+            <a:off x="822960" y="457200"/>
+            <a:ext cx="10058400" cy="365760"/>
+          </a:xfrm>
+          <a:prstGeom prst="rect">
+            <a:avLst/>
+          </a:prstGeom>
+          <a:noFill/>
+        </p:spPr>
+        <p:txBody>
+          <a:bodyPr wrap="square">
+            <a:spAutoFit/>
+          </a:bodyPr>
+          <a:lstStyle/>
+          <a:p>
+            <a:r>
+              <a:rPr sz="1300" b="1" i="0">
+                <a:solidFill>
+                  <a:srgbClr val="E8801A"/>
+                </a:solidFill>
+                <a:latin typeface="Montserrat"/>
+              </a:rPr>
+              <a:t>APARTADO 5.1 · PAPELEO</a:t>
+            </a:r>
+          </a:p>
+        </p:txBody>
+      </p:sp>
+      <p:sp>
+        <p:nvSpPr>
+          <p:cNvPr id="6" name="TextBox 5"/>
+          <p:cNvSpPr txBox="1"/>
+          <p:nvPr/>
+        </p:nvSpPr>
+        <p:spPr>
+          <a:xfrm>
+            <a:off x="822960" y="868680"/>
+            <a:ext cx="10515600" cy="914400"/>
+          </a:xfrm>
+          <a:prstGeom prst="rect">
+            <a:avLst/>
+          </a:prstGeom>
+          <a:noFill/>
+        </p:spPr>
+        <p:txBody>
+          <a:bodyPr wrap="square">
+            <a:spAutoFit/>
+          </a:bodyPr>
+          <a:lstStyle/>
+          <a:p>
+            <a:r>
+              <a:rPr sz="2800" b="1" i="0">
+                <a:solidFill>
+                  <a:srgbClr val="1E2761"/>
+                </a:solidFill>
+                <a:latin typeface="Montserrat"/>
+              </a:rPr>
+              <a:t>Queda por escrito</a:t>
+            </a:r>
+          </a:p>
+        </p:txBody>
+      </p:sp>
+      <p:sp>
+        <p:nvSpPr>
+          <p:cNvPr id="7" name="Rectangle 6"/>
           <p:cNvSpPr/>
           <p:nvPr/>
         </p:nvSpPr>
         <p:spPr>
           <a:xfrm>
-            <a:off x="868680" y="1051560"/>
-            <a:ext cx="1463040" cy="82296"/>
-          </a:xfrm>
-          <a:prstGeom prst="roundRect">
+            <a:off x="868680" y="1627632"/>
+            <a:ext cx="2011680" cy="73152"/>
+          </a:xfrm>
+          <a:prstGeom prst="rect">
             <a:avLst/>
           </a:prstGeom>
           <a:solidFill>
@@ -7676,14 +8655,14 @@
       </p:sp>
       <p:sp>
         <p:nvSpPr>
-          <p:cNvPr id="5" name="TextBox 4"/>
+          <p:cNvPr id="8" name="TextBox 7"/>
           <p:cNvSpPr txBox="1"/>
           <p:nvPr/>
         </p:nvSpPr>
         <p:spPr>
           <a:xfrm>
-            <a:off x="822960" y="1234440"/>
-            <a:ext cx="10515600" cy="1097280"/>
+            <a:off x="822960" y="1965960"/>
+            <a:ext cx="5029200" cy="4206240"/>
           </a:xfrm>
           <a:prstGeom prst="rect">
             <a:avLst/>
@@ -7696,28 +8675,138 @@
           </a:bodyPr>
           <a:lstStyle/>
           <a:p>
-            <a:r>
-              <a:rPr sz="3400" b="1" i="0">
-                <a:solidFill>
-                  <a:srgbClr val="FFFFFF"/>
-                </a:solidFill>
-                <a:latin typeface="Montserrat"/>
-              </a:rPr>
-              <a:t>Controlas la red desde el papel hasta el gas</a:t>
-            </a:r>
-          </a:p>
-        </p:txBody>
-      </p:sp>
-      <p:sp>
-        <p:nvSpPr>
-          <p:cNvPr id="6" name="TextBox 5"/>
+            <a:pPr>
+              <a:spcAft>
+                <a:spcPts val="1100"/>
+              </a:spcAft>
+            </a:pPr>
+            <a:r>
+              <a:rPr sz="1600" b="1" i="0">
+                <a:solidFill>
+                  <a:srgbClr val="E8801A"/>
+                </a:solidFill>
+                <a:latin typeface="Montserrat"/>
+              </a:rPr>
+              <a:t>▸  </a:t>
+            </a:r>
+            <a:r>
+              <a:rPr sz="1600" b="0" i="0">
+                <a:solidFill>
+                  <a:srgbClr val="1B2330"/>
+                </a:solidFill>
+                <a:latin typeface="Montserrat"/>
+              </a:rPr>
+              <a:t>Solo vale con resultado positivo</a:t>
+            </a:r>
+          </a:p>
+          <a:p>
+            <a:pPr>
+              <a:spcAft>
+                <a:spcPts val="1100"/>
+              </a:spcAft>
+            </a:pPr>
+            <a:r>
+              <a:rPr sz="1600" b="1" i="0">
+                <a:solidFill>
+                  <a:srgbClr val="E8801A"/>
+                </a:solidFill>
+                <a:latin typeface="Montserrat"/>
+              </a:rPr>
+              <a:t>▸  </a:t>
+            </a:r>
+            <a:r>
+              <a:rPr sz="1600" b="0" i="0">
+                <a:solidFill>
+                  <a:srgbClr val="1B2330"/>
+                </a:solidFill>
+                <a:latin typeface="Montserrat"/>
+              </a:rPr>
+              <a:t>Certificado de dirección de obra</a:t>
+            </a:r>
+          </a:p>
+          <a:p>
+            <a:pPr>
+              <a:spcAft>
+                <a:spcPts val="1100"/>
+              </a:spcAft>
+            </a:pPr>
+            <a:r>
+              <a:rPr sz="1600" b="1" i="0">
+                <a:solidFill>
+                  <a:srgbClr val="E8801A"/>
+                </a:solidFill>
+                <a:latin typeface="Montserrat"/>
+              </a:rPr>
+              <a:t>▸  </a:t>
+            </a:r>
+            <a:r>
+              <a:rPr sz="1600" b="0" i="0">
+                <a:solidFill>
+                  <a:srgbClr val="1B2330"/>
+                </a:solidFill>
+                <a:latin typeface="Montserrat"/>
+              </a:rPr>
+              <a:t>Lo firma el director de obra</a:t>
+            </a:r>
+          </a:p>
+        </p:txBody>
+      </p:sp>
+      <p:sp>
+        <p:nvSpPr>
+          <p:cNvPr id="9" name="imgph" descr="IMGQ:signing construction certificate document pen"/>
+          <p:cNvSpPr/>
+          <p:nvPr/>
+        </p:nvSpPr>
+        <p:spPr>
+          <a:xfrm>
+            <a:off x="6080760" y="1965960"/>
+            <a:ext cx="5303520" cy="4572000"/>
+          </a:xfrm>
+          <a:prstGeom prst="roundRect">
+            <a:avLst/>
+          </a:prstGeom>
+          <a:solidFill>
+            <a:srgbClr val="F3F6FB"/>
+          </a:solidFill>
+          <a:ln w="12700">
+            <a:solidFill>
+              <a:srgbClr val="C7D2E6"/>
+            </a:solidFill>
+          </a:ln>
+          <a:effectLst/>
+        </p:spPr>
+        <p:style>
+          <a:lnRef idx="1">
+            <a:schemeClr val="accent1"/>
+          </a:lnRef>
+          <a:fillRef idx="3">
+            <a:schemeClr val="accent1"/>
+          </a:fillRef>
+          <a:effectRef idx="2">
+            <a:schemeClr val="accent1"/>
+          </a:effectRef>
+          <a:fontRef idx="minor">
+            <a:schemeClr val="lt1"/>
+          </a:fontRef>
+        </p:style>
+        <p:txBody>
+          <a:bodyPr rtlCol="0" anchor="ctr"/>
+          <a:lstStyle/>
+          <a:p>
+            <a:pPr algn="ctr"/>
+          </a:p>
+        </p:txBody>
+      </p:sp>
+      <p:sp>
+        <p:nvSpPr>
+          <p:cNvPr id="10" name="TextBox 9"/>
           <p:cNvSpPr txBox="1"/>
           <p:nvPr/>
         </p:nvSpPr>
         <p:spPr>
           <a:xfrm>
-            <a:off x="822960" y="2606040"/>
-            <a:ext cx="10515600" cy="2743200"/>
+            <a:off x="6355080" y="3611880"/>
+            <a:ext cx="4754880" cy="1280160"/>
           </a:xfrm>
           <a:prstGeom prst="rect">
             <a:avLst/>
@@ -7730,119 +8819,254 @@
           </a:bodyPr>
           <a:lstStyle/>
           <a:p>
-            <a:pPr>
-              <a:spcAft>
-                <a:spcPts val="1200"/>
-              </a:spcAft>
-            </a:pPr>
-            <a:r>
-              <a:rPr sz="2000" b="1" i="0">
-                <a:solidFill>
-                  <a:srgbClr val="F4A24C"/>
-                </a:solidFill>
-                <a:latin typeface="Montserrat"/>
-              </a:rPr>
-              <a:t>✓  </a:t>
-            </a:r>
-            <a:r>
-              <a:rPr sz="1900" b="0" i="0">
-                <a:solidFill>
-                  <a:srgbClr val="FFFFFF"/>
-                </a:solidFill>
-                <a:latin typeface="Montserrat"/>
-              </a:rPr>
-              <a:t>Separas la red de la calle de tu receptora</a:t>
-            </a:r>
-          </a:p>
-          <a:p>
-            <a:pPr>
-              <a:spcAft>
-                <a:spcPts val="1200"/>
-              </a:spcAft>
-            </a:pPr>
-            <a:r>
-              <a:rPr sz="2000" b="1" i="0">
-                <a:solidFill>
-                  <a:srgbClr val="F4A24C"/>
-                </a:solidFill>
-                <a:latin typeface="Montserrat"/>
-              </a:rPr>
-              <a:t>✓  </a:t>
-            </a:r>
-            <a:r>
-              <a:rPr sz="1900" b="0" i="0">
-                <a:solidFill>
-                  <a:srgbClr val="FFFFFF"/>
-                </a:solidFill>
-                <a:latin typeface="Montserrat"/>
-              </a:rPr>
-              <a:t>Sabes quién autoriza y cuándo: la CA y el primer trimestre</a:t>
-            </a:r>
-          </a:p>
-          <a:p>
-            <a:pPr>
-              <a:spcAft>
-                <a:spcPts val="1200"/>
-              </a:spcAft>
-            </a:pPr>
-            <a:r>
-              <a:rPr sz="2000" b="1" i="0">
-                <a:solidFill>
-                  <a:srgbClr val="F4A24C"/>
-                </a:solidFill>
-                <a:latin typeface="Montserrat"/>
-              </a:rPr>
-              <a:t>✓  </a:t>
-            </a:r>
-            <a:r>
-              <a:rPr sz="1900" b="0" i="0">
-                <a:solidFill>
-                  <a:srgbClr val="FFFFFF"/>
-                </a:solidFill>
-                <a:latin typeface="Montserrat"/>
-              </a:rPr>
-              <a:t>Tienes grabado: sin pruebas superadas, no hay gas</a:t>
-            </a:r>
-          </a:p>
-          <a:p>
-            <a:pPr>
-              <a:spcAft>
-                <a:spcPts val="1200"/>
-              </a:spcAft>
-            </a:pPr>
-            <a:r>
-              <a:rPr sz="2000" b="1" i="0">
-                <a:solidFill>
-                  <a:srgbClr val="F4A24C"/>
-                </a:solidFill>
-                <a:latin typeface="Montserrat"/>
-              </a:rPr>
-              <a:t>✓  </a:t>
-            </a:r>
-            <a:r>
-              <a:rPr sz="1900" b="0" i="0">
-                <a:solidFill>
-                  <a:srgbClr val="FFFFFF"/>
-                </a:solidFill>
-                <a:latin typeface="Montserrat"/>
-              </a:rPr>
-              <a:t>El peligro no es el gas solo, es la mezcla aire-gas</a:t>
-            </a:r>
-          </a:p>
-        </p:txBody>
-      </p:sp>
-      <p:sp>
-        <p:nvSpPr>
-          <p:cNvPr id="7" name="Rounded Rectangle 6"/>
+            <a:pPr algn="ctr"/>
+            <a:r>
+              <a:rPr sz="1400" b="1" i="0">
+                <a:solidFill>
+                  <a:srgbClr val="64748B"/>
+                </a:solidFill>
+                <a:latin typeface="Montserrat"/>
+              </a:rPr>
+              <a:t>IMAGEN</a:t>
+            </a:r>
+          </a:p>
+          <a:p>
+            <a:pPr algn="ctr"/>
+            <a:r>
+              <a:rPr sz="1100" b="0" i="1">
+                <a:solidFill>
+                  <a:srgbClr val="64748B"/>
+                </a:solidFill>
+                <a:latin typeface="Montserrat"/>
+              </a:rPr>
+              <a:t>signing construction certificate document pen</a:t>
+            </a:r>
+          </a:p>
+        </p:txBody>
+      </p:sp>
+    </p:spTree>
+  </p:cSld>
+  <p:clrMapOvr>
+    <a:masterClrMapping/>
+  </p:clrMapOvr>
+  <mc:AlternateContent xmlns:mc="http://schemas.openxmlformats.org/markup-compatibility/2006">
+    <mc:Choice xmlns:p14="http://schemas.microsoft.com/office/powerpoint/2010/main" Requires="p14">
+      <p:transition spd="med" p14:dur="700">
+        <p14:cube dir="r"/>
+      </p:transition>
+    </mc:Choice>
+    <mc:Fallback>
+      <p:transition spd="med">
+        <p:push dir="r"/>
+      </p:transition>
+    </mc:Fallback>
+  </mc:AlternateContent>
+</p:sld>
+</file>
+
+<file path=ppt/slides/slide17.xml><?xml version="1.0" encoding="utf-8"?>
+<p:sld xmlns:a="http://schemas.openxmlformats.org/drawingml/2006/main" xmlns:p="http://schemas.openxmlformats.org/presentationml/2006/main" xmlns:r="http://schemas.openxmlformats.org/officeDocument/2006/relationships">
+  <p:cSld>
+    <p:spTree>
+      <p:nvGrpSpPr>
+        <p:cNvPr id="1" name=""/>
+        <p:cNvGrpSpPr/>
+        <p:nvPr/>
+      </p:nvGrpSpPr>
+      <p:grpSpPr/>
+      <p:sp>
+        <p:nvSpPr>
+          <p:cNvPr id="2" name="Rectangle 1"/>
           <p:cNvSpPr/>
           <p:nvPr/>
         </p:nvSpPr>
         <p:spPr>
           <a:xfrm>
-            <a:off x="822960" y="5532120"/>
-            <a:ext cx="10515600" cy="822960"/>
-          </a:xfrm>
-          <a:prstGeom prst="roundRect">
+            <a:off x="0" y="0"/>
+            <a:ext cx="12191695" cy="6858000"/>
+          </a:xfrm>
+          <a:prstGeom prst="rect">
+            <a:avLst/>
+          </a:prstGeom>
+          <a:solidFill>
+            <a:srgbClr val="FFFFFF"/>
+          </a:solidFill>
+          <a:ln>
+            <a:noFill/>
+          </a:ln>
+          <a:effectLst/>
+        </p:spPr>
+        <p:style>
+          <a:lnRef idx="1">
+            <a:schemeClr val="accent1"/>
+          </a:lnRef>
+          <a:fillRef idx="3">
+            <a:schemeClr val="accent1"/>
+          </a:fillRef>
+          <a:effectRef idx="2">
+            <a:schemeClr val="accent1"/>
+          </a:effectRef>
+          <a:fontRef idx="minor">
+            <a:schemeClr val="lt1"/>
+          </a:fontRef>
+        </p:style>
+        <p:txBody>
+          <a:bodyPr rtlCol="0" anchor="ctr"/>
+          <a:lstStyle/>
+          <a:p>
+            <a:pPr algn="ctr"/>
+          </a:p>
+        </p:txBody>
+      </p:sp>
+      <p:sp>
+        <p:nvSpPr>
+          <p:cNvPr id="3" name="TextBox 2"/>
+          <p:cNvSpPr txBox="1"/>
+          <p:nvPr/>
+        </p:nvSpPr>
+        <p:spPr>
+          <a:xfrm>
+            <a:off x="10607040" y="320040"/>
+            <a:ext cx="1371600" cy="365760"/>
+          </a:xfrm>
+          <a:prstGeom prst="rect">
+            <a:avLst/>
+          </a:prstGeom>
+          <a:noFill/>
+        </p:spPr>
+        <p:txBody>
+          <a:bodyPr wrap="square">
+            <a:spAutoFit/>
+          </a:bodyPr>
+          <a:lstStyle/>
+          <a:p>
+            <a:pPr algn="r"/>
+            <a:r>
+              <a:rPr sz="1000" b="1" i="0">
+                <a:solidFill>
+                  <a:srgbClr val="64748B"/>
+                </a:solidFill>
+                <a:latin typeface="Montserrat"/>
+              </a:rPr>
+              <a:t>017 / 022</a:t>
+            </a:r>
+          </a:p>
+        </p:txBody>
+      </p:sp>
+      <p:sp>
+        <p:nvSpPr>
+          <p:cNvPr id="4" name="TextBox 3"/>
+          <p:cNvSpPr txBox="1"/>
+          <p:nvPr/>
+        </p:nvSpPr>
+        <p:spPr>
+          <a:xfrm>
+            <a:off x="457200" y="6419088"/>
+            <a:ext cx="8229600" cy="365760"/>
+          </a:xfrm>
+          <a:prstGeom prst="rect">
+            <a:avLst/>
+          </a:prstGeom>
+          <a:noFill/>
+        </p:spPr>
+        <p:txBody>
+          <a:bodyPr wrap="square">
+            <a:spAutoFit/>
+          </a:bodyPr>
+          <a:lstStyle/>
+          <a:p>
+            <a:r>
+              <a:rPr sz="900" b="0" i="0">
+                <a:solidFill>
+                  <a:srgbClr val="64748B"/>
+                </a:solidFill>
+                <a:latin typeface="Montserrat"/>
+              </a:rPr>
+              <a:t>Curso Gas B · Tema 01 · Distribución por canalización</a:t>
+            </a:r>
+          </a:p>
+        </p:txBody>
+      </p:sp>
+      <p:sp>
+        <p:nvSpPr>
+          <p:cNvPr id="5" name="TextBox 4"/>
+          <p:cNvSpPr txBox="1"/>
+          <p:nvPr/>
+        </p:nvSpPr>
+        <p:spPr>
+          <a:xfrm>
+            <a:off x="822960" y="457200"/>
+            <a:ext cx="10058400" cy="365760"/>
+          </a:xfrm>
+          <a:prstGeom prst="rect">
+            <a:avLst/>
+          </a:prstGeom>
+          <a:noFill/>
+        </p:spPr>
+        <p:txBody>
+          <a:bodyPr wrap="square">
+            <a:spAutoFit/>
+          </a:bodyPr>
+          <a:lstStyle/>
+          <a:p>
+            <a:r>
+              <a:rPr sz="1300" b="1" i="0">
+                <a:solidFill>
+                  <a:srgbClr val="E8801A"/>
+                </a:solidFill>
+                <a:latin typeface="Montserrat"/>
+              </a:rPr>
+              <a:t>APARTADO 5.2 · PUESTA EN SERVICIO</a:t>
+            </a:r>
+          </a:p>
+        </p:txBody>
+      </p:sp>
+      <p:sp>
+        <p:nvSpPr>
+          <p:cNvPr id="6" name="TextBox 5"/>
+          <p:cNvSpPr txBox="1"/>
+          <p:nvPr/>
+        </p:nvSpPr>
+        <p:spPr>
+          <a:xfrm>
+            <a:off x="822960" y="868680"/>
+            <a:ext cx="10515600" cy="914400"/>
+          </a:xfrm>
+          <a:prstGeom prst="rect">
+            <a:avLst/>
+          </a:prstGeom>
+          <a:noFill/>
+        </p:spPr>
+        <p:txBody>
+          <a:bodyPr wrap="square">
+            <a:spAutoFit/>
+          </a:bodyPr>
+          <a:lstStyle/>
+          <a:p>
+            <a:r>
+              <a:rPr sz="2800" b="1" i="0">
+                <a:solidFill>
+                  <a:srgbClr val="1E2761"/>
+                </a:solidFill>
+                <a:latin typeface="Montserrat"/>
+              </a:rPr>
+              <a:t>Sin pruebas no hay gas</a:t>
+            </a:r>
+          </a:p>
+        </p:txBody>
+      </p:sp>
+      <p:sp>
+        <p:nvSpPr>
+          <p:cNvPr id="7" name="Rectangle 6"/>
+          <p:cNvSpPr/>
+          <p:nvPr/>
+        </p:nvSpPr>
+        <p:spPr>
+          <a:xfrm>
+            <a:off x="868680" y="1627632"/>
+            <a:ext cx="2011680" cy="73152"/>
+          </a:xfrm>
+          <a:prstGeom prst="rect">
             <a:avLst/>
           </a:prstGeom>
           <a:solidFill>
@@ -7883,8 +9107,8 @@
         </p:nvSpPr>
         <p:spPr>
           <a:xfrm>
-            <a:off x="1051560" y="5623560"/>
-            <a:ext cx="10058400" cy="640080"/>
+            <a:off x="6355080" y="1965960"/>
+            <a:ext cx="5029200" cy="4206240"/>
           </a:xfrm>
           <a:prstGeom prst="rect">
             <a:avLst/>
@@ -7897,14 +9121,196 @@
           </a:bodyPr>
           <a:lstStyle/>
           <a:p>
-            <a:r>
-              <a:rPr sz="1500" b="1" i="1">
-                <a:solidFill>
-                  <a:srgbClr val="1E2761"/>
-                </a:solidFill>
-                <a:latin typeface="Montserrat"/>
-              </a:rPr>
-              <a:t>Hoy ya sabes por dónde entra el gas al barrio. En el siguiente vídeo la mantenemos viva.</a:t>
+            <a:pPr>
+              <a:spcAft>
+                <a:spcPts val="1100"/>
+              </a:spcAft>
+            </a:pPr>
+            <a:r>
+              <a:rPr sz="1600" b="1" i="0">
+                <a:solidFill>
+                  <a:srgbClr val="E8801A"/>
+                </a:solidFill>
+                <a:latin typeface="Montserrat"/>
+              </a:rPr>
+              <a:t>▸  </a:t>
+            </a:r>
+            <a:r>
+              <a:rPr sz="1600" b="0" i="0">
+                <a:solidFill>
+                  <a:srgbClr val="1B2330"/>
+                </a:solidFill>
+                <a:latin typeface="Montserrat"/>
+              </a:rPr>
+              <a:t>Solo si superó las pruebas previas</a:t>
+            </a:r>
+          </a:p>
+          <a:p>
+            <a:pPr>
+              <a:spcAft>
+                <a:spcPts val="1100"/>
+              </a:spcAft>
+            </a:pPr>
+            <a:r>
+              <a:rPr sz="1600" b="1" i="0">
+                <a:solidFill>
+                  <a:srgbClr val="E8801A"/>
+                </a:solidFill>
+                <a:latin typeface="Montserrat"/>
+              </a:rPr>
+              <a:t>▸  </a:t>
+            </a:r>
+            <a:r>
+              <a:rPr sz="1600" b="0" i="0">
+                <a:solidFill>
+                  <a:srgbClr val="1B2330"/>
+                </a:solidFill>
+                <a:latin typeface="Montserrat"/>
+              </a:rPr>
+              <a:t>Evitar la mezcla aire-gas inflamable</a:t>
+            </a:r>
+          </a:p>
+          <a:p>
+            <a:pPr>
+              <a:spcAft>
+                <a:spcPts val="1100"/>
+              </a:spcAft>
+            </a:pPr>
+            <a:r>
+              <a:rPr sz="1600" b="1" i="0">
+                <a:solidFill>
+                  <a:srgbClr val="E8801A"/>
+                </a:solidFill>
+                <a:latin typeface="Montserrat"/>
+              </a:rPr>
+              <a:t>▸  </a:t>
+            </a:r>
+            <a:r>
+              <a:rPr sz="1600" b="0" i="0">
+                <a:solidFill>
+                  <a:srgbClr val="1B2330"/>
+                </a:solidFill>
+                <a:latin typeface="Montserrat"/>
+              </a:rPr>
+              <a:t>Llenado lento o tapón de gas inerte</a:t>
+            </a:r>
+          </a:p>
+          <a:p>
+            <a:pPr>
+              <a:spcAft>
+                <a:spcPts val="1100"/>
+              </a:spcAft>
+            </a:pPr>
+            <a:r>
+              <a:rPr sz="1600" b="1" i="0">
+                <a:solidFill>
+                  <a:srgbClr val="E8801A"/>
+                </a:solidFill>
+                <a:latin typeface="Montserrat"/>
+              </a:rPr>
+              <a:t>▸  </a:t>
+            </a:r>
+            <a:r>
+              <a:rPr sz="1600" b="0" i="0">
+                <a:solidFill>
+                  <a:srgbClr val="1B2330"/>
+                </a:solidFill>
+                <a:latin typeface="Montserrat"/>
+              </a:rPr>
+              <a:t>Purgado siempre controlado</a:t>
+            </a:r>
+          </a:p>
+        </p:txBody>
+      </p:sp>
+      <p:sp>
+        <p:nvSpPr>
+          <p:cNvPr id="9" name="imgph" descr="IMGQ:technician opening gas valve gloves pipeline"/>
+          <p:cNvSpPr/>
+          <p:nvPr/>
+        </p:nvSpPr>
+        <p:spPr>
+          <a:xfrm>
+            <a:off x="822960" y="1965960"/>
+            <a:ext cx="5303520" cy="4572000"/>
+          </a:xfrm>
+          <a:prstGeom prst="roundRect">
+            <a:avLst/>
+          </a:prstGeom>
+          <a:solidFill>
+            <a:srgbClr val="F3F6FB"/>
+          </a:solidFill>
+          <a:ln w="12700">
+            <a:solidFill>
+              <a:srgbClr val="C7D2E6"/>
+            </a:solidFill>
+          </a:ln>
+          <a:effectLst/>
+        </p:spPr>
+        <p:style>
+          <a:lnRef idx="1">
+            <a:schemeClr val="accent1"/>
+          </a:lnRef>
+          <a:fillRef idx="3">
+            <a:schemeClr val="accent1"/>
+          </a:fillRef>
+          <a:effectRef idx="2">
+            <a:schemeClr val="accent1"/>
+          </a:effectRef>
+          <a:fontRef idx="minor">
+            <a:schemeClr val="lt1"/>
+          </a:fontRef>
+        </p:style>
+        <p:txBody>
+          <a:bodyPr rtlCol="0" anchor="ctr"/>
+          <a:lstStyle/>
+          <a:p>
+            <a:pPr algn="ctr"/>
+          </a:p>
+        </p:txBody>
+      </p:sp>
+      <p:sp>
+        <p:nvSpPr>
+          <p:cNvPr id="10" name="TextBox 9"/>
+          <p:cNvSpPr txBox="1"/>
+          <p:nvPr/>
+        </p:nvSpPr>
+        <p:spPr>
+          <a:xfrm>
+            <a:off x="1097280" y="3611880"/>
+            <a:ext cx="4754880" cy="1280160"/>
+          </a:xfrm>
+          <a:prstGeom prst="rect">
+            <a:avLst/>
+          </a:prstGeom>
+          <a:noFill/>
+        </p:spPr>
+        <p:txBody>
+          <a:bodyPr wrap="square">
+            <a:spAutoFit/>
+          </a:bodyPr>
+          <a:lstStyle/>
+          <a:p>
+            <a:pPr algn="ctr"/>
+            <a:r>
+              <a:rPr sz="1400" b="1" i="0">
+                <a:solidFill>
+                  <a:srgbClr val="64748B"/>
+                </a:solidFill>
+                <a:latin typeface="Montserrat"/>
+              </a:rPr>
+              <a:t>IMAGEN</a:t>
+            </a:r>
+          </a:p>
+          <a:p>
+            <a:pPr algn="ctr"/>
+            <a:r>
+              <a:rPr sz="1100" b="0" i="1">
+                <a:solidFill>
+                  <a:srgbClr val="64748B"/>
+                </a:solidFill>
+                <a:latin typeface="Montserrat"/>
+              </a:rPr>
+              <a:t>technician opening gas valve gloves pipeline</a:t>
             </a:r>
           </a:p>
         </p:txBody>
@@ -7914,6 +9320,1296 @@
   <p:clrMapOvr>
     <a:masterClrMapping/>
   </p:clrMapOvr>
+  <mc:AlternateContent xmlns:mc="http://schemas.openxmlformats.org/markup-compatibility/2006">
+    <mc:Choice xmlns:p14="http://schemas.microsoft.com/office/powerpoint/2010/main" Requires="p14">
+      <p:transition spd="med" p14:dur="700">
+        <p14:cube dir="l"/>
+      </p:transition>
+    </mc:Choice>
+    <mc:Fallback>
+      <p:transition spd="med">
+        <p:push dir="l"/>
+      </p:transition>
+    </mc:Fallback>
+  </mc:AlternateContent>
+</p:sld>
+</file>
+
+<file path=ppt/slides/slide18.xml><?xml version="1.0" encoding="utf-8"?>
+<p:sld xmlns:a="http://schemas.openxmlformats.org/drawingml/2006/main" xmlns:p="http://schemas.openxmlformats.org/presentationml/2006/main" xmlns:r="http://schemas.openxmlformats.org/officeDocument/2006/relationships">
+  <p:cSld>
+    <p:spTree>
+      <p:nvGrpSpPr>
+        <p:cNvPr id="1" name=""/>
+        <p:cNvGrpSpPr/>
+        <p:nvPr/>
+      </p:nvGrpSpPr>
+      <p:grpSpPr/>
+      <p:sp>
+        <p:nvSpPr>
+          <p:cNvPr id="2" name="Rectangle 1"/>
+          <p:cNvSpPr/>
+          <p:nvPr/>
+        </p:nvSpPr>
+        <p:spPr>
+          <a:xfrm>
+            <a:off x="0" y="0"/>
+            <a:ext cx="12191695" cy="6858000"/>
+          </a:xfrm>
+          <a:prstGeom prst="rect">
+            <a:avLst/>
+          </a:prstGeom>
+          <a:solidFill>
+            <a:srgbClr val="FFFFFF"/>
+          </a:solidFill>
+          <a:ln>
+            <a:noFill/>
+          </a:ln>
+          <a:effectLst/>
+        </p:spPr>
+        <p:style>
+          <a:lnRef idx="1">
+            <a:schemeClr val="accent1"/>
+          </a:lnRef>
+          <a:fillRef idx="3">
+            <a:schemeClr val="accent1"/>
+          </a:fillRef>
+          <a:effectRef idx="2">
+            <a:schemeClr val="accent1"/>
+          </a:effectRef>
+          <a:fontRef idx="minor">
+            <a:schemeClr val="lt1"/>
+          </a:fontRef>
+        </p:style>
+        <p:txBody>
+          <a:bodyPr rtlCol="0" anchor="ctr"/>
+          <a:lstStyle/>
+          <a:p>
+            <a:pPr algn="ctr"/>
+          </a:p>
+        </p:txBody>
+      </p:sp>
+      <p:sp>
+        <p:nvSpPr>
+          <p:cNvPr id="3" name="TextBox 2"/>
+          <p:cNvSpPr txBox="1"/>
+          <p:nvPr/>
+        </p:nvSpPr>
+        <p:spPr>
+          <a:xfrm>
+            <a:off x="10607040" y="320040"/>
+            <a:ext cx="1371600" cy="365760"/>
+          </a:xfrm>
+          <a:prstGeom prst="rect">
+            <a:avLst/>
+          </a:prstGeom>
+          <a:noFill/>
+        </p:spPr>
+        <p:txBody>
+          <a:bodyPr wrap="square">
+            <a:spAutoFit/>
+          </a:bodyPr>
+          <a:lstStyle/>
+          <a:p>
+            <a:pPr algn="r"/>
+            <a:r>
+              <a:rPr sz="1000" b="1" i="0">
+                <a:solidFill>
+                  <a:srgbClr val="64748B"/>
+                </a:solidFill>
+                <a:latin typeface="Montserrat"/>
+              </a:rPr>
+              <a:t>018 / 022</a:t>
+            </a:r>
+          </a:p>
+        </p:txBody>
+      </p:sp>
+      <p:sp>
+        <p:nvSpPr>
+          <p:cNvPr id="4" name="TextBox 3"/>
+          <p:cNvSpPr txBox="1"/>
+          <p:nvPr/>
+        </p:nvSpPr>
+        <p:spPr>
+          <a:xfrm>
+            <a:off x="457200" y="6419088"/>
+            <a:ext cx="8229600" cy="365760"/>
+          </a:xfrm>
+          <a:prstGeom prst="rect">
+            <a:avLst/>
+          </a:prstGeom>
+          <a:noFill/>
+        </p:spPr>
+        <p:txBody>
+          <a:bodyPr wrap="square">
+            <a:spAutoFit/>
+          </a:bodyPr>
+          <a:lstStyle/>
+          <a:p>
+            <a:r>
+              <a:rPr sz="900" b="0" i="0">
+                <a:solidFill>
+                  <a:srgbClr val="64748B"/>
+                </a:solidFill>
+                <a:latin typeface="Montserrat"/>
+              </a:rPr>
+              <a:t>Curso Gas B · Tema 01 · Distribución por canalización</a:t>
+            </a:r>
+          </a:p>
+        </p:txBody>
+      </p:sp>
+      <p:sp>
+        <p:nvSpPr>
+          <p:cNvPr id="5" name="Rectangle 4"/>
+          <p:cNvSpPr/>
+          <p:nvPr/>
+        </p:nvSpPr>
+        <p:spPr>
+          <a:xfrm>
+            <a:off x="0" y="0"/>
+            <a:ext cx="12191695" cy="1143000"/>
+          </a:xfrm>
+          <a:prstGeom prst="rect">
+            <a:avLst/>
+          </a:prstGeom>
+          <a:solidFill>
+            <a:srgbClr val="E8801A"/>
+          </a:solidFill>
+          <a:ln>
+            <a:noFill/>
+          </a:ln>
+          <a:effectLst/>
+        </p:spPr>
+        <p:style>
+          <a:lnRef idx="1">
+            <a:schemeClr val="accent1"/>
+          </a:lnRef>
+          <a:fillRef idx="3">
+            <a:schemeClr val="accent1"/>
+          </a:fillRef>
+          <a:effectRef idx="2">
+            <a:schemeClr val="accent1"/>
+          </a:effectRef>
+          <a:fontRef idx="minor">
+            <a:schemeClr val="lt1"/>
+          </a:fontRef>
+        </p:style>
+        <p:txBody>
+          <a:bodyPr rtlCol="0" anchor="ctr"/>
+          <a:lstStyle/>
+          <a:p>
+            <a:pPr algn="ctr"/>
+          </a:p>
+        </p:txBody>
+      </p:sp>
+      <p:sp>
+        <p:nvSpPr>
+          <p:cNvPr id="6" name="TextBox 5"/>
+          <p:cNvSpPr txBox="1"/>
+          <p:nvPr/>
+        </p:nvSpPr>
+        <p:spPr>
+          <a:xfrm>
+            <a:off x="822960" y="274320"/>
+            <a:ext cx="10515600" cy="640080"/>
+          </a:xfrm>
+          <a:prstGeom prst="rect">
+            <a:avLst/>
+          </a:prstGeom>
+          <a:noFill/>
+        </p:spPr>
+        <p:txBody>
+          <a:bodyPr wrap="square">
+            <a:spAutoFit/>
+          </a:bodyPr>
+          <a:lstStyle/>
+          <a:p>
+            <a:r>
+              <a:rPr sz="2400" b="1" i="0">
+                <a:solidFill>
+                  <a:srgbClr val="FFFFFF"/>
+                </a:solidFill>
+                <a:latin typeface="Montserrat"/>
+              </a:rPr>
+              <a:t>⚡  PREGUNTA RÁPIDA</a:t>
+            </a:r>
+          </a:p>
+        </p:txBody>
+      </p:sp>
+      <p:sp>
+        <p:nvSpPr>
+          <p:cNvPr id="7" name="TextBox 6"/>
+          <p:cNvSpPr txBox="1"/>
+          <p:nvPr/>
+        </p:nvSpPr>
+        <p:spPr>
+          <a:xfrm>
+            <a:off x="822960" y="1508760"/>
+            <a:ext cx="10515600" cy="1371600"/>
+          </a:xfrm>
+          <a:prstGeom prst="rect">
+            <a:avLst/>
+          </a:prstGeom>
+          <a:noFill/>
+        </p:spPr>
+        <p:txBody>
+          <a:bodyPr wrap="square">
+            <a:spAutoFit/>
+          </a:bodyPr>
+          <a:lstStyle/>
+          <a:p>
+            <a:r>
+              <a:rPr sz="2400" b="1" i="0">
+                <a:solidFill>
+                  <a:srgbClr val="1E2761"/>
+                </a:solidFill>
+                <a:latin typeface="Montserrat"/>
+              </a:rPr>
+              <a:t>Al llenar la red de gas, ¿dónde está realmente el peligro?</a:t>
+            </a:r>
+          </a:p>
+        </p:txBody>
+      </p:sp>
+      <p:sp>
+        <p:nvSpPr>
+          <p:cNvPr id="8" name="Rounded Rectangle 7"/>
+          <p:cNvSpPr/>
+          <p:nvPr/>
+        </p:nvSpPr>
+        <p:spPr>
+          <a:xfrm>
+            <a:off x="822960" y="3291840"/>
+            <a:ext cx="4983480" cy="1143000"/>
+          </a:xfrm>
+          <a:prstGeom prst="roundRect">
+            <a:avLst/>
+          </a:prstGeom>
+          <a:solidFill>
+            <a:srgbClr val="F3F6FB"/>
+          </a:solidFill>
+          <a:ln w="12700">
+            <a:solidFill>
+              <a:srgbClr val="C7D2E6"/>
+            </a:solidFill>
+          </a:ln>
+          <a:effectLst/>
+        </p:spPr>
+        <p:style>
+          <a:lnRef idx="1">
+            <a:schemeClr val="accent1"/>
+          </a:lnRef>
+          <a:fillRef idx="3">
+            <a:schemeClr val="accent1"/>
+          </a:fillRef>
+          <a:effectRef idx="2">
+            <a:schemeClr val="accent1"/>
+          </a:effectRef>
+          <a:fontRef idx="minor">
+            <a:schemeClr val="lt1"/>
+          </a:fontRef>
+        </p:style>
+        <p:txBody>
+          <a:bodyPr rtlCol="0" anchor="ctr"/>
+          <a:lstStyle/>
+          <a:p>
+            <a:pPr algn="ctr"/>
+          </a:p>
+        </p:txBody>
+      </p:sp>
+      <p:sp>
+        <p:nvSpPr>
+          <p:cNvPr id="9" name="Rectangle 8"/>
+          <p:cNvSpPr/>
+          <p:nvPr/>
+        </p:nvSpPr>
+        <p:spPr>
+          <a:xfrm>
+            <a:off x="822960" y="3291840"/>
+            <a:ext cx="640080" cy="1143000"/>
+          </a:xfrm>
+          <a:prstGeom prst="rect">
+            <a:avLst/>
+          </a:prstGeom>
+          <a:solidFill>
+            <a:srgbClr val="1E2761"/>
+          </a:solidFill>
+          <a:ln>
+            <a:noFill/>
+          </a:ln>
+          <a:effectLst/>
+        </p:spPr>
+        <p:style>
+          <a:lnRef idx="1">
+            <a:schemeClr val="accent1"/>
+          </a:lnRef>
+          <a:fillRef idx="3">
+            <a:schemeClr val="accent1"/>
+          </a:fillRef>
+          <a:effectRef idx="2">
+            <a:schemeClr val="accent1"/>
+          </a:effectRef>
+          <a:fontRef idx="minor">
+            <a:schemeClr val="lt1"/>
+          </a:fontRef>
+        </p:style>
+        <p:txBody>
+          <a:bodyPr rtlCol="0" anchor="ctr"/>
+          <a:lstStyle/>
+          <a:p>
+            <a:pPr algn="ctr"/>
+          </a:p>
+        </p:txBody>
+      </p:sp>
+      <p:sp>
+        <p:nvSpPr>
+          <p:cNvPr id="10" name="TextBox 9"/>
+          <p:cNvSpPr txBox="1"/>
+          <p:nvPr/>
+        </p:nvSpPr>
+        <p:spPr>
+          <a:xfrm>
+            <a:off x="822960" y="3611880"/>
+            <a:ext cx="640080" cy="548640"/>
+          </a:xfrm>
+          <a:prstGeom prst="rect">
+            <a:avLst/>
+          </a:prstGeom>
+          <a:noFill/>
+        </p:spPr>
+        <p:txBody>
+          <a:bodyPr wrap="square">
+            <a:spAutoFit/>
+          </a:bodyPr>
+          <a:lstStyle/>
+          <a:p>
+            <a:pPr algn="ctr"/>
+            <a:r>
+              <a:rPr sz="2200" b="1" i="0">
+                <a:solidFill>
+                  <a:srgbClr val="FFFFFF"/>
+                </a:solidFill>
+                <a:latin typeface="Montserrat"/>
+              </a:rPr>
+              <a:t>A</a:t>
+            </a:r>
+          </a:p>
+        </p:txBody>
+      </p:sp>
+      <p:sp>
+        <p:nvSpPr>
+          <p:cNvPr id="11" name="TextBox 10"/>
+          <p:cNvSpPr txBox="1"/>
+          <p:nvPr/>
+        </p:nvSpPr>
+        <p:spPr>
+          <a:xfrm>
+            <a:off x="1600200" y="3474720"/>
+            <a:ext cx="4114800" cy="868680"/>
+          </a:xfrm>
+          <a:prstGeom prst="rect">
+            <a:avLst/>
+          </a:prstGeom>
+          <a:noFill/>
+        </p:spPr>
+        <p:txBody>
+          <a:bodyPr wrap="square">
+            <a:spAutoFit/>
+          </a:bodyPr>
+          <a:lstStyle/>
+          <a:p>
+            <a:r>
+              <a:rPr sz="1400" b="0" i="0">
+                <a:solidFill>
+                  <a:srgbClr val="1B2330"/>
+                </a:solidFill>
+                <a:latin typeface="Montserrat"/>
+              </a:rPr>
+              <a:t>En la mezcla aire-gas dentro de los límites de inflamabilidad</a:t>
+            </a:r>
+          </a:p>
+        </p:txBody>
+      </p:sp>
+      <p:sp>
+        <p:nvSpPr>
+          <p:cNvPr id="12" name="Rounded Rectangle 11"/>
+          <p:cNvSpPr/>
+          <p:nvPr/>
+        </p:nvSpPr>
+        <p:spPr>
+          <a:xfrm>
+            <a:off x="6355080" y="3291840"/>
+            <a:ext cx="4983480" cy="1143000"/>
+          </a:xfrm>
+          <a:prstGeom prst="roundRect">
+            <a:avLst/>
+          </a:prstGeom>
+          <a:solidFill>
+            <a:srgbClr val="F3F6FB"/>
+          </a:solidFill>
+          <a:ln w="12700">
+            <a:solidFill>
+              <a:srgbClr val="C7D2E6"/>
+            </a:solidFill>
+          </a:ln>
+          <a:effectLst/>
+        </p:spPr>
+        <p:style>
+          <a:lnRef idx="1">
+            <a:schemeClr val="accent1"/>
+          </a:lnRef>
+          <a:fillRef idx="3">
+            <a:schemeClr val="accent1"/>
+          </a:fillRef>
+          <a:effectRef idx="2">
+            <a:schemeClr val="accent1"/>
+          </a:effectRef>
+          <a:fontRef idx="minor">
+            <a:schemeClr val="lt1"/>
+          </a:fontRef>
+        </p:style>
+        <p:txBody>
+          <a:bodyPr rtlCol="0" anchor="ctr"/>
+          <a:lstStyle/>
+          <a:p>
+            <a:pPr algn="ctr"/>
+          </a:p>
+        </p:txBody>
+      </p:sp>
+      <p:sp>
+        <p:nvSpPr>
+          <p:cNvPr id="13" name="Rectangle 12"/>
+          <p:cNvSpPr/>
+          <p:nvPr/>
+        </p:nvSpPr>
+        <p:spPr>
+          <a:xfrm>
+            <a:off x="6355080" y="3291840"/>
+            <a:ext cx="640080" cy="1143000"/>
+          </a:xfrm>
+          <a:prstGeom prst="rect">
+            <a:avLst/>
+          </a:prstGeom>
+          <a:solidFill>
+            <a:srgbClr val="1E2761"/>
+          </a:solidFill>
+          <a:ln>
+            <a:noFill/>
+          </a:ln>
+          <a:effectLst/>
+        </p:spPr>
+        <p:style>
+          <a:lnRef idx="1">
+            <a:schemeClr val="accent1"/>
+          </a:lnRef>
+          <a:fillRef idx="3">
+            <a:schemeClr val="accent1"/>
+          </a:fillRef>
+          <a:effectRef idx="2">
+            <a:schemeClr val="accent1"/>
+          </a:effectRef>
+          <a:fontRef idx="minor">
+            <a:schemeClr val="lt1"/>
+          </a:fontRef>
+        </p:style>
+        <p:txBody>
+          <a:bodyPr rtlCol="0" anchor="ctr"/>
+          <a:lstStyle/>
+          <a:p>
+            <a:pPr algn="ctr"/>
+          </a:p>
+        </p:txBody>
+      </p:sp>
+      <p:sp>
+        <p:nvSpPr>
+          <p:cNvPr id="14" name="TextBox 13"/>
+          <p:cNvSpPr txBox="1"/>
+          <p:nvPr/>
+        </p:nvSpPr>
+        <p:spPr>
+          <a:xfrm>
+            <a:off x="6355080" y="3611880"/>
+            <a:ext cx="640080" cy="548640"/>
+          </a:xfrm>
+          <a:prstGeom prst="rect">
+            <a:avLst/>
+          </a:prstGeom>
+          <a:noFill/>
+        </p:spPr>
+        <p:txBody>
+          <a:bodyPr wrap="square">
+            <a:spAutoFit/>
+          </a:bodyPr>
+          <a:lstStyle/>
+          <a:p>
+            <a:pPr algn="ctr"/>
+            <a:r>
+              <a:rPr sz="2200" b="1" i="0">
+                <a:solidFill>
+                  <a:srgbClr val="FFFFFF"/>
+                </a:solidFill>
+                <a:latin typeface="Montserrat"/>
+              </a:rPr>
+              <a:t>B</a:t>
+            </a:r>
+          </a:p>
+        </p:txBody>
+      </p:sp>
+      <p:sp>
+        <p:nvSpPr>
+          <p:cNvPr id="15" name="TextBox 14"/>
+          <p:cNvSpPr txBox="1"/>
+          <p:nvPr/>
+        </p:nvSpPr>
+        <p:spPr>
+          <a:xfrm>
+            <a:off x="7132320" y="3474720"/>
+            <a:ext cx="4114800" cy="868680"/>
+          </a:xfrm>
+          <a:prstGeom prst="rect">
+            <a:avLst/>
+          </a:prstGeom>
+          <a:noFill/>
+        </p:spPr>
+        <p:txBody>
+          <a:bodyPr wrap="square">
+            <a:spAutoFit/>
+          </a:bodyPr>
+          <a:lstStyle/>
+          <a:p>
+            <a:r>
+              <a:rPr sz="1400" b="0" i="0">
+                <a:solidFill>
+                  <a:srgbClr val="1B2330"/>
+                </a:solidFill>
+                <a:latin typeface="Montserrat"/>
+              </a:rPr>
+              <a:t>En el gas puro, que arde en cuanto sale del tubo</a:t>
+            </a:r>
+          </a:p>
+        </p:txBody>
+      </p:sp>
+      <p:sp>
+        <p:nvSpPr>
+          <p:cNvPr id="16" name="Rounded Rectangle 15"/>
+          <p:cNvSpPr/>
+          <p:nvPr/>
+        </p:nvSpPr>
+        <p:spPr>
+          <a:xfrm>
+            <a:off x="822960" y="4617720"/>
+            <a:ext cx="4983480" cy="1143000"/>
+          </a:xfrm>
+          <a:prstGeom prst="roundRect">
+            <a:avLst/>
+          </a:prstGeom>
+          <a:solidFill>
+            <a:srgbClr val="F3F6FB"/>
+          </a:solidFill>
+          <a:ln w="12700">
+            <a:solidFill>
+              <a:srgbClr val="C7D2E6"/>
+            </a:solidFill>
+          </a:ln>
+          <a:effectLst/>
+        </p:spPr>
+        <p:style>
+          <a:lnRef idx="1">
+            <a:schemeClr val="accent1"/>
+          </a:lnRef>
+          <a:fillRef idx="3">
+            <a:schemeClr val="accent1"/>
+          </a:fillRef>
+          <a:effectRef idx="2">
+            <a:schemeClr val="accent1"/>
+          </a:effectRef>
+          <a:fontRef idx="minor">
+            <a:schemeClr val="lt1"/>
+          </a:fontRef>
+        </p:style>
+        <p:txBody>
+          <a:bodyPr rtlCol="0" anchor="ctr"/>
+          <a:lstStyle/>
+          <a:p>
+            <a:pPr algn="ctr"/>
+          </a:p>
+        </p:txBody>
+      </p:sp>
+      <p:sp>
+        <p:nvSpPr>
+          <p:cNvPr id="17" name="Rectangle 16"/>
+          <p:cNvSpPr/>
+          <p:nvPr/>
+        </p:nvSpPr>
+        <p:spPr>
+          <a:xfrm>
+            <a:off x="822960" y="4617720"/>
+            <a:ext cx="640080" cy="1143000"/>
+          </a:xfrm>
+          <a:prstGeom prst="rect">
+            <a:avLst/>
+          </a:prstGeom>
+          <a:solidFill>
+            <a:srgbClr val="1E2761"/>
+          </a:solidFill>
+          <a:ln>
+            <a:noFill/>
+          </a:ln>
+          <a:effectLst/>
+        </p:spPr>
+        <p:style>
+          <a:lnRef idx="1">
+            <a:schemeClr val="accent1"/>
+          </a:lnRef>
+          <a:fillRef idx="3">
+            <a:schemeClr val="accent1"/>
+          </a:fillRef>
+          <a:effectRef idx="2">
+            <a:schemeClr val="accent1"/>
+          </a:effectRef>
+          <a:fontRef idx="minor">
+            <a:schemeClr val="lt1"/>
+          </a:fontRef>
+        </p:style>
+        <p:txBody>
+          <a:bodyPr rtlCol="0" anchor="ctr"/>
+          <a:lstStyle/>
+          <a:p>
+            <a:pPr algn="ctr"/>
+          </a:p>
+        </p:txBody>
+      </p:sp>
+      <p:sp>
+        <p:nvSpPr>
+          <p:cNvPr id="18" name="TextBox 17"/>
+          <p:cNvSpPr txBox="1"/>
+          <p:nvPr/>
+        </p:nvSpPr>
+        <p:spPr>
+          <a:xfrm>
+            <a:off x="822960" y="4937760"/>
+            <a:ext cx="640080" cy="548640"/>
+          </a:xfrm>
+          <a:prstGeom prst="rect">
+            <a:avLst/>
+          </a:prstGeom>
+          <a:noFill/>
+        </p:spPr>
+        <p:txBody>
+          <a:bodyPr wrap="square">
+            <a:spAutoFit/>
+          </a:bodyPr>
+          <a:lstStyle/>
+          <a:p>
+            <a:pPr algn="ctr"/>
+            <a:r>
+              <a:rPr sz="2200" b="1" i="0">
+                <a:solidFill>
+                  <a:srgbClr val="FFFFFF"/>
+                </a:solidFill>
+                <a:latin typeface="Montserrat"/>
+              </a:rPr>
+              <a:t>C</a:t>
+            </a:r>
+          </a:p>
+        </p:txBody>
+      </p:sp>
+      <p:sp>
+        <p:nvSpPr>
+          <p:cNvPr id="19" name="TextBox 18"/>
+          <p:cNvSpPr txBox="1"/>
+          <p:nvPr/>
+        </p:nvSpPr>
+        <p:spPr>
+          <a:xfrm>
+            <a:off x="1600200" y="4800600"/>
+            <a:ext cx="4114800" cy="868680"/>
+          </a:xfrm>
+          <a:prstGeom prst="rect">
+            <a:avLst/>
+          </a:prstGeom>
+          <a:noFill/>
+        </p:spPr>
+        <p:txBody>
+          <a:bodyPr wrap="square">
+            <a:spAutoFit/>
+          </a:bodyPr>
+          <a:lstStyle/>
+          <a:p>
+            <a:r>
+              <a:rPr sz="1400" b="0" i="0">
+                <a:solidFill>
+                  <a:srgbClr val="1B2330"/>
+                </a:solidFill>
+                <a:latin typeface="Montserrat"/>
+              </a:rPr>
+              <a:t>En el aire de la tubería, que se inflama solo</a:t>
+            </a:r>
+          </a:p>
+        </p:txBody>
+      </p:sp>
+      <p:sp>
+        <p:nvSpPr>
+          <p:cNvPr id="20" name="Rounded Rectangle 19"/>
+          <p:cNvSpPr/>
+          <p:nvPr/>
+        </p:nvSpPr>
+        <p:spPr>
+          <a:xfrm>
+            <a:off x="6355080" y="4617720"/>
+            <a:ext cx="4983480" cy="1143000"/>
+          </a:xfrm>
+          <a:prstGeom prst="roundRect">
+            <a:avLst/>
+          </a:prstGeom>
+          <a:solidFill>
+            <a:srgbClr val="F3F6FB"/>
+          </a:solidFill>
+          <a:ln w="12700">
+            <a:solidFill>
+              <a:srgbClr val="C7D2E6"/>
+            </a:solidFill>
+          </a:ln>
+          <a:effectLst/>
+        </p:spPr>
+        <p:style>
+          <a:lnRef idx="1">
+            <a:schemeClr val="accent1"/>
+          </a:lnRef>
+          <a:fillRef idx="3">
+            <a:schemeClr val="accent1"/>
+          </a:fillRef>
+          <a:effectRef idx="2">
+            <a:schemeClr val="accent1"/>
+          </a:effectRef>
+          <a:fontRef idx="minor">
+            <a:schemeClr val="lt1"/>
+          </a:fontRef>
+        </p:style>
+        <p:txBody>
+          <a:bodyPr rtlCol="0" anchor="ctr"/>
+          <a:lstStyle/>
+          <a:p>
+            <a:pPr algn="ctr"/>
+          </a:p>
+        </p:txBody>
+      </p:sp>
+      <p:sp>
+        <p:nvSpPr>
+          <p:cNvPr id="21" name="Rectangle 20"/>
+          <p:cNvSpPr/>
+          <p:nvPr/>
+        </p:nvSpPr>
+        <p:spPr>
+          <a:xfrm>
+            <a:off x="6355080" y="4617720"/>
+            <a:ext cx="640080" cy="1143000"/>
+          </a:xfrm>
+          <a:prstGeom prst="rect">
+            <a:avLst/>
+          </a:prstGeom>
+          <a:solidFill>
+            <a:srgbClr val="1E2761"/>
+          </a:solidFill>
+          <a:ln>
+            <a:noFill/>
+          </a:ln>
+          <a:effectLst/>
+        </p:spPr>
+        <p:style>
+          <a:lnRef idx="1">
+            <a:schemeClr val="accent1"/>
+          </a:lnRef>
+          <a:fillRef idx="3">
+            <a:schemeClr val="accent1"/>
+          </a:fillRef>
+          <a:effectRef idx="2">
+            <a:schemeClr val="accent1"/>
+          </a:effectRef>
+          <a:fontRef idx="minor">
+            <a:schemeClr val="lt1"/>
+          </a:fontRef>
+        </p:style>
+        <p:txBody>
+          <a:bodyPr rtlCol="0" anchor="ctr"/>
+          <a:lstStyle/>
+          <a:p>
+            <a:pPr algn="ctr"/>
+          </a:p>
+        </p:txBody>
+      </p:sp>
+      <p:sp>
+        <p:nvSpPr>
+          <p:cNvPr id="22" name="TextBox 21"/>
+          <p:cNvSpPr txBox="1"/>
+          <p:nvPr/>
+        </p:nvSpPr>
+        <p:spPr>
+          <a:xfrm>
+            <a:off x="6355080" y="4937760"/>
+            <a:ext cx="640080" cy="548640"/>
+          </a:xfrm>
+          <a:prstGeom prst="rect">
+            <a:avLst/>
+          </a:prstGeom>
+          <a:noFill/>
+        </p:spPr>
+        <p:txBody>
+          <a:bodyPr wrap="square">
+            <a:spAutoFit/>
+          </a:bodyPr>
+          <a:lstStyle/>
+          <a:p>
+            <a:pPr algn="ctr"/>
+            <a:r>
+              <a:rPr sz="2200" b="1" i="0">
+                <a:solidFill>
+                  <a:srgbClr val="FFFFFF"/>
+                </a:solidFill>
+                <a:latin typeface="Montserrat"/>
+              </a:rPr>
+              <a:t>D</a:t>
+            </a:r>
+          </a:p>
+        </p:txBody>
+      </p:sp>
+      <p:sp>
+        <p:nvSpPr>
+          <p:cNvPr id="23" name="TextBox 22"/>
+          <p:cNvSpPr txBox="1"/>
+          <p:nvPr/>
+        </p:nvSpPr>
+        <p:spPr>
+          <a:xfrm>
+            <a:off x="7132320" y="4800600"/>
+            <a:ext cx="4114800" cy="868680"/>
+          </a:xfrm>
+          <a:prstGeom prst="rect">
+            <a:avLst/>
+          </a:prstGeom>
+          <a:noFill/>
+        </p:spPr>
+        <p:txBody>
+          <a:bodyPr wrap="square">
+            <a:spAutoFit/>
+          </a:bodyPr>
+          <a:lstStyle/>
+          <a:p>
+            <a:r>
+              <a:rPr sz="1400" b="0" i="0">
+                <a:solidFill>
+                  <a:srgbClr val="1B2330"/>
+                </a:solidFill>
+                <a:latin typeface="Montserrat"/>
+              </a:rPr>
+              <a:t>En la presión alta del gas al entrar en la red</a:t>
+            </a:r>
+          </a:p>
+        </p:txBody>
+      </p:sp>
+    </p:spTree>
+  </p:cSld>
+  <p:clrMapOvr>
+    <a:masterClrMapping/>
+  </p:clrMapOvr>
+  <mc:AlternateContent xmlns:mc="http://schemas.openxmlformats.org/markup-compatibility/2006">
+    <mc:Choice xmlns:p14="http://schemas.microsoft.com/office/powerpoint/2010/main" Requires="p14">
+      <p:transition spd="med" p14:dur="700">
+        <p14:cube dir="r"/>
+      </p:transition>
+    </mc:Choice>
+    <mc:Fallback>
+      <p:transition spd="med">
+        <p:push dir="r"/>
+      </p:transition>
+    </mc:Fallback>
+  </mc:AlternateContent>
+</p:sld>
+</file>
+
+<file path=ppt/slides/slide19.xml><?xml version="1.0" encoding="utf-8"?>
+<p:sld xmlns:a="http://schemas.openxmlformats.org/drawingml/2006/main" xmlns:p="http://schemas.openxmlformats.org/presentationml/2006/main" xmlns:r="http://schemas.openxmlformats.org/officeDocument/2006/relationships">
+  <p:cSld>
+    <p:spTree>
+      <p:nvGrpSpPr>
+        <p:cNvPr id="1" name=""/>
+        <p:cNvGrpSpPr/>
+        <p:nvPr/>
+      </p:nvGrpSpPr>
+      <p:grpSpPr/>
+      <p:sp>
+        <p:nvSpPr>
+          <p:cNvPr id="2" name="Rectangle 1"/>
+          <p:cNvSpPr/>
+          <p:nvPr/>
+        </p:nvSpPr>
+        <p:spPr>
+          <a:xfrm>
+            <a:off x="0" y="0"/>
+            <a:ext cx="12191695" cy="6858000"/>
+          </a:xfrm>
+          <a:prstGeom prst="rect">
+            <a:avLst/>
+          </a:prstGeom>
+          <a:solidFill>
+            <a:srgbClr val="FFFFFF"/>
+          </a:solidFill>
+          <a:ln>
+            <a:noFill/>
+          </a:ln>
+          <a:effectLst/>
+        </p:spPr>
+        <p:style>
+          <a:lnRef idx="1">
+            <a:schemeClr val="accent1"/>
+          </a:lnRef>
+          <a:fillRef idx="3">
+            <a:schemeClr val="accent1"/>
+          </a:fillRef>
+          <a:effectRef idx="2">
+            <a:schemeClr val="accent1"/>
+          </a:effectRef>
+          <a:fontRef idx="minor">
+            <a:schemeClr val="lt1"/>
+          </a:fontRef>
+        </p:style>
+        <p:txBody>
+          <a:bodyPr rtlCol="0" anchor="ctr"/>
+          <a:lstStyle/>
+          <a:p>
+            <a:pPr algn="ctr"/>
+          </a:p>
+        </p:txBody>
+      </p:sp>
+      <p:sp>
+        <p:nvSpPr>
+          <p:cNvPr id="3" name="TextBox 2"/>
+          <p:cNvSpPr txBox="1"/>
+          <p:nvPr/>
+        </p:nvSpPr>
+        <p:spPr>
+          <a:xfrm>
+            <a:off x="10607040" y="320040"/>
+            <a:ext cx="1371600" cy="365760"/>
+          </a:xfrm>
+          <a:prstGeom prst="rect">
+            <a:avLst/>
+          </a:prstGeom>
+          <a:noFill/>
+        </p:spPr>
+        <p:txBody>
+          <a:bodyPr wrap="square">
+            <a:spAutoFit/>
+          </a:bodyPr>
+          <a:lstStyle/>
+          <a:p>
+            <a:pPr algn="r"/>
+            <a:r>
+              <a:rPr sz="1000" b="1" i="0">
+                <a:solidFill>
+                  <a:srgbClr val="64748B"/>
+                </a:solidFill>
+                <a:latin typeface="Montserrat"/>
+              </a:rPr>
+              <a:t>019 / 022</a:t>
+            </a:r>
+          </a:p>
+        </p:txBody>
+      </p:sp>
+      <p:sp>
+        <p:nvSpPr>
+          <p:cNvPr id="4" name="TextBox 3"/>
+          <p:cNvSpPr txBox="1"/>
+          <p:nvPr/>
+        </p:nvSpPr>
+        <p:spPr>
+          <a:xfrm>
+            <a:off x="457200" y="6419088"/>
+            <a:ext cx="8229600" cy="365760"/>
+          </a:xfrm>
+          <a:prstGeom prst="rect">
+            <a:avLst/>
+          </a:prstGeom>
+          <a:noFill/>
+        </p:spPr>
+        <p:txBody>
+          <a:bodyPr wrap="square">
+            <a:spAutoFit/>
+          </a:bodyPr>
+          <a:lstStyle/>
+          <a:p>
+            <a:r>
+              <a:rPr sz="900" b="0" i="0">
+                <a:solidFill>
+                  <a:srgbClr val="64748B"/>
+                </a:solidFill>
+                <a:latin typeface="Montserrat"/>
+              </a:rPr>
+              <a:t>Curso Gas B · Tema 01 · Distribución por canalización</a:t>
+            </a:r>
+          </a:p>
+        </p:txBody>
+      </p:sp>
+      <p:sp>
+        <p:nvSpPr>
+          <p:cNvPr id="5" name="Rectangle 4"/>
+          <p:cNvSpPr/>
+          <p:nvPr/>
+        </p:nvSpPr>
+        <p:spPr>
+          <a:xfrm>
+            <a:off x="0" y="0"/>
+            <a:ext cx="12191695" cy="1143000"/>
+          </a:xfrm>
+          <a:prstGeom prst="rect">
+            <a:avLst/>
+          </a:prstGeom>
+          <a:solidFill>
+            <a:srgbClr val="1E8E4B"/>
+          </a:solidFill>
+          <a:ln>
+            <a:noFill/>
+          </a:ln>
+          <a:effectLst/>
+        </p:spPr>
+        <p:style>
+          <a:lnRef idx="1">
+            <a:schemeClr val="accent1"/>
+          </a:lnRef>
+          <a:fillRef idx="3">
+            <a:schemeClr val="accent1"/>
+          </a:fillRef>
+          <a:effectRef idx="2">
+            <a:schemeClr val="accent1"/>
+          </a:effectRef>
+          <a:fontRef idx="minor">
+            <a:schemeClr val="lt1"/>
+          </a:fontRef>
+        </p:style>
+        <p:txBody>
+          <a:bodyPr rtlCol="0" anchor="ctr"/>
+          <a:lstStyle/>
+          <a:p>
+            <a:pPr algn="ctr"/>
+          </a:p>
+        </p:txBody>
+      </p:sp>
+      <p:sp>
+        <p:nvSpPr>
+          <p:cNvPr id="6" name="TextBox 5"/>
+          <p:cNvSpPr txBox="1"/>
+          <p:nvPr/>
+        </p:nvSpPr>
+        <p:spPr>
+          <a:xfrm>
+            <a:off x="822960" y="274320"/>
+            <a:ext cx="10515600" cy="640080"/>
+          </a:xfrm>
+          <a:prstGeom prst="rect">
+            <a:avLst/>
+          </a:prstGeom>
+          <a:noFill/>
+        </p:spPr>
+        <p:txBody>
+          <a:bodyPr wrap="square">
+            <a:spAutoFit/>
+          </a:bodyPr>
+          <a:lstStyle/>
+          <a:p>
+            <a:r>
+              <a:rPr sz="2400" b="1" i="0">
+                <a:solidFill>
+                  <a:srgbClr val="FFFFFF"/>
+                </a:solidFill>
+                <a:latin typeface="Montserrat"/>
+              </a:rPr>
+              <a:t>✔  RESPUESTA:  A</a:t>
+            </a:r>
+          </a:p>
+        </p:txBody>
+      </p:sp>
+      <p:sp>
+        <p:nvSpPr>
+          <p:cNvPr id="7" name="TextBox 6"/>
+          <p:cNvSpPr txBox="1"/>
+          <p:nvPr/>
+        </p:nvSpPr>
+        <p:spPr>
+          <a:xfrm>
+            <a:off x="822960" y="1417320"/>
+            <a:ext cx="10515600" cy="914400"/>
+          </a:xfrm>
+          <a:prstGeom prst="rect">
+            <a:avLst/>
+          </a:prstGeom>
+          <a:noFill/>
+        </p:spPr>
+        <p:txBody>
+          <a:bodyPr wrap="square">
+            <a:spAutoFit/>
+          </a:bodyPr>
+          <a:lstStyle/>
+          <a:p>
+            <a:r>
+              <a:rPr sz="1800" b="1" i="0">
+                <a:solidFill>
+                  <a:srgbClr val="64748B"/>
+                </a:solidFill>
+                <a:latin typeface="Montserrat"/>
+              </a:rPr>
+              <a:t>Al llenar la red de gas, ¿dónde está realmente el peligro?</a:t>
+            </a:r>
+          </a:p>
+        </p:txBody>
+      </p:sp>
+      <p:sp>
+        <p:nvSpPr>
+          <p:cNvPr id="8" name="Rounded Rectangle 7"/>
+          <p:cNvSpPr/>
+          <p:nvPr/>
+        </p:nvSpPr>
+        <p:spPr>
+          <a:xfrm>
+            <a:off x="822960" y="2514600"/>
+            <a:ext cx="10515600" cy="914400"/>
+          </a:xfrm>
+          <a:prstGeom prst="roundRect">
+            <a:avLst/>
+          </a:prstGeom>
+          <a:solidFill>
+            <a:srgbClr val="E9F6EE"/>
+          </a:solidFill>
+          <a:ln w="12700">
+            <a:solidFill>
+              <a:srgbClr val="1E8E4B"/>
+            </a:solidFill>
+          </a:ln>
+          <a:effectLst/>
+        </p:spPr>
+        <p:style>
+          <a:lnRef idx="1">
+            <a:schemeClr val="accent1"/>
+          </a:lnRef>
+          <a:fillRef idx="3">
+            <a:schemeClr val="accent1"/>
+          </a:fillRef>
+          <a:effectRef idx="2">
+            <a:schemeClr val="accent1"/>
+          </a:effectRef>
+          <a:fontRef idx="minor">
+            <a:schemeClr val="lt1"/>
+          </a:fontRef>
+        </p:style>
+        <p:txBody>
+          <a:bodyPr rtlCol="0" anchor="ctr"/>
+          <a:lstStyle/>
+          <a:p>
+            <a:pPr algn="ctr"/>
+          </a:p>
+        </p:txBody>
+      </p:sp>
+      <p:sp>
+        <p:nvSpPr>
+          <p:cNvPr id="9" name="TextBox 8"/>
+          <p:cNvSpPr txBox="1"/>
+          <p:nvPr/>
+        </p:nvSpPr>
+        <p:spPr>
+          <a:xfrm>
+            <a:off x="1097280" y="2697480"/>
+            <a:ext cx="10058400" cy="640080"/>
+          </a:xfrm>
+          <a:prstGeom prst="rect">
+            <a:avLst/>
+          </a:prstGeom>
+          <a:noFill/>
+        </p:spPr>
+        <p:txBody>
+          <a:bodyPr wrap="square">
+            <a:spAutoFit/>
+          </a:bodyPr>
+          <a:lstStyle/>
+          <a:p>
+            <a:r>
+              <a:rPr sz="1800" b="1" i="0">
+                <a:solidFill>
+                  <a:srgbClr val="1E8E4B"/>
+                </a:solidFill>
+                <a:latin typeface="Montserrat"/>
+              </a:rPr>
+              <a:t>A.  </a:t>
+            </a:r>
+            <a:r>
+              <a:rPr sz="1800" b="1" i="0">
+                <a:solidFill>
+                  <a:srgbClr val="1E2761"/>
+                </a:solidFill>
+                <a:latin typeface="Montserrat"/>
+              </a:rPr>
+              <a:t>En la mezcla aire-gas dentro de los límites de inflamabilidad</a:t>
+            </a:r>
+          </a:p>
+        </p:txBody>
+      </p:sp>
+      <p:sp>
+        <p:nvSpPr>
+          <p:cNvPr id="10" name="TextBox 9"/>
+          <p:cNvSpPr txBox="1"/>
+          <p:nvPr/>
+        </p:nvSpPr>
+        <p:spPr>
+          <a:xfrm>
+            <a:off x="822960" y="3749039"/>
+            <a:ext cx="10515600" cy="2194560"/>
+          </a:xfrm>
+          <a:prstGeom prst="rect">
+            <a:avLst/>
+          </a:prstGeom>
+          <a:noFill/>
+        </p:spPr>
+        <p:txBody>
+          <a:bodyPr wrap="square">
+            <a:spAutoFit/>
+          </a:bodyPr>
+          <a:lstStyle/>
+          <a:p>
+            <a:r>
+              <a:rPr sz="1500" b="1" i="0">
+                <a:solidFill>
+                  <a:srgbClr val="E8801A"/>
+                </a:solidFill>
+                <a:latin typeface="Montserrat"/>
+              </a:rPr>
+              <a:t>Por qué:  </a:t>
+            </a:r>
+            <a:r>
+              <a:rPr sz="1500" b="0" i="0">
+                <a:solidFill>
+                  <a:srgbClr val="1B2330"/>
+                </a:solidFill>
+                <a:latin typeface="Montserrat"/>
+              </a:rPr>
+              <a:t>Ni el gas solo ni el aire solo arden; el riesgo es la mezcla en proporción inflamable, por eso se llena despacio o con tapón inerte.</a:t>
+            </a:r>
+          </a:p>
+        </p:txBody>
+      </p:sp>
+    </p:spTree>
+  </p:cSld>
+  <p:clrMapOvr>
+    <a:masterClrMapping/>
+  </p:clrMapOvr>
+  <mc:AlternateContent xmlns:mc="http://schemas.openxmlformats.org/markup-compatibility/2006">
+    <mc:Choice xmlns:p14="http://schemas.microsoft.com/office/powerpoint/2010/main" Requires="p14">
+      <p:transition spd="med" p14:dur="700">
+        <p14:cube dir="l"/>
+      </p:transition>
+    </mc:Choice>
+    <mc:Fallback>
+      <p:transition spd="med">
+        <p:push dir="l"/>
+      </p:transition>
+    </mc:Fallback>
+  </mc:AlternateContent>
 </p:sld>
 </file>
 
@@ -8001,7 +10697,7 @@
                 </a:solidFill>
                 <a:latin typeface="Montserrat"/>
               </a:rPr>
-              <a:t>002 / 016</a:t>
+              <a:t>002 / 022</a:t>
             </a:r>
           </a:p>
         </p:txBody>
@@ -8076,7 +10772,7 @@
       </p:sp>
       <p:sp>
         <p:nvSpPr>
-          <p:cNvPr id="6" name="Rounded Rectangle 5"/>
+          <p:cNvPr id="6" name="Rectangle 5"/>
           <p:cNvSpPr/>
           <p:nvPr/>
         </p:nvSpPr>
@@ -8085,7 +10781,7 @@
             <a:off x="868680" y="1234440"/>
             <a:ext cx="1463040" cy="73152"/>
           </a:xfrm>
-          <a:prstGeom prst="roundRect">
+          <a:prstGeom prst="rect">
             <a:avLst/>
           </a:prstGeom>
           <a:solidFill>
@@ -8166,14 +10862,58 @@
       </p:sp>
       <p:sp>
         <p:nvSpPr>
-          <p:cNvPr id="8" name="TextBox 7"/>
+          <p:cNvPr id="8" name="Rectangle 7"/>
+          <p:cNvSpPr/>
+          <p:nvPr/>
+        </p:nvSpPr>
+        <p:spPr>
+          <a:xfrm>
+            <a:off x="822960" y="2011680"/>
+            <a:ext cx="3017520" cy="128016"/>
+          </a:xfrm>
+          <a:prstGeom prst="rect">
+            <a:avLst/>
+          </a:prstGeom>
+          <a:solidFill>
+            <a:srgbClr val="E8801A"/>
+          </a:solidFill>
+          <a:ln>
+            <a:noFill/>
+          </a:ln>
+          <a:effectLst/>
+        </p:spPr>
+        <p:style>
+          <a:lnRef idx="1">
+            <a:schemeClr val="accent1"/>
+          </a:lnRef>
+          <a:fillRef idx="3">
+            <a:schemeClr val="accent1"/>
+          </a:fillRef>
+          <a:effectRef idx="2">
+            <a:schemeClr val="accent1"/>
+          </a:effectRef>
+          <a:fontRef idx="minor">
+            <a:schemeClr val="lt1"/>
+          </a:fontRef>
+        </p:style>
+        <p:txBody>
+          <a:bodyPr rtlCol="0" anchor="ctr"/>
+          <a:lstStyle/>
+          <a:p>
+            <a:pPr algn="ctr"/>
+          </a:p>
+        </p:txBody>
+      </p:sp>
+      <p:sp>
+        <p:nvSpPr>
+          <p:cNvPr id="9" name="TextBox 8"/>
           <p:cNvSpPr txBox="1"/>
           <p:nvPr/>
         </p:nvSpPr>
         <p:spPr>
           <a:xfrm>
-            <a:off x="822960" y="2331720"/>
-            <a:ext cx="3017520" cy="1463040"/>
+            <a:off x="822960" y="2377440"/>
+            <a:ext cx="3017520" cy="1371600"/>
           </a:xfrm>
           <a:prstGeom prst="rect">
             <a:avLst/>
@@ -8188,7 +10928,7 @@
           <a:p>
             <a:pPr algn="ctr"/>
             <a:r>
-              <a:rPr sz="6000" b="1" i="0">
+              <a:rPr sz="5800" b="1" i="0">
                 <a:solidFill>
                   <a:srgbClr val="1E2761"/>
                 </a:solidFill>
@@ -8201,13 +10941,13 @@
       </p:sp>
       <p:sp>
         <p:nvSpPr>
-          <p:cNvPr id="9" name="TextBox 8"/>
+          <p:cNvPr id="10" name="TextBox 9"/>
           <p:cNvSpPr txBox="1"/>
           <p:nvPr/>
         </p:nvSpPr>
         <p:spPr>
           <a:xfrm>
-            <a:off x="1051560" y="3611880"/>
+            <a:off x="1051560" y="3657600"/>
             <a:ext cx="2560320" cy="1005840"/>
           </a:xfrm>
           <a:prstGeom prst="rect">
@@ -8236,7 +10976,7 @@
       </p:sp>
       <p:sp>
         <p:nvSpPr>
-          <p:cNvPr id="10" name="Rounded Rectangle 9"/>
+          <p:cNvPr id="11" name="Rounded Rectangle 10"/>
           <p:cNvSpPr/>
           <p:nvPr/>
         </p:nvSpPr>
@@ -8282,14 +11022,58 @@
       </p:sp>
       <p:sp>
         <p:nvSpPr>
-          <p:cNvPr id="11" name="TextBox 10"/>
+          <p:cNvPr id="12" name="Rectangle 11"/>
+          <p:cNvSpPr/>
+          <p:nvPr/>
+        </p:nvSpPr>
+        <p:spPr>
+          <a:xfrm>
+            <a:off x="4617720" y="2011680"/>
+            <a:ext cx="3017520" cy="128016"/>
+          </a:xfrm>
+          <a:prstGeom prst="rect">
+            <a:avLst/>
+          </a:prstGeom>
+          <a:solidFill>
+            <a:srgbClr val="E8801A"/>
+          </a:solidFill>
+          <a:ln>
+            <a:noFill/>
+          </a:ln>
+          <a:effectLst/>
+        </p:spPr>
+        <p:style>
+          <a:lnRef idx="1">
+            <a:schemeClr val="accent1"/>
+          </a:lnRef>
+          <a:fillRef idx="3">
+            <a:schemeClr val="accent1"/>
+          </a:fillRef>
+          <a:effectRef idx="2">
+            <a:schemeClr val="accent1"/>
+          </a:effectRef>
+          <a:fontRef idx="minor">
+            <a:schemeClr val="lt1"/>
+          </a:fontRef>
+        </p:style>
+        <p:txBody>
+          <a:bodyPr rtlCol="0" anchor="ctr"/>
+          <a:lstStyle/>
+          <a:p>
+            <a:pPr algn="ctr"/>
+          </a:p>
+        </p:txBody>
+      </p:sp>
+      <p:sp>
+        <p:nvSpPr>
+          <p:cNvPr id="13" name="TextBox 12"/>
           <p:cNvSpPr txBox="1"/>
           <p:nvPr/>
         </p:nvSpPr>
         <p:spPr>
           <a:xfrm>
-            <a:off x="4617720" y="2331720"/>
-            <a:ext cx="3017520" cy="1463040"/>
+            <a:off x="4617720" y="2377440"/>
+            <a:ext cx="3017520" cy="1371600"/>
           </a:xfrm>
           <a:prstGeom prst="rect">
             <a:avLst/>
@@ -8304,7 +11088,7 @@
           <a:p>
             <a:pPr algn="ctr"/>
             <a:r>
-              <a:rPr sz="6000" b="1" i="0">
+              <a:rPr sz="5800" b="1" i="0">
                 <a:solidFill>
                   <a:srgbClr val="1E2761"/>
                 </a:solidFill>
@@ -8317,13 +11101,13 @@
       </p:sp>
       <p:sp>
         <p:nvSpPr>
-          <p:cNvPr id="12" name="TextBox 11"/>
+          <p:cNvPr id="14" name="TextBox 13"/>
           <p:cNvSpPr txBox="1"/>
           <p:nvPr/>
         </p:nvSpPr>
         <p:spPr>
           <a:xfrm>
-            <a:off x="4846320" y="3611880"/>
+            <a:off x="4846320" y="3657600"/>
             <a:ext cx="2560320" cy="1005840"/>
           </a:xfrm>
           <a:prstGeom prst="rect">
@@ -8352,7 +11136,7 @@
       </p:sp>
       <p:sp>
         <p:nvSpPr>
-          <p:cNvPr id="13" name="Rounded Rectangle 12"/>
+          <p:cNvPr id="15" name="Rounded Rectangle 14"/>
           <p:cNvSpPr/>
           <p:nvPr/>
         </p:nvSpPr>
@@ -8398,14 +11182,58 @@
       </p:sp>
       <p:sp>
         <p:nvSpPr>
-          <p:cNvPr id="14" name="TextBox 13"/>
+          <p:cNvPr id="16" name="Rectangle 15"/>
+          <p:cNvSpPr/>
+          <p:nvPr/>
+        </p:nvSpPr>
+        <p:spPr>
+          <a:xfrm>
+            <a:off x="8412480" y="2011680"/>
+            <a:ext cx="3017520" cy="128016"/>
+          </a:xfrm>
+          <a:prstGeom prst="rect">
+            <a:avLst/>
+          </a:prstGeom>
+          <a:solidFill>
+            <a:srgbClr val="E8801A"/>
+          </a:solidFill>
+          <a:ln>
+            <a:noFill/>
+          </a:ln>
+          <a:effectLst/>
+        </p:spPr>
+        <p:style>
+          <a:lnRef idx="1">
+            <a:schemeClr val="accent1"/>
+          </a:lnRef>
+          <a:fillRef idx="3">
+            <a:schemeClr val="accent1"/>
+          </a:fillRef>
+          <a:effectRef idx="2">
+            <a:schemeClr val="accent1"/>
+          </a:effectRef>
+          <a:fontRef idx="minor">
+            <a:schemeClr val="lt1"/>
+          </a:fontRef>
+        </p:style>
+        <p:txBody>
+          <a:bodyPr rtlCol="0" anchor="ctr"/>
+          <a:lstStyle/>
+          <a:p>
+            <a:pPr algn="ctr"/>
+          </a:p>
+        </p:txBody>
+      </p:sp>
+      <p:sp>
+        <p:nvSpPr>
+          <p:cNvPr id="17" name="TextBox 16"/>
           <p:cNvSpPr txBox="1"/>
           <p:nvPr/>
         </p:nvSpPr>
         <p:spPr>
           <a:xfrm>
-            <a:off x="8412480" y="2331720"/>
-            <a:ext cx="3017520" cy="1463040"/>
+            <a:off x="8412480" y="2377440"/>
+            <a:ext cx="3017520" cy="1371600"/>
           </a:xfrm>
           <a:prstGeom prst="rect">
             <a:avLst/>
@@ -8420,7 +11248,7 @@
           <a:p>
             <a:pPr algn="ctr"/>
             <a:r>
-              <a:rPr sz="6000" b="1" i="0">
+              <a:rPr sz="5800" b="1" i="0">
                 <a:solidFill>
                   <a:srgbClr val="1E2761"/>
                 </a:solidFill>
@@ -8433,13 +11261,13 @@
       </p:sp>
       <p:sp>
         <p:nvSpPr>
-          <p:cNvPr id="15" name="TextBox 14"/>
+          <p:cNvPr id="18" name="TextBox 17"/>
           <p:cNvSpPr txBox="1"/>
           <p:nvPr/>
         </p:nvSpPr>
         <p:spPr>
           <a:xfrm>
-            <a:off x="8641080" y="3611880"/>
+            <a:off x="8641080" y="3657600"/>
             <a:ext cx="2560320" cy="1005840"/>
           </a:xfrm>
           <a:prstGeom prst="rect">
@@ -8471,6 +11299,1322 @@
   <p:clrMapOvr>
     <a:masterClrMapping/>
   </p:clrMapOvr>
+  <mc:AlternateContent xmlns:mc="http://schemas.openxmlformats.org/markup-compatibility/2006">
+    <mc:Choice xmlns:p14="http://schemas.microsoft.com/office/powerpoint/2010/main" Requires="p14">
+      <p:transition spd="med" p14:dur="700">
+        <p14:cube dir="r"/>
+      </p:transition>
+    </mc:Choice>
+    <mc:Fallback>
+      <p:transition spd="med">
+        <p:push dir="r"/>
+      </p:transition>
+    </mc:Fallback>
+  </mc:AlternateContent>
+</p:sld>
+</file>
+
+<file path=ppt/slides/slide20.xml><?xml version="1.0" encoding="utf-8"?>
+<p:sld xmlns:a="http://schemas.openxmlformats.org/drawingml/2006/main" xmlns:p="http://schemas.openxmlformats.org/presentationml/2006/main" xmlns:r="http://schemas.openxmlformats.org/officeDocument/2006/relationships">
+  <p:cSld>
+    <p:spTree>
+      <p:nvGrpSpPr>
+        <p:cNvPr id="1" name=""/>
+        <p:cNvGrpSpPr/>
+        <p:nvPr/>
+      </p:nvGrpSpPr>
+      <p:grpSpPr/>
+      <p:sp>
+        <p:nvSpPr>
+          <p:cNvPr id="2" name="Rectangle 1"/>
+          <p:cNvSpPr/>
+          <p:nvPr/>
+        </p:nvSpPr>
+        <p:spPr>
+          <a:xfrm>
+            <a:off x="0" y="0"/>
+            <a:ext cx="12191695" cy="6858000"/>
+          </a:xfrm>
+          <a:prstGeom prst="rect">
+            <a:avLst/>
+          </a:prstGeom>
+          <a:solidFill>
+            <a:srgbClr val="FFFFFF"/>
+          </a:solidFill>
+          <a:ln>
+            <a:noFill/>
+          </a:ln>
+          <a:effectLst/>
+        </p:spPr>
+        <p:style>
+          <a:lnRef idx="1">
+            <a:schemeClr val="accent1"/>
+          </a:lnRef>
+          <a:fillRef idx="3">
+            <a:schemeClr val="accent1"/>
+          </a:fillRef>
+          <a:effectRef idx="2">
+            <a:schemeClr val="accent1"/>
+          </a:effectRef>
+          <a:fontRef idx="minor">
+            <a:schemeClr val="lt1"/>
+          </a:fontRef>
+        </p:style>
+        <p:txBody>
+          <a:bodyPr rtlCol="0" anchor="ctr"/>
+          <a:lstStyle/>
+          <a:p>
+            <a:pPr algn="ctr"/>
+          </a:p>
+        </p:txBody>
+      </p:sp>
+      <p:sp>
+        <p:nvSpPr>
+          <p:cNvPr id="3" name="TextBox 2"/>
+          <p:cNvSpPr txBox="1"/>
+          <p:nvPr/>
+        </p:nvSpPr>
+        <p:spPr>
+          <a:xfrm>
+            <a:off x="10607040" y="320040"/>
+            <a:ext cx="1371600" cy="365760"/>
+          </a:xfrm>
+          <a:prstGeom prst="rect">
+            <a:avLst/>
+          </a:prstGeom>
+          <a:noFill/>
+        </p:spPr>
+        <p:txBody>
+          <a:bodyPr wrap="square">
+            <a:spAutoFit/>
+          </a:bodyPr>
+          <a:lstStyle/>
+          <a:p>
+            <a:pPr algn="r"/>
+            <a:r>
+              <a:rPr sz="1000" b="1" i="0">
+                <a:solidFill>
+                  <a:srgbClr val="64748B"/>
+                </a:solidFill>
+                <a:latin typeface="Montserrat"/>
+              </a:rPr>
+              <a:t>020 / 022</a:t>
+            </a:r>
+          </a:p>
+        </p:txBody>
+      </p:sp>
+      <p:sp>
+        <p:nvSpPr>
+          <p:cNvPr id="4" name="TextBox 3"/>
+          <p:cNvSpPr txBox="1"/>
+          <p:nvPr/>
+        </p:nvSpPr>
+        <p:spPr>
+          <a:xfrm>
+            <a:off x="457200" y="6419088"/>
+            <a:ext cx="8229600" cy="365760"/>
+          </a:xfrm>
+          <a:prstGeom prst="rect">
+            <a:avLst/>
+          </a:prstGeom>
+          <a:noFill/>
+        </p:spPr>
+        <p:txBody>
+          <a:bodyPr wrap="square">
+            <a:spAutoFit/>
+          </a:bodyPr>
+          <a:lstStyle/>
+          <a:p>
+            <a:r>
+              <a:rPr sz="900" b="0" i="0">
+                <a:solidFill>
+                  <a:srgbClr val="64748B"/>
+                </a:solidFill>
+                <a:latin typeface="Montserrat"/>
+              </a:rPr>
+              <a:t>Curso Gas B · Tema 01 · Distribución por canalización</a:t>
+            </a:r>
+          </a:p>
+        </p:txBody>
+      </p:sp>
+      <p:sp>
+        <p:nvSpPr>
+          <p:cNvPr id="5" name="TextBox 4"/>
+          <p:cNvSpPr txBox="1"/>
+          <p:nvPr/>
+        </p:nvSpPr>
+        <p:spPr>
+          <a:xfrm>
+            <a:off x="822960" y="457200"/>
+            <a:ext cx="10058400" cy="365760"/>
+          </a:xfrm>
+          <a:prstGeom prst="rect">
+            <a:avLst/>
+          </a:prstGeom>
+          <a:noFill/>
+        </p:spPr>
+        <p:txBody>
+          <a:bodyPr wrap="square">
+            <a:spAutoFit/>
+          </a:bodyPr>
+          <a:lstStyle/>
+          <a:p>
+            <a:r>
+              <a:rPr sz="1300" b="1" i="0">
+                <a:solidFill>
+                  <a:srgbClr val="E8801A"/>
+                </a:solidFill>
+                <a:latin typeface="Montserrat"/>
+              </a:rPr>
+              <a:t>APARTADO 5.2 · QUIÉN LO HACE</a:t>
+            </a:r>
+          </a:p>
+        </p:txBody>
+      </p:sp>
+      <p:sp>
+        <p:nvSpPr>
+          <p:cNvPr id="6" name="TextBox 5"/>
+          <p:cNvSpPr txBox="1"/>
+          <p:nvPr/>
+        </p:nvSpPr>
+        <p:spPr>
+          <a:xfrm>
+            <a:off x="822960" y="868680"/>
+            <a:ext cx="10515600" cy="914400"/>
+          </a:xfrm>
+          <a:prstGeom prst="rect">
+            <a:avLst/>
+          </a:prstGeom>
+          <a:noFill/>
+        </p:spPr>
+        <p:txBody>
+          <a:bodyPr wrap="square">
+            <a:spAutoFit/>
+          </a:bodyPr>
+          <a:lstStyle/>
+          <a:p>
+            <a:r>
+              <a:rPr sz="2800" b="1" i="0">
+                <a:solidFill>
+                  <a:srgbClr val="1E2761"/>
+                </a:solidFill>
+                <a:latin typeface="Montserrat"/>
+              </a:rPr>
+              <a:t>La última barrera</a:t>
+            </a:r>
+          </a:p>
+        </p:txBody>
+      </p:sp>
+      <p:sp>
+        <p:nvSpPr>
+          <p:cNvPr id="7" name="Rectangle 6"/>
+          <p:cNvSpPr/>
+          <p:nvPr/>
+        </p:nvSpPr>
+        <p:spPr>
+          <a:xfrm>
+            <a:off x="868680" y="1627632"/>
+            <a:ext cx="2011680" cy="73152"/>
+          </a:xfrm>
+          <a:prstGeom prst="rect">
+            <a:avLst/>
+          </a:prstGeom>
+          <a:solidFill>
+            <a:srgbClr val="E8801A"/>
+          </a:solidFill>
+          <a:ln>
+            <a:noFill/>
+          </a:ln>
+          <a:effectLst/>
+        </p:spPr>
+        <p:style>
+          <a:lnRef idx="1">
+            <a:schemeClr val="accent1"/>
+          </a:lnRef>
+          <a:fillRef idx="3">
+            <a:schemeClr val="accent1"/>
+          </a:fillRef>
+          <a:effectRef idx="2">
+            <a:schemeClr val="accent1"/>
+          </a:effectRef>
+          <a:fontRef idx="minor">
+            <a:schemeClr val="lt1"/>
+          </a:fontRef>
+        </p:style>
+        <p:txBody>
+          <a:bodyPr rtlCol="0" anchor="ctr"/>
+          <a:lstStyle/>
+          <a:p>
+            <a:pPr algn="ctr"/>
+          </a:p>
+        </p:txBody>
+      </p:sp>
+      <p:sp>
+        <p:nvSpPr>
+          <p:cNvPr id="8" name="TextBox 7"/>
+          <p:cNvSpPr txBox="1"/>
+          <p:nvPr/>
+        </p:nvSpPr>
+        <p:spPr>
+          <a:xfrm>
+            <a:off x="822960" y="1965960"/>
+            <a:ext cx="5029200" cy="4206240"/>
+          </a:xfrm>
+          <a:prstGeom prst="rect">
+            <a:avLst/>
+          </a:prstGeom>
+          <a:noFill/>
+        </p:spPr>
+        <p:txBody>
+          <a:bodyPr wrap="square">
+            <a:spAutoFit/>
+          </a:bodyPr>
+          <a:lstStyle/>
+          <a:p>
+            <a:pPr>
+              <a:spcAft>
+                <a:spcPts val="1100"/>
+              </a:spcAft>
+            </a:pPr>
+            <a:r>
+              <a:rPr sz="1600" b="1" i="0">
+                <a:solidFill>
+                  <a:srgbClr val="E8801A"/>
+                </a:solidFill>
+                <a:latin typeface="Montserrat"/>
+              </a:rPr>
+              <a:t>▸  </a:t>
+            </a:r>
+            <a:r>
+              <a:rPr sz="1600" b="0" i="0">
+                <a:solidFill>
+                  <a:srgbClr val="1B2330"/>
+                </a:solidFill>
+                <a:latin typeface="Montserrat"/>
+              </a:rPr>
+              <a:t>Personal cualificado autorizado</a:t>
+            </a:r>
+          </a:p>
+          <a:p>
+            <a:pPr>
+              <a:spcAft>
+                <a:spcPts val="1100"/>
+              </a:spcAft>
+            </a:pPr>
+            <a:r>
+              <a:rPr sz="1600" b="1" i="0">
+                <a:solidFill>
+                  <a:srgbClr val="E8801A"/>
+                </a:solidFill>
+                <a:latin typeface="Montserrat"/>
+              </a:rPr>
+              <a:t>▸  </a:t>
+            </a:r>
+            <a:r>
+              <a:rPr sz="1600" b="0" i="0">
+                <a:solidFill>
+                  <a:srgbClr val="1B2330"/>
+                </a:solidFill>
+                <a:latin typeface="Montserrat"/>
+              </a:rPr>
+              <a:t>Por el distribuidor o el titular</a:t>
+            </a:r>
+          </a:p>
+          <a:p>
+            <a:pPr>
+              <a:spcAft>
+                <a:spcPts val="1100"/>
+              </a:spcAft>
+            </a:pPr>
+            <a:r>
+              <a:rPr sz="1600" b="1" i="0">
+                <a:solidFill>
+                  <a:srgbClr val="E8801A"/>
+                </a:solidFill>
+                <a:latin typeface="Montserrat"/>
+              </a:rPr>
+              <a:t>▸  </a:t>
+            </a:r>
+            <a:r>
+              <a:rPr sz="1600" b="0" i="0">
+                <a:solidFill>
+                  <a:srgbClr val="1B2330"/>
+                </a:solidFill>
+                <a:latin typeface="Montserrat"/>
+              </a:rPr>
+              <a:t>Con conocimiento del director de obra</a:t>
+            </a:r>
+          </a:p>
+        </p:txBody>
+      </p:sp>
+      <p:sp>
+        <p:nvSpPr>
+          <p:cNvPr id="9" name="imgph" descr="IMGQ:gas technician commissioning pipeline outdoor"/>
+          <p:cNvSpPr/>
+          <p:nvPr/>
+        </p:nvSpPr>
+        <p:spPr>
+          <a:xfrm>
+            <a:off x="6080760" y="1965960"/>
+            <a:ext cx="5303520" cy="4572000"/>
+          </a:xfrm>
+          <a:prstGeom prst="roundRect">
+            <a:avLst/>
+          </a:prstGeom>
+          <a:solidFill>
+            <a:srgbClr val="F3F6FB"/>
+          </a:solidFill>
+          <a:ln w="12700">
+            <a:solidFill>
+              <a:srgbClr val="C7D2E6"/>
+            </a:solidFill>
+          </a:ln>
+          <a:effectLst/>
+        </p:spPr>
+        <p:style>
+          <a:lnRef idx="1">
+            <a:schemeClr val="accent1"/>
+          </a:lnRef>
+          <a:fillRef idx="3">
+            <a:schemeClr val="accent1"/>
+          </a:fillRef>
+          <a:effectRef idx="2">
+            <a:schemeClr val="accent1"/>
+          </a:effectRef>
+          <a:fontRef idx="minor">
+            <a:schemeClr val="lt1"/>
+          </a:fontRef>
+        </p:style>
+        <p:txBody>
+          <a:bodyPr rtlCol="0" anchor="ctr"/>
+          <a:lstStyle/>
+          <a:p>
+            <a:pPr algn="ctr"/>
+          </a:p>
+        </p:txBody>
+      </p:sp>
+      <p:sp>
+        <p:nvSpPr>
+          <p:cNvPr id="10" name="TextBox 9"/>
+          <p:cNvSpPr txBox="1"/>
+          <p:nvPr/>
+        </p:nvSpPr>
+        <p:spPr>
+          <a:xfrm>
+            <a:off x="6355080" y="3611880"/>
+            <a:ext cx="4754880" cy="1280160"/>
+          </a:xfrm>
+          <a:prstGeom prst="rect">
+            <a:avLst/>
+          </a:prstGeom>
+          <a:noFill/>
+        </p:spPr>
+        <p:txBody>
+          <a:bodyPr wrap="square">
+            <a:spAutoFit/>
+          </a:bodyPr>
+          <a:lstStyle/>
+          <a:p>
+            <a:pPr algn="ctr"/>
+            <a:r>
+              <a:rPr sz="1400" b="1" i="0">
+                <a:solidFill>
+                  <a:srgbClr val="64748B"/>
+                </a:solidFill>
+                <a:latin typeface="Montserrat"/>
+              </a:rPr>
+              <a:t>IMAGEN</a:t>
+            </a:r>
+          </a:p>
+          <a:p>
+            <a:pPr algn="ctr"/>
+            <a:r>
+              <a:rPr sz="1100" b="0" i="1">
+                <a:solidFill>
+                  <a:srgbClr val="64748B"/>
+                </a:solidFill>
+                <a:latin typeface="Montserrat"/>
+              </a:rPr>
+              <a:t>gas technician commissioning pipeline outdoor</a:t>
+            </a:r>
+          </a:p>
+        </p:txBody>
+      </p:sp>
+    </p:spTree>
+  </p:cSld>
+  <p:clrMapOvr>
+    <a:masterClrMapping/>
+  </p:clrMapOvr>
+  <mc:AlternateContent xmlns:mc="http://schemas.openxmlformats.org/markup-compatibility/2006">
+    <mc:Choice xmlns:p14="http://schemas.microsoft.com/office/powerpoint/2010/main" Requires="p14">
+      <p:transition spd="med" p14:dur="700">
+        <p14:cube dir="r"/>
+      </p:transition>
+    </mc:Choice>
+    <mc:Fallback>
+      <p:transition spd="med">
+        <p:push dir="r"/>
+      </p:transition>
+    </mc:Fallback>
+  </mc:AlternateContent>
+</p:sld>
+</file>
+
+<file path=ppt/slides/slide21.xml><?xml version="1.0" encoding="utf-8"?>
+<p:sld xmlns:a="http://schemas.openxmlformats.org/drawingml/2006/main" xmlns:p="http://schemas.openxmlformats.org/presentationml/2006/main" xmlns:r="http://schemas.openxmlformats.org/officeDocument/2006/relationships">
+  <p:cSld>
+    <p:spTree>
+      <p:nvGrpSpPr>
+        <p:cNvPr id="1" name=""/>
+        <p:cNvGrpSpPr/>
+        <p:nvPr/>
+      </p:nvGrpSpPr>
+      <p:grpSpPr/>
+      <p:sp>
+        <p:nvSpPr>
+          <p:cNvPr id="2" name="Rectangle 1"/>
+          <p:cNvSpPr/>
+          <p:nvPr/>
+        </p:nvSpPr>
+        <p:spPr>
+          <a:xfrm>
+            <a:off x="0" y="0"/>
+            <a:ext cx="12191695" cy="6858000"/>
+          </a:xfrm>
+          <a:prstGeom prst="rect">
+            <a:avLst/>
+          </a:prstGeom>
+          <a:solidFill>
+            <a:srgbClr val="FFFFFF"/>
+          </a:solidFill>
+          <a:ln>
+            <a:noFill/>
+          </a:ln>
+          <a:effectLst/>
+        </p:spPr>
+        <p:style>
+          <a:lnRef idx="1">
+            <a:schemeClr val="accent1"/>
+          </a:lnRef>
+          <a:fillRef idx="3">
+            <a:schemeClr val="accent1"/>
+          </a:fillRef>
+          <a:effectRef idx="2">
+            <a:schemeClr val="accent1"/>
+          </a:effectRef>
+          <a:fontRef idx="minor">
+            <a:schemeClr val="lt1"/>
+          </a:fontRef>
+        </p:style>
+        <p:txBody>
+          <a:bodyPr rtlCol="0" anchor="ctr"/>
+          <a:lstStyle/>
+          <a:p>
+            <a:pPr algn="ctr"/>
+          </a:p>
+        </p:txBody>
+      </p:sp>
+      <p:sp>
+        <p:nvSpPr>
+          <p:cNvPr id="3" name="TextBox 2"/>
+          <p:cNvSpPr txBox="1"/>
+          <p:nvPr/>
+        </p:nvSpPr>
+        <p:spPr>
+          <a:xfrm>
+            <a:off x="10607040" y="320040"/>
+            <a:ext cx="1371600" cy="365760"/>
+          </a:xfrm>
+          <a:prstGeom prst="rect">
+            <a:avLst/>
+          </a:prstGeom>
+          <a:noFill/>
+        </p:spPr>
+        <p:txBody>
+          <a:bodyPr wrap="square">
+            <a:spAutoFit/>
+          </a:bodyPr>
+          <a:lstStyle/>
+          <a:p>
+            <a:pPr algn="r"/>
+            <a:r>
+              <a:rPr sz="1000" b="1" i="0">
+                <a:solidFill>
+                  <a:srgbClr val="64748B"/>
+                </a:solidFill>
+                <a:latin typeface="Montserrat"/>
+              </a:rPr>
+              <a:t>021 / 022</a:t>
+            </a:r>
+          </a:p>
+        </p:txBody>
+      </p:sp>
+      <p:sp>
+        <p:nvSpPr>
+          <p:cNvPr id="4" name="TextBox 3"/>
+          <p:cNvSpPr txBox="1"/>
+          <p:nvPr/>
+        </p:nvSpPr>
+        <p:spPr>
+          <a:xfrm>
+            <a:off x="457200" y="6419088"/>
+            <a:ext cx="8229600" cy="365760"/>
+          </a:xfrm>
+          <a:prstGeom prst="rect">
+            <a:avLst/>
+          </a:prstGeom>
+          <a:noFill/>
+        </p:spPr>
+        <p:txBody>
+          <a:bodyPr wrap="square">
+            <a:spAutoFit/>
+          </a:bodyPr>
+          <a:lstStyle/>
+          <a:p>
+            <a:r>
+              <a:rPr sz="900" b="0" i="0">
+                <a:solidFill>
+                  <a:srgbClr val="64748B"/>
+                </a:solidFill>
+                <a:latin typeface="Montserrat"/>
+              </a:rPr>
+              <a:t>Curso Gas B · Tema 01 · Distribución por canalización</a:t>
+            </a:r>
+          </a:p>
+        </p:txBody>
+      </p:sp>
+      <p:sp>
+        <p:nvSpPr>
+          <p:cNvPr id="5" name="TextBox 4"/>
+          <p:cNvSpPr txBox="1"/>
+          <p:nvPr/>
+        </p:nvSpPr>
+        <p:spPr>
+          <a:xfrm>
+            <a:off x="822960" y="457200"/>
+            <a:ext cx="10058400" cy="365760"/>
+          </a:xfrm>
+          <a:prstGeom prst="rect">
+            <a:avLst/>
+          </a:prstGeom>
+          <a:noFill/>
+        </p:spPr>
+        <p:txBody>
+          <a:bodyPr wrap="square">
+            <a:spAutoFit/>
+          </a:bodyPr>
+          <a:lstStyle/>
+          <a:p>
+            <a:r>
+              <a:rPr sz="1300" b="1" i="0">
+                <a:solidFill>
+                  <a:srgbClr val="E8801A"/>
+                </a:solidFill>
+                <a:latin typeface="Montserrat"/>
+              </a:rPr>
+              <a:t>REPASO RELÁMPAGO</a:t>
+            </a:r>
+          </a:p>
+        </p:txBody>
+      </p:sp>
+      <p:sp>
+        <p:nvSpPr>
+          <p:cNvPr id="6" name="TextBox 5"/>
+          <p:cNvSpPr txBox="1"/>
+          <p:nvPr/>
+        </p:nvSpPr>
+        <p:spPr>
+          <a:xfrm>
+            <a:off x="822960" y="868680"/>
+            <a:ext cx="10515600" cy="914400"/>
+          </a:xfrm>
+          <a:prstGeom prst="rect">
+            <a:avLst/>
+          </a:prstGeom>
+          <a:noFill/>
+        </p:spPr>
+        <p:txBody>
+          <a:bodyPr wrap="square">
+            <a:spAutoFit/>
+          </a:bodyPr>
+          <a:lstStyle/>
+          <a:p>
+            <a:r>
+              <a:rPr sz="2800" b="1" i="0">
+                <a:solidFill>
+                  <a:srgbClr val="1E2761"/>
+                </a:solidFill>
+                <a:latin typeface="Montserrat"/>
+              </a:rPr>
+              <a:t>Lo que no se te puede olvidar</a:t>
+            </a:r>
+          </a:p>
+        </p:txBody>
+      </p:sp>
+      <p:sp>
+        <p:nvSpPr>
+          <p:cNvPr id="7" name="Rectangle 6"/>
+          <p:cNvSpPr/>
+          <p:nvPr/>
+        </p:nvSpPr>
+        <p:spPr>
+          <a:xfrm>
+            <a:off x="868680" y="1627632"/>
+            <a:ext cx="2011680" cy="73152"/>
+          </a:xfrm>
+          <a:prstGeom prst="rect">
+            <a:avLst/>
+          </a:prstGeom>
+          <a:solidFill>
+            <a:srgbClr val="E8801A"/>
+          </a:solidFill>
+          <a:ln>
+            <a:noFill/>
+          </a:ln>
+          <a:effectLst/>
+        </p:spPr>
+        <p:style>
+          <a:lnRef idx="1">
+            <a:schemeClr val="accent1"/>
+          </a:lnRef>
+          <a:fillRef idx="3">
+            <a:schemeClr val="accent1"/>
+          </a:fillRef>
+          <a:effectRef idx="2">
+            <a:schemeClr val="accent1"/>
+          </a:effectRef>
+          <a:fontRef idx="minor">
+            <a:schemeClr val="lt1"/>
+          </a:fontRef>
+        </p:style>
+        <p:txBody>
+          <a:bodyPr rtlCol="0" anchor="ctr"/>
+          <a:lstStyle/>
+          <a:p>
+            <a:pPr algn="ctr"/>
+          </a:p>
+        </p:txBody>
+      </p:sp>
+      <p:sp>
+        <p:nvSpPr>
+          <p:cNvPr id="8" name="TextBox 7"/>
+          <p:cNvSpPr txBox="1"/>
+          <p:nvPr/>
+        </p:nvSpPr>
+        <p:spPr>
+          <a:xfrm>
+            <a:off x="6355080" y="1965960"/>
+            <a:ext cx="5029200" cy="4206240"/>
+          </a:xfrm>
+          <a:prstGeom prst="rect">
+            <a:avLst/>
+          </a:prstGeom>
+          <a:noFill/>
+        </p:spPr>
+        <p:txBody>
+          <a:bodyPr wrap="square">
+            <a:spAutoFit/>
+          </a:bodyPr>
+          <a:lstStyle/>
+          <a:p>
+            <a:pPr>
+              <a:spcAft>
+                <a:spcPts val="1100"/>
+              </a:spcAft>
+            </a:pPr>
+            <a:r>
+              <a:rPr sz="1600" b="1" i="0">
+                <a:solidFill>
+                  <a:srgbClr val="E8801A"/>
+                </a:solidFill>
+                <a:latin typeface="Montserrat"/>
+              </a:rPr>
+              <a:t>▸  </a:t>
+            </a:r>
+            <a:r>
+              <a:rPr sz="1600" b="0" i="0">
+                <a:solidFill>
+                  <a:srgbClr val="1B2330"/>
+                </a:solidFill>
+                <a:latin typeface="Montserrat"/>
+              </a:rPr>
+              <a:t>Manda en la red de la calle, no la tuya</a:t>
+            </a:r>
+          </a:p>
+          <a:p>
+            <a:pPr>
+              <a:spcAft>
+                <a:spcPts val="1100"/>
+              </a:spcAft>
+            </a:pPr>
+            <a:r>
+              <a:rPr sz="1600" b="1" i="0">
+                <a:solidFill>
+                  <a:srgbClr val="E8801A"/>
+                </a:solidFill>
+                <a:latin typeface="Montserrat"/>
+              </a:rPr>
+              <a:t>▸  </a:t>
+            </a:r>
+            <a:r>
+              <a:rPr sz="1600" b="0" i="0">
+                <a:solidFill>
+                  <a:srgbClr val="1B2330"/>
+                </a:solidFill>
+                <a:latin typeface="Montserrat"/>
+              </a:rPr>
+              <a:t>Autoriza la CA · entrega primer trimestre</a:t>
+            </a:r>
+          </a:p>
+          <a:p>
+            <a:pPr>
+              <a:spcAft>
+                <a:spcPts val="1100"/>
+              </a:spcAft>
+            </a:pPr>
+            <a:r>
+              <a:rPr sz="1600" b="1" i="0">
+                <a:solidFill>
+                  <a:srgbClr val="E8801A"/>
+                </a:solidFill>
+                <a:latin typeface="Montserrat"/>
+              </a:rPr>
+              <a:t>▸  </a:t>
+            </a:r>
+            <a:r>
+              <a:rPr sz="1600" b="0" i="0">
+                <a:solidFill>
+                  <a:srgbClr val="1B2330"/>
+                </a:solidFill>
+                <a:latin typeface="Montserrat"/>
+              </a:rPr>
+              <a:t>Sin pruebas superadas, no hay gas</a:t>
+            </a:r>
+          </a:p>
+          <a:p>
+            <a:pPr>
+              <a:spcAft>
+                <a:spcPts val="1100"/>
+              </a:spcAft>
+            </a:pPr>
+            <a:r>
+              <a:rPr sz="1600" b="1" i="0">
+                <a:solidFill>
+                  <a:srgbClr val="E8801A"/>
+                </a:solidFill>
+                <a:latin typeface="Montserrat"/>
+              </a:rPr>
+              <a:t>▸  </a:t>
+            </a:r>
+            <a:r>
+              <a:rPr sz="1600" b="0" i="0">
+                <a:solidFill>
+                  <a:srgbClr val="1B2330"/>
+                </a:solidFill>
+                <a:latin typeface="Montserrat"/>
+              </a:rPr>
+              <a:t>El peligro es la mezcla aire-gas</a:t>
+            </a:r>
+          </a:p>
+        </p:txBody>
+      </p:sp>
+      <p:sp>
+        <p:nvSpPr>
+          <p:cNvPr id="9" name="imgph" descr="IMGQ:gas meter cabinet street wall building"/>
+          <p:cNvSpPr/>
+          <p:nvPr/>
+        </p:nvSpPr>
+        <p:spPr>
+          <a:xfrm>
+            <a:off x="822960" y="1965960"/>
+            <a:ext cx="5303520" cy="4572000"/>
+          </a:xfrm>
+          <a:prstGeom prst="roundRect">
+            <a:avLst/>
+          </a:prstGeom>
+          <a:solidFill>
+            <a:srgbClr val="F3F6FB"/>
+          </a:solidFill>
+          <a:ln w="12700">
+            <a:solidFill>
+              <a:srgbClr val="C7D2E6"/>
+            </a:solidFill>
+          </a:ln>
+          <a:effectLst/>
+        </p:spPr>
+        <p:style>
+          <a:lnRef idx="1">
+            <a:schemeClr val="accent1"/>
+          </a:lnRef>
+          <a:fillRef idx="3">
+            <a:schemeClr val="accent1"/>
+          </a:fillRef>
+          <a:effectRef idx="2">
+            <a:schemeClr val="accent1"/>
+          </a:effectRef>
+          <a:fontRef idx="minor">
+            <a:schemeClr val="lt1"/>
+          </a:fontRef>
+        </p:style>
+        <p:txBody>
+          <a:bodyPr rtlCol="0" anchor="ctr"/>
+          <a:lstStyle/>
+          <a:p>
+            <a:pPr algn="ctr"/>
+          </a:p>
+        </p:txBody>
+      </p:sp>
+      <p:sp>
+        <p:nvSpPr>
+          <p:cNvPr id="10" name="TextBox 9"/>
+          <p:cNvSpPr txBox="1"/>
+          <p:nvPr/>
+        </p:nvSpPr>
+        <p:spPr>
+          <a:xfrm>
+            <a:off x="1097280" y="3611880"/>
+            <a:ext cx="4754880" cy="1280160"/>
+          </a:xfrm>
+          <a:prstGeom prst="rect">
+            <a:avLst/>
+          </a:prstGeom>
+          <a:noFill/>
+        </p:spPr>
+        <p:txBody>
+          <a:bodyPr wrap="square">
+            <a:spAutoFit/>
+          </a:bodyPr>
+          <a:lstStyle/>
+          <a:p>
+            <a:pPr algn="ctr"/>
+            <a:r>
+              <a:rPr sz="1400" b="1" i="0">
+                <a:solidFill>
+                  <a:srgbClr val="64748B"/>
+                </a:solidFill>
+                <a:latin typeface="Montserrat"/>
+              </a:rPr>
+              <a:t>IMAGEN</a:t>
+            </a:r>
+          </a:p>
+          <a:p>
+            <a:pPr algn="ctr"/>
+            <a:r>
+              <a:rPr sz="1100" b="0" i="1">
+                <a:solidFill>
+                  <a:srgbClr val="64748B"/>
+                </a:solidFill>
+                <a:latin typeface="Montserrat"/>
+              </a:rPr>
+              <a:t>gas meter cabinet street wall building</a:t>
+            </a:r>
+          </a:p>
+        </p:txBody>
+      </p:sp>
+    </p:spTree>
+  </p:cSld>
+  <p:clrMapOvr>
+    <a:masterClrMapping/>
+  </p:clrMapOvr>
+  <mc:AlternateContent xmlns:mc="http://schemas.openxmlformats.org/markup-compatibility/2006">
+    <mc:Choice xmlns:p14="http://schemas.microsoft.com/office/powerpoint/2010/main" Requires="p14">
+      <p:transition spd="med" p14:dur="700">
+        <p14:cube dir="l"/>
+      </p:transition>
+    </mc:Choice>
+    <mc:Fallback>
+      <p:transition spd="med">
+        <p:push dir="l"/>
+      </p:transition>
+    </mc:Fallback>
+  </mc:AlternateContent>
+</p:sld>
+</file>
+
+<file path=ppt/slides/slide22.xml><?xml version="1.0" encoding="utf-8"?>
+<p:sld xmlns:a="http://schemas.openxmlformats.org/drawingml/2006/main" xmlns:p="http://schemas.openxmlformats.org/presentationml/2006/main" xmlns:r="http://schemas.openxmlformats.org/officeDocument/2006/relationships">
+  <p:cSld>
+    <p:spTree>
+      <p:nvGrpSpPr>
+        <p:cNvPr id="1" name=""/>
+        <p:cNvGrpSpPr/>
+        <p:nvPr/>
+      </p:nvGrpSpPr>
+      <p:grpSpPr/>
+      <p:sp>
+        <p:nvSpPr>
+          <p:cNvPr id="2" name="Rectangle 1"/>
+          <p:cNvSpPr/>
+          <p:nvPr/>
+        </p:nvSpPr>
+        <p:spPr>
+          <a:xfrm>
+            <a:off x="0" y="0"/>
+            <a:ext cx="12191695" cy="6858000"/>
+          </a:xfrm>
+          <a:prstGeom prst="rect">
+            <a:avLst/>
+          </a:prstGeom>
+          <a:solidFill>
+            <a:srgbClr val="1E2761"/>
+          </a:solidFill>
+          <a:ln>
+            <a:noFill/>
+          </a:ln>
+          <a:effectLst/>
+        </p:spPr>
+        <p:style>
+          <a:lnRef idx="1">
+            <a:schemeClr val="accent1"/>
+          </a:lnRef>
+          <a:fillRef idx="3">
+            <a:schemeClr val="accent1"/>
+          </a:fillRef>
+          <a:effectRef idx="2">
+            <a:schemeClr val="accent1"/>
+          </a:effectRef>
+          <a:fontRef idx="minor">
+            <a:schemeClr val="lt1"/>
+          </a:fontRef>
+        </p:style>
+        <p:txBody>
+          <a:bodyPr rtlCol="0" anchor="ctr"/>
+          <a:lstStyle/>
+          <a:p>
+            <a:pPr algn="ctr"/>
+          </a:p>
+        </p:txBody>
+      </p:sp>
+      <p:sp>
+        <p:nvSpPr>
+          <p:cNvPr id="3" name="TextBox 2"/>
+          <p:cNvSpPr txBox="1"/>
+          <p:nvPr/>
+        </p:nvSpPr>
+        <p:spPr>
+          <a:xfrm>
+            <a:off x="822960" y="640080"/>
+            <a:ext cx="10515600" cy="457200"/>
+          </a:xfrm>
+          <a:prstGeom prst="rect">
+            <a:avLst/>
+          </a:prstGeom>
+          <a:noFill/>
+        </p:spPr>
+        <p:txBody>
+          <a:bodyPr wrap="square">
+            <a:spAutoFit/>
+          </a:bodyPr>
+          <a:lstStyle/>
+          <a:p>
+            <a:r>
+              <a:rPr sz="1400" b="1" i="0">
+                <a:solidFill>
+                  <a:srgbClr val="F4A24C"/>
+                </a:solidFill>
+                <a:latin typeface="Montserrat"/>
+              </a:rPr>
+              <a:t>LO QUE YA DOMINAS</a:t>
+            </a:r>
+          </a:p>
+        </p:txBody>
+      </p:sp>
+      <p:sp>
+        <p:nvSpPr>
+          <p:cNvPr id="4" name="Rectangle 3"/>
+          <p:cNvSpPr/>
+          <p:nvPr/>
+        </p:nvSpPr>
+        <p:spPr>
+          <a:xfrm>
+            <a:off x="868680" y="1051560"/>
+            <a:ext cx="1463040" cy="82296"/>
+          </a:xfrm>
+          <a:prstGeom prst="rect">
+            <a:avLst/>
+          </a:prstGeom>
+          <a:solidFill>
+            <a:srgbClr val="E8801A"/>
+          </a:solidFill>
+          <a:ln>
+            <a:noFill/>
+          </a:ln>
+          <a:effectLst/>
+        </p:spPr>
+        <p:style>
+          <a:lnRef idx="1">
+            <a:schemeClr val="accent1"/>
+          </a:lnRef>
+          <a:fillRef idx="3">
+            <a:schemeClr val="accent1"/>
+          </a:fillRef>
+          <a:effectRef idx="2">
+            <a:schemeClr val="accent1"/>
+          </a:effectRef>
+          <a:fontRef idx="minor">
+            <a:schemeClr val="lt1"/>
+          </a:fontRef>
+        </p:style>
+        <p:txBody>
+          <a:bodyPr rtlCol="0" anchor="ctr"/>
+          <a:lstStyle/>
+          <a:p>
+            <a:pPr algn="ctr"/>
+          </a:p>
+        </p:txBody>
+      </p:sp>
+      <p:sp>
+        <p:nvSpPr>
+          <p:cNvPr id="5" name="TextBox 4"/>
+          <p:cNvSpPr txBox="1"/>
+          <p:nvPr/>
+        </p:nvSpPr>
+        <p:spPr>
+          <a:xfrm>
+            <a:off x="822960" y="1234440"/>
+            <a:ext cx="10515600" cy="1097280"/>
+          </a:xfrm>
+          <a:prstGeom prst="rect">
+            <a:avLst/>
+          </a:prstGeom>
+          <a:noFill/>
+        </p:spPr>
+        <p:txBody>
+          <a:bodyPr wrap="square">
+            <a:spAutoFit/>
+          </a:bodyPr>
+          <a:lstStyle/>
+          <a:p>
+            <a:r>
+              <a:rPr sz="3400" b="1" i="0">
+                <a:solidFill>
+                  <a:srgbClr val="FFFFFF"/>
+                </a:solidFill>
+                <a:latin typeface="Montserrat"/>
+              </a:rPr>
+              <a:t>Controlas la red desde el papel hasta el gas</a:t>
+            </a:r>
+          </a:p>
+        </p:txBody>
+      </p:sp>
+      <p:sp>
+        <p:nvSpPr>
+          <p:cNvPr id="6" name="TextBox 5"/>
+          <p:cNvSpPr txBox="1"/>
+          <p:nvPr/>
+        </p:nvSpPr>
+        <p:spPr>
+          <a:xfrm>
+            <a:off x="822960" y="2606040"/>
+            <a:ext cx="10515600" cy="2743200"/>
+          </a:xfrm>
+          <a:prstGeom prst="rect">
+            <a:avLst/>
+          </a:prstGeom>
+          <a:noFill/>
+        </p:spPr>
+        <p:txBody>
+          <a:bodyPr wrap="square">
+            <a:spAutoFit/>
+          </a:bodyPr>
+          <a:lstStyle/>
+          <a:p>
+            <a:pPr>
+              <a:spcAft>
+                <a:spcPts val="1200"/>
+              </a:spcAft>
+            </a:pPr>
+            <a:r>
+              <a:rPr sz="2000" b="1" i="0">
+                <a:solidFill>
+                  <a:srgbClr val="F4A24C"/>
+                </a:solidFill>
+                <a:latin typeface="Montserrat"/>
+              </a:rPr>
+              <a:t>✓  </a:t>
+            </a:r>
+            <a:r>
+              <a:rPr sz="1900" b="0" i="0">
+                <a:solidFill>
+                  <a:srgbClr val="FFFFFF"/>
+                </a:solidFill>
+                <a:latin typeface="Montserrat"/>
+              </a:rPr>
+              <a:t>Separas la red de la calle de tu receptora</a:t>
+            </a:r>
+          </a:p>
+          <a:p>
+            <a:pPr>
+              <a:spcAft>
+                <a:spcPts val="1200"/>
+              </a:spcAft>
+            </a:pPr>
+            <a:r>
+              <a:rPr sz="2000" b="1" i="0">
+                <a:solidFill>
+                  <a:srgbClr val="F4A24C"/>
+                </a:solidFill>
+                <a:latin typeface="Montserrat"/>
+              </a:rPr>
+              <a:t>✓  </a:t>
+            </a:r>
+            <a:r>
+              <a:rPr sz="1900" b="0" i="0">
+                <a:solidFill>
+                  <a:srgbClr val="FFFFFF"/>
+                </a:solidFill>
+                <a:latin typeface="Montserrat"/>
+              </a:rPr>
+              <a:t>Sabes quién autoriza y cuándo: la CA y el primer trimestre</a:t>
+            </a:r>
+          </a:p>
+          <a:p>
+            <a:pPr>
+              <a:spcAft>
+                <a:spcPts val="1200"/>
+              </a:spcAft>
+            </a:pPr>
+            <a:r>
+              <a:rPr sz="2000" b="1" i="0">
+                <a:solidFill>
+                  <a:srgbClr val="F4A24C"/>
+                </a:solidFill>
+                <a:latin typeface="Montserrat"/>
+              </a:rPr>
+              <a:t>✓  </a:t>
+            </a:r>
+            <a:r>
+              <a:rPr sz="1900" b="0" i="0">
+                <a:solidFill>
+                  <a:srgbClr val="FFFFFF"/>
+                </a:solidFill>
+                <a:latin typeface="Montserrat"/>
+              </a:rPr>
+              <a:t>Tienes grabado: sin pruebas superadas, no hay gas</a:t>
+            </a:r>
+          </a:p>
+          <a:p>
+            <a:pPr>
+              <a:spcAft>
+                <a:spcPts val="1200"/>
+              </a:spcAft>
+            </a:pPr>
+            <a:r>
+              <a:rPr sz="2000" b="1" i="0">
+                <a:solidFill>
+                  <a:srgbClr val="F4A24C"/>
+                </a:solidFill>
+                <a:latin typeface="Montserrat"/>
+              </a:rPr>
+              <a:t>✓  </a:t>
+            </a:r>
+            <a:r>
+              <a:rPr sz="1900" b="0" i="0">
+                <a:solidFill>
+                  <a:srgbClr val="FFFFFF"/>
+                </a:solidFill>
+                <a:latin typeface="Montserrat"/>
+              </a:rPr>
+              <a:t>El peligro no es el gas solo, es la mezcla aire-gas</a:t>
+            </a:r>
+          </a:p>
+        </p:txBody>
+      </p:sp>
+      <p:sp>
+        <p:nvSpPr>
+          <p:cNvPr id="7" name="Rounded Rectangle 6"/>
+          <p:cNvSpPr/>
+          <p:nvPr/>
+        </p:nvSpPr>
+        <p:spPr>
+          <a:xfrm>
+            <a:off x="822960" y="5532120"/>
+            <a:ext cx="10515600" cy="822960"/>
+          </a:xfrm>
+          <a:prstGeom prst="roundRect">
+            <a:avLst/>
+          </a:prstGeom>
+          <a:solidFill>
+            <a:srgbClr val="E8801A"/>
+          </a:solidFill>
+          <a:ln>
+            <a:noFill/>
+          </a:ln>
+          <a:effectLst/>
+        </p:spPr>
+        <p:style>
+          <a:lnRef idx="1">
+            <a:schemeClr val="accent1"/>
+          </a:lnRef>
+          <a:fillRef idx="3">
+            <a:schemeClr val="accent1"/>
+          </a:fillRef>
+          <a:effectRef idx="2">
+            <a:schemeClr val="accent1"/>
+          </a:effectRef>
+          <a:fontRef idx="minor">
+            <a:schemeClr val="lt1"/>
+          </a:fontRef>
+        </p:style>
+        <p:txBody>
+          <a:bodyPr rtlCol="0" anchor="ctr"/>
+          <a:lstStyle/>
+          <a:p>
+            <a:pPr algn="ctr"/>
+          </a:p>
+        </p:txBody>
+      </p:sp>
+      <p:sp>
+        <p:nvSpPr>
+          <p:cNvPr id="8" name="TextBox 7"/>
+          <p:cNvSpPr txBox="1"/>
+          <p:nvPr/>
+        </p:nvSpPr>
+        <p:spPr>
+          <a:xfrm>
+            <a:off x="1051560" y="5623560"/>
+            <a:ext cx="10058400" cy="640080"/>
+          </a:xfrm>
+          <a:prstGeom prst="rect">
+            <a:avLst/>
+          </a:prstGeom>
+          <a:noFill/>
+        </p:spPr>
+        <p:txBody>
+          <a:bodyPr wrap="square">
+            <a:spAutoFit/>
+          </a:bodyPr>
+          <a:lstStyle/>
+          <a:p>
+            <a:r>
+              <a:rPr sz="1500" b="1" i="1">
+                <a:solidFill>
+                  <a:srgbClr val="1E2761"/>
+                </a:solidFill>
+                <a:latin typeface="Montserrat"/>
+              </a:rPr>
+              <a:t>Hoy ya sabes por dónde entra el gas al barrio. En el siguiente vídeo la mantenemos viva.</a:t>
+            </a:r>
+          </a:p>
+        </p:txBody>
+      </p:sp>
+    </p:spTree>
+  </p:cSld>
+  <p:clrMapOvr>
+    <a:masterClrMapping/>
+  </p:clrMapOvr>
+  <mc:AlternateContent xmlns:mc="http://schemas.openxmlformats.org/markup-compatibility/2006">
+    <mc:Choice xmlns:p14="http://schemas.microsoft.com/office/powerpoint/2010/main" Requires="p14">
+      <p:transition spd="med" p14:dur="700">
+        <p14:cube dir="r"/>
+      </p:transition>
+    </mc:Choice>
+    <mc:Fallback>
+      <p:transition spd="med">
+        <p:push dir="r"/>
+      </p:transition>
+    </mc:Fallback>
+  </mc:AlternateContent>
 </p:sld>
 </file>
 
@@ -8558,7 +12702,7 @@
                 </a:solidFill>
                 <a:latin typeface="Montserrat"/>
               </a:rPr>
-              <a:t>003 / 016</a:t>
+              <a:t>003 / 022</a:t>
             </a:r>
           </a:p>
         </p:txBody>
@@ -8667,7 +12811,7 @@
       </p:sp>
       <p:sp>
         <p:nvSpPr>
-          <p:cNvPr id="7" name="Rounded Rectangle 6"/>
+          <p:cNvPr id="7" name="Rectangle 6"/>
           <p:cNvSpPr/>
           <p:nvPr/>
         </p:nvSpPr>
@@ -8676,7 +12820,7 @@
             <a:off x="868680" y="1673352"/>
             <a:ext cx="2011680" cy="73152"/>
           </a:xfrm>
-          <a:prstGeom prst="roundRect">
+          <a:prstGeom prst="rect">
             <a:avLst/>
           </a:prstGeom>
           <a:solidFill>
@@ -8912,6 +13056,18 @@
   <p:clrMapOvr>
     <a:masterClrMapping/>
   </p:clrMapOvr>
+  <mc:AlternateContent xmlns:mc="http://schemas.openxmlformats.org/markup-compatibility/2006">
+    <mc:Choice xmlns:p14="http://schemas.microsoft.com/office/powerpoint/2010/main" Requires="p14">
+      <p:transition spd="med" p14:dur="700">
+        <p14:cube dir="l"/>
+      </p:transition>
+    </mc:Choice>
+    <mc:Fallback>
+      <p:transition spd="med">
+        <p:push dir="l"/>
+      </p:transition>
+    </mc:Fallback>
+  </mc:AlternateContent>
 </p:sld>
 </file>
 
@@ -8999,7 +13155,7 @@
                 </a:solidFill>
                 <a:latin typeface="Montserrat"/>
               </a:rPr>
-              <a:t>004 / 016</a:t>
+              <a:t>004 / 022</a:t>
             </a:r>
           </a:p>
         </p:txBody>
@@ -9108,7 +13264,7 @@
       </p:sp>
       <p:sp>
         <p:nvSpPr>
-          <p:cNvPr id="7" name="Rounded Rectangle 6"/>
+          <p:cNvPr id="7" name="Rectangle 6"/>
           <p:cNvSpPr/>
           <p:nvPr/>
         </p:nvSpPr>
@@ -9117,7 +13273,7 @@
             <a:off x="868680" y="1627632"/>
             <a:ext cx="2011680" cy="73152"/>
           </a:xfrm>
-          <a:prstGeom prst="roundRect">
+          <a:prstGeom prst="rect">
             <a:avLst/>
           </a:prstGeom>
           <a:solidFill>
@@ -9159,7 +13315,7 @@
         <p:spPr>
           <a:xfrm>
             <a:off x="822960" y="1965960"/>
-            <a:ext cx="4983480" cy="4206240"/>
+            <a:ext cx="5029200" cy="4206240"/>
           </a:xfrm>
           <a:prstGeom prst="rect">
             <a:avLst/>
@@ -9281,8 +13437,8 @@
         </p:nvSpPr>
         <p:spPr>
           <a:xfrm>
-            <a:off x="5806440" y="1051560"/>
-            <a:ext cx="5298947" cy="4629150"/>
+            <a:off x="6080760" y="1965960"/>
+            <a:ext cx="5303520" cy="4572000"/>
           </a:xfrm>
           <a:prstGeom prst="roundRect">
             <a:avLst/>
@@ -9327,8 +13483,8 @@
         </p:nvSpPr>
         <p:spPr>
           <a:xfrm>
-            <a:off x="6080760" y="2726055"/>
-            <a:ext cx="4750307" cy="1280160"/>
+            <a:off x="6355080" y="3611880"/>
+            <a:ext cx="4754880" cy="1280160"/>
           </a:xfrm>
           <a:prstGeom prst="rect">
             <a:avLst/>
@@ -9349,7 +13505,7 @@
                 </a:solidFill>
                 <a:latin typeface="Montserrat"/>
               </a:rPr>
-              <a:t>IMAGEN REALISTA</a:t>
+              <a:t>IMAGEN</a:t>
             </a:r>
           </a:p>
           <a:p>
@@ -9371,6 +13527,18 @@
   <p:clrMapOvr>
     <a:masterClrMapping/>
   </p:clrMapOvr>
+  <mc:AlternateContent xmlns:mc="http://schemas.openxmlformats.org/markup-compatibility/2006">
+    <mc:Choice xmlns:p14="http://schemas.microsoft.com/office/powerpoint/2010/main" Requires="p14">
+      <p:transition spd="med" p14:dur="700">
+        <p14:cube dir="r"/>
+      </p:transition>
+    </mc:Choice>
+    <mc:Fallback>
+      <p:transition spd="med">
+        <p:push dir="r"/>
+      </p:transition>
+    </mc:Fallback>
+  </mc:AlternateContent>
 </p:sld>
 </file>
 
@@ -9458,7 +13626,7 @@
                 </a:solidFill>
                 <a:latin typeface="Montserrat"/>
               </a:rPr>
-              <a:t>005 / 016</a:t>
+              <a:t>005 / 022</a:t>
             </a:r>
           </a:p>
         </p:txBody>
@@ -9567,7 +13735,7 @@
       </p:sp>
       <p:sp>
         <p:nvSpPr>
-          <p:cNvPr id="7" name="Rounded Rectangle 6"/>
+          <p:cNvPr id="7" name="Rectangle 6"/>
           <p:cNvSpPr/>
           <p:nvPr/>
         </p:nvSpPr>
@@ -9576,7 +13744,7 @@
             <a:off x="868680" y="1627632"/>
             <a:ext cx="2011680" cy="73152"/>
           </a:xfrm>
-          <a:prstGeom prst="roundRect">
+          <a:prstGeom prst="rect">
             <a:avLst/>
           </a:prstGeom>
           <a:solidFill>
@@ -9617,8 +13785,8 @@
         </p:nvSpPr>
         <p:spPr>
           <a:xfrm>
-            <a:off x="822960" y="1965960"/>
-            <a:ext cx="4983480" cy="4206240"/>
+            <a:off x="6355080" y="1965960"/>
+            <a:ext cx="5029200" cy="4206240"/>
           </a:xfrm>
           <a:prstGeom prst="rect">
             <a:avLst/>
@@ -9740,8 +13908,8 @@
         </p:nvSpPr>
         <p:spPr>
           <a:xfrm>
-            <a:off x="5806440" y="1051560"/>
-            <a:ext cx="5298947" cy="4629150"/>
+            <a:off x="822960" y="1965960"/>
+            <a:ext cx="5303520" cy="4572000"/>
           </a:xfrm>
           <a:prstGeom prst="roundRect">
             <a:avLst/>
@@ -9786,8 +13954,8 @@
         </p:nvSpPr>
         <p:spPr>
           <a:xfrm>
-            <a:off x="6080760" y="2726055"/>
-            <a:ext cx="4750307" cy="1280160"/>
+            <a:off x="1097280" y="3611880"/>
+            <a:ext cx="4754880" cy="1280160"/>
           </a:xfrm>
           <a:prstGeom prst="rect">
             <a:avLst/>
@@ -9808,7 +13976,7 @@
                 </a:solidFill>
                 <a:latin typeface="Montserrat"/>
               </a:rPr>
-              <a:t>IMAGEN REALISTA</a:t>
+              <a:t>IMAGEN</a:t>
             </a:r>
           </a:p>
           <a:p>
@@ -9830,6 +13998,18 @@
   <p:clrMapOvr>
     <a:masterClrMapping/>
   </p:clrMapOvr>
+  <mc:AlternateContent xmlns:mc="http://schemas.openxmlformats.org/markup-compatibility/2006">
+    <mc:Choice xmlns:p14="http://schemas.microsoft.com/office/powerpoint/2010/main" Requires="p14">
+      <p:transition spd="med" p14:dur="700">
+        <p14:cube dir="l"/>
+      </p:transition>
+    </mc:Choice>
+    <mc:Fallback>
+      <p:transition spd="med">
+        <p:push dir="l"/>
+      </p:transition>
+    </mc:Fallback>
+  </mc:AlternateContent>
 </p:sld>
 </file>
 
@@ -9917,7 +14097,7 @@
                 </a:solidFill>
                 <a:latin typeface="Montserrat"/>
               </a:rPr>
-              <a:t>006 / 016</a:t>
+              <a:t>006 / 022</a:t>
             </a:r>
           </a:p>
         </p:txBody>
@@ -9958,84 +14138,16 @@
       </p:sp>
       <p:sp>
         <p:nvSpPr>
-          <p:cNvPr id="5" name="TextBox 4"/>
-          <p:cNvSpPr txBox="1"/>
-          <p:nvPr/>
-        </p:nvSpPr>
-        <p:spPr>
-          <a:xfrm>
-            <a:off x="822960" y="457200"/>
-            <a:ext cx="10058400" cy="365760"/>
-          </a:xfrm>
-          <a:prstGeom prst="rect">
-            <a:avLst/>
-          </a:prstGeom>
-          <a:noFill/>
-        </p:spPr>
-        <p:txBody>
-          <a:bodyPr wrap="square">
-            <a:spAutoFit/>
-          </a:bodyPr>
-          <a:lstStyle/>
-          <a:p>
-            <a:r>
-              <a:rPr sz="1300" b="1" i="0">
-                <a:solidFill>
-                  <a:srgbClr val="E8801A"/>
-                </a:solidFill>
-                <a:latin typeface="Montserrat"/>
-              </a:rPr>
-              <a:t>APARTADO 3 · DISEÑO</a:t>
-            </a:r>
-          </a:p>
-        </p:txBody>
-      </p:sp>
-      <p:sp>
-        <p:nvSpPr>
-          <p:cNvPr id="6" name="TextBox 5"/>
-          <p:cNvSpPr txBox="1"/>
-          <p:nvPr/>
-        </p:nvSpPr>
-        <p:spPr>
-          <a:xfrm>
-            <a:off x="822960" y="868680"/>
-            <a:ext cx="10515600" cy="914400"/>
-          </a:xfrm>
-          <a:prstGeom prst="rect">
-            <a:avLst/>
-          </a:prstGeom>
-          <a:noFill/>
-        </p:spPr>
-        <p:txBody>
-          <a:bodyPr wrap="square">
-            <a:spAutoFit/>
-          </a:bodyPr>
-          <a:lstStyle/>
-          <a:p>
-            <a:r>
-              <a:rPr sz="2800" b="1" i="0">
-                <a:solidFill>
-                  <a:srgbClr val="1E2761"/>
-                </a:solidFill>
-                <a:latin typeface="Montserrat"/>
-              </a:rPr>
-              <a:t>Suministro seguro y continuo</a:t>
-            </a:r>
-          </a:p>
-        </p:txBody>
-      </p:sp>
-      <p:sp>
-        <p:nvSpPr>
-          <p:cNvPr id="7" name="Rounded Rectangle 6"/>
+          <p:cNvPr id="5" name="Rectangle 4"/>
           <p:cNvSpPr/>
           <p:nvPr/>
         </p:nvSpPr>
         <p:spPr>
           <a:xfrm>
-            <a:off x="868680" y="1627632"/>
-            <a:ext cx="2011680" cy="73152"/>
-          </a:xfrm>
-          <a:prstGeom prst="roundRect">
+            <a:off x="0" y="0"/>
+            <a:ext cx="12191695" cy="1143000"/>
+          </a:xfrm>
+          <a:prstGeom prst="rect">
             <a:avLst/>
           </a:prstGeom>
           <a:solidFill>
@@ -10070,14 +14182,14 @@
       </p:sp>
       <p:sp>
         <p:nvSpPr>
-          <p:cNvPr id="8" name="TextBox 7"/>
+          <p:cNvPr id="6" name="TextBox 5"/>
           <p:cNvSpPr txBox="1"/>
           <p:nvPr/>
         </p:nvSpPr>
         <p:spPr>
           <a:xfrm>
-            <a:off x="822960" y="1965960"/>
-            <a:ext cx="4983480" cy="4206240"/>
+            <a:off x="822960" y="274320"/>
+            <a:ext cx="10515600" cy="640080"/>
           </a:xfrm>
           <a:prstGeom prst="rect">
             <a:avLst/>
@@ -10090,117 +14202,62 @@
           </a:bodyPr>
           <a:lstStyle/>
           <a:p>
-            <a:pPr>
-              <a:spcAft>
-                <a:spcPts val="1100"/>
-              </a:spcAft>
-            </a:pPr>
-            <a:r>
-              <a:rPr sz="1600" b="1" i="0">
-                <a:solidFill>
-                  <a:srgbClr val="E8801A"/>
-                </a:solidFill>
-                <a:latin typeface="Montserrat"/>
-              </a:rPr>
-              <a:t>▸  </a:t>
-            </a:r>
-            <a:r>
-              <a:rPr sz="1600" b="0" i="0">
-                <a:solidFill>
-                  <a:srgbClr val="1B2330"/>
-                </a:solidFill>
-                <a:latin typeface="Montserrat"/>
-              </a:rPr>
-              <a:t>Seguro: sin fugas</a:t>
-            </a:r>
-          </a:p>
-          <a:p>
-            <a:pPr>
-              <a:spcAft>
-                <a:spcPts val="1100"/>
-              </a:spcAft>
-            </a:pPr>
-            <a:r>
-              <a:rPr sz="1600" b="1" i="0">
-                <a:solidFill>
-                  <a:srgbClr val="E8801A"/>
-                </a:solidFill>
-                <a:latin typeface="Montserrat"/>
-              </a:rPr>
-              <a:t>▸  </a:t>
-            </a:r>
-            <a:r>
-              <a:rPr sz="1600" b="0" i="0">
-                <a:solidFill>
-                  <a:srgbClr val="1B2330"/>
-                </a:solidFill>
-                <a:latin typeface="Montserrat"/>
-              </a:rPr>
-              <a:t>Continuo: sin cortes</a:t>
-            </a:r>
-          </a:p>
-          <a:p>
-            <a:pPr>
-              <a:spcAft>
-                <a:spcPts val="1100"/>
-              </a:spcAft>
-            </a:pPr>
-            <a:r>
-              <a:rPr sz="1600" b="1" i="0">
-                <a:solidFill>
-                  <a:srgbClr val="E8801A"/>
-                </a:solidFill>
-                <a:latin typeface="Montserrat"/>
-              </a:rPr>
-              <a:t>▸  </a:t>
-            </a:r>
-            <a:r>
-              <a:rPr sz="1600" b="0" i="0">
-                <a:solidFill>
-                  <a:srgbClr val="1B2330"/>
-                </a:solidFill>
-                <a:latin typeface="Montserrat"/>
-              </a:rPr>
-              <a:t>Dimensionar según la demanda</a:t>
-            </a:r>
-          </a:p>
-          <a:p>
-            <a:pPr>
-              <a:spcAft>
-                <a:spcPts val="1100"/>
-              </a:spcAft>
-            </a:pPr>
-            <a:r>
-              <a:rPr sz="1600" b="1" i="0">
-                <a:solidFill>
-                  <a:srgbClr val="E8801A"/>
-                </a:solidFill>
-                <a:latin typeface="Montserrat"/>
-              </a:rPr>
-              <a:t>▸  </a:t>
-            </a:r>
-            <a:r>
-              <a:rPr sz="1600" b="0" i="0">
-                <a:solidFill>
-                  <a:srgbClr val="1B2330"/>
-                </a:solidFill>
-                <a:latin typeface="Montserrat"/>
-              </a:rPr>
-              <a:t>Nivel socioeconómico y climatología</a:t>
-            </a:r>
-          </a:p>
-        </p:txBody>
-      </p:sp>
-      <p:sp>
-        <p:nvSpPr>
-          <p:cNvPr id="9" name="imgph" descr="IMGQ:engineer studying gas network plan office"/>
+            <a:r>
+              <a:rPr sz="2400" b="1" i="0">
+                <a:solidFill>
+                  <a:srgbClr val="FFFFFF"/>
+                </a:solidFill>
+                <a:latin typeface="Montserrat"/>
+              </a:rPr>
+              <a:t>⚡  PREGUNTA RÁPIDA</a:t>
+            </a:r>
+          </a:p>
+        </p:txBody>
+      </p:sp>
+      <p:sp>
+        <p:nvSpPr>
+          <p:cNvPr id="7" name="TextBox 6"/>
+          <p:cNvSpPr txBox="1"/>
+          <p:nvPr/>
+        </p:nvSpPr>
+        <p:spPr>
+          <a:xfrm>
+            <a:off x="822960" y="1508760"/>
+            <a:ext cx="10515600" cy="1371600"/>
+          </a:xfrm>
+          <a:prstGeom prst="rect">
+            <a:avLst/>
+          </a:prstGeom>
+          <a:noFill/>
+        </p:spPr>
+        <p:txBody>
+          <a:bodyPr wrap="square">
+            <a:spAutoFit/>
+          </a:bodyPr>
+          <a:lstStyle/>
+          <a:p>
+            <a:r>
+              <a:rPr sz="2400" b="1" i="0">
+                <a:solidFill>
+                  <a:srgbClr val="1E2761"/>
+                </a:solidFill>
+                <a:latin typeface="Montserrat"/>
+              </a:rPr>
+              <a:t>¿Quién autoriza la red y cuándo se entrega el proyecto de lo ejecutado?</a:t>
+            </a:r>
+          </a:p>
+        </p:txBody>
+      </p:sp>
+      <p:sp>
+        <p:nvSpPr>
+          <p:cNvPr id="8" name="Rounded Rectangle 7"/>
           <p:cNvSpPr/>
           <p:nvPr/>
         </p:nvSpPr>
         <p:spPr>
           <a:xfrm>
-            <a:off x="5806440" y="1051560"/>
-            <a:ext cx="5298947" cy="4629150"/>
+            <a:off x="822960" y="3291840"/>
+            <a:ext cx="4983480" cy="1143000"/>
           </a:xfrm>
           <a:prstGeom prst="roundRect">
             <a:avLst/>
@@ -10239,14 +14296,58 @@
       </p:sp>
       <p:sp>
         <p:nvSpPr>
+          <p:cNvPr id="9" name="Rectangle 8"/>
+          <p:cNvSpPr/>
+          <p:nvPr/>
+        </p:nvSpPr>
+        <p:spPr>
+          <a:xfrm>
+            <a:off x="822960" y="3291840"/>
+            <a:ext cx="640080" cy="1143000"/>
+          </a:xfrm>
+          <a:prstGeom prst="rect">
+            <a:avLst/>
+          </a:prstGeom>
+          <a:solidFill>
+            <a:srgbClr val="1E2761"/>
+          </a:solidFill>
+          <a:ln>
+            <a:noFill/>
+          </a:ln>
+          <a:effectLst/>
+        </p:spPr>
+        <p:style>
+          <a:lnRef idx="1">
+            <a:schemeClr val="accent1"/>
+          </a:lnRef>
+          <a:fillRef idx="3">
+            <a:schemeClr val="accent1"/>
+          </a:fillRef>
+          <a:effectRef idx="2">
+            <a:schemeClr val="accent1"/>
+          </a:effectRef>
+          <a:fontRef idx="minor">
+            <a:schemeClr val="lt1"/>
+          </a:fontRef>
+        </p:style>
+        <p:txBody>
+          <a:bodyPr rtlCol="0" anchor="ctr"/>
+          <a:lstStyle/>
+          <a:p>
+            <a:pPr algn="ctr"/>
+          </a:p>
+        </p:txBody>
+      </p:sp>
+      <p:sp>
+        <p:nvSpPr>
           <p:cNvPr id="10" name="TextBox 9"/>
           <p:cNvSpPr txBox="1"/>
           <p:nvPr/>
         </p:nvSpPr>
         <p:spPr>
           <a:xfrm>
-            <a:off x="6080760" y="2726055"/>
-            <a:ext cx="4750307" cy="1280160"/>
+            <a:off x="822960" y="3611880"/>
+            <a:ext cx="640080" cy="548640"/>
           </a:xfrm>
           <a:prstGeom prst="rect">
             <a:avLst/>
@@ -10261,25 +14362,524 @@
           <a:p>
             <a:pPr algn="ctr"/>
             <a:r>
-              <a:rPr sz="1400" b="1" i="0">
-                <a:solidFill>
-                  <a:srgbClr val="64748B"/>
-                </a:solidFill>
-                <a:latin typeface="Montserrat"/>
-              </a:rPr>
-              <a:t>IMAGEN REALISTA</a:t>
-            </a:r>
-          </a:p>
+              <a:rPr sz="2200" b="1" i="0">
+                <a:solidFill>
+                  <a:srgbClr val="FFFFFF"/>
+                </a:solidFill>
+                <a:latin typeface="Montserrat"/>
+              </a:rPr>
+              <a:t>A</a:t>
+            </a:r>
+          </a:p>
+        </p:txBody>
+      </p:sp>
+      <p:sp>
+        <p:nvSpPr>
+          <p:cNvPr id="11" name="TextBox 10"/>
+          <p:cNvSpPr txBox="1"/>
+          <p:nvPr/>
+        </p:nvSpPr>
+        <p:spPr>
+          <a:xfrm>
+            <a:off x="1600200" y="3474720"/>
+            <a:ext cx="4114800" cy="868680"/>
+          </a:xfrm>
+          <a:prstGeom prst="rect">
+            <a:avLst/>
+          </a:prstGeom>
+          <a:noFill/>
+        </p:spPr>
+        <p:txBody>
+          <a:bodyPr wrap="square">
+            <a:spAutoFit/>
+          </a:bodyPr>
+          <a:lstStyle/>
+          <a:p>
+            <a:r>
+              <a:rPr sz="1400" b="0" i="0">
+                <a:solidFill>
+                  <a:srgbClr val="1B2330"/>
+                </a:solidFill>
+                <a:latin typeface="Montserrat"/>
+              </a:rPr>
+              <a:t>La Comunidad Autónoma; en el primer trimestre del año siguiente</a:t>
+            </a:r>
+          </a:p>
+        </p:txBody>
+      </p:sp>
+      <p:sp>
+        <p:nvSpPr>
+          <p:cNvPr id="12" name="Rounded Rectangle 11"/>
+          <p:cNvSpPr/>
+          <p:nvPr/>
+        </p:nvSpPr>
+        <p:spPr>
+          <a:xfrm>
+            <a:off x="6355080" y="3291840"/>
+            <a:ext cx="4983480" cy="1143000"/>
+          </a:xfrm>
+          <a:prstGeom prst="roundRect">
+            <a:avLst/>
+          </a:prstGeom>
+          <a:solidFill>
+            <a:srgbClr val="F3F6FB"/>
+          </a:solidFill>
+          <a:ln w="12700">
+            <a:solidFill>
+              <a:srgbClr val="C7D2E6"/>
+            </a:solidFill>
+          </a:ln>
+          <a:effectLst/>
+        </p:spPr>
+        <p:style>
+          <a:lnRef idx="1">
+            <a:schemeClr val="accent1"/>
+          </a:lnRef>
+          <a:fillRef idx="3">
+            <a:schemeClr val="accent1"/>
+          </a:fillRef>
+          <a:effectRef idx="2">
+            <a:schemeClr val="accent1"/>
+          </a:effectRef>
+          <a:fontRef idx="minor">
+            <a:schemeClr val="lt1"/>
+          </a:fontRef>
+        </p:style>
+        <p:txBody>
+          <a:bodyPr rtlCol="0" anchor="ctr"/>
+          <a:lstStyle/>
           <a:p>
             <a:pPr algn="ctr"/>
-            <a:r>
-              <a:rPr sz="1100" b="0" i="1">
-                <a:solidFill>
-                  <a:srgbClr val="64748B"/>
-                </a:solidFill>
-                <a:latin typeface="Montserrat"/>
-              </a:rPr>
-              <a:t>engineer studying gas network plan office</a:t>
+          </a:p>
+        </p:txBody>
+      </p:sp>
+      <p:sp>
+        <p:nvSpPr>
+          <p:cNvPr id="13" name="Rectangle 12"/>
+          <p:cNvSpPr/>
+          <p:nvPr/>
+        </p:nvSpPr>
+        <p:spPr>
+          <a:xfrm>
+            <a:off x="6355080" y="3291840"/>
+            <a:ext cx="640080" cy="1143000"/>
+          </a:xfrm>
+          <a:prstGeom prst="rect">
+            <a:avLst/>
+          </a:prstGeom>
+          <a:solidFill>
+            <a:srgbClr val="1E2761"/>
+          </a:solidFill>
+          <a:ln>
+            <a:noFill/>
+          </a:ln>
+          <a:effectLst/>
+        </p:spPr>
+        <p:style>
+          <a:lnRef idx="1">
+            <a:schemeClr val="accent1"/>
+          </a:lnRef>
+          <a:fillRef idx="3">
+            <a:schemeClr val="accent1"/>
+          </a:fillRef>
+          <a:effectRef idx="2">
+            <a:schemeClr val="accent1"/>
+          </a:effectRef>
+          <a:fontRef idx="minor">
+            <a:schemeClr val="lt1"/>
+          </a:fontRef>
+        </p:style>
+        <p:txBody>
+          <a:bodyPr rtlCol="0" anchor="ctr"/>
+          <a:lstStyle/>
+          <a:p>
+            <a:pPr algn="ctr"/>
+          </a:p>
+        </p:txBody>
+      </p:sp>
+      <p:sp>
+        <p:nvSpPr>
+          <p:cNvPr id="14" name="TextBox 13"/>
+          <p:cNvSpPr txBox="1"/>
+          <p:nvPr/>
+        </p:nvSpPr>
+        <p:spPr>
+          <a:xfrm>
+            <a:off x="6355080" y="3611880"/>
+            <a:ext cx="640080" cy="548640"/>
+          </a:xfrm>
+          <a:prstGeom prst="rect">
+            <a:avLst/>
+          </a:prstGeom>
+          <a:noFill/>
+        </p:spPr>
+        <p:txBody>
+          <a:bodyPr wrap="square">
+            <a:spAutoFit/>
+          </a:bodyPr>
+          <a:lstStyle/>
+          <a:p>
+            <a:pPr algn="ctr"/>
+            <a:r>
+              <a:rPr sz="2200" b="1" i="0">
+                <a:solidFill>
+                  <a:srgbClr val="FFFFFF"/>
+                </a:solidFill>
+                <a:latin typeface="Montserrat"/>
+              </a:rPr>
+              <a:t>B</a:t>
+            </a:r>
+          </a:p>
+        </p:txBody>
+      </p:sp>
+      <p:sp>
+        <p:nvSpPr>
+          <p:cNvPr id="15" name="TextBox 14"/>
+          <p:cNvSpPr txBox="1"/>
+          <p:nvPr/>
+        </p:nvSpPr>
+        <p:spPr>
+          <a:xfrm>
+            <a:off x="7132320" y="3474720"/>
+            <a:ext cx="4114800" cy="868680"/>
+          </a:xfrm>
+          <a:prstGeom prst="rect">
+            <a:avLst/>
+          </a:prstGeom>
+          <a:noFill/>
+        </p:spPr>
+        <p:txBody>
+          <a:bodyPr wrap="square">
+            <a:spAutoFit/>
+          </a:bodyPr>
+          <a:lstStyle/>
+          <a:p>
+            <a:r>
+              <a:rPr sz="1400" b="0" i="0">
+                <a:solidFill>
+                  <a:srgbClr val="1B2330"/>
+                </a:solidFill>
+                <a:latin typeface="Montserrat"/>
+              </a:rPr>
+              <a:t>El Ayuntamiento; en el último trimestre del mismo año</a:t>
+            </a:r>
+          </a:p>
+        </p:txBody>
+      </p:sp>
+      <p:sp>
+        <p:nvSpPr>
+          <p:cNvPr id="16" name="Rounded Rectangle 15"/>
+          <p:cNvSpPr/>
+          <p:nvPr/>
+        </p:nvSpPr>
+        <p:spPr>
+          <a:xfrm>
+            <a:off x="822960" y="4617720"/>
+            <a:ext cx="4983480" cy="1143000"/>
+          </a:xfrm>
+          <a:prstGeom prst="roundRect">
+            <a:avLst/>
+          </a:prstGeom>
+          <a:solidFill>
+            <a:srgbClr val="F3F6FB"/>
+          </a:solidFill>
+          <a:ln w="12700">
+            <a:solidFill>
+              <a:srgbClr val="C7D2E6"/>
+            </a:solidFill>
+          </a:ln>
+          <a:effectLst/>
+        </p:spPr>
+        <p:style>
+          <a:lnRef idx="1">
+            <a:schemeClr val="accent1"/>
+          </a:lnRef>
+          <a:fillRef idx="3">
+            <a:schemeClr val="accent1"/>
+          </a:fillRef>
+          <a:effectRef idx="2">
+            <a:schemeClr val="accent1"/>
+          </a:effectRef>
+          <a:fontRef idx="minor">
+            <a:schemeClr val="lt1"/>
+          </a:fontRef>
+        </p:style>
+        <p:txBody>
+          <a:bodyPr rtlCol="0" anchor="ctr"/>
+          <a:lstStyle/>
+          <a:p>
+            <a:pPr algn="ctr"/>
+          </a:p>
+        </p:txBody>
+      </p:sp>
+      <p:sp>
+        <p:nvSpPr>
+          <p:cNvPr id="17" name="Rectangle 16"/>
+          <p:cNvSpPr/>
+          <p:nvPr/>
+        </p:nvSpPr>
+        <p:spPr>
+          <a:xfrm>
+            <a:off x="822960" y="4617720"/>
+            <a:ext cx="640080" cy="1143000"/>
+          </a:xfrm>
+          <a:prstGeom prst="rect">
+            <a:avLst/>
+          </a:prstGeom>
+          <a:solidFill>
+            <a:srgbClr val="1E2761"/>
+          </a:solidFill>
+          <a:ln>
+            <a:noFill/>
+          </a:ln>
+          <a:effectLst/>
+        </p:spPr>
+        <p:style>
+          <a:lnRef idx="1">
+            <a:schemeClr val="accent1"/>
+          </a:lnRef>
+          <a:fillRef idx="3">
+            <a:schemeClr val="accent1"/>
+          </a:fillRef>
+          <a:effectRef idx="2">
+            <a:schemeClr val="accent1"/>
+          </a:effectRef>
+          <a:fontRef idx="minor">
+            <a:schemeClr val="lt1"/>
+          </a:fontRef>
+        </p:style>
+        <p:txBody>
+          <a:bodyPr rtlCol="0" anchor="ctr"/>
+          <a:lstStyle/>
+          <a:p>
+            <a:pPr algn="ctr"/>
+          </a:p>
+        </p:txBody>
+      </p:sp>
+      <p:sp>
+        <p:nvSpPr>
+          <p:cNvPr id="18" name="TextBox 17"/>
+          <p:cNvSpPr txBox="1"/>
+          <p:nvPr/>
+        </p:nvSpPr>
+        <p:spPr>
+          <a:xfrm>
+            <a:off x="822960" y="4937760"/>
+            <a:ext cx="640080" cy="548640"/>
+          </a:xfrm>
+          <a:prstGeom prst="rect">
+            <a:avLst/>
+          </a:prstGeom>
+          <a:noFill/>
+        </p:spPr>
+        <p:txBody>
+          <a:bodyPr wrap="square">
+            <a:spAutoFit/>
+          </a:bodyPr>
+          <a:lstStyle/>
+          <a:p>
+            <a:pPr algn="ctr"/>
+            <a:r>
+              <a:rPr sz="2200" b="1" i="0">
+                <a:solidFill>
+                  <a:srgbClr val="FFFFFF"/>
+                </a:solidFill>
+                <a:latin typeface="Montserrat"/>
+              </a:rPr>
+              <a:t>C</a:t>
+            </a:r>
+          </a:p>
+        </p:txBody>
+      </p:sp>
+      <p:sp>
+        <p:nvSpPr>
+          <p:cNvPr id="19" name="TextBox 18"/>
+          <p:cNvSpPr txBox="1"/>
+          <p:nvPr/>
+        </p:nvSpPr>
+        <p:spPr>
+          <a:xfrm>
+            <a:off x="1600200" y="4800600"/>
+            <a:ext cx="4114800" cy="868680"/>
+          </a:xfrm>
+          <a:prstGeom prst="rect">
+            <a:avLst/>
+          </a:prstGeom>
+          <a:noFill/>
+        </p:spPr>
+        <p:txBody>
+          <a:bodyPr wrap="square">
+            <a:spAutoFit/>
+          </a:bodyPr>
+          <a:lstStyle/>
+          <a:p>
+            <a:r>
+              <a:rPr sz="1400" b="0" i="0">
+                <a:solidFill>
+                  <a:srgbClr val="1B2330"/>
+                </a:solidFill>
+                <a:latin typeface="Montserrat"/>
+              </a:rPr>
+              <a:t>El Ministerio; dentro de los treinta días tras la obra</a:t>
+            </a:r>
+          </a:p>
+        </p:txBody>
+      </p:sp>
+      <p:sp>
+        <p:nvSpPr>
+          <p:cNvPr id="20" name="Rounded Rectangle 19"/>
+          <p:cNvSpPr/>
+          <p:nvPr/>
+        </p:nvSpPr>
+        <p:spPr>
+          <a:xfrm>
+            <a:off x="6355080" y="4617720"/>
+            <a:ext cx="4983480" cy="1143000"/>
+          </a:xfrm>
+          <a:prstGeom prst="roundRect">
+            <a:avLst/>
+          </a:prstGeom>
+          <a:solidFill>
+            <a:srgbClr val="F3F6FB"/>
+          </a:solidFill>
+          <a:ln w="12700">
+            <a:solidFill>
+              <a:srgbClr val="C7D2E6"/>
+            </a:solidFill>
+          </a:ln>
+          <a:effectLst/>
+        </p:spPr>
+        <p:style>
+          <a:lnRef idx="1">
+            <a:schemeClr val="accent1"/>
+          </a:lnRef>
+          <a:fillRef idx="3">
+            <a:schemeClr val="accent1"/>
+          </a:fillRef>
+          <a:effectRef idx="2">
+            <a:schemeClr val="accent1"/>
+          </a:effectRef>
+          <a:fontRef idx="minor">
+            <a:schemeClr val="lt1"/>
+          </a:fontRef>
+        </p:style>
+        <p:txBody>
+          <a:bodyPr rtlCol="0" anchor="ctr"/>
+          <a:lstStyle/>
+          <a:p>
+            <a:pPr algn="ctr"/>
+          </a:p>
+        </p:txBody>
+      </p:sp>
+      <p:sp>
+        <p:nvSpPr>
+          <p:cNvPr id="21" name="Rectangle 20"/>
+          <p:cNvSpPr/>
+          <p:nvPr/>
+        </p:nvSpPr>
+        <p:spPr>
+          <a:xfrm>
+            <a:off x="6355080" y="4617720"/>
+            <a:ext cx="640080" cy="1143000"/>
+          </a:xfrm>
+          <a:prstGeom prst="rect">
+            <a:avLst/>
+          </a:prstGeom>
+          <a:solidFill>
+            <a:srgbClr val="1E2761"/>
+          </a:solidFill>
+          <a:ln>
+            <a:noFill/>
+          </a:ln>
+          <a:effectLst/>
+        </p:spPr>
+        <p:style>
+          <a:lnRef idx="1">
+            <a:schemeClr val="accent1"/>
+          </a:lnRef>
+          <a:fillRef idx="3">
+            <a:schemeClr val="accent1"/>
+          </a:fillRef>
+          <a:effectRef idx="2">
+            <a:schemeClr val="accent1"/>
+          </a:effectRef>
+          <a:fontRef idx="minor">
+            <a:schemeClr val="lt1"/>
+          </a:fontRef>
+        </p:style>
+        <p:txBody>
+          <a:bodyPr rtlCol="0" anchor="ctr"/>
+          <a:lstStyle/>
+          <a:p>
+            <a:pPr algn="ctr"/>
+          </a:p>
+        </p:txBody>
+      </p:sp>
+      <p:sp>
+        <p:nvSpPr>
+          <p:cNvPr id="22" name="TextBox 21"/>
+          <p:cNvSpPr txBox="1"/>
+          <p:nvPr/>
+        </p:nvSpPr>
+        <p:spPr>
+          <a:xfrm>
+            <a:off x="6355080" y="4937760"/>
+            <a:ext cx="640080" cy="548640"/>
+          </a:xfrm>
+          <a:prstGeom prst="rect">
+            <a:avLst/>
+          </a:prstGeom>
+          <a:noFill/>
+        </p:spPr>
+        <p:txBody>
+          <a:bodyPr wrap="square">
+            <a:spAutoFit/>
+          </a:bodyPr>
+          <a:lstStyle/>
+          <a:p>
+            <a:pPr algn="ctr"/>
+            <a:r>
+              <a:rPr sz="2200" b="1" i="0">
+                <a:solidFill>
+                  <a:srgbClr val="FFFFFF"/>
+                </a:solidFill>
+                <a:latin typeface="Montserrat"/>
+              </a:rPr>
+              <a:t>D</a:t>
+            </a:r>
+          </a:p>
+        </p:txBody>
+      </p:sp>
+      <p:sp>
+        <p:nvSpPr>
+          <p:cNvPr id="23" name="TextBox 22"/>
+          <p:cNvSpPr txBox="1"/>
+          <p:nvPr/>
+        </p:nvSpPr>
+        <p:spPr>
+          <a:xfrm>
+            <a:off x="7132320" y="4800600"/>
+            <a:ext cx="4114800" cy="868680"/>
+          </a:xfrm>
+          <a:prstGeom prst="rect">
+            <a:avLst/>
+          </a:prstGeom>
+          <a:noFill/>
+        </p:spPr>
+        <p:txBody>
+          <a:bodyPr wrap="square">
+            <a:spAutoFit/>
+          </a:bodyPr>
+          <a:lstStyle/>
+          <a:p>
+            <a:r>
+              <a:rPr sz="1400" b="0" i="0">
+                <a:solidFill>
+                  <a:srgbClr val="1B2330"/>
+                </a:solidFill>
+                <a:latin typeface="Montserrat"/>
+              </a:rPr>
+              <a:t>El distribuidor; cuando finalice cada tramo de tubería</a:t>
             </a:r>
           </a:p>
         </p:txBody>
@@ -10289,6 +14889,18 @@
   <p:clrMapOvr>
     <a:masterClrMapping/>
   </p:clrMapOvr>
+  <mc:AlternateContent xmlns:mc="http://schemas.openxmlformats.org/markup-compatibility/2006">
+    <mc:Choice xmlns:p14="http://schemas.microsoft.com/office/powerpoint/2010/main" Requires="p14">
+      <p:transition spd="med" p14:dur="700">
+        <p14:cube dir="r"/>
+      </p:transition>
+    </mc:Choice>
+    <mc:Fallback>
+      <p:transition spd="med">
+        <p:push dir="r"/>
+      </p:transition>
+    </mc:Fallback>
+  </mc:AlternateContent>
 </p:sld>
 </file>
 
@@ -10376,7 +14988,7 @@
                 </a:solidFill>
                 <a:latin typeface="Montserrat"/>
               </a:rPr>
-              <a:t>007 / 016</a:t>
+              <a:t>007 / 022</a:t>
             </a:r>
           </a:p>
         </p:txBody>
@@ -10417,88 +15029,20 @@
       </p:sp>
       <p:sp>
         <p:nvSpPr>
-          <p:cNvPr id="5" name="TextBox 4"/>
-          <p:cNvSpPr txBox="1"/>
-          <p:nvPr/>
-        </p:nvSpPr>
-        <p:spPr>
-          <a:xfrm>
-            <a:off x="822960" y="457200"/>
-            <a:ext cx="10058400" cy="365760"/>
-          </a:xfrm>
-          <a:prstGeom prst="rect">
-            <a:avLst/>
-          </a:prstGeom>
-          <a:noFill/>
-        </p:spPr>
-        <p:txBody>
-          <a:bodyPr wrap="square">
-            <a:spAutoFit/>
-          </a:bodyPr>
-          <a:lstStyle/>
-          <a:p>
-            <a:r>
-              <a:rPr sz="1300" b="1" i="0">
-                <a:solidFill>
-                  <a:srgbClr val="E8801A"/>
-                </a:solidFill>
-                <a:latin typeface="Montserrat"/>
-              </a:rPr>
-              <a:t>APARTADO 3 · DISEÑO</a:t>
-            </a:r>
-          </a:p>
-        </p:txBody>
-      </p:sp>
-      <p:sp>
-        <p:nvSpPr>
-          <p:cNvPr id="6" name="TextBox 5"/>
-          <p:cNvSpPr txBox="1"/>
-          <p:nvPr/>
-        </p:nvSpPr>
-        <p:spPr>
-          <a:xfrm>
-            <a:off x="822960" y="868680"/>
-            <a:ext cx="10515600" cy="914400"/>
-          </a:xfrm>
-          <a:prstGeom prst="rect">
-            <a:avLst/>
-          </a:prstGeom>
-          <a:noFill/>
-        </p:spPr>
-        <p:txBody>
-          <a:bodyPr wrap="square">
-            <a:spAutoFit/>
-          </a:bodyPr>
-          <a:lstStyle/>
-          <a:p>
-            <a:r>
-              <a:rPr sz="2800" b="1" i="0">
-                <a:solidFill>
-                  <a:srgbClr val="1E2761"/>
-                </a:solidFill>
-                <a:latin typeface="Montserrat"/>
-              </a:rPr>
-              <a:t>Qué se pone sobre la mesa</a:t>
-            </a:r>
-          </a:p>
-        </p:txBody>
-      </p:sp>
-      <p:sp>
-        <p:nvSpPr>
-          <p:cNvPr id="7" name="Rounded Rectangle 6"/>
+          <p:cNvPr id="5" name="Rectangle 4"/>
           <p:cNvSpPr/>
           <p:nvPr/>
         </p:nvSpPr>
         <p:spPr>
           <a:xfrm>
-            <a:off x="868680" y="1627632"/>
-            <a:ext cx="2011680" cy="73152"/>
-          </a:xfrm>
-          <a:prstGeom prst="roundRect">
+            <a:off x="0" y="0"/>
+            <a:ext cx="12191695" cy="1143000"/>
+          </a:xfrm>
+          <a:prstGeom prst="rect">
             <a:avLst/>
           </a:prstGeom>
           <a:solidFill>
-            <a:srgbClr val="E8801A"/>
+            <a:srgbClr val="1E8E4B"/>
           </a:solidFill>
           <a:ln>
             <a:noFill/>
@@ -10529,14 +15073,14 @@
       </p:sp>
       <p:sp>
         <p:nvSpPr>
-          <p:cNvPr id="8" name="TextBox 7"/>
+          <p:cNvPr id="6" name="TextBox 5"/>
           <p:cNvSpPr txBox="1"/>
           <p:nvPr/>
         </p:nvSpPr>
         <p:spPr>
           <a:xfrm>
-            <a:off x="822960" y="1965960"/>
-            <a:ext cx="4983480" cy="4206240"/>
+            <a:off x="822960" y="274320"/>
+            <a:ext cx="10515600" cy="640080"/>
           </a:xfrm>
           <a:prstGeom prst="rect">
             <a:avLst/>
@@ -10549,127 +15093,72 @@
           </a:bodyPr>
           <a:lstStyle/>
           <a:p>
-            <a:pPr>
-              <a:spcAft>
-                <a:spcPts val="1100"/>
-              </a:spcAft>
-            </a:pPr>
-            <a:r>
-              <a:rPr sz="1600" b="1" i="0">
-                <a:solidFill>
-                  <a:srgbClr val="E8801A"/>
-                </a:solidFill>
-                <a:latin typeface="Montserrat"/>
-              </a:rPr>
-              <a:t>▸  </a:t>
-            </a:r>
-            <a:r>
-              <a:rPr sz="1600" b="0" i="0">
-                <a:solidFill>
-                  <a:srgbClr val="1B2330"/>
-                </a:solidFill>
-                <a:latin typeface="Montserrat"/>
-              </a:rPr>
-              <a:t>Características físico-químicas del gas</a:t>
-            </a:r>
-          </a:p>
-          <a:p>
-            <a:pPr>
-              <a:spcAft>
-                <a:spcPts val="1100"/>
-              </a:spcAft>
-            </a:pPr>
-            <a:r>
-              <a:rPr sz="1600" b="1" i="0">
-                <a:solidFill>
-                  <a:srgbClr val="E8801A"/>
-                </a:solidFill>
-                <a:latin typeface="Montserrat"/>
-              </a:rPr>
-              <a:t>▸  </a:t>
-            </a:r>
-            <a:r>
-              <a:rPr sz="1600" b="0" i="0">
-                <a:solidFill>
-                  <a:srgbClr val="1B2330"/>
-                </a:solidFill>
-                <a:latin typeface="Montserrat"/>
-              </a:rPr>
-              <a:t>Presión de diseño</a:t>
-            </a:r>
-          </a:p>
-          <a:p>
-            <a:pPr>
-              <a:spcAft>
-                <a:spcPts val="1100"/>
-              </a:spcAft>
-            </a:pPr>
-            <a:r>
-              <a:rPr sz="1600" b="1" i="0">
-                <a:solidFill>
-                  <a:srgbClr val="E8801A"/>
-                </a:solidFill>
-                <a:latin typeface="Montserrat"/>
-              </a:rPr>
-              <a:t>▸  </a:t>
-            </a:r>
-            <a:r>
-              <a:rPr sz="1600" b="0" i="0">
-                <a:solidFill>
-                  <a:srgbClr val="1B2330"/>
-                </a:solidFill>
-                <a:latin typeface="Montserrat"/>
-              </a:rPr>
-              <a:t>Pérdida de carga admisible</a:t>
-            </a:r>
-          </a:p>
-          <a:p>
-            <a:pPr>
-              <a:spcAft>
-                <a:spcPts val="1100"/>
-              </a:spcAft>
-            </a:pPr>
-            <a:r>
-              <a:rPr sz="1600" b="1" i="0">
-                <a:solidFill>
-                  <a:srgbClr val="E8801A"/>
-                </a:solidFill>
-                <a:latin typeface="Montserrat"/>
-              </a:rPr>
-              <a:t>▸  </a:t>
-            </a:r>
-            <a:r>
-              <a:rPr sz="1600" b="0" i="0">
-                <a:solidFill>
-                  <a:srgbClr val="1B2330"/>
-                </a:solidFill>
-                <a:latin typeface="Montserrat"/>
-              </a:rPr>
-              <a:t>Operación y mantenimiento</a:t>
-            </a:r>
-          </a:p>
-        </p:txBody>
-      </p:sp>
-      <p:sp>
-        <p:nvSpPr>
-          <p:cNvPr id="9" name="imgph" descr="IMGQ:engineer technical drawing pipes ruler"/>
+            <a:r>
+              <a:rPr sz="2400" b="1" i="0">
+                <a:solidFill>
+                  <a:srgbClr val="FFFFFF"/>
+                </a:solidFill>
+                <a:latin typeface="Montserrat"/>
+              </a:rPr>
+              <a:t>✔  RESPUESTA:  A</a:t>
+            </a:r>
+          </a:p>
+        </p:txBody>
+      </p:sp>
+      <p:sp>
+        <p:nvSpPr>
+          <p:cNvPr id="7" name="TextBox 6"/>
+          <p:cNvSpPr txBox="1"/>
+          <p:nvPr/>
+        </p:nvSpPr>
+        <p:spPr>
+          <a:xfrm>
+            <a:off x="822960" y="1417320"/>
+            <a:ext cx="10515600" cy="914400"/>
+          </a:xfrm>
+          <a:prstGeom prst="rect">
+            <a:avLst/>
+          </a:prstGeom>
+          <a:noFill/>
+        </p:spPr>
+        <p:txBody>
+          <a:bodyPr wrap="square">
+            <a:spAutoFit/>
+          </a:bodyPr>
+          <a:lstStyle/>
+          <a:p>
+            <a:r>
+              <a:rPr sz="1800" b="1" i="0">
+                <a:solidFill>
+                  <a:srgbClr val="64748B"/>
+                </a:solidFill>
+                <a:latin typeface="Montserrat"/>
+              </a:rPr>
+              <a:t>¿Quién autoriza la red y cuándo se entrega el proyecto de lo ejecutado?</a:t>
+            </a:r>
+          </a:p>
+        </p:txBody>
+      </p:sp>
+      <p:sp>
+        <p:nvSpPr>
+          <p:cNvPr id="8" name="Rounded Rectangle 7"/>
           <p:cNvSpPr/>
           <p:nvPr/>
         </p:nvSpPr>
         <p:spPr>
           <a:xfrm>
-            <a:off x="5806440" y="1051560"/>
-            <a:ext cx="5298947" cy="4629150"/>
+            <a:off x="822960" y="2514600"/>
+            <a:ext cx="10515600" cy="914400"/>
           </a:xfrm>
           <a:prstGeom prst="roundRect">
             <a:avLst/>
           </a:prstGeom>
           <a:solidFill>
-            <a:srgbClr val="F3F6FB"/>
+            <a:srgbClr val="E9F6EE"/>
           </a:solidFill>
           <a:ln w="12700">
             <a:solidFill>
-              <a:srgbClr val="C7D2E6"/>
+              <a:srgbClr val="1E8E4B"/>
             </a:solidFill>
           </a:ln>
           <a:effectLst/>
@@ -10698,14 +15187,14 @@
       </p:sp>
       <p:sp>
         <p:nvSpPr>
-          <p:cNvPr id="10" name="TextBox 9"/>
+          <p:cNvPr id="9" name="TextBox 8"/>
           <p:cNvSpPr txBox="1"/>
           <p:nvPr/>
         </p:nvSpPr>
         <p:spPr>
           <a:xfrm>
-            <a:off x="6080760" y="2726055"/>
-            <a:ext cx="4750307" cy="1280160"/>
+            <a:off x="1097280" y="2697480"/>
+            <a:ext cx="10058400" cy="640080"/>
           </a:xfrm>
           <a:prstGeom prst="rect">
             <a:avLst/>
@@ -10718,27 +15207,66 @@
           </a:bodyPr>
           <a:lstStyle/>
           <a:p>
-            <a:pPr algn="ctr"/>
-            <a:r>
-              <a:rPr sz="1400" b="1" i="0">
-                <a:solidFill>
-                  <a:srgbClr val="64748B"/>
-                </a:solidFill>
-                <a:latin typeface="Montserrat"/>
-              </a:rPr>
-              <a:t>IMAGEN REALISTA</a:t>
-            </a:r>
-          </a:p>
-          <a:p>
-            <a:pPr algn="ctr"/>
-            <a:r>
-              <a:rPr sz="1100" b="0" i="1">
-                <a:solidFill>
-                  <a:srgbClr val="64748B"/>
-                </a:solidFill>
-                <a:latin typeface="Montserrat"/>
-              </a:rPr>
-              <a:t>engineer technical drawing pipes ruler</a:t>
+            <a:r>
+              <a:rPr sz="1800" b="1" i="0">
+                <a:solidFill>
+                  <a:srgbClr val="1E8E4B"/>
+                </a:solidFill>
+                <a:latin typeface="Montserrat"/>
+              </a:rPr>
+              <a:t>A.  </a:t>
+            </a:r>
+            <a:r>
+              <a:rPr sz="1800" b="1" i="0">
+                <a:solidFill>
+                  <a:srgbClr val="1E2761"/>
+                </a:solidFill>
+                <a:latin typeface="Montserrat"/>
+              </a:rPr>
+              <a:t>La Comunidad Autónoma; en el primer trimestre del año siguiente</a:t>
+            </a:r>
+          </a:p>
+        </p:txBody>
+      </p:sp>
+      <p:sp>
+        <p:nvSpPr>
+          <p:cNvPr id="10" name="TextBox 9"/>
+          <p:cNvSpPr txBox="1"/>
+          <p:nvPr/>
+        </p:nvSpPr>
+        <p:spPr>
+          <a:xfrm>
+            <a:off x="822960" y="3749039"/>
+            <a:ext cx="10515600" cy="2194560"/>
+          </a:xfrm>
+          <a:prstGeom prst="rect">
+            <a:avLst/>
+          </a:prstGeom>
+          <a:noFill/>
+        </p:spPr>
+        <p:txBody>
+          <a:bodyPr wrap="square">
+            <a:spAutoFit/>
+          </a:bodyPr>
+          <a:lstStyle/>
+          <a:p>
+            <a:r>
+              <a:rPr sz="1500" b="1" i="0">
+                <a:solidFill>
+                  <a:srgbClr val="E8801A"/>
+                </a:solidFill>
+                <a:latin typeface="Montserrat"/>
+              </a:rPr>
+              <a:t>Por qué:  </a:t>
+            </a:r>
+            <a:r>
+              <a:rPr sz="1500" b="0" i="0">
+                <a:solidFill>
+                  <a:srgbClr val="1B2330"/>
+                </a:solidFill>
+                <a:latin typeface="Montserrat"/>
+              </a:rPr>
+              <a:t>La autoriza el órgano competente de la Comunidad Autónoma y las obras del año anterior se entregan dentro del primer trimestre.</a:t>
             </a:r>
           </a:p>
         </p:txBody>
@@ -10748,6 +15276,18 @@
   <p:clrMapOvr>
     <a:masterClrMapping/>
   </p:clrMapOvr>
+  <mc:AlternateContent xmlns:mc="http://schemas.openxmlformats.org/markup-compatibility/2006">
+    <mc:Choice xmlns:p14="http://schemas.microsoft.com/office/powerpoint/2010/main" Requires="p14">
+      <p:transition spd="med" p14:dur="700">
+        <p14:cube dir="l"/>
+      </p:transition>
+    </mc:Choice>
+    <mc:Fallback>
+      <p:transition spd="med">
+        <p:push dir="l"/>
+      </p:transition>
+    </mc:Fallback>
+  </mc:AlternateContent>
 </p:sld>
 </file>
 
@@ -10835,7 +15375,7 @@
                 </a:solidFill>
                 <a:latin typeface="Montserrat"/>
               </a:rPr>
-              <a:t>008 / 016</a:t>
+              <a:t>008 / 022</a:t>
             </a:r>
           </a:p>
         </p:txBody>
@@ -10903,7 +15443,7 @@
                 </a:solidFill>
                 <a:latin typeface="Montserrat"/>
               </a:rPr>
-              <a:t>APARTADO 3 · NORMAS DE DISEÑO</a:t>
+              <a:t>APARTADO 3 · DISEÑO</a:t>
             </a:r>
           </a:p>
         </p:txBody>
@@ -10937,14 +15477,14 @@
                 </a:solidFill>
                 <a:latin typeface="Montserrat"/>
               </a:rPr>
-              <a:t>Las siete normas</a:t>
-            </a:r>
-          </a:p>
-        </p:txBody>
-      </p:sp>
-      <p:sp>
-        <p:nvSpPr>
-          <p:cNvPr id="7" name="Rounded Rectangle 6"/>
+              <a:t>Suministro seguro y continuo</a:t>
+            </a:r>
+          </a:p>
+        </p:txBody>
+      </p:sp>
+      <p:sp>
+        <p:nvSpPr>
+          <p:cNvPr id="7" name="Rectangle 6"/>
           <p:cNvSpPr/>
           <p:nvPr/>
         </p:nvSpPr>
@@ -10953,7 +15493,7 @@
             <a:off x="868680" y="1627632"/>
             <a:ext cx="2011680" cy="73152"/>
           </a:xfrm>
-          <a:prstGeom prst="roundRect">
+          <a:prstGeom prst="rect">
             <a:avLst/>
           </a:prstGeom>
           <a:solidFill>
@@ -10995,7 +15535,7 @@
         <p:spPr>
           <a:xfrm>
             <a:off x="822960" y="1965960"/>
-            <a:ext cx="4983480" cy="4206240"/>
+            <a:ext cx="5029200" cy="4206240"/>
           </a:xfrm>
           <a:prstGeom prst="rect">
             <a:avLst/>
@@ -11029,7 +15569,7 @@
                 </a:solidFill>
                 <a:latin typeface="Montserrat"/>
               </a:rPr>
-              <a:t>UNE-EN 12007 · 1594 · 12186 · 12327</a:t>
+              <a:t>Seguro: sin fugas</a:t>
             </a:r>
           </a:p>
           <a:p>
@@ -11054,7 +15594,7 @@
                 </a:solidFill>
                 <a:latin typeface="Montserrat"/>
               </a:rPr>
-              <a:t>UNE 60310 · 60311 · 60312</a:t>
+              <a:t>Continuo: sin cortes</a:t>
             </a:r>
           </a:p>
           <a:p>
@@ -11079,21 +15619,46 @@
                 </a:solidFill>
                 <a:latin typeface="Montserrat"/>
               </a:rPr>
-              <a:t>Se aplican según la presión de diseño</a:t>
-            </a:r>
-          </a:p>
-        </p:txBody>
-      </p:sp>
-      <p:sp>
-        <p:nvSpPr>
-          <p:cNvPr id="9" name="imgph" descr="IMGQ:technical standards binders shelf office"/>
+              <a:t>Dimensionar según la demanda</a:t>
+            </a:r>
+          </a:p>
+          <a:p>
+            <a:pPr>
+              <a:spcAft>
+                <a:spcPts val="1100"/>
+              </a:spcAft>
+            </a:pPr>
+            <a:r>
+              <a:rPr sz="1600" b="1" i="0">
+                <a:solidFill>
+                  <a:srgbClr val="E8801A"/>
+                </a:solidFill>
+                <a:latin typeface="Montserrat"/>
+              </a:rPr>
+              <a:t>▸  </a:t>
+            </a:r>
+            <a:r>
+              <a:rPr sz="1600" b="0" i="0">
+                <a:solidFill>
+                  <a:srgbClr val="1B2330"/>
+                </a:solidFill>
+                <a:latin typeface="Montserrat"/>
+              </a:rPr>
+              <a:t>Nivel socioeconómico y climatología</a:t>
+            </a:r>
+          </a:p>
+        </p:txBody>
+      </p:sp>
+      <p:sp>
+        <p:nvSpPr>
+          <p:cNvPr id="9" name="imgph" descr="IMGQ:engineer studying gas network plan office"/>
           <p:cNvSpPr/>
           <p:nvPr/>
         </p:nvSpPr>
         <p:spPr>
           <a:xfrm>
-            <a:off x="5806440" y="1051560"/>
-            <a:ext cx="5298947" cy="4629150"/>
+            <a:off x="6080760" y="1965960"/>
+            <a:ext cx="5303520" cy="4572000"/>
           </a:xfrm>
           <a:prstGeom prst="roundRect">
             <a:avLst/>
@@ -11138,8 +15703,8 @@
         </p:nvSpPr>
         <p:spPr>
           <a:xfrm>
-            <a:off x="6080760" y="2726055"/>
-            <a:ext cx="4750307" cy="1280160"/>
+            <a:off x="6355080" y="3611880"/>
+            <a:ext cx="4754880" cy="1280160"/>
           </a:xfrm>
           <a:prstGeom prst="rect">
             <a:avLst/>
@@ -11160,7 +15725,7 @@
                 </a:solidFill>
                 <a:latin typeface="Montserrat"/>
               </a:rPr>
-              <a:t>IMAGEN REALISTA</a:t>
+              <a:t>IMAGEN</a:t>
             </a:r>
           </a:p>
           <a:p>
@@ -11172,7 +15737,7 @@
                 </a:solidFill>
                 <a:latin typeface="Montserrat"/>
               </a:rPr>
-              <a:t>technical standards binders shelf office</a:t>
+              <a:t>engineer studying gas network plan office</a:t>
             </a:r>
           </a:p>
         </p:txBody>
@@ -11182,6 +15747,18 @@
   <p:clrMapOvr>
     <a:masterClrMapping/>
   </p:clrMapOvr>
+  <mc:AlternateContent xmlns:mc="http://schemas.openxmlformats.org/markup-compatibility/2006">
+    <mc:Choice xmlns:p14="http://schemas.microsoft.com/office/powerpoint/2010/main" Requires="p14">
+      <p:transition spd="med" p14:dur="700">
+        <p14:cube dir="r"/>
+      </p:transition>
+    </mc:Choice>
+    <mc:Fallback>
+      <p:transition spd="med">
+        <p:push dir="r"/>
+      </p:transition>
+    </mc:Fallback>
+  </mc:AlternateContent>
 </p:sld>
 </file>
 
@@ -11269,7 +15846,7 @@
                 </a:solidFill>
                 <a:latin typeface="Montserrat"/>
               </a:rPr>
-              <a:t>009 / 016</a:t>
+              <a:t>009 / 022</a:t>
             </a:r>
           </a:p>
         </p:txBody>
@@ -11337,7 +15914,7 @@
                 </a:solidFill>
                 <a:latin typeface="Montserrat"/>
               </a:rPr>
-              <a:t>APARTADO 4 · EJECUCIÓN</a:t>
+              <a:t>APARTADO 3 · DISEÑO</a:t>
             </a:r>
           </a:p>
         </p:txBody>
@@ -11371,14 +15948,14 @@
                 </a:solidFill>
                 <a:latin typeface="Montserrat"/>
               </a:rPr>
-              <a:t>Montar sin dañar</a:t>
-            </a:r>
-          </a:p>
-        </p:txBody>
-      </p:sp>
-      <p:sp>
-        <p:nvSpPr>
-          <p:cNvPr id="7" name="Rounded Rectangle 6"/>
+              <a:t>Qué se pone sobre la mesa</a:t>
+            </a:r>
+          </a:p>
+        </p:txBody>
+      </p:sp>
+      <p:sp>
+        <p:nvSpPr>
+          <p:cNvPr id="7" name="Rectangle 6"/>
           <p:cNvSpPr/>
           <p:nvPr/>
         </p:nvSpPr>
@@ -11387,7 +15964,7 @@
             <a:off x="868680" y="1627632"/>
             <a:ext cx="2011680" cy="73152"/>
           </a:xfrm>
-          <a:prstGeom prst="roundRect">
+          <a:prstGeom prst="rect">
             <a:avLst/>
           </a:prstGeom>
           <a:solidFill>
@@ -11428,8 +16005,8 @@
         </p:nvSpPr>
         <p:spPr>
           <a:xfrm>
-            <a:off x="822960" y="1965960"/>
-            <a:ext cx="4983480" cy="4206240"/>
+            <a:off x="6355080" y="1965960"/>
+            <a:ext cx="5029200" cy="4206240"/>
           </a:xfrm>
           <a:prstGeom prst="rect">
             <a:avLst/>
@@ -11463,7 +16040,7 @@
                 </a:solidFill>
                 <a:latin typeface="Montserrat"/>
               </a:rPr>
-              <a:t>Bajo responsabilidad del titular</a:t>
+              <a:t>Características físico-químicas del gas</a:t>
             </a:r>
           </a:p>
           <a:p>
@@ -11488,7 +16065,7 @@
                 </a:solidFill>
                 <a:latin typeface="Montserrat"/>
               </a:rPr>
-              <a:t>No dañar otras redes enterradas</a:t>
+              <a:t>Presión de diseño</a:t>
             </a:r>
           </a:p>
           <a:p>
@@ -11513,21 +16090,46 @@
                 </a:solidFill>
                 <a:latin typeface="Montserrat"/>
               </a:rPr>
-              <a:t>Conectar sin cortar el suministro</a:t>
-            </a:r>
-          </a:p>
-        </p:txBody>
-      </p:sp>
-      <p:sp>
-        <p:nvSpPr>
-          <p:cNvPr id="9" name="imgph" descr="IMGQ:excavator digging trench underground pipes"/>
+              <a:t>Pérdida de carga admisible</a:t>
+            </a:r>
+          </a:p>
+          <a:p>
+            <a:pPr>
+              <a:spcAft>
+                <a:spcPts val="1100"/>
+              </a:spcAft>
+            </a:pPr>
+            <a:r>
+              <a:rPr sz="1600" b="1" i="0">
+                <a:solidFill>
+                  <a:srgbClr val="E8801A"/>
+                </a:solidFill>
+                <a:latin typeface="Montserrat"/>
+              </a:rPr>
+              <a:t>▸  </a:t>
+            </a:r>
+            <a:r>
+              <a:rPr sz="1600" b="0" i="0">
+                <a:solidFill>
+                  <a:srgbClr val="1B2330"/>
+                </a:solidFill>
+                <a:latin typeface="Montserrat"/>
+              </a:rPr>
+              <a:t>Operación y mantenimiento</a:t>
+            </a:r>
+          </a:p>
+        </p:txBody>
+      </p:sp>
+      <p:sp>
+        <p:nvSpPr>
+          <p:cNvPr id="9" name="imgph" descr="IMGQ:engineer technical drawing pipes ruler"/>
           <p:cNvSpPr/>
           <p:nvPr/>
         </p:nvSpPr>
         <p:spPr>
           <a:xfrm>
-            <a:off x="5806440" y="1051560"/>
-            <a:ext cx="5298947" cy="4629150"/>
+            <a:off x="822960" y="1965960"/>
+            <a:ext cx="5303520" cy="4572000"/>
           </a:xfrm>
           <a:prstGeom prst="roundRect">
             <a:avLst/>
@@ -11572,8 +16174,8 @@
         </p:nvSpPr>
         <p:spPr>
           <a:xfrm>
-            <a:off x="6080760" y="2726055"/>
-            <a:ext cx="4750307" cy="1280160"/>
+            <a:off x="1097280" y="3611880"/>
+            <a:ext cx="4754880" cy="1280160"/>
           </a:xfrm>
           <a:prstGeom prst="rect">
             <a:avLst/>
@@ -11594,7 +16196,7 @@
                 </a:solidFill>
                 <a:latin typeface="Montserrat"/>
               </a:rPr>
-              <a:t>IMAGEN REALISTA</a:t>
+              <a:t>IMAGEN</a:t>
             </a:r>
           </a:p>
           <a:p>
@@ -11606,7 +16208,7 @@
                 </a:solidFill>
                 <a:latin typeface="Montserrat"/>
               </a:rPr>
-              <a:t>excavator digging trench underground pipes</a:t>
+              <a:t>engineer technical drawing pipes ruler</a:t>
             </a:r>
           </a:p>
         </p:txBody>
@@ -11616,6 +16218,18 @@
   <p:clrMapOvr>
     <a:masterClrMapping/>
   </p:clrMapOvr>
+  <mc:AlternateContent xmlns:mc="http://schemas.openxmlformats.org/markup-compatibility/2006">
+    <mc:Choice xmlns:p14="http://schemas.microsoft.com/office/powerpoint/2010/main" Requires="p14">
+      <p:transition spd="med" p14:dur="700">
+        <p14:cube dir="l"/>
+      </p:transition>
+    </mc:Choice>
+    <mc:Fallback>
+      <p:transition spd="med">
+        <p:push dir="l"/>
+      </p:transition>
+    </mc:Fallback>
+  </mc:AlternateContent>
 </p:sld>
 </file>
 

--- a/Curso Gas B/01 - ITC-ICG 01 - Distribucion por canalizacion/01 - ITC-ICG 01 - Distribucion por canalizacion - Vídeo 1.pptx
+++ b/Curso Gas B/01 - ITC-ICG 01 - Distribucion por canalizacion/01 - ITC-ICG 01 - Distribucion por canalizacion - Vídeo 1.pptx
@@ -898,12 +898,12 @@
           <a:lstStyle/>
           <a:p>
             <a:r>
-              <a:t>N1: Cuidado, que estas dos pruebas se confunden a la primera de cambio.</a:t>
-            </a:r>
-          </a:p>
-          <a:p>
-            <a:r>
-              <a:t>N2: Una mira si el tubo es fuerte; la otra, si el tubo es hermético. La pregunta va por la segunda.</a:t>
+              <a:t>N1: Atención a esta, porque estas dos pruebas se confunden a la primera de cambio. Escucha la pregunta y las cuatro opciones. En las pruebas previas, ¿qué comprueba exactamente la prueba de estanquidad? Opción A: que la tubería no deja escapar el gas por ninguna unión. Opción B: que la tubería aguanta la presión sin reventar. Opción C: que el material resiste la corrosión del terreno. Opción D: que la red tiene el diámetro adecuado a la demanda.</a:t>
+            </a:r>
+          </a:p>
+          <a:p>
+            <a:r>
+              <a:t>N2: Tómate un segundo. Una prueba mira si el tubo es fuerte; la otra, si el tubo es hermético. La pregunta va por la hermeticidad. ¿Lo tienes?</a:t>
             </a:r>
           </a:p>
         </p:txBody>
@@ -973,12 +973,12 @@
           <a:lstStyle/>
           <a:p>
             <a:r>
-              <a:t>N1: ¿Por qué la a?</a:t>
-            </a:r>
-          </a:p>
-          <a:p>
-            <a:r>
-              <a:t>N2: Porque estanquidad es que no se escape ni una burbuja por las uniones. Que aguante la presión sin reventar es la de resistencia, que es otra cosa. Recuerda el truco: resistencia, que no rompa; estanquidad, que no fugue.</a:t>
+              <a:t>N2: La respuesta correcta es la opción A: que la tubería no deja escapar el gas por ninguna unión. ¿Por qué? Porque estanquidad significa justo eso, que no se escape ni una burbuja por las uniones. La opción B, aguantar la presión sin reventar, es la prueba de resistencia, que es otra cosa distinta. Y la corrosión del terreno o el diámetro no tienen nada que ver con esta prueba. El truco para no confundirlas nunca: resistencia, que no rompa; estanquidad, que no fugue.</a:t>
+            </a:r>
+          </a:p>
+          <a:p>
+            <a:r>
+              <a:t>N1: Clavado: estanquidad, ni una burbuja.</a:t>
             </a:r>
           </a:p>
         </p:txBody>
@@ -1198,12 +1198,12 @@
           <a:lstStyle/>
           <a:p>
             <a:r>
-              <a:t>N1: Pregunta de las que salvan vidas, no solo exámenes.</a:t>
-            </a:r>
-          </a:p>
-          <a:p>
-            <a:r>
-              <a:t>N2: El gas solo no arde y el aire solo tampoco. Piensa qué aparece cuando se juntan los dos en la proporción justa.</a:t>
+              <a:t>N1: Esta pregunta salva vidas, no solo exámenes. Escúchala entera con sus cuatro opciones. Al llenar la red de gas, ¿dónde está realmente el peligro? Opción A: en la mezcla aire-gas dentro de los límites de inflamabilidad. Opción B: en el gas puro, que arde en cuanto sale del tubo. Opción C: en el aire de la tubería, que se inflama solo. Opción D: en la presión alta del gas al entrar en la red.</a:t>
+            </a:r>
+          </a:p>
+          <a:p>
+            <a:r>
+              <a:t>N2: Piénsalo un momento. El gas solo no arde y el aire solo tampoco. ¿Qué aparece cuando se juntan los dos en la proporción justa?</a:t>
             </a:r>
           </a:p>
         </p:txBody>
@@ -1273,12 +1273,12 @@
           <a:lstStyle/>
           <a:p>
             <a:r>
-              <a:t>N1: ¿Por qué la a?</a:t>
-            </a:r>
-          </a:p>
-          <a:p>
-            <a:r>
-              <a:t>N2: Porque el peligro no es el gas ni el aire por separado, sino la mezcla aire-gas cuando cae dentro de los límites de inflamabilidad y basta una chispa. Por eso se mete el gas despacio o con un tapón de gas inerte que separe ambos fluidos.</a:t>
+              <a:t>N2: La respuesta correcta es la opción A: en la mezcla aire-gas dentro de los límites de inflamabilidad. ¿Por qué? Porque ni el gas solo ni el aire solo arden; el peligro es la mezcla de ambos en la proporción justa, esa en la que basta una chispa para provocar una deflagración. Por eso se llena la red despacio o metiendo en medio un tapón de gas inerte que separe el aire del gas. Las opciones B, C y D te despistan con el gas puro, con el aire o con la presión, pero el riesgo real es la mezcla.</a:t>
+            </a:r>
+          </a:p>
+          <a:p>
+            <a:r>
+              <a:t>N1: Grábatelo: aire, más gas, más una chispa, igual a explosión.</a:t>
             </a:r>
           </a:p>
         </p:txBody>
@@ -1874,12 +1874,12 @@
           <a:lstStyle/>
           <a:p>
             <a:r>
-              <a:t>N1: Aquí van dos datos que caen casi siempre juntos, no los sueltes por separado.</a:t>
-            </a:r>
-          </a:p>
-          <a:p>
-            <a:r>
-              <a:t>N2: Piensa quién da el permiso y en qué momento del calendario se rinden cuentas de lo construido. Uno es una administración; el otro, un trimestre concreto.</a:t>
+              <a:t>N1: Vamos con una pregunta, y esta cae casi siempre. Escucha con atención la pregunta y sus cuatro opciones. ¿Quién autoriza la red y cuándo se entrega el proyecto de lo ejecutado? Opción A: la Comunidad Autónoma; en el primer trimestre del año siguiente. Opción B: el Ayuntamiento; en el último trimestre del mismo año. Opción C: el Ministerio; dentro de los treinta días tras la obra. Opción D: el distribuidor; cuando finalice cada tramo de tubería.</a:t>
+            </a:r>
+          </a:p>
+          <a:p>
+            <a:r>
+              <a:t>N2: Piénsalo un momento, que aquí hay dos datos que van juntos: quién da el permiso y en qué trimestre se rinden cuentas de lo construido. Cuando lo tengas, seguimos.</a:t>
             </a:r>
           </a:p>
         </p:txBody>
@@ -1949,12 +1949,12 @@
           <a:lstStyle/>
           <a:p>
             <a:r>
-              <a:t>N1: ¿Por qué la primera?</a:t>
-            </a:r>
-          </a:p>
-          <a:p>
-            <a:r>
-              <a:t>N2: Porque la que autoriza es la Comunidad Autónoma, no el Ayuntamiento ni el Ministerio, y el proyecto de las obras realizadas se entrega dentro del primer trimestre del año siguiente. El truco: primero digo lo que pienso hacer y luego justifico lo que hice, y quien manda es la comunidad autónoma.</a:t>
+              <a:t>N2: La respuesta correcta es la opción A: la Comunidad Autónoma; en el primer trimestre del año siguiente. ¿Por qué? Porque quien autoriza es el órgano competente de la Comunidad Autónoma, no el Ayuntamiento ni el Ministerio, y el proyecto de las obras realizadas se entrega dentro del primer trimestre del año siguiente. Las otras tres opciones bailan el organismo o el plazo. El truco para no fallar: primero digo lo que pienso hacer y luego justifico lo que hice, y quien manda es la comunidad autónoma.</a:t>
+            </a:r>
+          </a:p>
+          <a:p>
+            <a:r>
+              <a:t>N1: Eso es: comunidad autónoma y primer trimestre, siempre de la mano.</a:t>
             </a:r>
           </a:p>
         </p:txBody>
